--- a/poster templaates/AC297r_Poster_Template.pptx
+++ b/poster templaates/AC297r_Poster_Template.pptx
@@ -1,108 +1,108 @@
 
 <file path=ppt/presentation.xml><?xml version="1.0" encoding="utf-8"?>
-<p:presentation xmlns:a="http://schemas.openxmlformats.org/drawingml/2006/main" xmlns:r="http://schemas.openxmlformats.org/officeDocument/2006/relationships" xmlns:p="http://schemas.openxmlformats.org/presentationml/2006/main" saveSubsetFonts="1" autoCompressPictures="0">
+<p:presentation xmlns="http://schemas.openxmlformats.org/drawingml/2006/main" xmlns:ns1="http://schemas.openxmlformats.org/officeDocument/2006/relationships" xmlns:p="http://schemas.openxmlformats.org/presentationml/2006/main" saveSubsetFonts="1" autoCompressPictures="0">
   <p:sldMasterIdLst>
-    <p:sldMasterId id="2147483648" r:id="rId1"/>
+    <p:sldMasterId id="2147483648" ns1:id="rId1"/>
   </p:sldMasterIdLst>
   <p:sldIdLst>
-    <p:sldId id="256" r:id="rId7"/>
+    <p:sldId id="256" ns1:id="rId7"/>
   </p:sldIdLst>
-  <p:sldSz cx="49377600" cy="38404800" type="screen4x3"/>
+  <p:sldSz cx="54864000" cy="43891200" type="screen4x3"/>
   <p:notesSz cx="6858000" cy="9144000"/>
   <p:defaultTextStyle>
-    <a:defPPr>
-      <a:defRPr lang="en-US"/>
-    </a:defPPr>
-    <a:lvl1pPr marL="0" algn="l" defTabSz="457200" rtl="0" eaLnBrk="1" latinLnBrk="0" hangingPunct="1">
-      <a:defRPr sz="1800" kern="1200">
-        <a:solidFill>
-          <a:schemeClr val="tx1"/>
-        </a:solidFill>
-        <a:latin typeface="+mn-lt"/>
-        <a:ea typeface="+mn-ea"/>
-        <a:cs typeface="+mn-cs"/>
-      </a:defRPr>
-    </a:lvl1pPr>
-    <a:lvl2pPr marL="457200" algn="l" defTabSz="457200" rtl="0" eaLnBrk="1" latinLnBrk="0" hangingPunct="1">
-      <a:defRPr sz="1800" kern="1200">
-        <a:solidFill>
-          <a:schemeClr val="tx1"/>
-        </a:solidFill>
-        <a:latin typeface="+mn-lt"/>
-        <a:ea typeface="+mn-ea"/>
-        <a:cs typeface="+mn-cs"/>
-      </a:defRPr>
-    </a:lvl2pPr>
-    <a:lvl3pPr marL="914400" algn="l" defTabSz="457200" rtl="0" eaLnBrk="1" latinLnBrk="0" hangingPunct="1">
-      <a:defRPr sz="1800" kern="1200">
-        <a:solidFill>
-          <a:schemeClr val="tx1"/>
-        </a:solidFill>
-        <a:latin typeface="+mn-lt"/>
-        <a:ea typeface="+mn-ea"/>
-        <a:cs typeface="+mn-cs"/>
-      </a:defRPr>
-    </a:lvl3pPr>
-    <a:lvl4pPr marL="1371600" algn="l" defTabSz="457200" rtl="0" eaLnBrk="1" latinLnBrk="0" hangingPunct="1">
-      <a:defRPr sz="1800" kern="1200">
-        <a:solidFill>
-          <a:schemeClr val="tx1"/>
-        </a:solidFill>
-        <a:latin typeface="+mn-lt"/>
-        <a:ea typeface="+mn-ea"/>
-        <a:cs typeface="+mn-cs"/>
-      </a:defRPr>
-    </a:lvl4pPr>
-    <a:lvl5pPr marL="1828800" algn="l" defTabSz="457200" rtl="0" eaLnBrk="1" latinLnBrk="0" hangingPunct="1">
-      <a:defRPr sz="1800" kern="1200">
-        <a:solidFill>
-          <a:schemeClr val="tx1"/>
-        </a:solidFill>
-        <a:latin typeface="+mn-lt"/>
-        <a:ea typeface="+mn-ea"/>
-        <a:cs typeface="+mn-cs"/>
-      </a:defRPr>
-    </a:lvl5pPr>
-    <a:lvl6pPr marL="2286000" algn="l" defTabSz="457200" rtl="0" eaLnBrk="1" latinLnBrk="0" hangingPunct="1">
-      <a:defRPr sz="1800" kern="1200">
-        <a:solidFill>
-          <a:schemeClr val="tx1"/>
-        </a:solidFill>
-        <a:latin typeface="+mn-lt"/>
-        <a:ea typeface="+mn-ea"/>
-        <a:cs typeface="+mn-cs"/>
-      </a:defRPr>
-    </a:lvl6pPr>
-    <a:lvl7pPr marL="2743200" algn="l" defTabSz="457200" rtl="0" eaLnBrk="1" latinLnBrk="0" hangingPunct="1">
-      <a:defRPr sz="1800" kern="1200">
-        <a:solidFill>
-          <a:schemeClr val="tx1"/>
-        </a:solidFill>
-        <a:latin typeface="+mn-lt"/>
-        <a:ea typeface="+mn-ea"/>
-        <a:cs typeface="+mn-cs"/>
-      </a:defRPr>
-    </a:lvl7pPr>
-    <a:lvl8pPr marL="3200400" algn="l" defTabSz="457200" rtl="0" eaLnBrk="1" latinLnBrk="0" hangingPunct="1">
-      <a:defRPr sz="1800" kern="1200">
-        <a:solidFill>
-          <a:schemeClr val="tx1"/>
-        </a:solidFill>
-        <a:latin typeface="+mn-lt"/>
-        <a:ea typeface="+mn-ea"/>
-        <a:cs typeface="+mn-cs"/>
-      </a:defRPr>
-    </a:lvl8pPr>
-    <a:lvl9pPr marL="3657600" algn="l" defTabSz="457200" rtl="0" eaLnBrk="1" latinLnBrk="0" hangingPunct="1">
-      <a:defRPr sz="1800" kern="1200">
-        <a:solidFill>
-          <a:schemeClr val="tx1"/>
-        </a:solidFill>
-        <a:latin typeface="+mn-lt"/>
-        <a:ea typeface="+mn-ea"/>
-        <a:cs typeface="+mn-cs"/>
-      </a:defRPr>
-    </a:lvl9pPr>
+    <defPPr>
+      <defRPr lang="en-US"/>
+    </defPPr>
+    <lvl1pPr marL="0" algn="l" defTabSz="457200" rtl="0" eaLnBrk="1" latinLnBrk="0" hangingPunct="1">
+      <defRPr sz="1800" kern="1200">
+        <solidFill>
+          <schemeClr val="tx1"/>
+        </solidFill>
+        <latin typeface="+mn-lt"/>
+        <ea typeface="+mn-ea"/>
+        <cs typeface="+mn-cs"/>
+      </defRPr>
+    </lvl1pPr>
+    <lvl2pPr marL="457200" algn="l" defTabSz="457200" rtl="0" eaLnBrk="1" latinLnBrk="0" hangingPunct="1">
+      <defRPr sz="1800" kern="1200">
+        <solidFill>
+          <schemeClr val="tx1"/>
+        </solidFill>
+        <latin typeface="+mn-lt"/>
+        <ea typeface="+mn-ea"/>
+        <cs typeface="+mn-cs"/>
+      </defRPr>
+    </lvl2pPr>
+    <lvl3pPr marL="914400" algn="l" defTabSz="457200" rtl="0" eaLnBrk="1" latinLnBrk="0" hangingPunct="1">
+      <defRPr sz="1800" kern="1200">
+        <solidFill>
+          <schemeClr val="tx1"/>
+        </solidFill>
+        <latin typeface="+mn-lt"/>
+        <ea typeface="+mn-ea"/>
+        <cs typeface="+mn-cs"/>
+      </defRPr>
+    </lvl3pPr>
+    <lvl4pPr marL="1371600" algn="l" defTabSz="457200" rtl="0" eaLnBrk="1" latinLnBrk="0" hangingPunct="1">
+      <defRPr sz="1800" kern="1200">
+        <solidFill>
+          <schemeClr val="tx1"/>
+        </solidFill>
+        <latin typeface="+mn-lt"/>
+        <ea typeface="+mn-ea"/>
+        <cs typeface="+mn-cs"/>
+      </defRPr>
+    </lvl4pPr>
+    <lvl5pPr marL="1828800" algn="l" defTabSz="457200" rtl="0" eaLnBrk="1" latinLnBrk="0" hangingPunct="1">
+      <defRPr sz="1800" kern="1200">
+        <solidFill>
+          <schemeClr val="tx1"/>
+        </solidFill>
+        <latin typeface="+mn-lt"/>
+        <ea typeface="+mn-ea"/>
+        <cs typeface="+mn-cs"/>
+      </defRPr>
+    </lvl5pPr>
+    <lvl6pPr marL="2286000" algn="l" defTabSz="457200" rtl="0" eaLnBrk="1" latinLnBrk="0" hangingPunct="1">
+      <defRPr sz="1800" kern="1200">
+        <solidFill>
+          <schemeClr val="tx1"/>
+        </solidFill>
+        <latin typeface="+mn-lt"/>
+        <ea typeface="+mn-ea"/>
+        <cs typeface="+mn-cs"/>
+      </defRPr>
+    </lvl6pPr>
+    <lvl7pPr marL="2743200" algn="l" defTabSz="457200" rtl="0" eaLnBrk="1" latinLnBrk="0" hangingPunct="1">
+      <defRPr sz="1800" kern="1200">
+        <solidFill>
+          <schemeClr val="tx1"/>
+        </solidFill>
+        <latin typeface="+mn-lt"/>
+        <ea typeface="+mn-ea"/>
+        <cs typeface="+mn-cs"/>
+      </defRPr>
+    </lvl7pPr>
+    <lvl8pPr marL="3200400" algn="l" defTabSz="457200" rtl="0" eaLnBrk="1" latinLnBrk="0" hangingPunct="1">
+      <defRPr sz="1800" kern="1200">
+        <solidFill>
+          <schemeClr val="tx1"/>
+        </solidFill>
+        <latin typeface="+mn-lt"/>
+        <ea typeface="+mn-ea"/>
+        <cs typeface="+mn-cs"/>
+      </defRPr>
+    </lvl8pPr>
+    <lvl9pPr marL="3657600" algn="l" defTabSz="457200" rtl="0" eaLnBrk="1" latinLnBrk="0" hangingPunct="1">
+      <defRPr sz="1800" kern="1200">
+        <solidFill>
+          <schemeClr val="tx1"/>
+        </solidFill>
+        <latin typeface="+mn-lt"/>
+        <ea typeface="+mn-ea"/>
+        <cs typeface="+mn-cs"/>
+      </defRPr>
+    </lvl9pPr>
   </p:defaultTextStyle>
 </p:presentation>
 </file>
@@ -3079,7 +3079,7 @@
 </file>
 
 <file path=ppt/slides/slide1.xml><?xml version="1.0" encoding="utf-8"?>
-<p:sld xmlns:a="http://schemas.openxmlformats.org/drawingml/2006/main" xmlns:p="http://schemas.openxmlformats.org/presentationml/2006/main" xmlns:r="http://schemas.openxmlformats.org/officeDocument/2006/relationships">
+<p:sld xmlns="http://schemas.openxmlformats.org/drawingml/2006/main" xmlns:ns2="http://schemas.openxmlformats.org/officeDocument/2006/relationships" xmlns:p="http://schemas.openxmlformats.org/presentationml/2006/main">
   <p:cSld>
     <p:spTree>
       <p:nvGrpSpPr>
@@ -3095,40 +3095,40 @@
           <p:nvPr/>
         </p:nvSpPr>
         <p:spPr>
-          <a:xfrm>
-            <a:off x="0" y="0"/>
-            <a:ext cx="49377600" cy="38404800"/>
-          </a:xfrm>
-          <a:prstGeom prst="rect">
-            <a:avLst/>
-          </a:prstGeom>
-          <a:solidFill>
-            <a:srgbClr val="FFFFFF"/>
-          </a:solidFill>
-          <a:ln>
-            <a:noFill/>
-          </a:ln>
+          <xfrm>
+            <off x="0" y="0"/>
+            <ext cx="54863999" cy="43891200"/>
+          </xfrm>
+          <prstGeom prst="rect">
+            <avLst/>
+          </prstGeom>
+          <solidFill>
+            <srgbClr val="FFFFFF"/>
+          </solidFill>
+          <ln>
+            <noFill/>
+          </ln>
         </p:spPr>
         <p:style>
-          <a:lnRef idx="1">
-            <a:schemeClr val="accent1"/>
-          </a:lnRef>
-          <a:fillRef idx="3">
-            <a:schemeClr val="accent1"/>
-          </a:fillRef>
-          <a:effectRef idx="2">
-            <a:schemeClr val="accent1"/>
-          </a:effectRef>
-          <a:fontRef idx="minor">
-            <a:schemeClr val="lt1"/>
-          </a:fontRef>
+          <lnRef idx="1">
+            <schemeClr val="accent1"/>
+          </lnRef>
+          <fillRef idx="3">
+            <schemeClr val="accent1"/>
+          </fillRef>
+          <effectRef idx="2">
+            <schemeClr val="accent1"/>
+          </effectRef>
+          <fontRef idx="minor">
+            <schemeClr val="lt1"/>
+          </fontRef>
         </p:style>
         <p:txBody>
-          <a:bodyPr rtlCol="0" anchor="ctr"/>
-          <a:lstStyle/>
-          <a:p>
-            <a:pPr algn="ctr"/>
-          </a:p>
+          <bodyPr rtlCol="0" anchor="ctr"/>
+          <lstStyle/>
+          <p>
+            <pPr algn="ctr"/>
+          </p>
         </p:txBody>
       </p:sp>
       <p:sp>
@@ -3138,83 +3138,82 @@
           <p:nvPr/>
         </p:nvSpPr>
         <p:spPr>
-          <a:xfrm>
-            <a:off x="0" y="0"/>
-            <a:ext cx="49377600" cy="5029200"/>
-          </a:xfrm>
-          <a:prstGeom prst="rect">
-            <a:avLst/>
-          </a:prstGeom>
-          <a:solidFill>
-            <a:srgbClr val="FFFFFF"/>
-          </a:solidFill>
-          <a:ln>
-            <a:noFill/>
-          </a:ln>
+          <xfrm>
+            <off x="897774" y="598516"/>
+            <ext cx="3192087" cy="3591098"/>
+          </xfrm>
+          <prstGeom prst="rect">
+            <avLst/>
+          </prstGeom>
+          <solidFill>
+            <srgbClr val="F5F5F5"/>
+          </solidFill>
+          <ln w="9525">
+            <solidFill>
+              <srgbClr val="D8D8D8"/>
+            </solidFill>
+          </ln>
+          <effectLst/>
         </p:spPr>
         <p:style>
-          <a:lnRef idx="1">
-            <a:schemeClr val="accent1"/>
-          </a:lnRef>
-          <a:fillRef idx="3">
-            <a:schemeClr val="accent1"/>
-          </a:fillRef>
-          <a:effectRef idx="2">
-            <a:schemeClr val="accent1"/>
-          </a:effectRef>
-          <a:fontRef idx="minor">
-            <a:schemeClr val="lt1"/>
-          </a:fontRef>
+          <lnRef idx="1">
+            <schemeClr val="accent1"/>
+          </lnRef>
+          <fillRef idx="3">
+            <schemeClr val="accent1"/>
+          </fillRef>
+          <effectRef idx="2">
+            <schemeClr val="accent1"/>
+          </effectRef>
+          <fontRef idx="minor">
+            <schemeClr val="lt1"/>
+          </fontRef>
         </p:style>
         <p:txBody>
-          <a:bodyPr rtlCol="0" anchor="ctr"/>
-          <a:lstStyle/>
-          <a:p>
-            <a:pPr algn="ctr"/>
-          </a:p>
-        </p:txBody>
-      </p:sp>
-      <p:sp>
-        <p:nvSpPr>
-          <p:cNvPr id="4" name="Rectangle 3"/>
-          <p:cNvSpPr/>
+          <bodyPr rtlCol="0" anchor="ctr"/>
+          <lstStyle/>
+          <p>
+            <pPr algn="ctr"/>
+          </p>
+        </p:txBody>
+      </p:sp>
+      <p:sp>
+        <p:nvSpPr>
+          <p:cNvPr id="4" name="TextBox 3"/>
+          <p:cNvSpPr txBox="1"/>
           <p:nvPr/>
         </p:nvSpPr>
         <p:spPr>
-          <a:xfrm>
-            <a:off x="0" y="5029200"/>
-            <a:ext cx="49377600" cy="228600"/>
-          </a:xfrm>
-          <a:prstGeom prst="rect">
-            <a:avLst/>
-          </a:prstGeom>
-          <a:solidFill>
-            <a:srgbClr val="A51C30"/>
-          </a:solidFill>
-          <a:ln>
-            <a:noFill/>
-          </a:ln>
+          <xfrm>
+            <off x="897774" y="2094807"/>
+            <ext cx="3192087" cy="698269"/>
+          </xfrm>
+          <prstGeom prst="rect">
+            <avLst/>
+          </prstGeom>
+          <noFill/>
         </p:spPr>
-        <p:style>
-          <a:lnRef idx="1">
-            <a:schemeClr val="accent1"/>
-          </a:lnRef>
-          <a:fillRef idx="3">
-            <a:schemeClr val="accent1"/>
-          </a:fillRef>
-          <a:effectRef idx="2">
-            <a:schemeClr val="accent1"/>
-          </a:effectRef>
-          <a:fontRef idx="minor">
-            <a:schemeClr val="lt1"/>
-          </a:fontRef>
-        </p:style>
-        <p:txBody>
-          <a:bodyPr rtlCol="0" anchor="ctr"/>
-          <a:lstStyle/>
-          <a:p>
-            <a:pPr algn="ctr"/>
-          </a:p>
+        <p:txBody>
+          <bodyPr wrap="square" anchor="t">
+            <spAutoFit/>
+          </bodyPr>
+          <lstStyle/>
+          <p>
+            <pPr algn="ctr">
+              <lnSpc>
+                <spcPct val="115000"/>
+              </lnSpc>
+            </pPr>
+            <r>
+              <rPr sz="2181" b="0" i="1">
+                <solidFill>
+                  <srgbClr val="999999"/>
+                </solidFill>
+                <latin typeface="Calibri"/>
+              </rPr>
+              <t>[ shield ]</t>
+            </r>
+          </p>
         </p:txBody>
       </p:sp>
       <p:sp>
@@ -3224,43 +3223,43 @@
           <p:nvPr/>
         </p:nvSpPr>
         <p:spPr>
-          <a:xfrm>
-            <a:off x="914400" y="640080"/>
-            <a:ext cx="3200400" cy="3657600"/>
-          </a:xfrm>
-          <a:prstGeom prst="rect">
-            <a:avLst/>
-          </a:prstGeom>
-          <a:solidFill>
-            <a:srgbClr val="F2F2F2"/>
-          </a:solidFill>
-          <a:ln w="9525">
-            <a:solidFill>
-              <a:srgbClr val="CCCCCC"/>
-            </a:solidFill>
-          </a:ln>
-          <a:effectLst/>
+          <xfrm>
+            <off x="50774138" y="598516"/>
+            <ext cx="3192087" cy="3591098"/>
+          </xfrm>
+          <prstGeom prst="rect">
+            <avLst/>
+          </prstGeom>
+          <solidFill>
+            <srgbClr val="F5F5F5"/>
+          </solidFill>
+          <ln w="9525">
+            <solidFill>
+              <srgbClr val="D8D8D8"/>
+            </solidFill>
+          </ln>
+          <effectLst/>
         </p:spPr>
         <p:style>
-          <a:lnRef idx="1">
-            <a:schemeClr val="accent1"/>
-          </a:lnRef>
-          <a:fillRef idx="3">
-            <a:schemeClr val="accent1"/>
-          </a:fillRef>
-          <a:effectRef idx="2">
-            <a:schemeClr val="accent1"/>
-          </a:effectRef>
-          <a:fontRef idx="minor">
-            <a:schemeClr val="lt1"/>
-          </a:fontRef>
+          <lnRef idx="1">
+            <schemeClr val="accent1"/>
+          </lnRef>
+          <fillRef idx="3">
+            <schemeClr val="accent1"/>
+          </fillRef>
+          <effectRef idx="2">
+            <schemeClr val="accent1"/>
+          </effectRef>
+          <fontRef idx="minor">
+            <schemeClr val="lt1"/>
+          </fontRef>
         </p:style>
         <p:txBody>
-          <a:bodyPr rtlCol="0" anchor="ctr"/>
-          <a:lstStyle/>
-          <a:p>
-            <a:pPr algn="ctr"/>
-          </a:p>
+          <bodyPr rtlCol="0" anchor="ctr"/>
+          <lstStyle/>
+          <p>
+            <pPr algn="ctr"/>
+          </p>
         </p:txBody>
       </p:sp>
       <p:sp>
@@ -3270,78 +3269,91 @@
           <p:nvPr/>
         </p:nvSpPr>
         <p:spPr>
-          <a:xfrm>
-            <a:off x="914400" y="2011680"/>
-            <a:ext cx="3200400" cy="914400"/>
-          </a:xfrm>
-          <a:prstGeom prst="rect">
-            <a:avLst/>
-          </a:prstGeom>
-          <a:noFill/>
+          <xfrm>
+            <off x="50774138" y="2094807"/>
+            <ext cx="3192087" cy="698269"/>
+          </xfrm>
+          <prstGeom prst="rect">
+            <avLst/>
+          </prstGeom>
+          <noFill/>
         </p:spPr>
         <p:txBody>
-          <a:bodyPr wrap="square" anchor="t">
-            <a:spAutoFit/>
-          </a:bodyPr>
-          <a:lstStyle/>
-          <a:p>
-            <a:pPr algn="ctr"/>
-            <a:r>
-              <a:rPr sz="1400" b="0" i="1">
-                <a:solidFill>
-                  <a:srgbClr val="999999"/>
-                </a:solidFill>
-                <a:latin typeface="Calibri"/>
-              </a:rPr>
-              <a:t>[ shield / logo ]</a:t>
-            </a:r>
-          </a:p>
-        </p:txBody>
-      </p:sp>
-      <p:sp>
-        <p:nvSpPr>
-          <p:cNvPr id="7" name="Rectangle 6"/>
-          <p:cNvSpPr/>
+          <bodyPr wrap="square" anchor="t">
+            <spAutoFit/>
+          </bodyPr>
+          <lstStyle/>
+          <p>
+            <pPr algn="ctr">
+              <lnSpc>
+                <spcPct val="115000"/>
+              </lnSpc>
+            </pPr>
+            <r>
+              <rPr sz="2181" b="0" i="1">
+                <solidFill>
+                  <srgbClr val="999999"/>
+                </solidFill>
+                <latin typeface="Calibri"/>
+              </rPr>
+              <t>[ shield ]</t>
+            </r>
+          </p>
+        </p:txBody>
+      </p:sp>
+      <p:sp>
+        <p:nvSpPr>
+          <p:cNvPr id="7" name="TextBox 6"/>
+          <p:cNvSpPr txBox="1"/>
           <p:nvPr/>
         </p:nvSpPr>
         <p:spPr>
-          <a:xfrm>
-            <a:off x="45262800" y="640080"/>
-            <a:ext cx="3200400" cy="3657600"/>
-          </a:xfrm>
-          <a:prstGeom prst="rect">
-            <a:avLst/>
-          </a:prstGeom>
-          <a:solidFill>
-            <a:srgbClr val="F2F2F2"/>
-          </a:solidFill>
-          <a:ln w="9525">
-            <a:solidFill>
-              <a:srgbClr val="CCCCCC"/>
-            </a:solidFill>
-          </a:ln>
-          <a:effectLst/>
+          <xfrm>
+            <off x="4488872" y="598516"/>
+            <ext cx="45886254" cy="2593570"/>
+          </xfrm>
+          <prstGeom prst="rect">
+            <avLst/>
+          </prstGeom>
+          <noFill/>
         </p:spPr>
-        <p:style>
-          <a:lnRef idx="1">
-            <a:schemeClr val="accent1"/>
-          </a:lnRef>
-          <a:fillRef idx="3">
-            <a:schemeClr val="accent1"/>
-          </a:fillRef>
-          <a:effectRef idx="2">
-            <a:schemeClr val="accent1"/>
-          </a:effectRef>
-          <a:fontRef idx="minor">
-            <a:schemeClr val="lt1"/>
-          </a:fontRef>
-        </p:style>
-        <p:txBody>
-          <a:bodyPr rtlCol="0" anchor="ctr"/>
-          <a:lstStyle/>
-          <a:p>
-            <a:pPr algn="ctr"/>
-          </a:p>
+        <p:txBody>
+          <bodyPr wrap="square" anchor="t">
+            <spAutoFit/>
+          </bodyPr>
+          <lstStyle/>
+          <p>
+            <pPr algn="ctr">
+              <lnSpc>
+                <spcPct val="105000"/>
+              </lnSpc>
+            </pPr>
+            <r>
+              <rPr sz="6763" b="1" i="0">
+                <solidFill>
+                  <srgbClr val="A51C30"/>
+                </solidFill>
+                <latin typeface="Georgia"/>
+              </rPr>
+              <t>Detecting crypto fraud without labels:</t>
+            </r>
+          </p>
+          <p>
+            <pPr algn="ctr">
+              <lnSpc>
+                <spcPct val="105000"/>
+              </lnSpc>
+            </pPr>
+            <r>
+              <rPr sz="6763" b="1" i="0">
+                <solidFill>
+                  <srgbClr val="A51C30"/>
+                </solidFill>
+                <latin typeface="Georgia"/>
+              </rPr>
+              <t>6 of 6 known rug pulls recovered from 4,334 Ethereum tokens.</t>
+            </r>
+          </p>
         </p:txBody>
       </p:sp>
       <p:sp>
@@ -3351,32 +3363,36 @@
           <p:nvPr/>
         </p:nvSpPr>
         <p:spPr>
-          <a:xfrm>
-            <a:off x="45262800" y="2011680"/>
-            <a:ext cx="3200400" cy="914400"/>
-          </a:xfrm>
-          <a:prstGeom prst="rect">
-            <a:avLst/>
-          </a:prstGeom>
-          <a:noFill/>
+          <xfrm>
+            <off x="4488872" y="3291839"/>
+            <ext cx="45886254" cy="698269"/>
+          </xfrm>
+          <prstGeom prst="rect">
+            <avLst/>
+          </prstGeom>
+          <noFill/>
         </p:spPr>
         <p:txBody>
-          <a:bodyPr wrap="square" anchor="t">
-            <a:spAutoFit/>
-          </a:bodyPr>
-          <a:lstStyle/>
-          <a:p>
-            <a:pPr algn="ctr"/>
-            <a:r>
-              <a:rPr sz="1400" b="0" i="1">
-                <a:solidFill>
-                  <a:srgbClr val="999999"/>
-                </a:solidFill>
-                <a:latin typeface="Calibri"/>
-              </a:rPr>
-              <a:t>[ shield / logo ]</a:t>
-            </a:r>
-          </a:p>
+          <bodyPr wrap="square" anchor="t">
+            <spAutoFit/>
+          </bodyPr>
+          <lstStyle/>
+          <p>
+            <pPr algn="ctr">
+              <lnSpc>
+                <spcPct val="115000"/>
+              </lnSpc>
+            </pPr>
+            <r>
+              <rPr sz="3054" b="0" i="0">
+                <solidFill>
+                  <srgbClr val="2A2A2A"/>
+                </solidFill>
+                <latin typeface="Georgia"/>
+              </rPr>
+              <t>Gillian Schriever  ·  Jiahui (Cecilia) Cai  ·  Zhilin Chen  ·  Jinghan Huang</t>
+            </r>
+          </p>
         </p:txBody>
       </p:sp>
       <p:sp>
@@ -3386,67 +3402,80 @@
           <p:nvPr/>
         </p:nvSpPr>
         <p:spPr>
-          <a:xfrm>
-            <a:off x="5029200" y="457200"/>
-            <a:ext cx="39319200" cy="2194560"/>
-          </a:xfrm>
-          <a:prstGeom prst="rect">
-            <a:avLst/>
-          </a:prstGeom>
-          <a:noFill/>
+          <xfrm>
+            <off x="4488872" y="3990109"/>
+            <ext cx="45886254" cy="598516"/>
+          </xfrm>
+          <prstGeom prst="rect">
+            <avLst/>
+          </prstGeom>
+          <noFill/>
         </p:spPr>
         <p:txBody>
-          <a:bodyPr wrap="square" anchor="t">
-            <a:spAutoFit/>
-          </a:bodyPr>
-          <a:lstStyle/>
-          <a:p>
-            <a:pPr algn="ctr"/>
-            <a:r>
-              <a:rPr sz="6600" b="1" i="0">
-                <a:solidFill>
-                  <a:srgbClr val="A51C30"/>
-                </a:solidFill>
-                <a:latin typeface="Georgia"/>
-              </a:rPr>
-              <a:t>[ Project Title — Unsupervised Crypto Fraud Detection ]</a:t>
-            </a:r>
-          </a:p>
-        </p:txBody>
-      </p:sp>
-      <p:sp>
-        <p:nvSpPr>
-          <p:cNvPr id="10" name="TextBox 9"/>
-          <p:cNvSpPr txBox="1"/>
+          <bodyPr wrap="square" anchor="t">
+            <spAutoFit/>
+          </bodyPr>
+          <lstStyle/>
+          <p>
+            <pPr algn="ctr">
+              <lnSpc>
+                <spcPct val="115000"/>
+              </lnSpc>
+            </pPr>
+            <r>
+              <rPr sz="2400" b="0" i="1">
+                <solidFill>
+                  <srgbClr val="2A2A2A"/>
+                </solidFill>
+                <latin typeface="Georgia"/>
+              </rPr>
+              <t>Harvard John A. Paulson School of Engineering and Applied Sciences  —  AC297r Capstone, Spring 2026</t>
+            </r>
+          </p>
+        </p:txBody>
+      </p:sp>
+      <p:sp>
+        <p:nvSpPr>
+          <p:cNvPr id="10" name="Rectangle 9"/>
+          <p:cNvSpPr/>
           <p:nvPr/>
         </p:nvSpPr>
         <p:spPr>
-          <a:xfrm>
-            <a:off x="5029200" y="2834640"/>
-            <a:ext cx="39319200" cy="822960"/>
-          </a:xfrm>
-          <a:prstGeom prst="rect">
-            <a:avLst/>
-          </a:prstGeom>
-          <a:noFill/>
+          <xfrm>
+            <off x="0" y="4788130"/>
+            <ext cx="54863999" cy="39901"/>
+          </xfrm>
+          <prstGeom prst="rect">
+            <avLst/>
+          </prstGeom>
+          <solidFill>
+            <srgbClr val="A51C30"/>
+          </solidFill>
+          <ln>
+            <noFill/>
+          </ln>
+          <effectLst/>
         </p:spPr>
-        <p:txBody>
-          <a:bodyPr wrap="square" anchor="t">
-            <a:spAutoFit/>
-          </a:bodyPr>
-          <a:lstStyle/>
-          <a:p>
-            <a:pPr algn="ctr"/>
-            <a:r>
-              <a:rPr sz="2600" b="0" i="0">
-                <a:solidFill>
-                  <a:srgbClr val="1A1A1A"/>
-                </a:solidFill>
-                <a:latin typeface="Georgia"/>
-              </a:rPr>
-              <a:t>Gillian Schriever¹, Jiahui (Cecilia) Cai¹, Zhilin Chen¹, Jinghan Huang¹</a:t>
-            </a:r>
-          </a:p>
+        <p:style>
+          <lnRef idx="1">
+            <schemeClr val="accent1"/>
+          </lnRef>
+          <fillRef idx="3">
+            <schemeClr val="accent1"/>
+          </fillRef>
+          <effectRef idx="2">
+            <schemeClr val="accent1"/>
+          </effectRef>
+          <fontRef idx="minor">
+            <schemeClr val="lt1"/>
+          </fontRef>
+        </p:style>
+        <p:txBody>
+          <bodyPr rtlCol="0" anchor="ctr"/>
+          <lstStyle/>
+          <p>
+            <pPr algn="ctr"/>
+          </p>
         </p:txBody>
       </p:sp>
       <p:sp>
@@ -3456,80 +3485,80 @@
           <p:nvPr/>
         </p:nvSpPr>
         <p:spPr>
-          <a:xfrm>
-            <a:off x="5029200" y="3566160"/>
-            <a:ext cx="39319200" cy="731520"/>
-          </a:xfrm>
-          <a:prstGeom prst="rect">
-            <a:avLst/>
-          </a:prstGeom>
-          <a:noFill/>
+          <xfrm>
+            <off x="897774" y="5486400"/>
+            <ext cx="17090967" cy="897774"/>
+          </xfrm>
+          <prstGeom prst="rect">
+            <avLst/>
+          </prstGeom>
+          <noFill/>
         </p:spPr>
         <p:txBody>
-          <a:bodyPr wrap="square" anchor="t">
-            <a:spAutoFit/>
-          </a:bodyPr>
-          <a:lstStyle/>
-          <a:p>
-            <a:pPr algn="ctr"/>
-            <a:r>
-              <a:rPr sz="2000" b="0" i="1">
-                <a:solidFill>
-                  <a:srgbClr val="1A1A1A"/>
-                </a:solidFill>
-                <a:latin typeface="Georgia"/>
-              </a:rPr>
-              <a:t>¹ Harvard John A. Paulson School of Engineering and Applied Sciences — AC297r Capstone, Spring 2026</a:t>
-            </a:r>
-          </a:p>
-        </p:txBody>
-      </p:sp>
-      <p:sp>
-        <p:nvSpPr>
-          <p:cNvPr id="12" name="Rounded Rectangle 11"/>
+          <bodyPr wrap="square" anchor="t">
+            <spAutoFit/>
+          </bodyPr>
+          <lstStyle/>
+          <p>
+            <pPr algn="l">
+              <lnSpc>
+                <spcPct val="115000"/>
+              </lnSpc>
+            </pPr>
+            <r>
+              <rPr sz="4581" b="1" i="0">
+                <solidFill>
+                  <srgbClr val="A51C30"/>
+                </solidFill>
+                <latin typeface="Calibri"/>
+              </rPr>
+              <t>THE QUESTION</t>
+            </r>
+          </p>
+        </p:txBody>
+      </p:sp>
+      <p:sp>
+        <p:nvSpPr>
+          <p:cNvPr id="12" name="Rectangle 11"/>
           <p:cNvSpPr/>
           <p:nvPr/>
         </p:nvSpPr>
         <p:spPr>
-          <a:xfrm>
-            <a:off x="914400" y="5577840"/>
-            <a:ext cx="23500080" cy="11887200"/>
-          </a:xfrm>
-          <a:prstGeom prst="roundRect">
-            <a:avLst>
-              <a:gd name="adj" fmla="val 4000"/>
-            </a:avLst>
-          </a:prstGeom>
-          <a:solidFill>
-            <a:srgbClr val="F2F2F2"/>
-          </a:solidFill>
-          <a:ln w="9525">
-            <a:solidFill>
-              <a:srgbClr val="CCCCCC"/>
-            </a:solidFill>
-          </a:ln>
-          <a:effectLst/>
+          <xfrm>
+            <off x="897774" y="6483927"/>
+            <ext cx="5981838" cy="39901"/>
+          </xfrm>
+          <prstGeom prst="rect">
+            <avLst/>
+          </prstGeom>
+          <solidFill>
+            <srgbClr val="A51C30"/>
+          </solidFill>
+          <ln>
+            <noFill/>
+          </ln>
+          <effectLst/>
         </p:spPr>
         <p:style>
-          <a:lnRef idx="1">
-            <a:schemeClr val="accent1"/>
-          </a:lnRef>
-          <a:fillRef idx="3">
-            <a:schemeClr val="accent1"/>
-          </a:fillRef>
-          <a:effectRef idx="2">
-            <a:schemeClr val="accent1"/>
-          </a:effectRef>
-          <a:fontRef idx="minor">
-            <a:schemeClr val="lt1"/>
-          </a:fontRef>
+          <lnRef idx="1">
+            <schemeClr val="accent1"/>
+          </lnRef>
+          <fillRef idx="3">
+            <schemeClr val="accent1"/>
+          </fillRef>
+          <effectRef idx="2">
+            <schemeClr val="accent1"/>
+          </effectRef>
+          <fontRef idx="minor">
+            <schemeClr val="lt1"/>
+          </fontRef>
         </p:style>
         <p:txBody>
-          <a:bodyPr rtlCol="0" anchor="ctr"/>
-          <a:lstStyle/>
-          <a:p>
-            <a:pPr algn="ctr"/>
-          </a:p>
+          <bodyPr rtlCol="0" anchor="ctr"/>
+          <lstStyle/>
+          <p>
+            <pPr algn="ctr"/>
+          </p>
         </p:txBody>
       </p:sp>
       <p:sp>
@@ -3539,32 +3568,36 @@
           <p:nvPr/>
         </p:nvSpPr>
         <p:spPr>
-          <a:xfrm>
-            <a:off x="1188720" y="5760720"/>
-            <a:ext cx="22951440" cy="1005840"/>
-          </a:xfrm>
-          <a:prstGeom prst="rect">
-            <a:avLst/>
-          </a:prstGeom>
-          <a:noFill/>
+          <xfrm>
+            <off x="897774" y="6882938"/>
+            <ext cx="17090967" cy="3391592"/>
+          </xfrm>
+          <prstGeom prst="rect">
+            <avLst/>
+          </prstGeom>
+          <noFill/>
         </p:spPr>
         <p:txBody>
-          <a:bodyPr wrap="square" anchor="t">
-            <a:spAutoFit/>
-          </a:bodyPr>
-          <a:lstStyle/>
-          <a:p>
-            <a:pPr algn="l"/>
-            <a:r>
-              <a:rPr sz="4000" b="1" i="0">
-                <a:solidFill>
-                  <a:srgbClr val="A51C30"/>
-                </a:solidFill>
-                <a:latin typeface="Calibri"/>
-              </a:rPr>
-              <a:t>1. Background</a:t>
-            </a:r>
-          </a:p>
+          <bodyPr wrap="square" anchor="t">
+            <spAutoFit/>
+          </bodyPr>
+          <lstStyle/>
+          <p>
+            <pPr algn="l">
+              <lnSpc>
+                <spcPct val="115000"/>
+              </lnSpc>
+            </pPr>
+            <r>
+              <rPr sz="3490" b="1" i="0">
+                <solidFill>
+                  <srgbClr val="2A2A2A"/>
+                </solidFill>
+                <latin typeface="Calibri"/>
+              </rPr>
+              <t>Can we detect crypto fraud without any labeled data?</t>
+            </r>
+          </p>
         </p:txBody>
       </p:sp>
       <p:sp>
@@ -3574,247 +3607,311 @@
           <p:nvPr/>
         </p:nvSpPr>
         <p:spPr>
-          <a:xfrm>
-            <a:off x="1371600" y="6858000"/>
-            <a:ext cx="22585680" cy="6858000"/>
-          </a:xfrm>
-          <a:prstGeom prst="rect">
-            <a:avLst/>
-          </a:prstGeom>
-          <a:noFill/>
+          <xfrm>
+            <off x="897774" y="9875520"/>
+            <ext cx="17090967" cy="8977745"/>
+          </xfrm>
+          <prstGeom prst="rect">
+            <avLst/>
+          </prstGeom>
+          <noFill/>
         </p:spPr>
         <p:txBody>
-          <a:bodyPr wrap="square" anchor="t">
-            <a:spAutoFit/>
-          </a:bodyPr>
-          <a:lstStyle/>
-          <a:p>
-            <a:pPr algn="l"/>
-            <a:r>
-              <a:rPr sz="1800" b="0" i="0">
-                <a:solidFill>
-                  <a:srgbClr val="1A1A1A"/>
-                </a:solidFill>
-                <a:latin typeface="Calibri"/>
-              </a:rPr>
-              <a:t>Traditional fraud detection relies on labeled datasets — rare and</a:t>
-            </a:r>
-          </a:p>
-          <a:p>
-            <a:pPr algn="l"/>
-            <a:r>
-              <a:rPr sz="1800" b="0" i="0">
-                <a:solidFill>
-                  <a:srgbClr val="1A1A1A"/>
-                </a:solidFill>
-                <a:latin typeface="Calibri"/>
-              </a:rPr>
-              <a:t>quickly outdated in crypto. We instead build a two-layer</a:t>
-            </a:r>
-          </a:p>
-          <a:p>
-            <a:pPr algn="l"/>
-            <a:r>
-              <a:rPr sz="1800" b="0" i="0">
-                <a:solidFill>
-                  <a:srgbClr val="1A1A1A"/>
-                </a:solidFill>
-                <a:latin typeface="Calibri"/>
-              </a:rPr>
-              <a:t>unsupervised system:</a:t>
-            </a:r>
-          </a:p>
-          <a:p>
-            <a:pPr algn="l"/>
-            <a:r>
-              <a:rPr sz="1800" b="0" i="0">
-                <a:solidFill>
-                  <a:srgbClr val="1A1A1A"/>
-                </a:solidFill>
-                <a:latin typeface="Calibri"/>
-              </a:rPr>
-              <a:t/>
-            </a:r>
-          </a:p>
-          <a:p>
-            <a:pPr algn="l"/>
-            <a:r>
-              <a:rPr sz="1800" b="0" i="0">
-                <a:solidFill>
-                  <a:srgbClr val="1A1A1A"/>
-                </a:solidFill>
-                <a:latin typeface="Calibri"/>
-              </a:rPr>
-              <a:t>   •  Layer 1 flags suspicious behavior</a:t>
-            </a:r>
-          </a:p>
-          <a:p>
-            <a:pPr algn="l"/>
-            <a:r>
-              <a:rPr sz="1800" b="0" i="0">
-                <a:solidFill>
-                  <a:srgbClr val="1A1A1A"/>
-                </a:solidFill>
-                <a:latin typeface="Calibri"/>
-              </a:rPr>
-              <a:t>   •  Layer 2 estimates P(fraud | suspicious)</a:t>
-            </a:r>
-          </a:p>
-          <a:p>
-            <a:pPr algn="l"/>
-            <a:r>
-              <a:rPr sz="1800" b="0" i="0">
-                <a:solidFill>
-                  <a:srgbClr val="1A1A1A"/>
-                </a:solidFill>
-                <a:latin typeface="Calibri"/>
-              </a:rPr>
-              <a:t/>
-            </a:r>
-          </a:p>
-          <a:p>
-            <a:pPr algn="l"/>
-            <a:r>
-              <a:rPr sz="1800" b="0" i="0">
-                <a:solidFill>
-                  <a:srgbClr val="1A1A1A"/>
-                </a:solidFill>
-                <a:latin typeface="Calibri"/>
-              </a:rPr>
-              <a:t>Dataset: 4,334 mid-cap ERC-20 tokens on Ethereum (Dune Analytics,</a:t>
-            </a:r>
-          </a:p>
-          <a:p>
-            <a:pPr algn="l"/>
-            <a:r>
-              <a:rPr sz="1800" b="0" i="0">
-                <a:solidFill>
-                  <a:srgbClr val="1A1A1A"/>
-                </a:solidFill>
-                <a:latin typeface="Calibri"/>
-              </a:rPr>
-              <a:t>365-day window, $1M–$1B annualized volume).</a:t>
-            </a:r>
-          </a:p>
-          <a:p>
-            <a:pPr algn="l"/>
-            <a:r>
-              <a:rPr sz="1800" b="0" i="0">
-                <a:solidFill>
-                  <a:srgbClr val="1A1A1A"/>
-                </a:solidFill>
-                <a:latin typeface="Calibri"/>
-              </a:rPr>
-              <a:t/>
-            </a:r>
-          </a:p>
-          <a:p>
-            <a:pPr algn="l"/>
-            <a:r>
-              <a:rPr sz="1800" b="0" i="0">
-                <a:solidFill>
-                  <a:srgbClr val="1A1A1A"/>
-                </a:solidFill>
-                <a:latin typeface="Calibri"/>
-              </a:rPr>
-              <a:t>[ Why it matters: 1–2 sentences in plain English for the reader</a:t>
-            </a:r>
-          </a:p>
-          <a:p>
-            <a:pPr algn="l"/>
-            <a:r>
-              <a:rPr sz="1800" b="0" i="0">
-                <a:solidFill>
-                  <a:srgbClr val="1A1A1A"/>
-                </a:solidFill>
-                <a:latin typeface="Calibri"/>
-              </a:rPr>
-              <a:t>who has 5 seconds at your poster. ]</a:t>
-            </a:r>
-          </a:p>
-        </p:txBody>
-      </p:sp>
-      <p:sp>
-        <p:nvSpPr>
-          <p:cNvPr id="15" name="Rounded Rectangle 14"/>
+          <bodyPr wrap="square" anchor="t">
+            <spAutoFit/>
+          </bodyPr>
+          <lstStyle/>
+          <p>
+            <pPr algn="l">
+              <lnSpc>
+                <spcPct val="125000"/>
+              </lnSpc>
+            </pPr>
+            <r>
+              <rPr sz="2618" b="0" i="0">
+                <solidFill>
+                  <srgbClr val="2A2A2A"/>
+                </solidFill>
+                <latin typeface="Calibri"/>
+              </rPr>
+              <t>Labels for crypto fraud are rare, slow to publish, and biased</t>
+            </r>
+          </p>
+          <p>
+            <pPr algn="l">
+              <lnSpc>
+                <spcPct val="125000"/>
+              </lnSpc>
+            </pPr>
+            <r>
+              <rPr sz="2618" b="0" i="0">
+                <solidFill>
+                  <srgbClr val="2A2A2A"/>
+                </solidFill>
+                <latin typeface="Calibri"/>
+              </rPr>
+              <t>toward high-profile cases. Supervised classifiers trained on</t>
+            </r>
+          </p>
+          <p>
+            <pPr algn="l">
+              <lnSpc>
+                <spcPct val="125000"/>
+              </lnSpc>
+            </pPr>
+            <r>
+              <rPr sz="2618" b="0" i="0">
+                <solidFill>
+                  <srgbClr val="2A2A2A"/>
+                </solidFill>
+                <latin typeface="Calibri"/>
+              </rPr>
+              <t>them don't generalize — the attacks evolve faster than the</t>
+            </r>
+          </p>
+          <p>
+            <pPr algn="l">
+              <lnSpc>
+                <spcPct val="125000"/>
+              </lnSpc>
+            </pPr>
+            <r>
+              <rPr sz="2618" b="0" i="0">
+                <solidFill>
+                  <srgbClr val="2A2A2A"/>
+                </solidFill>
+                <latin typeface="Calibri"/>
+              </rPr>
+              <t>labels.</t>
+            </r>
+          </p>
+          <p>
+            <pPr algn="l">
+              <lnSpc>
+                <spcPct val="125000"/>
+              </lnSpc>
+            </pPr>
+            <r>
+              <rPr sz="2618" b="0" i="0">
+                <solidFill>
+                  <srgbClr val="2A2A2A"/>
+                </solidFill>
+                <latin typeface="Calibri"/>
+              </rPr>
+              <t/>
+            </r>
+          </p>
+          <p>
+            <pPr algn="l">
+              <lnSpc>
+                <spcPct val="125000"/>
+              </lnSpc>
+            </pPr>
+            <r>
+              <rPr sz="2618" b="0" i="0">
+                <solidFill>
+                  <srgbClr val="2A2A2A"/>
+                </solidFill>
+                <latin typeface="Calibri"/>
+              </rPr>
+              <t>We build a two-layer unsupervised pipeline:</t>
+            </r>
+          </p>
+          <p>
+            <pPr algn="l">
+              <lnSpc>
+                <spcPct val="125000"/>
+              </lnSpc>
+            </pPr>
+            <r>
+              <rPr sz="2618" b="0" i="0">
+                <solidFill>
+                  <srgbClr val="2A2A2A"/>
+                </solidFill>
+                <latin typeface="Calibri"/>
+              </rPr>
+              <t/>
+            </r>
+          </p>
+          <p>
+            <pPr algn="l">
+              <lnSpc>
+                <spcPct val="125000"/>
+              </lnSpc>
+            </pPr>
+            <r>
+              <rPr sz="2618" b="0" i="0">
+                <solidFill>
+                  <srgbClr val="2A2A2A"/>
+                </solidFill>
+                <latin typeface="Calibri"/>
+              </rPr>
+              <t>  ① Flag tokens whose on-chain trading behavior looks</t>
+            </r>
+          </p>
+          <p>
+            <pPr algn="l">
+              <lnSpc>
+                <spcPct val="125000"/>
+              </lnSpc>
+            </pPr>
+            <r>
+              <rPr sz="2618" b="0" i="0">
+                <solidFill>
+                  <srgbClr val="2A2A2A"/>
+                </solidFill>
+                <latin typeface="Calibri"/>
+              </rPr>
+              <t>      statistically unusual.</t>
+            </r>
+          </p>
+          <p>
+            <pPr algn="l">
+              <lnSpc>
+                <spcPct val="125000"/>
+              </lnSpc>
+            </pPr>
+            <r>
+              <rPr sz="2618" b="0" i="0">
+                <solidFill>
+                  <srgbClr val="2A2A2A"/>
+                </solidFill>
+                <latin typeface="Calibri"/>
+              </rPr>
+              <t/>
+            </r>
+          </p>
+          <p>
+            <pPr algn="l">
+              <lnSpc>
+                <spcPct val="125000"/>
+              </lnSpc>
+            </pPr>
+            <r>
+              <rPr sz="2618" b="0" i="0">
+                <solidFill>
+                  <srgbClr val="2A2A2A"/>
+                </solidFill>
+                <latin typeface="Calibri"/>
+              </rPr>
+              <t>  ② Estimate how likely that unusual behavior is to be</t>
+            </r>
+          </p>
+          <p>
+            <pPr algn="l">
+              <lnSpc>
+                <spcPct val="125000"/>
+              </lnSpc>
+            </pPr>
+            <r>
+              <rPr sz="2618" b="0" i="0">
+                <solidFill>
+                  <srgbClr val="2A2A2A"/>
+                </solidFill>
+                <latin typeface="Calibri"/>
+              </rPr>
+              <t>      intentional fraud (vs. a hack, bug, or large legitimate</t>
+            </r>
+          </p>
+          <p>
+            <pPr algn="l">
+              <lnSpc>
+                <spcPct val="125000"/>
+              </lnSpc>
+            </pPr>
+            <r>
+              <rPr sz="2618" b="0" i="0">
+                <solidFill>
+                  <srgbClr val="2A2A2A"/>
+                </solidFill>
+                <latin typeface="Calibri"/>
+              </rPr>
+              <t>      event).</t>
+            </r>
+          </p>
+        </p:txBody>
+      </p:sp>
+      <p:sp>
+        <p:nvSpPr>
+          <p:cNvPr id="15" name="TextBox 14"/>
+          <p:cNvSpPr txBox="1"/>
+          <p:nvPr/>
+        </p:nvSpPr>
+        <p:spPr>
+          <xfrm>
+            <off x="18886516" y="5486400"/>
+            <ext cx="17090967" cy="897774"/>
+          </xfrm>
+          <prstGeom prst="rect">
+            <avLst/>
+          </prstGeom>
+          <noFill/>
+        </p:spPr>
+        <p:txBody>
+          <bodyPr wrap="square" anchor="t">
+            <spAutoFit/>
+          </bodyPr>
+          <lstStyle/>
+          <p>
+            <pPr algn="l">
+              <lnSpc>
+                <spcPct val="115000"/>
+              </lnSpc>
+            </pPr>
+            <r>
+              <rPr sz="4581" b="1" i="0">
+                <solidFill>
+                  <srgbClr val="A51C30"/>
+                </solidFill>
+                <latin typeface="Calibri"/>
+              </rPr>
+              <t>METHODS</t>
+            </r>
+          </p>
+        </p:txBody>
+      </p:sp>
+      <p:sp>
+        <p:nvSpPr>
+          <p:cNvPr id="16" name="Rectangle 15"/>
           <p:cNvSpPr/>
           <p:nvPr/>
         </p:nvSpPr>
         <p:spPr>
-          <a:xfrm>
-            <a:off x="24963120" y="5577840"/>
-            <a:ext cx="23500080" cy="11887200"/>
-          </a:xfrm>
-          <a:prstGeom prst="roundRect">
-            <a:avLst>
-              <a:gd name="adj" fmla="val 4000"/>
-            </a:avLst>
-          </a:prstGeom>
-          <a:solidFill>
-            <a:srgbClr val="E8EFF7"/>
-          </a:solidFill>
-          <a:ln w="9525">
-            <a:solidFill>
-              <a:srgbClr val="CCCCCC"/>
-            </a:solidFill>
-          </a:ln>
-          <a:effectLst/>
+          <xfrm>
+            <off x="18886516" y="6483927"/>
+            <ext cx="5981838" cy="39901"/>
+          </xfrm>
+          <prstGeom prst="rect">
+            <avLst/>
+          </prstGeom>
+          <solidFill>
+            <srgbClr val="A51C30"/>
+          </solidFill>
+          <ln>
+            <noFill/>
+          </ln>
+          <effectLst/>
         </p:spPr>
         <p:style>
-          <a:lnRef idx="1">
-            <a:schemeClr val="accent1"/>
-          </a:lnRef>
-          <a:fillRef idx="3">
-            <a:schemeClr val="accent1"/>
-          </a:fillRef>
-          <a:effectRef idx="2">
-            <a:schemeClr val="accent1"/>
-          </a:effectRef>
-          <a:fontRef idx="minor">
-            <a:schemeClr val="lt1"/>
-          </a:fontRef>
+          <lnRef idx="1">
+            <schemeClr val="accent1"/>
+          </lnRef>
+          <fillRef idx="3">
+            <schemeClr val="accent1"/>
+          </fillRef>
+          <effectRef idx="2">
+            <schemeClr val="accent1"/>
+          </effectRef>
+          <fontRef idx="minor">
+            <schemeClr val="lt1"/>
+          </fontRef>
         </p:style>
         <p:txBody>
-          <a:bodyPr rtlCol="0" anchor="ctr"/>
-          <a:lstStyle/>
-          <a:p>
-            <a:pPr algn="ctr"/>
-          </a:p>
-        </p:txBody>
-      </p:sp>
-      <p:sp>
-        <p:nvSpPr>
-          <p:cNvPr id="16" name="TextBox 15"/>
-          <p:cNvSpPr txBox="1"/>
-          <p:nvPr/>
-        </p:nvSpPr>
-        <p:spPr>
-          <a:xfrm>
-            <a:off x="25237440" y="5760720"/>
-            <a:ext cx="22951440" cy="1005840"/>
-          </a:xfrm>
-          <a:prstGeom prst="rect">
-            <a:avLst/>
-          </a:prstGeom>
-          <a:noFill/>
-        </p:spPr>
-        <p:txBody>
-          <a:bodyPr wrap="square" anchor="t">
-            <a:spAutoFit/>
-          </a:bodyPr>
-          <a:lstStyle/>
-          <a:p>
-            <a:pPr algn="l"/>
-            <a:r>
-              <a:rPr sz="4000" b="1" i="0">
-                <a:solidFill>
-                  <a:srgbClr val="A51C30"/>
-                </a:solidFill>
-                <a:latin typeface="Calibri"/>
-              </a:rPr>
-              <a:t>2. Methodology</a:t>
-            </a:r>
-          </a:p>
+          <bodyPr rtlCol="0" anchor="ctr"/>
+          <lstStyle/>
+          <p>
+            <pPr algn="ctr"/>
+          </p>
         </p:txBody>
       </p:sp>
       <p:sp>
@@ -3824,438 +3921,494 @@
           <p:nvPr/>
         </p:nvSpPr>
         <p:spPr>
-          <a:xfrm>
-            <a:off x="25420320" y="6858000"/>
-            <a:ext cx="22585680" cy="6858000"/>
-          </a:xfrm>
-          <a:prstGeom prst="rect">
-            <a:avLst/>
-          </a:prstGeom>
-          <a:noFill/>
+          <xfrm>
+            <off x="18886516" y="6882938"/>
+            <ext cx="17090967" cy="13466618"/>
+          </xfrm>
+          <prstGeom prst="rect">
+            <avLst/>
+          </prstGeom>
+          <noFill/>
         </p:spPr>
         <p:txBody>
-          <a:bodyPr wrap="square" anchor="t">
-            <a:spAutoFit/>
-          </a:bodyPr>
-          <a:lstStyle/>
-          <a:p>
-            <a:pPr algn="l"/>
-            <a:r>
-              <a:rPr sz="1800" b="0" i="0">
-                <a:solidFill>
-                  <a:srgbClr val="1A1A1A"/>
-                </a:solidFill>
-                <a:latin typeface="Calibri"/>
-              </a:rPr>
-              <a:t>Features (6): volume_spike_ratio, max_daily_volume, days_traded,</a:t>
-            </a:r>
-          </a:p>
-          <a:p>
-            <a:pPr algn="l"/>
-            <a:r>
-              <a:rPr sz="1800" b="0" i="0">
-                <a:solidFill>
-                  <a:srgbClr val="1A1A1A"/>
-                </a:solidFill>
-                <a:latin typeface="Calibri"/>
-              </a:rPr>
-              <a:t>max_trade_dominance, early_velocity_ratio, early_trade_dominance.</a:t>
-            </a:r>
-          </a:p>
-          <a:p>
-            <a:pPr algn="l"/>
-            <a:r>
-              <a:rPr sz="1800" b="0" i="0">
-                <a:solidFill>
-                  <a:srgbClr val="1A1A1A"/>
-                </a:solidFill>
-                <a:latin typeface="Calibri"/>
-              </a:rPr>
-              <a:t/>
-            </a:r>
-          </a:p>
-          <a:p>
-            <a:pPr algn="l"/>
-            <a:r>
-              <a:rPr sz="1800" b="0" i="0">
-                <a:solidFill>
-                  <a:srgbClr val="1A1A1A"/>
-                </a:solidFill>
-                <a:latin typeface="Calibri"/>
-              </a:rPr>
-              <a:t>Three independent anomaly detectors:</a:t>
-            </a:r>
-          </a:p>
-          <a:p>
-            <a:pPr algn="l"/>
-            <a:r>
-              <a:rPr sz="1800" b="0" i="0">
-                <a:solidFill>
-                  <a:srgbClr val="1A1A1A"/>
-                </a:solidFill>
-                <a:latin typeface="Calibri"/>
-              </a:rPr>
-              <a:t>   1. Isolation Forest (sparse outliers)</a:t>
-            </a:r>
-          </a:p>
-          <a:p>
-            <a:pPr algn="l"/>
-            <a:r>
-              <a:rPr sz="1800" b="0" i="0">
-                <a:solidFill>
-                  <a:srgbClr val="1A1A1A"/>
-                </a:solidFill>
-                <a:latin typeface="Calibri"/>
-              </a:rPr>
-              <a:t>   2. DBSCAN (density-based noise points)</a:t>
-            </a:r>
-          </a:p>
-          <a:p>
-            <a:pPr algn="l"/>
-            <a:r>
-              <a:rPr sz="1800" b="0" i="0">
-                <a:solidFill>
-                  <a:srgbClr val="1A1A1A"/>
-                </a:solidFill>
-                <a:latin typeface="Calibri"/>
-              </a:rPr>
-              <a:t>   3. PCA + Mahalanobis distance (multivariate extremes)</a:t>
-            </a:r>
-          </a:p>
-          <a:p>
-            <a:pPr algn="l"/>
-            <a:r>
-              <a:rPr sz="1800" b="0" i="0">
-                <a:solidFill>
-                  <a:srgbClr val="1A1A1A"/>
-                </a:solidFill>
-                <a:latin typeface="Calibri"/>
-              </a:rPr>
-              <a:t/>
-            </a:r>
-          </a:p>
-          <a:p>
-            <a:pPr algn="l"/>
-            <a:r>
-              <a:rPr sz="1800" b="0" i="0">
-                <a:solidFill>
-                  <a:srgbClr val="1A1A1A"/>
-                </a:solidFill>
-                <a:latin typeface="Calibri"/>
-              </a:rPr>
-              <a:t>Rank-averaged to produce a continuous suspicion_score ∈ [0, 1].</a:t>
-            </a:r>
-          </a:p>
-          <a:p>
-            <a:pPr algn="l"/>
-            <a:r>
-              <a:rPr sz="1800" b="0" i="0">
-                <a:solidFill>
-                  <a:srgbClr val="1A1A1A"/>
-                </a:solidFill>
-                <a:latin typeface="Calibri"/>
-              </a:rPr>
-              <a:t>Layer 2: logistic regression on n=14 hand-validated tokens (LOO-CV)</a:t>
-            </a:r>
-          </a:p>
-          <a:p>
-            <a:pPr algn="l"/>
-            <a:r>
-              <a:rPr sz="1800" b="0" i="0">
-                <a:solidFill>
-                  <a:srgbClr val="1A1A1A"/>
-                </a:solidFill>
-                <a:latin typeface="Calibri"/>
-              </a:rPr>
-              <a:t>mapping suspicious-behavior features → P(fraud).</a:t>
-            </a:r>
-          </a:p>
-        </p:txBody>
-      </p:sp>
-      <p:sp>
-        <p:nvSpPr>
-          <p:cNvPr id="18" name="Rounded Rectangle 17"/>
+          <bodyPr wrap="square" anchor="t">
+            <spAutoFit/>
+          </bodyPr>
+          <lstStyle/>
+          <p>
+            <pPr algn="l">
+              <lnSpc>
+                <spcPct val="125000"/>
+              </lnSpc>
+            </pPr>
+            <r>
+              <rPr sz="2618" b="0" i="0">
+                <solidFill>
+                  <srgbClr val="2A2A2A"/>
+                </solidFill>
+                <latin typeface="Calibri"/>
+              </rPr>
+              <t>Data. 4,334 mid-cap ERC-20 tokens on Ethereum</t>
+            </r>
+          </p>
+          <p>
+            <pPr algn="l">
+              <lnSpc>
+                <spcPct val="125000"/>
+              </lnSpc>
+            </pPr>
+            <r>
+              <rPr sz="2618" b="0" i="0">
+                <solidFill>
+                  <srgbClr val="2A2A2A"/>
+                </solidFill>
+                <latin typeface="Calibri"/>
+              </rPr>
+              <t>(Dune Analytics, 365-day window, $1M–$1B annual volume).</t>
+            </r>
+          </p>
+          <p>
+            <pPr algn="l">
+              <lnSpc>
+                <spcPct val="125000"/>
+              </lnSpc>
+            </pPr>
+            <r>
+              <rPr sz="2618" b="0" i="0">
+                <solidFill>
+                  <srgbClr val="2A2A2A"/>
+                </solidFill>
+                <latin typeface="Calibri"/>
+              </rPr>
+              <t/>
+            </r>
+          </p>
+          <p>
+            <pPr algn="l">
+              <lnSpc>
+                <spcPct val="125000"/>
+              </lnSpc>
+            </pPr>
+            <r>
+              <rPr sz="2618" b="0" i="0">
+                <solidFill>
+                  <srgbClr val="2A2A2A"/>
+                </solidFill>
+                <latin typeface="Calibri"/>
+              </rPr>
+              <t>Features (6). Volume spike ratio, peak daily volume, days</t>
+            </r>
+          </p>
+          <p>
+            <pPr algn="l">
+              <lnSpc>
+                <spcPct val="125000"/>
+              </lnSpc>
+            </pPr>
+            <r>
+              <rPr sz="2618" b="0" i="0">
+                <solidFill>
+                  <srgbClr val="2A2A2A"/>
+                </solidFill>
+                <latin typeface="Calibri"/>
+              </rPr>
+              <t>traded, max single-trade dominance, and two 24-hour post-</t>
+            </r>
+          </p>
+          <p>
+            <pPr algn="l">
+              <lnSpc>
+                <spcPct val="125000"/>
+              </lnSpc>
+            </pPr>
+            <r>
+              <rPr sz="2618" b="0" i="0">
+                <solidFill>
+                  <srgbClr val="2A2A2A"/>
+                </solidFill>
+                <latin typeface="Calibri"/>
+              </rPr>
+              <t>launch velocity features.</t>
+            </r>
+          </p>
+          <p>
+            <pPr algn="l">
+              <lnSpc>
+                <spcPct val="125000"/>
+              </lnSpc>
+            </pPr>
+            <r>
+              <rPr sz="2618" b="0" i="0">
+                <solidFill>
+                  <srgbClr val="2A2A2A"/>
+                </solidFill>
+                <latin typeface="Calibri"/>
+              </rPr>
+              <t/>
+            </r>
+          </p>
+          <p>
+            <pPr algn="l">
+              <lnSpc>
+                <spcPct val="125000"/>
+              </lnSpc>
+            </pPr>
+            <r>
+              <rPr sz="2618" b="0" i="0">
+                <solidFill>
+                  <srgbClr val="2A2A2A"/>
+                </solidFill>
+                <latin typeface="Calibri"/>
+              </rPr>
+              <t>Layer 1 — three independent detectors:</t>
+            </r>
+          </p>
+          <p>
+            <pPr algn="l">
+              <lnSpc>
+                <spcPct val="125000"/>
+              </lnSpc>
+            </pPr>
+            <r>
+              <rPr sz="2618" b="0" i="0">
+                <solidFill>
+                  <srgbClr val="2A2A2A"/>
+                </solidFill>
+                <latin typeface="Calibri"/>
+              </rPr>
+              <t>    •  Isolation Forest (tree-based outlier detection)</t>
+            </r>
+          </p>
+          <p>
+            <pPr algn="l">
+              <lnSpc>
+                <spcPct val="125000"/>
+              </lnSpc>
+            </pPr>
+            <r>
+              <rPr sz="2618" b="0" i="0">
+                <solidFill>
+                  <srgbClr val="2A2A2A"/>
+                </solidFill>
+                <latin typeface="Calibri"/>
+              </rPr>
+              <t>    •  DBSCAN (density clustering; we keep the noise points)</t>
+            </r>
+          </p>
+          <p>
+            <pPr algn="l">
+              <lnSpc>
+                <spcPct val="125000"/>
+              </lnSpc>
+            </pPr>
+            <r>
+              <rPr sz="2618" b="0" i="0">
+                <solidFill>
+                  <srgbClr val="2A2A2A"/>
+                </solidFill>
+                <latin typeface="Calibri"/>
+              </rPr>
+              <t>    •  PCA + Mahalanobis distance</t>
+            </r>
+          </p>
+          <p>
+            <pPr algn="l">
+              <lnSpc>
+                <spcPct val="125000"/>
+              </lnSpc>
+            </pPr>
+            <r>
+              <rPr sz="2618" b="0" i="0">
+                <solidFill>
+                  <srgbClr val="2A2A2A"/>
+                </solidFill>
+                <latin typeface="Calibri"/>
+              </rPr>
+              <t/>
+            </r>
+          </p>
+          <p>
+            <pPr algn="l">
+              <lnSpc>
+                <spcPct val="125000"/>
+              </lnSpc>
+            </pPr>
+            <r>
+              <rPr sz="2618" b="0" i="0">
+                <solidFill>
+                  <srgbClr val="2A2A2A"/>
+                </solidFill>
+                <latin typeface="Calibri"/>
+              </rPr>
+              <t>We rank-average their outputs into a single continuous</t>
+            </r>
+          </p>
+          <p>
+            <pPr algn="l">
+              <lnSpc>
+                <spcPct val="125000"/>
+              </lnSpc>
+            </pPr>
+            <r>
+              <rPr sz="2618" b="0" i="0">
+                <solidFill>
+                  <srgbClr val="2A2A2A"/>
+                </solidFill>
+                <latin typeface="Calibri"/>
+              </rPr>
+              <t>suspicion score in [0, 1], replacing the legacy three-detector</t>
+            </r>
+          </p>
+          <p>
+            <pPr algn="l">
+              <lnSpc>
+                <spcPct val="125000"/>
+              </lnSpc>
+            </pPr>
+            <r>
+              <rPr sz="2618" b="0" i="0">
+                <solidFill>
+                  <srgbClr val="2A2A2A"/>
+                </solidFill>
+                <latin typeface="Calibri"/>
+              </rPr>
+              <t>yes/no vote.</t>
+            </r>
+          </p>
+          <p>
+            <pPr algn="l">
+              <lnSpc>
+                <spcPct val="125000"/>
+              </lnSpc>
+            </pPr>
+            <r>
+              <rPr sz="2618" b="0" i="0">
+                <solidFill>
+                  <srgbClr val="2A2A2A"/>
+                </solidFill>
+                <latin typeface="Calibri"/>
+              </rPr>
+              <t/>
+            </r>
+          </p>
+          <p>
+            <pPr algn="l">
+              <lnSpc>
+                <spcPct val="125000"/>
+              </lnSpc>
+            </pPr>
+            <r>
+              <rPr sz="2618" b="0" i="0">
+                <solidFill>
+                  <srgbClr val="2A2A2A"/>
+                </solidFill>
+                <latin typeface="Calibri"/>
+              </rPr>
+              <t>Layer 2. Logistic regression (L2-regularized) fit on n=14</t>
+            </r>
+          </p>
+          <p>
+            <pPr algn="l">
+              <lnSpc>
+                <spcPct val="125000"/>
+              </lnSpc>
+            </pPr>
+            <r>
+              <rPr sz="2618" b="0" i="0">
+                <solidFill>
+                  <srgbClr val="2A2A2A"/>
+                </solidFill>
+                <latin typeface="Calibri"/>
+              </rPr>
+              <t>hand-validated tokens, mapping suspicious-behavior features</t>
+            </r>
+          </p>
+          <p>
+            <pPr algn="l">
+              <lnSpc>
+                <spcPct val="125000"/>
+              </lnSpc>
+            </pPr>
+            <r>
+              <rPr sz="2618" b="0" i="0">
+                <solidFill>
+                  <srgbClr val="2A2A2A"/>
+                </solidFill>
+                <latin typeface="Calibri"/>
+              </rPr>
+              <t>to P(fraud). Evaluated with leave-one-out cross-validation.</t>
+            </r>
+          </p>
+        </p:txBody>
+      </p:sp>
+      <p:sp>
+        <p:nvSpPr>
+          <p:cNvPr id="18" name="TextBox 17"/>
+          <p:cNvSpPr txBox="1"/>
+          <p:nvPr/>
+        </p:nvSpPr>
+        <p:spPr>
+          <xfrm>
+            <off x="36875258" y="5486400"/>
+            <ext cx="17090967" cy="897774"/>
+          </xfrm>
+          <prstGeom prst="rect">
+            <avLst/>
+          </prstGeom>
+          <noFill/>
+        </p:spPr>
+        <p:txBody>
+          <bodyPr wrap="square" anchor="t">
+            <spAutoFit/>
+          </bodyPr>
+          <lstStyle/>
+          <p>
+            <pPr algn="l">
+              <lnSpc>
+                <spcPct val="115000"/>
+              </lnSpc>
+            </pPr>
+            <r>
+              <rPr sz="4581" b="1" i="0">
+                <solidFill>
+                  <srgbClr val="A51C30"/>
+                </solidFill>
+                <latin typeface="Calibri"/>
+              </rPr>
+              <t>RESULTS</t>
+            </r>
+          </p>
+        </p:txBody>
+      </p:sp>
+      <p:sp>
+        <p:nvSpPr>
+          <p:cNvPr id="19" name="Rectangle 18"/>
           <p:cNvSpPr/>
           <p:nvPr/>
         </p:nvSpPr>
         <p:spPr>
-          <a:xfrm>
-            <a:off x="914400" y="18013680"/>
-            <a:ext cx="23500080" cy="11887200"/>
-          </a:xfrm>
-          <a:prstGeom prst="roundRect">
-            <a:avLst>
-              <a:gd name="adj" fmla="val 4000"/>
-            </a:avLst>
-          </a:prstGeom>
-          <a:solidFill>
-            <a:srgbClr val="FAF3E0"/>
-          </a:solidFill>
-          <a:ln w="9525">
-            <a:solidFill>
-              <a:srgbClr val="CCCCCC"/>
-            </a:solidFill>
-          </a:ln>
-          <a:effectLst/>
+          <xfrm>
+            <off x="36875258" y="6483927"/>
+            <ext cx="5981838" cy="39901"/>
+          </xfrm>
+          <prstGeom prst="rect">
+            <avLst/>
+          </prstGeom>
+          <solidFill>
+            <srgbClr val="A51C30"/>
+          </solidFill>
+          <ln>
+            <noFill/>
+          </ln>
+          <effectLst/>
         </p:spPr>
         <p:style>
-          <a:lnRef idx="1">
-            <a:schemeClr val="accent1"/>
-          </a:lnRef>
-          <a:fillRef idx="3">
-            <a:schemeClr val="accent1"/>
-          </a:fillRef>
-          <a:effectRef idx="2">
-            <a:schemeClr val="accent1"/>
-          </a:effectRef>
-          <a:fontRef idx="minor">
-            <a:schemeClr val="lt1"/>
-          </a:fontRef>
+          <lnRef idx="1">
+            <schemeClr val="accent1"/>
+          </lnRef>
+          <fillRef idx="3">
+            <schemeClr val="accent1"/>
+          </fillRef>
+          <effectRef idx="2">
+            <schemeClr val="accent1"/>
+          </effectRef>
+          <fontRef idx="minor">
+            <schemeClr val="lt1"/>
+          </fontRef>
         </p:style>
         <p:txBody>
-          <a:bodyPr rtlCol="0" anchor="ctr"/>
-          <a:lstStyle/>
-          <a:p>
-            <a:pPr algn="ctr"/>
-          </a:p>
-        </p:txBody>
-      </p:sp>
-      <p:sp>
-        <p:nvSpPr>
-          <p:cNvPr id="19" name="TextBox 18"/>
+          <bodyPr rtlCol="0" anchor="ctr"/>
+          <lstStyle/>
+          <p>
+            <pPr algn="ctr"/>
+          </p>
+        </p:txBody>
+      </p:sp>
+      <p:sp>
+        <p:nvSpPr>
+          <p:cNvPr id="20" name="Rounded Rectangle 19"/>
+          <p:cNvSpPr/>
+          <p:nvPr/>
+        </p:nvSpPr>
+        <p:spPr>
+          <xfrm>
+            <off x="36875258" y="6882938"/>
+            <ext cx="17090967" cy="3192087"/>
+          </xfrm>
+          <prstGeom prst="roundRect">
+            <avLst>
+              <gd name="adj" fmla="val 6000"/>
+            </avLst>
+          </prstGeom>
+          <solidFill>
+            <srgbClr val="F5F5F5"/>
+          </solidFill>
+          <ln w="9525">
+            <solidFill>
+              <srgbClr val="D8D8D8"/>
+            </solidFill>
+          </ln>
+          <effectLst/>
+        </p:spPr>
+        <p:style>
+          <lnRef idx="1">
+            <schemeClr val="accent1"/>
+          </lnRef>
+          <fillRef idx="3">
+            <schemeClr val="accent1"/>
+          </fillRef>
+          <effectRef idx="2">
+            <schemeClr val="accent1"/>
+          </effectRef>
+          <fontRef idx="minor">
+            <schemeClr val="lt1"/>
+          </fontRef>
+        </p:style>
+        <p:txBody>
+          <bodyPr rtlCol="0" anchor="ctr"/>
+          <lstStyle/>
+          <p>
+            <pPr algn="ctr"/>
+          </p>
+        </p:txBody>
+      </p:sp>
+      <p:sp>
+        <p:nvSpPr>
+          <p:cNvPr id="21" name="TextBox 20"/>
           <p:cNvSpPr txBox="1"/>
           <p:nvPr/>
         </p:nvSpPr>
         <p:spPr>
-          <a:xfrm>
-            <a:off x="1188720" y="18196560"/>
-            <a:ext cx="22951440" cy="1005840"/>
-          </a:xfrm>
-          <a:prstGeom prst="rect">
-            <a:avLst/>
-          </a:prstGeom>
-          <a:noFill/>
+          <xfrm>
+            <off x="36875258" y="7032567"/>
+            <ext cx="17090967" cy="1596043"/>
+          </xfrm>
+          <prstGeom prst="rect">
+            <avLst/>
+          </prstGeom>
+          <noFill/>
         </p:spPr>
         <p:txBody>
-          <a:bodyPr wrap="square" anchor="t">
-            <a:spAutoFit/>
-          </a:bodyPr>
-          <a:lstStyle/>
-          <a:p>
-            <a:pPr algn="l"/>
-            <a:r>
-              <a:rPr sz="4000" b="1" i="0">
-                <a:solidFill>
-                  <a:srgbClr val="A51C30"/>
-                </a:solidFill>
-                <a:latin typeface="Calibri"/>
-              </a:rPr>
-              <a:t>3. Layer 1 — Suspicious-Behavior Detection</a:t>
-            </a:r>
-          </a:p>
-        </p:txBody>
-      </p:sp>
-      <p:sp>
-        <p:nvSpPr>
-          <p:cNvPr id="20" name="TextBox 19"/>
-          <p:cNvSpPr txBox="1"/>
-          <p:nvPr/>
-        </p:nvSpPr>
-        <p:spPr>
-          <a:xfrm>
-            <a:off x="1371600" y="19293840"/>
-            <a:ext cx="22585680" cy="6858000"/>
-          </a:xfrm>
-          <a:prstGeom prst="rect">
-            <a:avLst/>
-          </a:prstGeom>
-          <a:noFill/>
-        </p:spPr>
-        <p:txBody>
-          <a:bodyPr wrap="square" anchor="t">
-            <a:spAutoFit/>
-          </a:bodyPr>
-          <a:lstStyle/>
-          <a:p>
-            <a:pPr algn="l"/>
-            <a:r>
-              <a:rPr sz="1800" b="0" i="0">
-                <a:solidFill>
-                  <a:srgbClr val="1A1A1A"/>
-                </a:solidFill>
-                <a:latin typeface="Calibri"/>
-              </a:rPr>
-              <a:t>[ Headline finding in plain English. ]</a:t>
-            </a:r>
-          </a:p>
-          <a:p>
-            <a:pPr algn="l"/>
-            <a:r>
-              <a:rPr sz="1800" b="0" i="0">
-                <a:solidFill>
-                  <a:srgbClr val="1A1A1A"/>
-                </a:solidFill>
-                <a:latin typeface="Calibri"/>
-              </a:rPr>
-              <a:t/>
-            </a:r>
-          </a:p>
-          <a:p>
-            <a:pPr algn="l"/>
-            <a:r>
-              <a:rPr sz="1800" b="0" i="0">
-                <a:solidFill>
-                  <a:srgbClr val="1A1A1A"/>
-                </a:solidFill>
-                <a:latin typeface="Calibri"/>
-              </a:rPr>
-              <a:t>Continuous suspicion score at p90 cutoff:</a:t>
-            </a:r>
-          </a:p>
-          <a:p>
-            <a:pPr algn="l"/>
-            <a:r>
-              <a:rPr sz="1800" b="0" i="0">
-                <a:solidFill>
-                  <a:srgbClr val="1A1A1A"/>
-                </a:solidFill>
-                <a:latin typeface="Calibri"/>
-              </a:rPr>
-              <a:t>   •  Flags 10% of tokens</a:t>
-            </a:r>
-          </a:p>
-          <a:p>
-            <a:pPr algn="l"/>
-            <a:r>
-              <a:rPr sz="1800" b="0" i="0">
-                <a:solidFill>
-                  <a:srgbClr val="1A1A1A"/>
-                </a:solidFill>
-                <a:latin typeface="Calibri"/>
-              </a:rPr>
-              <a:t>   •  Catches 100% of validated fraud (6/6)</a:t>
-            </a:r>
-          </a:p>
-          <a:p>
-            <a:pPr algn="l"/>
-            <a:r>
-              <a:rPr sz="1800" b="0" i="0">
-                <a:solidFill>
-                  <a:srgbClr val="1A1A1A"/>
-                </a:solidFill>
-                <a:latin typeface="Calibri"/>
-              </a:rPr>
-              <a:t/>
-            </a:r>
-          </a:p>
-          <a:p>
-            <a:pPr algn="l"/>
-            <a:r>
-              <a:rPr sz="1800" b="0" i="0">
-                <a:solidFill>
-                  <a:srgbClr val="1A1A1A"/>
-                </a:solidFill>
-                <a:latin typeface="Calibri"/>
-              </a:rPr>
-              <a:t>Discrete 3-vote consensus (legacy approach):</a:t>
-            </a:r>
-          </a:p>
-          <a:p>
-            <a:pPr algn="l"/>
-            <a:r>
-              <a:rPr sz="1800" b="0" i="0">
-                <a:solidFill>
-                  <a:srgbClr val="1A1A1A"/>
-                </a:solidFill>
-                <a:latin typeface="Calibri"/>
-              </a:rPr>
-              <a:t>   •  Flags 2.3% of tokens</a:t>
-            </a:r>
-          </a:p>
-          <a:p>
-            <a:pPr algn="l"/>
-            <a:r>
-              <a:rPr sz="1800" b="0" i="0">
-                <a:solidFill>
-                  <a:srgbClr val="1A1A1A"/>
-                </a:solidFill>
-                <a:latin typeface="Calibri"/>
-              </a:rPr>
-              <a:t>   •  Catches 17% of validated fraud (1/6)</a:t>
-            </a:r>
-          </a:p>
-          <a:p>
-            <a:pPr algn="l"/>
-            <a:r>
-              <a:rPr sz="1800" b="0" i="0">
-                <a:solidFill>
-                  <a:srgbClr val="1A1A1A"/>
-                </a:solidFill>
-                <a:latin typeface="Calibri"/>
-              </a:rPr>
-              <a:t/>
-            </a:r>
-          </a:p>
-          <a:p>
-            <a:pPr algn="l"/>
-            <a:r>
-              <a:rPr sz="1800" b="0" i="0">
-                <a:solidFill>
-                  <a:srgbClr val="1A1A1A"/>
-                </a:solidFill>
-                <a:latin typeface="Calibri"/>
-              </a:rPr>
-              <a:t>[ Figure placeholder below: PCA anomaly map + baseline lift chart. ]</a:t>
-            </a:r>
-          </a:p>
-        </p:txBody>
-      </p:sp>
-      <p:sp>
-        <p:nvSpPr>
-          <p:cNvPr id="21" name="Rounded Rectangle 20"/>
-          <p:cNvSpPr/>
-          <p:nvPr/>
-        </p:nvSpPr>
-        <p:spPr>
-          <a:xfrm>
-            <a:off x="24963120" y="18013680"/>
-            <a:ext cx="23500080" cy="11887200"/>
-          </a:xfrm>
-          <a:prstGeom prst="roundRect">
-            <a:avLst>
-              <a:gd name="adj" fmla="val 4000"/>
-            </a:avLst>
-          </a:prstGeom>
-          <a:solidFill>
-            <a:srgbClr val="F2F2F2"/>
-          </a:solidFill>
-          <a:ln w="9525">
-            <a:solidFill>
-              <a:srgbClr val="CCCCCC"/>
-            </a:solidFill>
-          </a:ln>
-          <a:effectLst/>
-        </p:spPr>
-        <p:style>
-          <a:lnRef idx="1">
-            <a:schemeClr val="accent1"/>
-          </a:lnRef>
-          <a:fillRef idx="3">
-            <a:schemeClr val="accent1"/>
-          </a:fillRef>
-          <a:effectRef idx="2">
-            <a:schemeClr val="accent1"/>
-          </a:effectRef>
-          <a:fontRef idx="minor">
-            <a:schemeClr val="lt1"/>
-          </a:fontRef>
-        </p:style>
-        <p:txBody>
-          <a:bodyPr rtlCol="0" anchor="ctr"/>
-          <a:lstStyle/>
-          <a:p>
-            <a:pPr algn="ctr"/>
-          </a:p>
+          <bodyPr wrap="square" anchor="t">
+            <spAutoFit/>
+          </bodyPr>
+          <lstStyle/>
+          <p>
+            <pPr algn="ctr">
+              <lnSpc>
+                <spcPct val="115000"/>
+              </lnSpc>
+            </pPr>
+            <r>
+              <rPr sz="10472" b="1" i="0">
+                <solidFill>
+                  <srgbClr val="A51C30"/>
+                </solidFill>
+                <latin typeface="Georgia"/>
+              </rPr>
+              <t>6 / 6</t>
+            </r>
+          </p>
         </p:txBody>
       </p:sp>
       <p:sp>
@@ -4265,270 +4418,173 @@
           <p:nvPr/>
         </p:nvSpPr>
         <p:spPr>
-          <a:xfrm>
-            <a:off x="25237440" y="18196560"/>
-            <a:ext cx="22951440" cy="1005840"/>
-          </a:xfrm>
-          <a:prstGeom prst="rect">
-            <a:avLst/>
-          </a:prstGeom>
-          <a:noFill/>
+          <xfrm>
+            <off x="36875258" y="8778240"/>
+            <ext cx="17090967" cy="1197032"/>
+          </xfrm>
+          <prstGeom prst="rect">
+            <avLst/>
+          </prstGeom>
+          <noFill/>
         </p:spPr>
         <p:txBody>
-          <a:bodyPr wrap="square" anchor="t">
-            <a:spAutoFit/>
-          </a:bodyPr>
-          <a:lstStyle/>
-          <a:p>
-            <a:pPr algn="l"/>
-            <a:r>
-              <a:rPr sz="4000" b="1" i="0">
-                <a:solidFill>
-                  <a:srgbClr val="A51C30"/>
-                </a:solidFill>
-                <a:latin typeface="Calibri"/>
-              </a:rPr>
-              <a:t>4. Layer 2 — Fraud Calibration &amp; Explainability</a:t>
-            </a:r>
-          </a:p>
-        </p:txBody>
-      </p:sp>
-      <p:sp>
-        <p:nvSpPr>
-          <p:cNvPr id="23" name="TextBox 22"/>
+          <bodyPr wrap="square" anchor="t">
+            <spAutoFit/>
+          </bodyPr>
+          <lstStyle/>
+          <p>
+            <pPr algn="ctr">
+              <lnSpc>
+                <spcPct val="120000"/>
+              </lnSpc>
+            </pPr>
+            <r>
+              <rPr sz="2400" b="0" i="1">
+                <solidFill>
+                  <srgbClr val="2A2A2A"/>
+                </solidFill>
+                <latin typeface="Calibri"/>
+              </rPr>
+              <t>known frauds recovered at the p90 suspicion cutoff.</t>
+            </r>
+          </p>
+          <p>
+            <pPr algn="ctr">
+              <lnSpc>
+                <spcPct val="120000"/>
+              </lnSpc>
+            </pPr>
+            <r>
+              <rPr sz="2400" b="0" i="1">
+                <solidFill>
+                  <srgbClr val="2A2A2A"/>
+                </solidFill>
+                <latin typeface="Calibri"/>
+              </rPr>
+              <t>The legacy three-vote consensus recovered 1 of 6.</t>
+            </r>
+          </p>
+        </p:txBody>
+      </p:sp>
+      <p:pic>
+        <p:nvPicPr>
+          <p:cNvPr id="23" name="Picture 22" descr="baseline_comparison.png"/>
+          <p:cNvPicPr>
+            <picLocks noChangeAspect="1"/>
+          </p:cNvPicPr>
+          <p:nvPr/>
+        </p:nvPicPr>
+        <p:blipFill>
+          <blip ns2:embed="rId2"/>
+          <stretch>
+            <fillRect/>
+          </stretch>
+        </p:blipFill>
+        <p:spPr>
+          <xfrm>
+            <off x="36875258" y="10474036"/>
+            <ext cx="17090967" cy="6483927"/>
+          </xfrm>
+          <prstGeom prst="rect">
+            <avLst/>
+          </prstGeom>
+        </p:spPr>
+      </p:pic>
+      <p:sp>
+        <p:nvSpPr>
+          <p:cNvPr id="24" name="TextBox 23"/>
           <p:cNvSpPr txBox="1"/>
           <p:nvPr/>
         </p:nvSpPr>
         <p:spPr>
-          <a:xfrm>
-            <a:off x="25420320" y="19293840"/>
-            <a:ext cx="22585680" cy="6858000"/>
-          </a:xfrm>
-          <a:prstGeom prst="rect">
-            <a:avLst/>
-          </a:prstGeom>
-          <a:noFill/>
+          <xfrm>
+            <off x="36875258" y="17007840"/>
+            <ext cx="17090967" cy="798021"/>
+          </xfrm>
+          <prstGeom prst="rect">
+            <avLst/>
+          </prstGeom>
+          <noFill/>
         </p:spPr>
         <p:txBody>
-          <a:bodyPr wrap="square" anchor="t">
-            <a:spAutoFit/>
-          </a:bodyPr>
-          <a:lstStyle/>
-          <a:p>
-            <a:pPr algn="l"/>
-            <a:r>
-              <a:rPr sz="1800" b="0" i="0">
-                <a:solidFill>
-                  <a:srgbClr val="1A1A1A"/>
-                </a:solidFill>
-                <a:latin typeface="Calibri"/>
-              </a:rPr>
-              <a:t>SHAP feature-importance on Isolation Forest identifies</a:t>
-            </a:r>
-          </a:p>
-          <a:p>
-            <a:pPr algn="l"/>
-            <a:r>
-              <a:rPr sz="1800" b="0" i="0">
-                <a:solidFill>
-                  <a:srgbClr val="1A1A1A"/>
-                </a:solidFill>
-                <a:latin typeface="Calibri"/>
-              </a:rPr>
-              <a:t>early_velocity_ratio (first-24h volume/total) as the #1 driver of</a:t>
-            </a:r>
-          </a:p>
-          <a:p>
-            <a:pPr algn="l"/>
-            <a:r>
-              <a:rPr sz="1800" b="0" i="0">
-                <a:solidFill>
-                  <a:srgbClr val="1A1A1A"/>
-                </a:solidFill>
-                <a:latin typeface="Calibri"/>
-              </a:rPr>
-              <a:t>suspicion — validating the 'Do Not Rug on Me' (Mazorra et al.)</a:t>
-            </a:r>
-          </a:p>
-          <a:p>
-            <a:pPr algn="l"/>
-            <a:r>
-              <a:rPr sz="1800" b="0" i="0">
-                <a:solidFill>
-                  <a:srgbClr val="1A1A1A"/>
-                </a:solidFill>
-                <a:latin typeface="Calibri"/>
-              </a:rPr>
-              <a:t>temporal hypothesis.</a:t>
-            </a:r>
-          </a:p>
-          <a:p>
-            <a:pPr algn="l"/>
-            <a:r>
-              <a:rPr sz="1800" b="0" i="0">
-                <a:solidFill>
-                  <a:srgbClr val="1A1A1A"/>
-                </a:solidFill>
-                <a:latin typeface="Calibri"/>
-              </a:rPr>
-              <a:t/>
-            </a:r>
-          </a:p>
-          <a:p>
-            <a:pPr algn="l"/>
-            <a:r>
-              <a:rPr sz="1800" b="0" i="0">
-                <a:solidFill>
-                  <a:srgbClr val="1A1A1A"/>
-                </a:solidFill>
-                <a:latin typeface="Calibri"/>
-              </a:rPr>
-              <a:t>Calibration separates catastrophic non-fraud (SLP / 3Crv / MIM,</a:t>
-            </a:r>
-          </a:p>
-          <a:p>
-            <a:pPr algn="l"/>
-            <a:r>
-              <a:rPr sz="1800" b="0" i="0">
-                <a:solidFill>
-                  <a:srgbClr val="1A1A1A"/>
-                </a:solidFill>
-                <a:latin typeface="Calibri"/>
-              </a:rPr>
-              <a:t>P(fraud) &lt; 0.15) from rug-like tokens (WFT / PLASMA / GREED,</a:t>
-            </a:r>
-          </a:p>
-          <a:p>
-            <a:pPr algn="l"/>
-            <a:r>
-              <a:rPr sz="1800" b="0" i="0">
-                <a:solidFill>
-                  <a:srgbClr val="1A1A1A"/>
-                </a:solidFill>
-                <a:latin typeface="Calibri"/>
-              </a:rPr>
-              <a:t>P(fraud) &gt; 0.6). LOO accuracy modest at n=14 — we report this</a:t>
-            </a:r>
-          </a:p>
-          <a:p>
-            <a:pPr algn="l"/>
-            <a:r>
-              <a:rPr sz="1800" b="0" i="0">
-                <a:solidFill>
-                  <a:srgbClr val="1A1A1A"/>
-                </a:solidFill>
-                <a:latin typeface="Calibri"/>
-              </a:rPr>
-              <a:t>honestly and note what additional labels would buy.</a:t>
-            </a:r>
-          </a:p>
-          <a:p>
-            <a:pPr algn="l"/>
-            <a:r>
-              <a:rPr sz="1800" b="0" i="0">
-                <a:solidFill>
-                  <a:srgbClr val="1A1A1A"/>
-                </a:solidFill>
-                <a:latin typeface="Calibri"/>
-              </a:rPr>
-              <a:t/>
-            </a:r>
-          </a:p>
-          <a:p>
-            <a:pPr algn="l"/>
-            <a:r>
-              <a:rPr sz="1800" b="0" i="0">
-                <a:solidFill>
-                  <a:srgbClr val="1A1A1A"/>
-                </a:solidFill>
-                <a:latin typeface="Calibri"/>
-              </a:rPr>
-              <a:t>[ Figure placeholder below: SHAP global importance + calibration report. ]</a:t>
-            </a:r>
-          </a:p>
-        </p:txBody>
-      </p:sp>
-      <p:sp>
-        <p:nvSpPr>
-          <p:cNvPr id="24" name="Rectangle 23"/>
-          <p:cNvSpPr/>
+          <bodyPr wrap="square" anchor="t">
+            <spAutoFit/>
+          </bodyPr>
+          <lstStyle/>
+          <p>
+            <pPr algn="ctr">
+              <lnSpc>
+                <spcPct val="115000"/>
+              </lnSpc>
+            </pPr>
+            <r>
+              <rPr sz="2400" b="0" i="1">
+                <solidFill>
+                  <srgbClr val="2A2A2A"/>
+                </solidFill>
+                <latin typeface="Calibri"/>
+              </rPr>
+              <t>Fig. 1.  Fraud recall on the validated subset (n=6 fraud, 8 non-fraud</t>
+            </r>
+          </p>
+          <p>
+            <pPr algn="ctr">
+              <lnSpc>
+                <spcPct val="115000"/>
+              </lnSpc>
+            </pPr>
+            <r>
+              <rPr sz="2400" b="0" i="1">
+                <solidFill>
+                  <srgbClr val="2A2A2A"/>
+                </solidFill>
+                <latin typeface="Calibri"/>
+              </rPr>
+              <t>anomaly). Continuous suspicion score catches all known fraud where</t>
+            </r>
+          </p>
+          <p>
+            <pPr algn="ctr">
+              <lnSpc>
+                <spcPct val="115000"/>
+              </lnSpc>
+            </pPr>
+            <r>
+              <rPr sz="2400" b="0" i="1">
+                <solidFill>
+                  <srgbClr val="2A2A2A"/>
+                </solidFill>
+                <latin typeface="Calibri"/>
+              </rPr>
+              <t>the legacy consensus vote catches one.</t>
+            </r>
+          </p>
+        </p:txBody>
+      </p:sp>
+      <p:pic>
+        <p:nvPicPr>
+          <p:cNvPr id="25" name="Picture 24" descr="shap_global_importance.png"/>
+          <p:cNvPicPr>
+            <picLocks noChangeAspect="1"/>
+          </p:cNvPicPr>
           <p:nvPr/>
-        </p:nvSpPr>
+        </p:nvPicPr>
+        <p:blipFill>
+          <blip ns2:embed="rId3"/>
+          <stretch>
+            <fillRect/>
+          </stretch>
+        </p:blipFill>
         <p:spPr>
-          <a:xfrm>
-            <a:off x="1371600" y="24871680"/>
-            <a:ext cx="11064240" cy="4114800"/>
-          </a:xfrm>
-          <a:prstGeom prst="rect">
-            <a:avLst/>
-          </a:prstGeom>
-          <a:solidFill>
-            <a:srgbClr val="FFFFFF"/>
-          </a:solidFill>
-          <a:ln w="12700">
-            <a:solidFill>
-              <a:srgbClr val="CCCCCC"/>
-            </a:solidFill>
-          </a:ln>
-          <a:effectLst/>
+          <xfrm>
+            <off x="36875258" y="18554007"/>
+            <ext cx="17090967" cy="5187141"/>
+          </xfrm>
+          <prstGeom prst="rect">
+            <avLst/>
+          </prstGeom>
         </p:spPr>
-        <p:style>
-          <a:lnRef idx="1">
-            <a:schemeClr val="accent1"/>
-          </a:lnRef>
-          <a:fillRef idx="3">
-            <a:schemeClr val="accent1"/>
-          </a:fillRef>
-          <a:effectRef idx="2">
-            <a:schemeClr val="accent1"/>
-          </a:effectRef>
-          <a:fontRef idx="minor">
-            <a:schemeClr val="lt1"/>
-          </a:fontRef>
-        </p:style>
-        <p:txBody>
-          <a:bodyPr rtlCol="0" anchor="ctr"/>
-          <a:lstStyle/>
-          <a:p>
-            <a:pPr algn="ctr"/>
-          </a:p>
-        </p:txBody>
-      </p:sp>
-      <p:sp>
-        <p:nvSpPr>
-          <p:cNvPr id="25" name="TextBox 24"/>
-          <p:cNvSpPr txBox="1"/>
-          <p:nvPr/>
-        </p:nvSpPr>
-        <p:spPr>
-          <a:xfrm>
-            <a:off x="1371600" y="26563320"/>
-            <a:ext cx="11064240" cy="731520"/>
-          </a:xfrm>
-          <a:prstGeom prst="rect">
-            <a:avLst/>
-          </a:prstGeom>
-          <a:noFill/>
-        </p:spPr>
-        <p:txBody>
-          <a:bodyPr wrap="square" anchor="t">
-            <a:spAutoFit/>
-          </a:bodyPr>
-          <a:lstStyle/>
-          <a:p>
-            <a:pPr algn="ctr"/>
-            <a:r>
-              <a:rPr sz="2000" b="0" i="1">
-                <a:solidFill>
-                  <a:srgbClr val="999999"/>
-                </a:solidFill>
-                <a:latin typeface="Calibri"/>
-              </a:rPr>
-              <a:t>[ Insert figure ]</a:t>
-            </a:r>
-          </a:p>
-        </p:txBody>
-      </p:sp>
+      </p:pic>
       <p:sp>
         <p:nvSpPr>
           <p:cNvPr id="26" name="TextBox 25"/>
@@ -4536,78 +4592,98 @@
           <p:nvPr/>
         </p:nvSpPr>
         <p:spPr>
-          <a:xfrm>
-            <a:off x="1371600" y="29032200"/>
-            <a:ext cx="11064240" cy="457200"/>
-          </a:xfrm>
-          <a:prstGeom prst="rect">
-            <a:avLst/>
-          </a:prstGeom>
-          <a:noFill/>
+          <xfrm>
+            <off x="36875258" y="23791025"/>
+            <ext cx="17090967" cy="798021"/>
+          </xfrm>
+          <prstGeom prst="rect">
+            <avLst/>
+          </prstGeom>
+          <noFill/>
         </p:spPr>
         <p:txBody>
-          <a:bodyPr wrap="square" anchor="t">
-            <a:spAutoFit/>
-          </a:bodyPr>
-          <a:lstStyle/>
-          <a:p>
-            <a:pPr algn="ctr"/>
-            <a:r>
-              <a:rPr sz="1400" b="0" i="1">
-                <a:solidFill>
-                  <a:srgbClr val="1A1A1A"/>
-                </a:solidFill>
-                <a:latin typeface="Calibri"/>
-              </a:rPr>
-              <a:t>Fig 3a. PCA anomaly map (consensus votes)</a:t>
-            </a:r>
-          </a:p>
-        </p:txBody>
-      </p:sp>
-      <p:sp>
-        <p:nvSpPr>
-          <p:cNvPr id="27" name="Rectangle 26"/>
+          <bodyPr wrap="square" anchor="t">
+            <spAutoFit/>
+          </bodyPr>
+          <lstStyle/>
+          <p>
+            <pPr algn="ctr">
+              <lnSpc>
+                <spcPct val="115000"/>
+              </lnSpc>
+            </pPr>
+            <r>
+              <rPr sz="2400" b="0" i="1">
+                <solidFill>
+                  <srgbClr val="2A2A2A"/>
+                </solidFill>
+                <latin typeface="Calibri"/>
+              </rPr>
+              <t>Fig. 2.  SHAP attribution on Isolation Forest.  Early 24-hour</t>
+            </r>
+          </p>
+          <p>
+            <pPr algn="ctr">
+              <lnSpc>
+                <spcPct val="115000"/>
+              </lnSpc>
+            </pPr>
+            <r>
+              <rPr sz="2400" b="0" i="1">
+                <solidFill>
+                  <srgbClr val="2A2A2A"/>
+                </solidFill>
+                <latin typeface="Calibri"/>
+              </rPr>
+              <t>velocity outranks the legacy headline feature (volume spike ratio).</t>
+            </r>
+          </p>
+        </p:txBody>
+      </p:sp>
+      <p:sp>
+        <p:nvSpPr>
+          <p:cNvPr id="27" name="Rounded Rectangle 26"/>
           <p:cNvSpPr/>
           <p:nvPr/>
         </p:nvSpPr>
         <p:spPr>
-          <a:xfrm>
-            <a:off x="12893040" y="24871680"/>
-            <a:ext cx="11064240" cy="4114800"/>
-          </a:xfrm>
-          <a:prstGeom prst="rect">
-            <a:avLst/>
-          </a:prstGeom>
-          <a:solidFill>
-            <a:srgbClr val="FFFFFF"/>
-          </a:solidFill>
-          <a:ln w="12700">
-            <a:solidFill>
-              <a:srgbClr val="CCCCCC"/>
-            </a:solidFill>
-          </a:ln>
-          <a:effectLst/>
+          <xfrm>
+            <off x="897774" y="35412218"/>
+            <ext cx="53068450" cy="5187141"/>
+          </xfrm>
+          <prstGeom prst="roundRect">
+            <avLst>
+              <gd name="adj" fmla="val 3000"/>
+            </avLst>
+          </prstGeom>
+          <solidFill>
+            <srgbClr val="A51C30"/>
+          </solidFill>
+          <ln>
+            <noFill/>
+          </ln>
+          <effectLst/>
         </p:spPr>
         <p:style>
-          <a:lnRef idx="1">
-            <a:schemeClr val="accent1"/>
-          </a:lnRef>
-          <a:fillRef idx="3">
-            <a:schemeClr val="accent1"/>
-          </a:fillRef>
-          <a:effectRef idx="2">
-            <a:schemeClr val="accent1"/>
-          </a:effectRef>
-          <a:fontRef idx="minor">
-            <a:schemeClr val="lt1"/>
-          </a:fontRef>
+          <lnRef idx="1">
+            <schemeClr val="accent1"/>
+          </lnRef>
+          <fillRef idx="3">
+            <schemeClr val="accent1"/>
+          </fillRef>
+          <effectRef idx="2">
+            <schemeClr val="accent1"/>
+          </effectRef>
+          <fontRef idx="minor">
+            <schemeClr val="lt1"/>
+          </fontRef>
         </p:style>
         <p:txBody>
-          <a:bodyPr rtlCol="0" anchor="ctr"/>
-          <a:lstStyle/>
-          <a:p>
-            <a:pPr algn="ctr"/>
-          </a:p>
+          <bodyPr rtlCol="0" anchor="ctr"/>
+          <lstStyle/>
+          <p>
+            <pPr algn="ctr"/>
+          </p>
         </p:txBody>
       </p:sp>
       <p:sp>
@@ -4617,32 +4693,36 @@
           <p:nvPr/>
         </p:nvSpPr>
         <p:spPr>
-          <a:xfrm>
-            <a:off x="12893040" y="26563320"/>
-            <a:ext cx="11064240" cy="731520"/>
-          </a:xfrm>
-          <a:prstGeom prst="rect">
-            <a:avLst/>
-          </a:prstGeom>
-          <a:noFill/>
+          <xfrm>
+            <off x="1496290" y="35711476"/>
+            <ext cx="51871418" cy="1097280"/>
+          </xfrm>
+          <prstGeom prst="rect">
+            <avLst/>
+          </prstGeom>
+          <noFill/>
         </p:spPr>
         <p:txBody>
-          <a:bodyPr wrap="square" anchor="t">
-            <a:spAutoFit/>
-          </a:bodyPr>
-          <a:lstStyle/>
-          <a:p>
-            <a:pPr algn="ctr"/>
-            <a:r>
-              <a:rPr sz="2000" b="0" i="1">
-                <a:solidFill>
-                  <a:srgbClr val="999999"/>
-                </a:solidFill>
-                <a:latin typeface="Calibri"/>
-              </a:rPr>
-              <a:t>[ Insert figure ]</a:t>
-            </a:r>
-          </a:p>
+          <bodyPr wrap="square" anchor="t">
+            <spAutoFit/>
+          </bodyPr>
+          <lstStyle/>
+          <p>
+            <pPr algn="l">
+              <lnSpc>
+                <spcPct val="115000"/>
+              </lnSpc>
+            </pPr>
+            <r>
+              <rPr sz="3490" b="1" i="0">
+                <solidFill>
+                  <srgbClr val="FFFFFF"/>
+                </solidFill>
+                <latin typeface="Calibri"/>
+              </rPr>
+              <t>SO WHAT</t>
+            </r>
+          </p>
         </p:txBody>
       </p:sp>
       <p:sp>
@@ -4652,78 +4732,219 @@
           <p:nvPr/>
         </p:nvSpPr>
         <p:spPr>
-          <a:xfrm>
-            <a:off x="12893040" y="29032200"/>
-            <a:ext cx="11064240" cy="457200"/>
-          </a:xfrm>
-          <a:prstGeom prst="rect">
-            <a:avLst/>
-          </a:prstGeom>
-          <a:noFill/>
+          <xfrm>
+            <off x="1496290" y="36808756"/>
+            <ext cx="51871418" cy="3690850"/>
+          </xfrm>
+          <prstGeom prst="rect">
+            <avLst/>
+          </prstGeom>
+          <noFill/>
         </p:spPr>
         <p:txBody>
-          <a:bodyPr wrap="square" anchor="t">
-            <a:spAutoFit/>
-          </a:bodyPr>
-          <a:lstStyle/>
-          <a:p>
-            <a:pPr algn="ctr"/>
-            <a:r>
-              <a:rPr sz="1400" b="0" i="1">
-                <a:solidFill>
-                  <a:srgbClr val="1A1A1A"/>
-                </a:solidFill>
-                <a:latin typeface="Calibri"/>
-              </a:rPr>
-              <a:t>Fig 3b. Fraud-recall lift over baselines</a:t>
-            </a:r>
-          </a:p>
-        </p:txBody>
-      </p:sp>
-      <p:sp>
-        <p:nvSpPr>
-          <p:cNvPr id="30" name="Rectangle 29"/>
-          <p:cNvSpPr/>
+          <bodyPr wrap="square" anchor="t">
+            <spAutoFit/>
+          </bodyPr>
+          <lstStyle/>
+          <p>
+            <pPr algn="l">
+              <lnSpc>
+                <spcPct val="125000"/>
+              </lnSpc>
+            </pPr>
+            <r>
+              <rPr sz="2836" b="0" i="0">
+                <solidFill>
+                  <srgbClr val="FFFFFF"/>
+                </solidFill>
+                <latin typeface="Calibri"/>
+              </rPr>
+              <t>Continuous ranking beats discrete voting.  A rank-averaged suspicion score recovered 6/6 known</t>
+            </r>
+          </p>
+          <p>
+            <pPr algn="l">
+              <lnSpc>
+                <spcPct val="125000"/>
+              </lnSpc>
+            </pPr>
+            <r>
+              <rPr sz="2836" b="0" i="0">
+                <solidFill>
+                  <srgbClr val="FFFFFF"/>
+                </solidFill>
+                <latin typeface="Calibri"/>
+              </rPr>
+              <t>frauds on the validated subset; the legacy "3 of 3 detectors agree" rule recovered 1/6.</t>
+            </r>
+          </p>
+          <p>
+            <pPr algn="l">
+              <lnSpc>
+                <spcPct val="125000"/>
+              </lnSpc>
+            </pPr>
+            <r>
+              <rPr sz="2836" b="0" i="0">
+                <solidFill>
+                  <srgbClr val="FFFFFF"/>
+                </solidFill>
+                <latin typeface="Calibri"/>
+              </rPr>
+              <t/>
+            </r>
+          </p>
+          <p>
+            <pPr algn="l">
+              <lnSpc>
+                <spcPct val="125000"/>
+              </lnSpc>
+            </pPr>
+            <r>
+              <rPr sz="2836" b="0" i="0">
+                <solidFill>
+                  <srgbClr val="FFFFFF"/>
+                </solidFill>
+                <latin typeface="Calibri"/>
+              </rPr>
+              <t>Two layers separate 'anomaly' from 'fraud.'  The Layer-2 calibrator cleanly distinguishes rug-pulls</t>
+            </r>
+          </p>
+          <p>
+            <pPr algn="l">
+              <lnSpc>
+                <spcPct val="125000"/>
+              </lnSpc>
+            </pPr>
+            <r>
+              <rPr sz="2836" b="0" i="0">
+                <solidFill>
+                  <srgbClr val="FFFFFF"/>
+                </solidFill>
+                <latin typeface="Calibri"/>
+              </rPr>
+              <t>(P ≈ 0.5–0.7) from large legitimate events like hacks and de-peg shocks (P ≈ 0.1–0.2).</t>
+            </r>
+          </p>
+          <p>
+            <pPr algn="l">
+              <lnSpc>
+                <spcPct val="125000"/>
+              </lnSpc>
+            </pPr>
+            <r>
+              <rPr sz="2836" b="0" i="0">
+                <solidFill>
+                  <srgbClr val="FFFFFF"/>
+                </solidFill>
+                <latin typeface="Calibri"/>
+              </rPr>
+              <t/>
+            </r>
+          </p>
+          <p>
+            <pPr algn="l">
+              <lnSpc>
+                <spcPct val="125000"/>
+              </lnSpc>
+            </pPr>
+            <r>
+              <rPr sz="2836" b="0" i="0">
+                <solidFill>
+                  <srgbClr val="FFFFFF"/>
+                </solidFill>
+                <latin typeface="Calibri"/>
+              </rPr>
+              <t>Key caveat.  The calibration layer is trained on only 14 hand-validated tokens; expanding that</t>
+            </r>
+          </p>
+          <p>
+            <pPr algn="l">
+              <lnSpc>
+                <spcPct val="125000"/>
+              </lnSpc>
+            </pPr>
+            <r>
+              <rPr sz="2836" b="0" i="0">
+                <solidFill>
+                  <srgbClr val="FFFFFF"/>
+                </solidFill>
+                <latin typeface="Calibri"/>
+              </rPr>
+              <t>labeled set is the single most valuable next step.</t>
+            </r>
+          </p>
+        </p:txBody>
+      </p:sp>
+      <p:sp>
+        <p:nvSpPr>
+          <p:cNvPr id="30" name="TextBox 29"/>
+          <p:cNvSpPr txBox="1"/>
           <p:nvPr/>
         </p:nvSpPr>
         <p:spPr>
-          <a:xfrm>
-            <a:off x="25420320" y="24871680"/>
-            <a:ext cx="11064240" cy="4114800"/>
-          </a:xfrm>
-          <a:prstGeom prst="rect">
-            <a:avLst/>
-          </a:prstGeom>
-          <a:solidFill>
-            <a:srgbClr val="FFFFFF"/>
-          </a:solidFill>
-          <a:ln w="12700">
-            <a:solidFill>
-              <a:srgbClr val="CCCCCC"/>
-            </a:solidFill>
-          </a:ln>
-          <a:effectLst/>
+          <xfrm>
+            <off x="897774" y="40998370"/>
+            <ext cx="26534225" cy="2493818"/>
+          </xfrm>
+          <prstGeom prst="rect">
+            <avLst/>
+          </prstGeom>
+          <noFill/>
         </p:spPr>
-        <p:style>
-          <a:lnRef idx="1">
-            <a:schemeClr val="accent1"/>
-          </a:lnRef>
-          <a:fillRef idx="3">
-            <a:schemeClr val="accent1"/>
-          </a:fillRef>
-          <a:effectRef idx="2">
-            <a:schemeClr val="accent1"/>
-          </a:effectRef>
-          <a:fontRef idx="minor">
-            <a:schemeClr val="lt1"/>
-          </a:fontRef>
-        </p:style>
-        <p:txBody>
-          <a:bodyPr rtlCol="0" anchor="ctr"/>
-          <a:lstStyle/>
-          <a:p>
-            <a:pPr algn="ctr"/>
-          </a:p>
+        <p:txBody>
+          <bodyPr wrap="square" anchor="t">
+            <spAutoFit/>
+          </bodyPr>
+          <lstStyle/>
+          <p>
+            <pPr algn="l">
+              <lnSpc>
+                <spcPct val="130000"/>
+              </lnSpc>
+            </pPr>
+            <r>
+              <rPr sz="2400" b="0" i="0">
+                <solidFill>
+                  <srgbClr val="2A2A2A"/>
+                </solidFill>
+                <latin typeface="Calibri"/>
+              </rPr>
+              <t>Code:      github.com/gschriever/AC297r-crypto-fraud-detector</t>
+            </r>
+          </p>
+          <p>
+            <pPr algn="l">
+              <lnSpc>
+                <spcPct val="130000"/>
+              </lnSpc>
+            </pPr>
+            <r>
+              <rPr sz="2400" b="0" i="0">
+                <solidFill>
+                  <srgbClr val="2A2A2A"/>
+                </solidFill>
+                <latin typeface="Calibri"/>
+              </rPr>
+              <t>Contact:   [ name ]  ·  [ email ]</t>
+            </r>
+          </p>
+          <p>
+            <pPr algn="l">
+              <lnSpc>
+                <spcPct val="130000"/>
+              </lnSpc>
+            </pPr>
+            <r>
+              <rPr sz="2400" b="0" i="0">
+                <solidFill>
+                  <srgbClr val="2A2A2A"/>
+                </solidFill>
+                <latin typeface="Calibri"/>
+              </rPr>
+              <t>Advisor:   [ advisor ]</t>
+            </r>
+          </p>
         </p:txBody>
       </p:sp>
       <p:sp>
@@ -4733,1221 +4954,74 @@
           <p:nvPr/>
         </p:nvSpPr>
         <p:spPr>
-          <a:xfrm>
-            <a:off x="25420320" y="26563320"/>
-            <a:ext cx="11064240" cy="731520"/>
-          </a:xfrm>
-          <a:prstGeom prst="rect">
-            <a:avLst/>
-          </a:prstGeom>
-          <a:noFill/>
+          <xfrm>
+            <off x="27431999" y="40998370"/>
+            <ext cx="26534225" cy="2493818"/>
+          </xfrm>
+          <prstGeom prst="rect">
+            <avLst/>
+          </prstGeom>
+          <noFill/>
         </p:spPr>
         <p:txBody>
-          <a:bodyPr wrap="square" anchor="t">
-            <a:spAutoFit/>
-          </a:bodyPr>
-          <a:lstStyle/>
-          <a:p>
-            <a:pPr algn="ctr"/>
-            <a:r>
-              <a:rPr sz="2000" b="0" i="1">
-                <a:solidFill>
-                  <a:srgbClr val="999999"/>
-                </a:solidFill>
-                <a:latin typeface="Calibri"/>
-              </a:rPr>
-              <a:t>[ Insert figure ]</a:t>
-            </a:r>
-          </a:p>
-        </p:txBody>
-      </p:sp>
-      <p:sp>
-        <p:nvSpPr>
-          <p:cNvPr id="32" name="TextBox 31"/>
-          <p:cNvSpPr txBox="1"/>
-          <p:nvPr/>
-        </p:nvSpPr>
-        <p:spPr>
-          <a:xfrm>
-            <a:off x="25420320" y="29032200"/>
-            <a:ext cx="11064240" cy="457200"/>
-          </a:xfrm>
-          <a:prstGeom prst="rect">
-            <a:avLst/>
-          </a:prstGeom>
-          <a:noFill/>
-        </p:spPr>
-        <p:txBody>
-          <a:bodyPr wrap="square" anchor="t">
-            <a:spAutoFit/>
-          </a:bodyPr>
-          <a:lstStyle/>
-          <a:p>
-            <a:pPr algn="ctr"/>
-            <a:r>
-              <a:rPr sz="1400" b="0" i="1">
-                <a:solidFill>
-                  <a:srgbClr val="1A1A1A"/>
-                </a:solidFill>
-                <a:latin typeface="Calibri"/>
-              </a:rPr>
-              <a:t>Fig 4a. SHAP global importance</a:t>
-            </a:r>
-          </a:p>
-        </p:txBody>
-      </p:sp>
-      <p:sp>
-        <p:nvSpPr>
-          <p:cNvPr id="33" name="Rectangle 32"/>
-          <p:cNvSpPr/>
-          <p:nvPr/>
-        </p:nvSpPr>
-        <p:spPr>
-          <a:xfrm>
-            <a:off x="36941760" y="24871680"/>
-            <a:ext cx="11064240" cy="4114800"/>
-          </a:xfrm>
-          <a:prstGeom prst="rect">
-            <a:avLst/>
-          </a:prstGeom>
-          <a:solidFill>
-            <a:srgbClr val="FFFFFF"/>
-          </a:solidFill>
-          <a:ln w="12700">
-            <a:solidFill>
-              <a:srgbClr val="CCCCCC"/>
-            </a:solidFill>
-          </a:ln>
-          <a:effectLst/>
-        </p:spPr>
-        <p:style>
-          <a:lnRef idx="1">
-            <a:schemeClr val="accent1"/>
-          </a:lnRef>
-          <a:fillRef idx="3">
-            <a:schemeClr val="accent1"/>
-          </a:fillRef>
-          <a:effectRef idx="2">
-            <a:schemeClr val="accent1"/>
-          </a:effectRef>
-          <a:fontRef idx="minor">
-            <a:schemeClr val="lt1"/>
-          </a:fontRef>
-        </p:style>
-        <p:txBody>
-          <a:bodyPr rtlCol="0" anchor="ctr"/>
-          <a:lstStyle/>
-          <a:p>
-            <a:pPr algn="ctr"/>
-          </a:p>
-        </p:txBody>
-      </p:sp>
-      <p:sp>
-        <p:nvSpPr>
-          <p:cNvPr id="34" name="TextBox 33"/>
-          <p:cNvSpPr txBox="1"/>
-          <p:nvPr/>
-        </p:nvSpPr>
-        <p:spPr>
-          <a:xfrm>
-            <a:off x="36941760" y="26563320"/>
-            <a:ext cx="11064240" cy="731520"/>
-          </a:xfrm>
-          <a:prstGeom prst="rect">
-            <a:avLst/>
-          </a:prstGeom>
-          <a:noFill/>
-        </p:spPr>
-        <p:txBody>
-          <a:bodyPr wrap="square" anchor="t">
-            <a:spAutoFit/>
-          </a:bodyPr>
-          <a:lstStyle/>
-          <a:p>
-            <a:pPr algn="ctr"/>
-            <a:r>
-              <a:rPr sz="2000" b="0" i="1">
-                <a:solidFill>
-                  <a:srgbClr val="999999"/>
-                </a:solidFill>
-                <a:latin typeface="Calibri"/>
-              </a:rPr>
-              <a:t>[ Insert figure ]</a:t>
-            </a:r>
-          </a:p>
-        </p:txBody>
-      </p:sp>
-      <p:sp>
-        <p:nvSpPr>
-          <p:cNvPr id="35" name="TextBox 34"/>
-          <p:cNvSpPr txBox="1"/>
-          <p:nvPr/>
-        </p:nvSpPr>
-        <p:spPr>
-          <a:xfrm>
-            <a:off x="36941760" y="29032200"/>
-            <a:ext cx="11064240" cy="457200"/>
-          </a:xfrm>
-          <a:prstGeom prst="rect">
-            <a:avLst/>
-          </a:prstGeom>
-          <a:noFill/>
-        </p:spPr>
-        <p:txBody>
-          <a:bodyPr wrap="square" anchor="t">
-            <a:spAutoFit/>
-          </a:bodyPr>
-          <a:lstStyle/>
-          <a:p>
-            <a:pPr algn="ctr"/>
-            <a:r>
-              <a:rPr sz="1400" b="0" i="1">
-                <a:solidFill>
-                  <a:srgbClr val="1A1A1A"/>
-                </a:solidFill>
-                <a:latin typeface="Calibri"/>
-              </a:rPr>
-              <a:t>Fig 4b. LOO calibration on validated subset</a:t>
-            </a:r>
-          </a:p>
-        </p:txBody>
-      </p:sp>
-      <p:sp>
-        <p:nvSpPr>
-          <p:cNvPr id="36" name="Rounded Rectangle 35"/>
-          <p:cNvSpPr/>
-          <p:nvPr/>
-        </p:nvSpPr>
-        <p:spPr>
-          <a:xfrm>
-            <a:off x="41148000" y="12710160"/>
-            <a:ext cx="6858000" cy="4114800"/>
-          </a:xfrm>
-          <a:prstGeom prst="roundRect">
-            <a:avLst>
-              <a:gd name="adj" fmla="val 8000"/>
-            </a:avLst>
-          </a:prstGeom>
-          <a:solidFill>
-            <a:srgbClr val="FFF5B8"/>
-          </a:solidFill>
-          <a:ln w="12700">
-            <a:solidFill>
-              <a:srgbClr val="E0C850"/>
-            </a:solidFill>
-          </a:ln>
-          <a:effectLst/>
-        </p:spPr>
-        <p:style>
-          <a:lnRef idx="1">
-            <a:schemeClr val="accent1"/>
-          </a:lnRef>
-          <a:fillRef idx="3">
-            <a:schemeClr val="accent1"/>
-          </a:fillRef>
-          <a:effectRef idx="2">
-            <a:schemeClr val="accent1"/>
-          </a:effectRef>
-          <a:fontRef idx="minor">
-            <a:schemeClr val="lt1"/>
-          </a:fontRef>
-        </p:style>
-        <p:txBody>
-          <a:bodyPr rtlCol="0" anchor="ctr"/>
-          <a:lstStyle/>
-          <a:p>
-            <a:pPr algn="ctr"/>
-          </a:p>
-        </p:txBody>
-      </p:sp>
-      <p:sp>
-        <p:nvSpPr>
-          <p:cNvPr id="37" name="TextBox 36"/>
-          <p:cNvSpPr txBox="1"/>
-          <p:nvPr/>
-        </p:nvSpPr>
-        <p:spPr>
-          <a:xfrm>
-            <a:off x="41330880" y="12847320"/>
-            <a:ext cx="6492240" cy="731520"/>
-          </a:xfrm>
-          <a:prstGeom prst="rect">
-            <a:avLst/>
-          </a:prstGeom>
-          <a:noFill/>
-        </p:spPr>
-        <p:txBody>
-          <a:bodyPr wrap="square" anchor="t">
-            <a:spAutoFit/>
-          </a:bodyPr>
-          <a:lstStyle/>
-          <a:p>
-            <a:pPr algn="l"/>
-            <a:r>
-              <a:rPr sz="2200" b="1" i="0">
-                <a:solidFill>
-                  <a:srgbClr val="A51C30"/>
-                </a:solidFill>
-                <a:latin typeface="Calibri"/>
-              </a:rPr>
-              <a:t>Key design decision</a:t>
-            </a:r>
-          </a:p>
-        </p:txBody>
-      </p:sp>
-      <p:sp>
-        <p:nvSpPr>
-          <p:cNvPr id="38" name="TextBox 37"/>
-          <p:cNvSpPr txBox="1"/>
-          <p:nvPr/>
-        </p:nvSpPr>
-        <p:spPr>
-          <a:xfrm>
-            <a:off x="41330880" y="13624560"/>
-            <a:ext cx="6492240" cy="3108960"/>
-          </a:xfrm>
-          <a:prstGeom prst="rect">
-            <a:avLst/>
-          </a:prstGeom>
-          <a:noFill/>
-        </p:spPr>
-        <p:txBody>
-          <a:bodyPr wrap="square" anchor="t">
-            <a:spAutoFit/>
-          </a:bodyPr>
-          <a:lstStyle/>
-          <a:p>
-            <a:pPr algn="l"/>
-            <a:r>
-              <a:rPr sz="1800" b="0" i="0">
-                <a:solidFill>
-                  <a:srgbClr val="1A1A1A"/>
-                </a:solidFill>
-                <a:latin typeface="Calibri"/>
-              </a:rPr>
-              <a:t>Move from discrete consensus voting</a:t>
-            </a:r>
-          </a:p>
-          <a:p>
-            <a:pPr algn="l"/>
-            <a:r>
-              <a:rPr sz="1800" b="0" i="0">
-                <a:solidFill>
-                  <a:srgbClr val="1A1A1A"/>
-                </a:solidFill>
-                <a:latin typeface="Calibri"/>
-              </a:rPr>
-              <a:t>to a continuous rank-averaged score.</a:t>
-            </a:r>
-          </a:p>
-          <a:p>
-            <a:pPr algn="l"/>
-            <a:r>
-              <a:rPr sz="1800" b="0" i="0">
-                <a:solidFill>
-                  <a:srgbClr val="1A1A1A"/>
-                </a:solidFill>
-                <a:latin typeface="Calibri"/>
-              </a:rPr>
-              <a:t/>
-            </a:r>
-          </a:p>
-          <a:p>
-            <a:pPr algn="l"/>
-            <a:r>
-              <a:rPr sz="1800" b="0" i="0">
-                <a:solidFill>
-                  <a:srgbClr val="1A1A1A"/>
-                </a:solidFill>
-                <a:latin typeface="Calibri"/>
-              </a:rPr>
-              <a:t>Rationale: the old yes/no voting</a:t>
-            </a:r>
-          </a:p>
-          <a:p>
-            <a:pPr algn="l"/>
-            <a:r>
-              <a:rPr sz="1800" b="0" i="0">
-                <a:solidFill>
-                  <a:srgbClr val="1A1A1A"/>
-                </a:solidFill>
-                <a:latin typeface="Calibri"/>
-              </a:rPr>
-              <a:t>dropped validated fraud tokens that</a:t>
-            </a:r>
-          </a:p>
-          <a:p>
-            <a:pPr algn="l"/>
-            <a:r>
-              <a:rPr sz="1800" b="0" i="0">
-                <a:solidFill>
-                  <a:srgbClr val="1A1A1A"/>
-                </a:solidFill>
-                <a:latin typeface="Calibri"/>
-              </a:rPr>
-              <a:t>any single detector happened to miss.</a:t>
-            </a:r>
-          </a:p>
-        </p:txBody>
-      </p:sp>
-      <p:sp>
-        <p:nvSpPr>
-          <p:cNvPr id="39" name="Rounded Rectangle 38"/>
-          <p:cNvSpPr/>
-          <p:nvPr/>
-        </p:nvSpPr>
-        <p:spPr>
-          <a:xfrm>
-            <a:off x="914400" y="30449520"/>
-            <a:ext cx="47548800" cy="3474720"/>
-          </a:xfrm>
-          <a:prstGeom prst="roundRect">
-            <a:avLst>
-              <a:gd name="adj" fmla="val 4000"/>
-            </a:avLst>
-          </a:prstGeom>
-          <a:solidFill>
-            <a:srgbClr val="F2F2F2"/>
-          </a:solidFill>
-          <a:ln w="9525">
-            <a:solidFill>
-              <a:srgbClr val="CCCCCC"/>
-            </a:solidFill>
-          </a:ln>
-          <a:effectLst/>
-        </p:spPr>
-        <p:style>
-          <a:lnRef idx="1">
-            <a:schemeClr val="accent1"/>
-          </a:lnRef>
-          <a:fillRef idx="3">
-            <a:schemeClr val="accent1"/>
-          </a:fillRef>
-          <a:effectRef idx="2">
-            <a:schemeClr val="accent1"/>
-          </a:effectRef>
-          <a:fontRef idx="minor">
-            <a:schemeClr val="lt1"/>
-          </a:fontRef>
-        </p:style>
-        <p:txBody>
-          <a:bodyPr rtlCol="0" anchor="ctr"/>
-          <a:lstStyle/>
-          <a:p>
-            <a:pPr algn="ctr"/>
-          </a:p>
-        </p:txBody>
-      </p:sp>
-      <p:sp>
-        <p:nvSpPr>
-          <p:cNvPr id="40" name="TextBox 39"/>
-          <p:cNvSpPr txBox="1"/>
-          <p:nvPr/>
-        </p:nvSpPr>
-        <p:spPr>
-          <a:xfrm>
-            <a:off x="1280160" y="30632400"/>
-            <a:ext cx="46817280" cy="1005840"/>
-          </a:xfrm>
-          <a:prstGeom prst="rect">
-            <a:avLst/>
-          </a:prstGeom>
-          <a:noFill/>
-        </p:spPr>
-        <p:txBody>
-          <a:bodyPr wrap="square" anchor="t">
-            <a:spAutoFit/>
-          </a:bodyPr>
-          <a:lstStyle/>
-          <a:p>
-            <a:pPr algn="l"/>
-            <a:r>
-              <a:rPr sz="4000" b="1" i="0">
-                <a:solidFill>
-                  <a:srgbClr val="A51C30"/>
-                </a:solidFill>
-                <a:latin typeface="Calibri"/>
-              </a:rPr>
-              <a:t>5. Summary &amp; Recommendation</a:t>
-            </a:r>
-          </a:p>
-        </p:txBody>
-      </p:sp>
-      <p:sp>
-        <p:nvSpPr>
-          <p:cNvPr id="41" name="TextBox 40"/>
-          <p:cNvSpPr txBox="1"/>
-          <p:nvPr/>
-        </p:nvSpPr>
-        <p:spPr>
-          <a:xfrm>
-            <a:off x="1371600" y="31729680"/>
-            <a:ext cx="46634400" cy="2103120"/>
-          </a:xfrm>
-          <a:prstGeom prst="rect">
-            <a:avLst/>
-          </a:prstGeom>
-          <a:noFill/>
-        </p:spPr>
-        <p:txBody>
-          <a:bodyPr wrap="square" anchor="t">
-            <a:spAutoFit/>
-          </a:bodyPr>
-          <a:lstStyle/>
-          <a:p>
-            <a:pPr algn="l"/>
-            <a:r>
-              <a:rPr sz="2000" b="0" i="0">
-                <a:solidFill>
-                  <a:srgbClr val="1A1A1A"/>
-                </a:solidFill>
-                <a:latin typeface="Calibri"/>
-              </a:rPr>
-              <a:t>[ One-sentence plain-English headline, large, bold. Replace this. ]</a:t>
-            </a:r>
-          </a:p>
-          <a:p>
-            <a:pPr algn="l"/>
-            <a:r>
-              <a:rPr sz="2000" b="0" i="0">
-                <a:solidFill>
-                  <a:srgbClr val="1A1A1A"/>
-                </a:solidFill>
-                <a:latin typeface="Calibri"/>
-              </a:rPr>
-              <a:t/>
-            </a:r>
-          </a:p>
-          <a:p>
-            <a:pPr algn="l"/>
-            <a:r>
-              <a:rPr sz="2000" b="0" i="0">
-                <a:solidFill>
-                  <a:srgbClr val="1A1A1A"/>
-                </a:solidFill>
-                <a:latin typeface="Calibri"/>
-              </a:rPr>
-              <a:t>   •  A continuous suspicion score materially outperforms the legacy consensus-vote threshold for fraud recall.</a:t>
-            </a:r>
-          </a:p>
-          <a:p>
-            <a:pPr algn="l"/>
-            <a:r>
-              <a:rPr sz="2000" b="0" i="0">
-                <a:solidFill>
-                  <a:srgbClr val="1A1A1A"/>
-                </a:solidFill>
-                <a:latin typeface="Calibri"/>
-              </a:rPr>
-              <a:t>   •  The Layer-2 calibrator reliably identifies what is NOT fraud (large legitimate events); separating fraud</a:t>
-            </a:r>
-          </a:p>
-          <a:p>
-            <a:pPr algn="l"/>
-            <a:r>
-              <a:rPr sz="2000" b="0" i="0">
-                <a:solidFill>
-                  <a:srgbClr val="1A1A1A"/>
-                </a:solidFill>
-                <a:latin typeface="Calibri"/>
-              </a:rPr>
-              <a:t>       from hacks/bugs within the high-suspicion region requires evidence beyond on-chain volume features.</a:t>
-            </a:r>
-          </a:p>
-          <a:p>
-            <a:pPr algn="l"/>
-            <a:r>
-              <a:rPr sz="2000" b="0" i="0">
-                <a:solidFill>
-                  <a:srgbClr val="1A1A1A"/>
-                </a:solidFill>
-                <a:latin typeface="Calibri"/>
-              </a:rPr>
-              <a:t>   •  Limitations: validation set n=14; token-symbol collisions handled via lowercase dedup; 37% of tokens</a:t>
-            </a:r>
-          </a:p>
-          <a:p>
-            <a:pPr algn="l"/>
-            <a:r>
-              <a:rPr sz="2000" b="0" i="0">
-                <a:solidFill>
-                  <a:srgbClr val="1A1A1A"/>
-                </a:solidFill>
-                <a:latin typeface="Calibri"/>
-              </a:rPr>
-              <a:t>       have imputed 24-hour features. All limitations disclosed in the accompanying report.</a:t>
-            </a:r>
-          </a:p>
-        </p:txBody>
-      </p:sp>
-      <p:sp>
-        <p:nvSpPr>
-          <p:cNvPr id="42" name="TextBox 41"/>
-          <p:cNvSpPr txBox="1"/>
-          <p:nvPr/>
-        </p:nvSpPr>
-        <p:spPr>
-          <a:xfrm>
-            <a:off x="914400" y="34152840"/>
-            <a:ext cx="31089600" cy="548640"/>
-          </a:xfrm>
-          <a:prstGeom prst="rect">
-            <a:avLst/>
-          </a:prstGeom>
-          <a:noFill/>
-        </p:spPr>
-        <p:txBody>
-          <a:bodyPr wrap="square" anchor="t">
-            <a:spAutoFit/>
-          </a:bodyPr>
-          <a:lstStyle/>
-          <a:p>
-            <a:pPr algn="l"/>
-            <a:r>
-              <a:rPr sz="2000" b="1" i="0">
-                <a:solidFill>
-                  <a:srgbClr val="A51C30"/>
-                </a:solidFill>
-                <a:latin typeface="Calibri"/>
-              </a:rPr>
-              <a:t>References &amp; Acknowledgments</a:t>
-            </a:r>
-          </a:p>
-        </p:txBody>
-      </p:sp>
-      <p:sp>
-        <p:nvSpPr>
-          <p:cNvPr id="43" name="TextBox 42"/>
-          <p:cNvSpPr txBox="1"/>
-          <p:nvPr/>
-        </p:nvSpPr>
-        <p:spPr>
-          <a:xfrm>
-            <a:off x="914400" y="34792920"/>
-            <a:ext cx="31089600" cy="3154680"/>
-          </a:xfrm>
-          <a:prstGeom prst="rect">
-            <a:avLst/>
-          </a:prstGeom>
-          <a:noFill/>
-        </p:spPr>
-        <p:txBody>
-          <a:bodyPr wrap="square" anchor="t">
-            <a:spAutoFit/>
-          </a:bodyPr>
-          <a:lstStyle/>
-          <a:p>
-            <a:pPr algn="l"/>
-            <a:r>
-              <a:rPr sz="1400" b="0" i="0">
-                <a:solidFill>
-                  <a:srgbClr val="1A1A1A"/>
-                </a:solidFill>
-                <a:latin typeface="Calibri"/>
-              </a:rPr>
-              <a:t>1. Mazorra, B. et al. Do Not Rug on Me: Zero-Dimensional Scam Detection. arXiv:2201.07220, 2022.</a:t>
-            </a:r>
-          </a:p>
-          <a:p>
-            <a:pPr algn="l"/>
-            <a:r>
-              <a:rPr sz="1400" b="0" i="0">
-                <a:solidFill>
-                  <a:srgbClr val="1A1A1A"/>
-                </a:solidFill>
-                <a:latin typeface="Calibri"/>
-              </a:rPr>
-              <a:t>2. Liu, F. T., Ting, K. M., &amp; Zhou, Z.-H. Isolation Forest. ICDM 2008.</a:t>
-            </a:r>
-          </a:p>
-          <a:p>
-            <a:pPr algn="l"/>
-            <a:r>
-              <a:rPr sz="1400" b="0" i="0">
-                <a:solidFill>
-                  <a:srgbClr val="1A1A1A"/>
-                </a:solidFill>
-                <a:latin typeface="Calibri"/>
-              </a:rPr>
-              <a:t>3. Ester, M. et al. A Density-Based Algorithm for Discovering Clusters. KDD 1996.</a:t>
-            </a:r>
-          </a:p>
-          <a:p>
-            <a:pPr algn="l"/>
-            <a:r>
-              <a:rPr sz="1400" b="0" i="0">
-                <a:solidFill>
-                  <a:srgbClr val="1A1A1A"/>
-                </a:solidFill>
-                <a:latin typeface="Calibri"/>
-              </a:rPr>
-              <a:t>4. Lundberg, S. M. &amp; Lee, S.-I. A Unified Approach to Interpreting Model Predictions. NeurIPS 2017.</a:t>
-            </a:r>
-          </a:p>
-          <a:p>
-            <a:pPr algn="l"/>
-            <a:r>
-              <a:rPr sz="1400" b="0" i="0">
-                <a:solidFill>
-                  <a:srgbClr val="1A1A1A"/>
-                </a:solidFill>
-                <a:latin typeface="Calibri"/>
-              </a:rPr>
-              <a:t/>
-            </a:r>
-          </a:p>
-          <a:p>
-            <a:pPr algn="l"/>
-            <a:r>
-              <a:rPr sz="1400" b="0" i="0">
-                <a:solidFill>
-                  <a:srgbClr val="1A1A1A"/>
-                </a:solidFill>
-                <a:latin typeface="Calibri"/>
-              </a:rPr>
-              <a:t>Data: Dune Analytics (dex.trades, Ethereum, 365-day window). Code: [ github link ]</a:t>
-            </a:r>
-          </a:p>
-        </p:txBody>
-      </p:sp>
-      <p:sp>
-        <p:nvSpPr>
-          <p:cNvPr id="44" name="Rectangle 43"/>
-          <p:cNvSpPr/>
-          <p:nvPr/>
-        </p:nvSpPr>
-        <p:spPr>
-          <a:xfrm>
-            <a:off x="32552640" y="34152840"/>
-            <a:ext cx="5303520" cy="822960"/>
-          </a:xfrm>
-          <a:prstGeom prst="rect">
-            <a:avLst/>
-          </a:prstGeom>
-          <a:solidFill>
-            <a:srgbClr val="A51C30"/>
-          </a:solidFill>
-          <a:ln w="25400">
-            <a:solidFill>
-              <a:srgbClr val="FFFFFF"/>
-            </a:solidFill>
-          </a:ln>
-          <a:effectLst/>
-        </p:spPr>
-        <p:style>
-          <a:lnRef idx="1">
-            <a:schemeClr val="accent1"/>
-          </a:lnRef>
-          <a:fillRef idx="3">
-            <a:schemeClr val="accent1"/>
-          </a:fillRef>
-          <a:effectRef idx="2">
-            <a:schemeClr val="accent1"/>
-          </a:effectRef>
-          <a:fontRef idx="minor">
-            <a:schemeClr val="lt1"/>
-          </a:fontRef>
-        </p:style>
-        <p:txBody>
-          <a:bodyPr rtlCol="0" anchor="ctr"/>
-          <a:lstStyle/>
-          <a:p>
-            <a:pPr algn="ctr"/>
-          </a:p>
-        </p:txBody>
-      </p:sp>
-      <p:sp>
-        <p:nvSpPr>
-          <p:cNvPr id="45" name="TextBox 44"/>
-          <p:cNvSpPr txBox="1"/>
-          <p:nvPr/>
-        </p:nvSpPr>
-        <p:spPr>
-          <a:xfrm>
-            <a:off x="32552640" y="34290000"/>
-            <a:ext cx="5303520" cy="640080"/>
-          </a:xfrm>
-          <a:prstGeom prst="rect">
-            <a:avLst/>
-          </a:prstGeom>
-          <a:noFill/>
-        </p:spPr>
-        <p:txBody>
-          <a:bodyPr wrap="square" anchor="t">
-            <a:spAutoFit/>
-          </a:bodyPr>
-          <a:lstStyle/>
-          <a:p>
-            <a:pPr algn="ctr"/>
-            <a:r>
-              <a:rPr sz="2200" b="1" i="0">
-                <a:solidFill>
-                  <a:srgbClr val="FFFFFF"/>
-                </a:solidFill>
-                <a:latin typeface="Calibri"/>
-              </a:rPr>
-              <a:t>CONTACT</a:t>
-            </a:r>
-          </a:p>
-        </p:txBody>
-      </p:sp>
-      <p:sp>
-        <p:nvSpPr>
-          <p:cNvPr id="46" name="Rectangle 45"/>
-          <p:cNvSpPr/>
-          <p:nvPr/>
-        </p:nvSpPr>
-        <p:spPr>
-          <a:xfrm>
-            <a:off x="32552640" y="34975800"/>
-            <a:ext cx="5303520" cy="3063240"/>
-          </a:xfrm>
-          <a:prstGeom prst="rect">
-            <a:avLst/>
-          </a:prstGeom>
-          <a:solidFill>
-            <a:srgbClr val="FFFFFF"/>
-          </a:solidFill>
-          <a:ln w="19050">
-            <a:solidFill>
-              <a:srgbClr val="A51C30"/>
-            </a:solidFill>
-          </a:ln>
-          <a:effectLst/>
-        </p:spPr>
-        <p:style>
-          <a:lnRef idx="1">
-            <a:schemeClr val="accent1"/>
-          </a:lnRef>
-          <a:fillRef idx="3">
-            <a:schemeClr val="accent1"/>
-          </a:fillRef>
-          <a:effectRef idx="2">
-            <a:schemeClr val="accent1"/>
-          </a:effectRef>
-          <a:fontRef idx="minor">
-            <a:schemeClr val="lt1"/>
-          </a:fontRef>
-        </p:style>
-        <p:txBody>
-          <a:bodyPr rtlCol="0" anchor="ctr"/>
-          <a:lstStyle/>
-          <a:p>
-            <a:pPr algn="ctr"/>
-          </a:p>
-        </p:txBody>
-      </p:sp>
-      <p:sp>
-        <p:nvSpPr>
-          <p:cNvPr id="47" name="TextBox 46"/>
-          <p:cNvSpPr txBox="1"/>
-          <p:nvPr/>
-        </p:nvSpPr>
-        <p:spPr>
-          <a:xfrm>
-            <a:off x="32689800" y="35067240"/>
-            <a:ext cx="5029200" cy="2971800"/>
-          </a:xfrm>
-          <a:prstGeom prst="rect">
-            <a:avLst/>
-          </a:prstGeom>
-          <a:noFill/>
-        </p:spPr>
-        <p:txBody>
-          <a:bodyPr wrap="square" anchor="t">
-            <a:spAutoFit/>
-          </a:bodyPr>
-          <a:lstStyle/>
-          <a:p>
-            <a:pPr algn="ctr"/>
-            <a:r>
-              <a:rPr sz="1400" b="0" i="0">
-                <a:solidFill>
-                  <a:srgbClr val="1A1A1A"/>
-                </a:solidFill>
-                <a:latin typeface="Calibri"/>
-              </a:rPr>
-              <a:t>[ name ]</a:t>
-            </a:r>
-          </a:p>
-          <a:p>
-            <a:pPr algn="ctr"/>
-            <a:r>
-              <a:rPr sz="1400" b="0" i="0">
-                <a:solidFill>
-                  <a:srgbClr val="1A1A1A"/>
-                </a:solidFill>
-                <a:latin typeface="Calibri"/>
-              </a:rPr>
-              <a:t>[ email ]</a:t>
-            </a:r>
-          </a:p>
-          <a:p>
-            <a:pPr algn="ctr"/>
-            <a:r>
-              <a:rPr sz="1400" b="0" i="0">
-                <a:solidFill>
-                  <a:srgbClr val="1A1A1A"/>
-                </a:solidFill>
-                <a:latin typeface="Calibri"/>
-              </a:rPr>
-              <a:t>[ website ]</a:t>
-            </a:r>
-          </a:p>
-        </p:txBody>
-      </p:sp>
-      <p:sp>
-        <p:nvSpPr>
-          <p:cNvPr id="48" name="Rectangle 47"/>
-          <p:cNvSpPr/>
-          <p:nvPr/>
-        </p:nvSpPr>
-        <p:spPr>
-          <a:xfrm>
-            <a:off x="37856160" y="34152840"/>
-            <a:ext cx="5303520" cy="822960"/>
-          </a:xfrm>
-          <a:prstGeom prst="rect">
-            <a:avLst/>
-          </a:prstGeom>
-          <a:solidFill>
-            <a:srgbClr val="A51C30"/>
-          </a:solidFill>
-          <a:ln w="25400">
-            <a:solidFill>
-              <a:srgbClr val="FFFFFF"/>
-            </a:solidFill>
-          </a:ln>
-          <a:effectLst/>
-        </p:spPr>
-        <p:style>
-          <a:lnRef idx="1">
-            <a:schemeClr val="accent1"/>
-          </a:lnRef>
-          <a:fillRef idx="3">
-            <a:schemeClr val="accent1"/>
-          </a:fillRef>
-          <a:effectRef idx="2">
-            <a:schemeClr val="accent1"/>
-          </a:effectRef>
-          <a:fontRef idx="minor">
-            <a:schemeClr val="lt1"/>
-          </a:fontRef>
-        </p:style>
-        <p:txBody>
-          <a:bodyPr rtlCol="0" anchor="ctr"/>
-          <a:lstStyle/>
-          <a:p>
-            <a:pPr algn="ctr"/>
-          </a:p>
-        </p:txBody>
-      </p:sp>
-      <p:sp>
-        <p:nvSpPr>
-          <p:cNvPr id="49" name="TextBox 48"/>
-          <p:cNvSpPr txBox="1"/>
-          <p:nvPr/>
-        </p:nvSpPr>
-        <p:spPr>
-          <a:xfrm>
-            <a:off x="37856160" y="34290000"/>
-            <a:ext cx="5303520" cy="640080"/>
-          </a:xfrm>
-          <a:prstGeom prst="rect">
-            <a:avLst/>
-          </a:prstGeom>
-          <a:noFill/>
-        </p:spPr>
-        <p:txBody>
-          <a:bodyPr wrap="square" anchor="t">
-            <a:spAutoFit/>
-          </a:bodyPr>
-          <a:lstStyle/>
-          <a:p>
-            <a:pPr algn="ctr"/>
-            <a:r>
-              <a:rPr sz="2200" b="1" i="0">
-                <a:solidFill>
-                  <a:srgbClr val="FFFFFF"/>
-                </a:solidFill>
-                <a:latin typeface="Calibri"/>
-              </a:rPr>
-              <a:t>MORE INFO</a:t>
-            </a:r>
-          </a:p>
-        </p:txBody>
-      </p:sp>
-      <p:sp>
-        <p:nvSpPr>
-          <p:cNvPr id="50" name="Rectangle 49"/>
-          <p:cNvSpPr/>
-          <p:nvPr/>
-        </p:nvSpPr>
-        <p:spPr>
-          <a:xfrm>
-            <a:off x="37856160" y="34975800"/>
-            <a:ext cx="5303520" cy="3063240"/>
-          </a:xfrm>
-          <a:prstGeom prst="rect">
-            <a:avLst/>
-          </a:prstGeom>
-          <a:solidFill>
-            <a:srgbClr val="FFFFFF"/>
-          </a:solidFill>
-          <a:ln w="19050">
-            <a:solidFill>
-              <a:srgbClr val="A51C30"/>
-            </a:solidFill>
-          </a:ln>
-          <a:effectLst/>
-        </p:spPr>
-        <p:style>
-          <a:lnRef idx="1">
-            <a:schemeClr val="accent1"/>
-          </a:lnRef>
-          <a:fillRef idx="3">
-            <a:schemeClr val="accent1"/>
-          </a:fillRef>
-          <a:effectRef idx="2">
-            <a:schemeClr val="accent1"/>
-          </a:effectRef>
-          <a:fontRef idx="minor">
-            <a:schemeClr val="lt1"/>
-          </a:fontRef>
-        </p:style>
-        <p:txBody>
-          <a:bodyPr rtlCol="0" anchor="ctr"/>
-          <a:lstStyle/>
-          <a:p>
-            <a:pPr algn="ctr"/>
-          </a:p>
-        </p:txBody>
-      </p:sp>
-      <p:sp>
-        <p:nvSpPr>
-          <p:cNvPr id="51" name="TextBox 50"/>
-          <p:cNvSpPr txBox="1"/>
-          <p:nvPr/>
-        </p:nvSpPr>
-        <p:spPr>
-          <a:xfrm>
-            <a:off x="37993320" y="35067240"/>
-            <a:ext cx="5029200" cy="2971800"/>
-          </a:xfrm>
-          <a:prstGeom prst="rect">
-            <a:avLst/>
-          </a:prstGeom>
-          <a:noFill/>
-        </p:spPr>
-        <p:txBody>
-          <a:bodyPr wrap="square" anchor="t">
-            <a:spAutoFit/>
-          </a:bodyPr>
-          <a:lstStyle/>
-          <a:p>
-            <a:pPr algn="ctr"/>
-            <a:r>
-              <a:rPr sz="1400" b="0" i="0">
-                <a:solidFill>
-                  <a:srgbClr val="1A1A1A"/>
-                </a:solidFill>
-                <a:latin typeface="Calibri"/>
-              </a:rPr>
-              <a:t>[ github / paper link ]</a:t>
-            </a:r>
-          </a:p>
-          <a:p>
-            <a:pPr algn="ctr"/>
-            <a:r>
-              <a:rPr sz="1400" b="0" i="0">
-                <a:solidFill>
-                  <a:srgbClr val="1A1A1A"/>
-                </a:solidFill>
-                <a:latin typeface="Calibri"/>
-              </a:rPr>
-              <a:t>[ QR code placeholder ]</a:t>
-            </a:r>
-          </a:p>
-        </p:txBody>
-      </p:sp>
-      <p:sp>
-        <p:nvSpPr>
-          <p:cNvPr id="52" name="Rectangle 51"/>
-          <p:cNvSpPr/>
-          <p:nvPr/>
-        </p:nvSpPr>
-        <p:spPr>
-          <a:xfrm>
-            <a:off x="43159680" y="34152840"/>
-            <a:ext cx="5303520" cy="822960"/>
-          </a:xfrm>
-          <a:prstGeom prst="rect">
-            <a:avLst/>
-          </a:prstGeom>
-          <a:solidFill>
-            <a:srgbClr val="A51C30"/>
-          </a:solidFill>
-          <a:ln w="25400">
-            <a:solidFill>
-              <a:srgbClr val="FFFFFF"/>
-            </a:solidFill>
-          </a:ln>
-          <a:effectLst/>
-        </p:spPr>
-        <p:style>
-          <a:lnRef idx="1">
-            <a:schemeClr val="accent1"/>
-          </a:lnRef>
-          <a:fillRef idx="3">
-            <a:schemeClr val="accent1"/>
-          </a:fillRef>
-          <a:effectRef idx="2">
-            <a:schemeClr val="accent1"/>
-          </a:effectRef>
-          <a:fontRef idx="minor">
-            <a:schemeClr val="lt1"/>
-          </a:fontRef>
-        </p:style>
-        <p:txBody>
-          <a:bodyPr rtlCol="0" anchor="ctr"/>
-          <a:lstStyle/>
-          <a:p>
-            <a:pPr algn="ctr"/>
-          </a:p>
-        </p:txBody>
-      </p:sp>
-      <p:sp>
-        <p:nvSpPr>
-          <p:cNvPr id="53" name="TextBox 52"/>
-          <p:cNvSpPr txBox="1"/>
-          <p:nvPr/>
-        </p:nvSpPr>
-        <p:spPr>
-          <a:xfrm>
-            <a:off x="43159680" y="34290000"/>
-            <a:ext cx="5303520" cy="640080"/>
-          </a:xfrm>
-          <a:prstGeom prst="rect">
-            <a:avLst/>
-          </a:prstGeom>
-          <a:noFill/>
-        </p:spPr>
-        <p:txBody>
-          <a:bodyPr wrap="square" anchor="t">
-            <a:spAutoFit/>
-          </a:bodyPr>
-          <a:lstStyle/>
-          <a:p>
-            <a:pPr algn="ctr"/>
-            <a:r>
-              <a:rPr sz="2200" b="1" i="0">
-                <a:solidFill>
-                  <a:srgbClr val="FFFFFF"/>
-                </a:solidFill>
-                <a:latin typeface="Calibri"/>
-              </a:rPr>
-              <a:t>THANK YOU</a:t>
-            </a:r>
-          </a:p>
-        </p:txBody>
-      </p:sp>
-      <p:sp>
-        <p:nvSpPr>
-          <p:cNvPr id="54" name="Rectangle 53"/>
-          <p:cNvSpPr/>
-          <p:nvPr/>
-        </p:nvSpPr>
-        <p:spPr>
-          <a:xfrm>
-            <a:off x="43159680" y="34975800"/>
-            <a:ext cx="5303520" cy="3063240"/>
-          </a:xfrm>
-          <a:prstGeom prst="rect">
-            <a:avLst/>
-          </a:prstGeom>
-          <a:solidFill>
-            <a:srgbClr val="FFFFFF"/>
-          </a:solidFill>
-          <a:ln w="19050">
-            <a:solidFill>
-              <a:srgbClr val="A51C30"/>
-            </a:solidFill>
-          </a:ln>
-          <a:effectLst/>
-        </p:spPr>
-        <p:style>
-          <a:lnRef idx="1">
-            <a:schemeClr val="accent1"/>
-          </a:lnRef>
-          <a:fillRef idx="3">
-            <a:schemeClr val="accent1"/>
-          </a:fillRef>
-          <a:effectRef idx="2">
-            <a:schemeClr val="accent1"/>
-          </a:effectRef>
-          <a:fontRef idx="minor">
-            <a:schemeClr val="lt1"/>
-          </a:fontRef>
-        </p:style>
-        <p:txBody>
-          <a:bodyPr rtlCol="0" anchor="ctr"/>
-          <a:lstStyle/>
-          <a:p>
-            <a:pPr algn="ctr"/>
-          </a:p>
-        </p:txBody>
-      </p:sp>
-      <p:sp>
-        <p:nvSpPr>
-          <p:cNvPr id="55" name="TextBox 54"/>
-          <p:cNvSpPr txBox="1"/>
-          <p:nvPr/>
-        </p:nvSpPr>
-        <p:spPr>
-          <a:xfrm>
-            <a:off x="43296840" y="35067240"/>
-            <a:ext cx="5029200" cy="2971800"/>
-          </a:xfrm>
-          <a:prstGeom prst="rect">
-            <a:avLst/>
-          </a:prstGeom>
-          <a:noFill/>
-        </p:spPr>
-        <p:txBody>
-          <a:bodyPr wrap="square" anchor="t">
-            <a:spAutoFit/>
-          </a:bodyPr>
-          <a:lstStyle/>
-          <a:p>
-            <a:pPr algn="ctr"/>
-            <a:r>
-              <a:rPr sz="1400" b="0" i="0">
-                <a:solidFill>
-                  <a:srgbClr val="1A1A1A"/>
-                </a:solidFill>
-                <a:latin typeface="Calibri"/>
-              </a:rPr>
-              <a:t>[ advisor ]</a:t>
-            </a:r>
-          </a:p>
-          <a:p>
-            <a:pPr algn="ctr"/>
-            <a:r>
-              <a:rPr sz="1400" b="0" i="0">
-                <a:solidFill>
-                  <a:srgbClr val="1A1A1A"/>
-                </a:solidFill>
-                <a:latin typeface="Calibri"/>
-              </a:rPr>
-              <a:t>[ team / partners ]</a:t>
-            </a:r>
-          </a:p>
+          <bodyPr wrap="square" anchor="t">
+            <spAutoFit/>
+          </bodyPr>
+          <lstStyle/>
+          <p>
+            <pPr algn="l">
+              <lnSpc>
+                <spcPct val="130000"/>
+              </lnSpc>
+            </pPr>
+            <r>
+              <rPr sz="2400" b="0" i="0">
+                <solidFill>
+                  <srgbClr val="2A2A2A"/>
+                </solidFill>
+                <latin typeface="Calibri"/>
+              </rPr>
+              <t>[1] Mazorra et al.  Do Not Rug on Me.  arXiv:2201.07220, 2022.</t>
+            </r>
+          </p>
+          <p>
+            <pPr algn="l">
+              <lnSpc>
+                <spcPct val="130000"/>
+              </lnSpc>
+            </pPr>
+            <r>
+              <rPr sz="2400" b="0" i="0">
+                <solidFill>
+                  <srgbClr val="2A2A2A"/>
+                </solidFill>
+                <latin typeface="Calibri"/>
+              </rPr>
+              <t>[2] Liu, Ting &amp; Zhou.  Isolation Forest.  ICDM 2008.</t>
+            </r>
+          </p>
+          <p>
+            <pPr algn="l">
+              <lnSpc>
+                <spcPct val="130000"/>
+              </lnSpc>
+            </pPr>
+            <r>
+              <rPr sz="2400" b="0" i="0">
+                <solidFill>
+                  <srgbClr val="2A2A2A"/>
+                </solidFill>
+                <latin typeface="Calibri"/>
+              </rPr>
+              <t>[3] Lundberg &amp; Lee.  SHAP.  NeurIPS 2017.</t>
+            </r>
+          </p>
         </p:txBody>
       </p:sp>
     </p:spTree>
   </p:cSld>
   <p:clrMapOvr>
-    <a:masterClrMapping/>
+    <masterClrMapping/>
   </p:clrMapOvr>
 </p:sld>
 </file>

--- a/poster templaates/AC297r_Poster_Template.pptx
+++ b/poster templaates/AC297r_Poster_Template.pptx
@@ -1,108 +1,108 @@
 
 <file path=ppt/presentation.xml><?xml version="1.0" encoding="utf-8"?>
-<p:presentation xmlns="http://schemas.openxmlformats.org/drawingml/2006/main" xmlns:ns1="http://schemas.openxmlformats.org/officeDocument/2006/relationships" xmlns:p="http://schemas.openxmlformats.org/presentationml/2006/main" saveSubsetFonts="1" autoCompressPictures="0">
+<p:presentation xmlns:a="http://schemas.openxmlformats.org/drawingml/2006/main" xmlns:r="http://schemas.openxmlformats.org/officeDocument/2006/relationships" xmlns:p="http://schemas.openxmlformats.org/presentationml/2006/main" saveSubsetFonts="1" autoCompressPictures="0">
   <p:sldMasterIdLst>
-    <p:sldMasterId id="2147483648" ns1:id="rId1"/>
+    <p:sldMasterId id="2147483648" r:id="rId1"/>
   </p:sldMasterIdLst>
   <p:sldIdLst>
-    <p:sldId id="256" ns1:id="rId7"/>
+    <p:sldId id="256" r:id="rId7"/>
   </p:sldIdLst>
-  <p:sldSz cx="54864000" cy="43891200" type="screen4x3"/>
+  <p:sldSz cx="50292000" cy="40233600" type="screen4x3"/>
   <p:notesSz cx="6858000" cy="9144000"/>
   <p:defaultTextStyle>
-    <defPPr>
-      <defRPr lang="en-US"/>
-    </defPPr>
-    <lvl1pPr marL="0" algn="l" defTabSz="457200" rtl="0" eaLnBrk="1" latinLnBrk="0" hangingPunct="1">
-      <defRPr sz="1800" kern="1200">
-        <solidFill>
-          <schemeClr val="tx1"/>
-        </solidFill>
-        <latin typeface="+mn-lt"/>
-        <ea typeface="+mn-ea"/>
-        <cs typeface="+mn-cs"/>
-      </defRPr>
-    </lvl1pPr>
-    <lvl2pPr marL="457200" algn="l" defTabSz="457200" rtl="0" eaLnBrk="1" latinLnBrk="0" hangingPunct="1">
-      <defRPr sz="1800" kern="1200">
-        <solidFill>
-          <schemeClr val="tx1"/>
-        </solidFill>
-        <latin typeface="+mn-lt"/>
-        <ea typeface="+mn-ea"/>
-        <cs typeface="+mn-cs"/>
-      </defRPr>
-    </lvl2pPr>
-    <lvl3pPr marL="914400" algn="l" defTabSz="457200" rtl="0" eaLnBrk="1" latinLnBrk="0" hangingPunct="1">
-      <defRPr sz="1800" kern="1200">
-        <solidFill>
-          <schemeClr val="tx1"/>
-        </solidFill>
-        <latin typeface="+mn-lt"/>
-        <ea typeface="+mn-ea"/>
-        <cs typeface="+mn-cs"/>
-      </defRPr>
-    </lvl3pPr>
-    <lvl4pPr marL="1371600" algn="l" defTabSz="457200" rtl="0" eaLnBrk="1" latinLnBrk="0" hangingPunct="1">
-      <defRPr sz="1800" kern="1200">
-        <solidFill>
-          <schemeClr val="tx1"/>
-        </solidFill>
-        <latin typeface="+mn-lt"/>
-        <ea typeface="+mn-ea"/>
-        <cs typeface="+mn-cs"/>
-      </defRPr>
-    </lvl4pPr>
-    <lvl5pPr marL="1828800" algn="l" defTabSz="457200" rtl="0" eaLnBrk="1" latinLnBrk="0" hangingPunct="1">
-      <defRPr sz="1800" kern="1200">
-        <solidFill>
-          <schemeClr val="tx1"/>
-        </solidFill>
-        <latin typeface="+mn-lt"/>
-        <ea typeface="+mn-ea"/>
-        <cs typeface="+mn-cs"/>
-      </defRPr>
-    </lvl5pPr>
-    <lvl6pPr marL="2286000" algn="l" defTabSz="457200" rtl="0" eaLnBrk="1" latinLnBrk="0" hangingPunct="1">
-      <defRPr sz="1800" kern="1200">
-        <solidFill>
-          <schemeClr val="tx1"/>
-        </solidFill>
-        <latin typeface="+mn-lt"/>
-        <ea typeface="+mn-ea"/>
-        <cs typeface="+mn-cs"/>
-      </defRPr>
-    </lvl6pPr>
-    <lvl7pPr marL="2743200" algn="l" defTabSz="457200" rtl="0" eaLnBrk="1" latinLnBrk="0" hangingPunct="1">
-      <defRPr sz="1800" kern="1200">
-        <solidFill>
-          <schemeClr val="tx1"/>
-        </solidFill>
-        <latin typeface="+mn-lt"/>
-        <ea typeface="+mn-ea"/>
-        <cs typeface="+mn-cs"/>
-      </defRPr>
-    </lvl7pPr>
-    <lvl8pPr marL="3200400" algn="l" defTabSz="457200" rtl="0" eaLnBrk="1" latinLnBrk="0" hangingPunct="1">
-      <defRPr sz="1800" kern="1200">
-        <solidFill>
-          <schemeClr val="tx1"/>
-        </solidFill>
-        <latin typeface="+mn-lt"/>
-        <ea typeface="+mn-ea"/>
-        <cs typeface="+mn-cs"/>
-      </defRPr>
-    </lvl8pPr>
-    <lvl9pPr marL="3657600" algn="l" defTabSz="457200" rtl="0" eaLnBrk="1" latinLnBrk="0" hangingPunct="1">
-      <defRPr sz="1800" kern="1200">
-        <solidFill>
-          <schemeClr val="tx1"/>
-        </solidFill>
-        <latin typeface="+mn-lt"/>
-        <ea typeface="+mn-ea"/>
-        <cs typeface="+mn-cs"/>
-      </defRPr>
-    </lvl9pPr>
+    <a:defPPr>
+      <a:defRPr lang="en-US"/>
+    </a:defPPr>
+    <a:lvl1pPr marL="0" algn="l" defTabSz="457200" rtl="0" eaLnBrk="1" latinLnBrk="0" hangingPunct="1">
+      <a:defRPr sz="1800" kern="1200">
+        <a:solidFill>
+          <a:schemeClr val="tx1"/>
+        </a:solidFill>
+        <a:latin typeface="+mn-lt"/>
+        <a:ea typeface="+mn-ea"/>
+        <a:cs typeface="+mn-cs"/>
+      </a:defRPr>
+    </a:lvl1pPr>
+    <a:lvl2pPr marL="457200" algn="l" defTabSz="457200" rtl="0" eaLnBrk="1" latinLnBrk="0" hangingPunct="1">
+      <a:defRPr sz="1800" kern="1200">
+        <a:solidFill>
+          <a:schemeClr val="tx1"/>
+        </a:solidFill>
+        <a:latin typeface="+mn-lt"/>
+        <a:ea typeface="+mn-ea"/>
+        <a:cs typeface="+mn-cs"/>
+      </a:defRPr>
+    </a:lvl2pPr>
+    <a:lvl3pPr marL="914400" algn="l" defTabSz="457200" rtl="0" eaLnBrk="1" latinLnBrk="0" hangingPunct="1">
+      <a:defRPr sz="1800" kern="1200">
+        <a:solidFill>
+          <a:schemeClr val="tx1"/>
+        </a:solidFill>
+        <a:latin typeface="+mn-lt"/>
+        <a:ea typeface="+mn-ea"/>
+        <a:cs typeface="+mn-cs"/>
+      </a:defRPr>
+    </a:lvl3pPr>
+    <a:lvl4pPr marL="1371600" algn="l" defTabSz="457200" rtl="0" eaLnBrk="1" latinLnBrk="0" hangingPunct="1">
+      <a:defRPr sz="1800" kern="1200">
+        <a:solidFill>
+          <a:schemeClr val="tx1"/>
+        </a:solidFill>
+        <a:latin typeface="+mn-lt"/>
+        <a:ea typeface="+mn-ea"/>
+        <a:cs typeface="+mn-cs"/>
+      </a:defRPr>
+    </a:lvl4pPr>
+    <a:lvl5pPr marL="1828800" algn="l" defTabSz="457200" rtl="0" eaLnBrk="1" latinLnBrk="0" hangingPunct="1">
+      <a:defRPr sz="1800" kern="1200">
+        <a:solidFill>
+          <a:schemeClr val="tx1"/>
+        </a:solidFill>
+        <a:latin typeface="+mn-lt"/>
+        <a:ea typeface="+mn-ea"/>
+        <a:cs typeface="+mn-cs"/>
+      </a:defRPr>
+    </a:lvl5pPr>
+    <a:lvl6pPr marL="2286000" algn="l" defTabSz="457200" rtl="0" eaLnBrk="1" latinLnBrk="0" hangingPunct="1">
+      <a:defRPr sz="1800" kern="1200">
+        <a:solidFill>
+          <a:schemeClr val="tx1"/>
+        </a:solidFill>
+        <a:latin typeface="+mn-lt"/>
+        <a:ea typeface="+mn-ea"/>
+        <a:cs typeface="+mn-cs"/>
+      </a:defRPr>
+    </a:lvl6pPr>
+    <a:lvl7pPr marL="2743200" algn="l" defTabSz="457200" rtl="0" eaLnBrk="1" latinLnBrk="0" hangingPunct="1">
+      <a:defRPr sz="1800" kern="1200">
+        <a:solidFill>
+          <a:schemeClr val="tx1"/>
+        </a:solidFill>
+        <a:latin typeface="+mn-lt"/>
+        <a:ea typeface="+mn-ea"/>
+        <a:cs typeface="+mn-cs"/>
+      </a:defRPr>
+    </a:lvl7pPr>
+    <a:lvl8pPr marL="3200400" algn="l" defTabSz="457200" rtl="0" eaLnBrk="1" latinLnBrk="0" hangingPunct="1">
+      <a:defRPr sz="1800" kern="1200">
+        <a:solidFill>
+          <a:schemeClr val="tx1"/>
+        </a:solidFill>
+        <a:latin typeface="+mn-lt"/>
+        <a:ea typeface="+mn-ea"/>
+        <a:cs typeface="+mn-cs"/>
+      </a:defRPr>
+    </a:lvl8pPr>
+    <a:lvl9pPr marL="3657600" algn="l" defTabSz="457200" rtl="0" eaLnBrk="1" latinLnBrk="0" hangingPunct="1">
+      <a:defRPr sz="1800" kern="1200">
+        <a:solidFill>
+          <a:schemeClr val="tx1"/>
+        </a:solidFill>
+        <a:latin typeface="+mn-lt"/>
+        <a:ea typeface="+mn-ea"/>
+        <a:cs typeface="+mn-cs"/>
+      </a:defRPr>
+    </a:lvl9pPr>
   </p:defaultTextStyle>
 </p:presentation>
 </file>
@@ -3079,7 +3079,7 @@
 </file>
 
 <file path=ppt/slides/slide1.xml><?xml version="1.0" encoding="utf-8"?>
-<p:sld xmlns="http://schemas.openxmlformats.org/drawingml/2006/main" xmlns:ns2="http://schemas.openxmlformats.org/officeDocument/2006/relationships" xmlns:p="http://schemas.openxmlformats.org/presentationml/2006/main">
+<p:sld xmlns:a="http://schemas.openxmlformats.org/drawingml/2006/main" xmlns:p="http://schemas.openxmlformats.org/presentationml/2006/main" xmlns:r="http://schemas.openxmlformats.org/officeDocument/2006/relationships">
   <p:cSld>
     <p:spTree>
       <p:nvGrpSpPr>
@@ -3095,1496 +3095,1475 @@
           <p:nvPr/>
         </p:nvSpPr>
         <p:spPr>
-          <xfrm>
-            <off x="0" y="0"/>
-            <ext cx="54863999" cy="43891200"/>
-          </xfrm>
-          <prstGeom prst="rect">
-            <avLst/>
-          </prstGeom>
-          <solidFill>
-            <srgbClr val="FFFFFF"/>
-          </solidFill>
-          <ln>
-            <noFill/>
-          </ln>
+          <a:xfrm>
+            <a:off x="0" y="0"/>
+            <a:ext cx="50292000" cy="40233600"/>
+          </a:xfrm>
+          <a:prstGeom prst="rect">
+            <a:avLst/>
+          </a:prstGeom>
+          <a:solidFill>
+            <a:srgbClr val="FFFFFF"/>
+          </a:solidFill>
+          <a:ln>
+            <a:noFill/>
+          </a:ln>
         </p:spPr>
         <p:style>
-          <lnRef idx="1">
-            <schemeClr val="accent1"/>
-          </lnRef>
-          <fillRef idx="3">
-            <schemeClr val="accent1"/>
-          </fillRef>
-          <effectRef idx="2">
-            <schemeClr val="accent1"/>
-          </effectRef>
-          <fontRef idx="minor">
-            <schemeClr val="lt1"/>
-          </fontRef>
+          <a:lnRef idx="1">
+            <a:schemeClr val="accent1"/>
+          </a:lnRef>
+          <a:fillRef idx="3">
+            <a:schemeClr val="accent1"/>
+          </a:fillRef>
+          <a:effectRef idx="2">
+            <a:schemeClr val="accent1"/>
+          </a:effectRef>
+          <a:fontRef idx="minor">
+            <a:schemeClr val="lt1"/>
+          </a:fontRef>
         </p:style>
         <p:txBody>
-          <bodyPr rtlCol="0" anchor="ctr"/>
-          <lstStyle/>
-          <p>
-            <pPr algn="ctr"/>
-          </p>
-        </p:txBody>
-      </p:sp>
-      <p:sp>
-        <p:nvSpPr>
-          <p:cNvPr id="3" name="Rectangle 2"/>
-          <p:cNvSpPr/>
-          <p:nvPr/>
-        </p:nvSpPr>
-        <p:spPr>
-          <xfrm>
-            <off x="897774" y="598516"/>
-            <ext cx="3192087" cy="3591098"/>
-          </xfrm>
-          <prstGeom prst="rect">
-            <avLst/>
-          </prstGeom>
-          <solidFill>
-            <srgbClr val="F5F5F5"/>
-          </solidFill>
-          <ln w="9525">
-            <solidFill>
-              <srgbClr val="D8D8D8"/>
-            </solidFill>
-          </ln>
-          <effectLst/>
-        </p:spPr>
-        <p:style>
-          <lnRef idx="1">
-            <schemeClr val="accent1"/>
-          </lnRef>
-          <fillRef idx="3">
-            <schemeClr val="accent1"/>
-          </fillRef>
-          <effectRef idx="2">
-            <schemeClr val="accent1"/>
-          </effectRef>
-          <fontRef idx="minor">
-            <schemeClr val="lt1"/>
-          </fontRef>
-        </p:style>
-        <p:txBody>
-          <bodyPr rtlCol="0" anchor="ctr"/>
-          <lstStyle/>
-          <p>
-            <pPr algn="ctr"/>
-          </p>
-        </p:txBody>
-      </p:sp>
-      <p:sp>
-        <p:nvSpPr>
-          <p:cNvPr id="4" name="TextBox 3"/>
-          <p:cNvSpPr txBox="1"/>
-          <p:nvPr/>
-        </p:nvSpPr>
-        <p:spPr>
-          <xfrm>
-            <off x="897774" y="2094807"/>
-            <ext cx="3192087" cy="698269"/>
-          </xfrm>
-          <prstGeom prst="rect">
-            <avLst/>
-          </prstGeom>
-          <noFill/>
-        </p:spPr>
-        <p:txBody>
-          <bodyPr wrap="square" anchor="t">
-            <spAutoFit/>
-          </bodyPr>
-          <lstStyle/>
-          <p>
-            <pPr algn="ctr">
-              <lnSpc>
-                <spcPct val="115000"/>
-              </lnSpc>
-            </pPr>
-            <r>
-              <rPr sz="2181" b="0" i="1">
-                <solidFill>
-                  <srgbClr val="999999"/>
-                </solidFill>
-                <latin typeface="Calibri"/>
-              </rPr>
-              <t>[ shield ]</t>
-            </r>
-          </p>
-        </p:txBody>
-      </p:sp>
-      <p:sp>
-        <p:nvSpPr>
-          <p:cNvPr id="5" name="Rectangle 4"/>
-          <p:cNvSpPr/>
-          <p:nvPr/>
-        </p:nvSpPr>
-        <p:spPr>
-          <xfrm>
-            <off x="50774138" y="598516"/>
-            <ext cx="3192087" cy="3591098"/>
-          </xfrm>
-          <prstGeom prst="rect">
-            <avLst/>
-          </prstGeom>
-          <solidFill>
-            <srgbClr val="F5F5F5"/>
-          </solidFill>
-          <ln w="9525">
-            <solidFill>
-              <srgbClr val="D8D8D8"/>
-            </solidFill>
-          </ln>
-          <effectLst/>
-        </p:spPr>
-        <p:style>
-          <lnRef idx="1">
-            <schemeClr val="accent1"/>
-          </lnRef>
-          <fillRef idx="3">
-            <schemeClr val="accent1"/>
-          </fillRef>
-          <effectRef idx="2">
-            <schemeClr val="accent1"/>
-          </effectRef>
-          <fontRef idx="minor">
-            <schemeClr val="lt1"/>
-          </fontRef>
-        </p:style>
-        <p:txBody>
-          <bodyPr rtlCol="0" anchor="ctr"/>
-          <lstStyle/>
-          <p>
-            <pPr algn="ctr"/>
-          </p>
-        </p:txBody>
-      </p:sp>
-      <p:sp>
-        <p:nvSpPr>
-          <p:cNvPr id="6" name="TextBox 5"/>
-          <p:cNvSpPr txBox="1"/>
-          <p:nvPr/>
-        </p:nvSpPr>
-        <p:spPr>
-          <xfrm>
-            <off x="50774138" y="2094807"/>
-            <ext cx="3192087" cy="698269"/>
-          </xfrm>
-          <prstGeom prst="rect">
-            <avLst/>
-          </prstGeom>
-          <noFill/>
-        </p:spPr>
-        <p:txBody>
-          <bodyPr wrap="square" anchor="t">
-            <spAutoFit/>
-          </bodyPr>
-          <lstStyle/>
-          <p>
-            <pPr algn="ctr">
-              <lnSpc>
-                <spcPct val="115000"/>
-              </lnSpc>
-            </pPr>
-            <r>
-              <rPr sz="2181" b="0" i="1">
-                <solidFill>
-                  <srgbClr val="999999"/>
-                </solidFill>
-                <latin typeface="Calibri"/>
-              </rPr>
-              <t>[ shield ]</t>
-            </r>
-          </p>
-        </p:txBody>
-      </p:sp>
-      <p:sp>
-        <p:nvSpPr>
-          <p:cNvPr id="7" name="TextBox 6"/>
-          <p:cNvSpPr txBox="1"/>
-          <p:nvPr/>
-        </p:nvSpPr>
-        <p:spPr>
-          <xfrm>
-            <off x="4488872" y="598516"/>
-            <ext cx="45886254" cy="2593570"/>
-          </xfrm>
-          <prstGeom prst="rect">
-            <avLst/>
-          </prstGeom>
-          <noFill/>
-        </p:spPr>
-        <p:txBody>
-          <bodyPr wrap="square" anchor="t">
-            <spAutoFit/>
-          </bodyPr>
-          <lstStyle/>
-          <p>
-            <pPr algn="ctr">
-              <lnSpc>
-                <spcPct val="105000"/>
-              </lnSpc>
-            </pPr>
-            <r>
-              <rPr sz="6763" b="1" i="0">
-                <solidFill>
-                  <srgbClr val="A51C30"/>
-                </solidFill>
-                <latin typeface="Georgia"/>
-              </rPr>
-              <t>Detecting crypto fraud without labels:</t>
-            </r>
-          </p>
-          <p>
-            <pPr algn="ctr">
-              <lnSpc>
-                <spcPct val="105000"/>
-              </lnSpc>
-            </pPr>
-            <r>
-              <rPr sz="6763" b="1" i="0">
-                <solidFill>
-                  <srgbClr val="A51C30"/>
-                </solidFill>
-                <latin typeface="Georgia"/>
-              </rPr>
-              <t>6 of 6 known rug pulls recovered from 4,334 Ethereum tokens.</t>
-            </r>
-          </p>
-        </p:txBody>
-      </p:sp>
-      <p:sp>
-        <p:nvSpPr>
-          <p:cNvPr id="8" name="TextBox 7"/>
-          <p:cNvSpPr txBox="1"/>
-          <p:nvPr/>
-        </p:nvSpPr>
-        <p:spPr>
-          <xfrm>
-            <off x="4488872" y="3291839"/>
-            <ext cx="45886254" cy="698269"/>
-          </xfrm>
-          <prstGeom prst="rect">
-            <avLst/>
-          </prstGeom>
-          <noFill/>
-        </p:spPr>
-        <p:txBody>
-          <bodyPr wrap="square" anchor="t">
-            <spAutoFit/>
-          </bodyPr>
-          <lstStyle/>
-          <p>
-            <pPr algn="ctr">
-              <lnSpc>
-                <spcPct val="115000"/>
-              </lnSpc>
-            </pPr>
-            <r>
-              <rPr sz="3054" b="0" i="0">
-                <solidFill>
-                  <srgbClr val="2A2A2A"/>
-                </solidFill>
-                <latin typeface="Georgia"/>
-              </rPr>
-              <t>Gillian Schriever  ·  Jiahui (Cecilia) Cai  ·  Zhilin Chen  ·  Jinghan Huang</t>
-            </r>
-          </p>
-        </p:txBody>
-      </p:sp>
-      <p:sp>
-        <p:nvSpPr>
-          <p:cNvPr id="9" name="TextBox 8"/>
-          <p:cNvSpPr txBox="1"/>
-          <p:nvPr/>
-        </p:nvSpPr>
-        <p:spPr>
-          <xfrm>
-            <off x="4488872" y="3990109"/>
-            <ext cx="45886254" cy="598516"/>
-          </xfrm>
-          <prstGeom prst="rect">
-            <avLst/>
-          </prstGeom>
-          <noFill/>
-        </p:spPr>
-        <p:txBody>
-          <bodyPr wrap="square" anchor="t">
-            <spAutoFit/>
-          </bodyPr>
-          <lstStyle/>
-          <p>
-            <pPr algn="ctr">
-              <lnSpc>
-                <spcPct val="115000"/>
-              </lnSpc>
-            </pPr>
-            <r>
-              <rPr sz="2400" b="0" i="1">
-                <solidFill>
-                  <srgbClr val="2A2A2A"/>
-                </solidFill>
-                <latin typeface="Georgia"/>
-              </rPr>
-              <t>Harvard John A. Paulson School of Engineering and Applied Sciences  —  AC297r Capstone, Spring 2026</t>
-            </r>
-          </p>
-        </p:txBody>
-      </p:sp>
-      <p:sp>
-        <p:nvSpPr>
-          <p:cNvPr id="10" name="Rectangle 9"/>
-          <p:cNvSpPr/>
-          <p:nvPr/>
-        </p:nvSpPr>
-        <p:spPr>
-          <xfrm>
-            <off x="0" y="4788130"/>
-            <ext cx="54863999" cy="39901"/>
-          </xfrm>
-          <prstGeom prst="rect">
-            <avLst/>
-          </prstGeom>
-          <solidFill>
-            <srgbClr val="A51C30"/>
-          </solidFill>
-          <ln>
-            <noFill/>
-          </ln>
-          <effectLst/>
-        </p:spPr>
-        <p:style>
-          <lnRef idx="1">
-            <schemeClr val="accent1"/>
-          </lnRef>
-          <fillRef idx="3">
-            <schemeClr val="accent1"/>
-          </fillRef>
-          <effectRef idx="2">
-            <schemeClr val="accent1"/>
-          </effectRef>
-          <fontRef idx="minor">
-            <schemeClr val="lt1"/>
-          </fontRef>
-        </p:style>
-        <p:txBody>
-          <bodyPr rtlCol="0" anchor="ctr"/>
-          <lstStyle/>
-          <p>
-            <pPr algn="ctr"/>
-          </p>
-        </p:txBody>
-      </p:sp>
-      <p:sp>
-        <p:nvSpPr>
-          <p:cNvPr id="11" name="TextBox 10"/>
-          <p:cNvSpPr txBox="1"/>
-          <p:nvPr/>
-        </p:nvSpPr>
-        <p:spPr>
-          <xfrm>
-            <off x="897774" y="5486400"/>
-            <ext cx="17090967" cy="897774"/>
-          </xfrm>
-          <prstGeom prst="rect">
-            <avLst/>
-          </prstGeom>
-          <noFill/>
-        </p:spPr>
-        <p:txBody>
-          <bodyPr wrap="square" anchor="t">
-            <spAutoFit/>
-          </bodyPr>
-          <lstStyle/>
-          <p>
-            <pPr algn="l">
-              <lnSpc>
-                <spcPct val="115000"/>
-              </lnSpc>
-            </pPr>
-            <r>
-              <rPr sz="4581" b="1" i="0">
-                <solidFill>
-                  <srgbClr val="A51C30"/>
-                </solidFill>
-                <latin typeface="Calibri"/>
-              </rPr>
-              <t>THE QUESTION</t>
-            </r>
-          </p>
-        </p:txBody>
-      </p:sp>
-      <p:sp>
-        <p:nvSpPr>
-          <p:cNvPr id="12" name="Rectangle 11"/>
-          <p:cNvSpPr/>
-          <p:nvPr/>
-        </p:nvSpPr>
-        <p:spPr>
-          <xfrm>
-            <off x="897774" y="6483927"/>
-            <ext cx="5981838" cy="39901"/>
-          </xfrm>
-          <prstGeom prst="rect">
-            <avLst/>
-          </prstGeom>
-          <solidFill>
-            <srgbClr val="A51C30"/>
-          </solidFill>
-          <ln>
-            <noFill/>
-          </ln>
-          <effectLst/>
-        </p:spPr>
-        <p:style>
-          <lnRef idx="1">
-            <schemeClr val="accent1"/>
-          </lnRef>
-          <fillRef idx="3">
-            <schemeClr val="accent1"/>
-          </fillRef>
-          <effectRef idx="2">
-            <schemeClr val="accent1"/>
-          </effectRef>
-          <fontRef idx="minor">
-            <schemeClr val="lt1"/>
-          </fontRef>
-        </p:style>
-        <p:txBody>
-          <bodyPr rtlCol="0" anchor="ctr"/>
-          <lstStyle/>
-          <p>
-            <pPr algn="ctr"/>
-          </p>
-        </p:txBody>
-      </p:sp>
-      <p:sp>
-        <p:nvSpPr>
-          <p:cNvPr id="13" name="TextBox 12"/>
-          <p:cNvSpPr txBox="1"/>
-          <p:nvPr/>
-        </p:nvSpPr>
-        <p:spPr>
-          <xfrm>
-            <off x="897774" y="6882938"/>
-            <ext cx="17090967" cy="3391592"/>
-          </xfrm>
-          <prstGeom prst="rect">
-            <avLst/>
-          </prstGeom>
-          <noFill/>
-        </p:spPr>
-        <p:txBody>
-          <bodyPr wrap="square" anchor="t">
-            <spAutoFit/>
-          </bodyPr>
-          <lstStyle/>
-          <p>
-            <pPr algn="l">
-              <lnSpc>
-                <spcPct val="115000"/>
-              </lnSpc>
-            </pPr>
-            <r>
-              <rPr sz="3490" b="1" i="0">
-                <solidFill>
-                  <srgbClr val="2A2A2A"/>
-                </solidFill>
-                <latin typeface="Calibri"/>
-              </rPr>
-              <t>Can we detect crypto fraud without any labeled data?</t>
-            </r>
-          </p>
-        </p:txBody>
-      </p:sp>
-      <p:sp>
-        <p:nvSpPr>
-          <p:cNvPr id="14" name="TextBox 13"/>
-          <p:cNvSpPr txBox="1"/>
-          <p:nvPr/>
-        </p:nvSpPr>
-        <p:spPr>
-          <xfrm>
-            <off x="897774" y="9875520"/>
-            <ext cx="17090967" cy="8977745"/>
-          </xfrm>
-          <prstGeom prst="rect">
-            <avLst/>
-          </prstGeom>
-          <noFill/>
-        </p:spPr>
-        <p:txBody>
-          <bodyPr wrap="square" anchor="t">
-            <spAutoFit/>
-          </bodyPr>
-          <lstStyle/>
-          <p>
-            <pPr algn="l">
-              <lnSpc>
-                <spcPct val="125000"/>
-              </lnSpc>
-            </pPr>
-            <r>
-              <rPr sz="2618" b="0" i="0">
-                <solidFill>
-                  <srgbClr val="2A2A2A"/>
-                </solidFill>
-                <latin typeface="Calibri"/>
-              </rPr>
-              <t>Labels for crypto fraud are rare, slow to publish, and biased</t>
-            </r>
-          </p>
-          <p>
-            <pPr algn="l">
-              <lnSpc>
-                <spcPct val="125000"/>
-              </lnSpc>
-            </pPr>
-            <r>
-              <rPr sz="2618" b="0" i="0">
-                <solidFill>
-                  <srgbClr val="2A2A2A"/>
-                </solidFill>
-                <latin typeface="Calibri"/>
-              </rPr>
-              <t>toward high-profile cases. Supervised classifiers trained on</t>
-            </r>
-          </p>
-          <p>
-            <pPr algn="l">
-              <lnSpc>
-                <spcPct val="125000"/>
-              </lnSpc>
-            </pPr>
-            <r>
-              <rPr sz="2618" b="0" i="0">
-                <solidFill>
-                  <srgbClr val="2A2A2A"/>
-                </solidFill>
-                <latin typeface="Calibri"/>
-              </rPr>
-              <t>them don't generalize — the attacks evolve faster than the</t>
-            </r>
-          </p>
-          <p>
-            <pPr algn="l">
-              <lnSpc>
-                <spcPct val="125000"/>
-              </lnSpc>
-            </pPr>
-            <r>
-              <rPr sz="2618" b="0" i="0">
-                <solidFill>
-                  <srgbClr val="2A2A2A"/>
-                </solidFill>
-                <latin typeface="Calibri"/>
-              </rPr>
-              <t>labels.</t>
-            </r>
-          </p>
-          <p>
-            <pPr algn="l">
-              <lnSpc>
-                <spcPct val="125000"/>
-              </lnSpc>
-            </pPr>
-            <r>
-              <rPr sz="2618" b="0" i="0">
-                <solidFill>
-                  <srgbClr val="2A2A2A"/>
-                </solidFill>
-                <latin typeface="Calibri"/>
-              </rPr>
-              <t/>
-            </r>
-          </p>
-          <p>
-            <pPr algn="l">
-              <lnSpc>
-                <spcPct val="125000"/>
-              </lnSpc>
-            </pPr>
-            <r>
-              <rPr sz="2618" b="0" i="0">
-                <solidFill>
-                  <srgbClr val="2A2A2A"/>
-                </solidFill>
-                <latin typeface="Calibri"/>
-              </rPr>
-              <t>We build a two-layer unsupervised pipeline:</t>
-            </r>
-          </p>
-          <p>
-            <pPr algn="l">
-              <lnSpc>
-                <spcPct val="125000"/>
-              </lnSpc>
-            </pPr>
-            <r>
-              <rPr sz="2618" b="0" i="0">
-                <solidFill>
-                  <srgbClr val="2A2A2A"/>
-                </solidFill>
-                <latin typeface="Calibri"/>
-              </rPr>
-              <t/>
-            </r>
-          </p>
-          <p>
-            <pPr algn="l">
-              <lnSpc>
-                <spcPct val="125000"/>
-              </lnSpc>
-            </pPr>
-            <r>
-              <rPr sz="2618" b="0" i="0">
-                <solidFill>
-                  <srgbClr val="2A2A2A"/>
-                </solidFill>
-                <latin typeface="Calibri"/>
-              </rPr>
-              <t>  ① Flag tokens whose on-chain trading behavior looks</t>
-            </r>
-          </p>
-          <p>
-            <pPr algn="l">
-              <lnSpc>
-                <spcPct val="125000"/>
-              </lnSpc>
-            </pPr>
-            <r>
-              <rPr sz="2618" b="0" i="0">
-                <solidFill>
-                  <srgbClr val="2A2A2A"/>
-                </solidFill>
-                <latin typeface="Calibri"/>
-              </rPr>
-              <t>      statistically unusual.</t>
-            </r>
-          </p>
-          <p>
-            <pPr algn="l">
-              <lnSpc>
-                <spcPct val="125000"/>
-              </lnSpc>
-            </pPr>
-            <r>
-              <rPr sz="2618" b="0" i="0">
-                <solidFill>
-                  <srgbClr val="2A2A2A"/>
-                </solidFill>
-                <latin typeface="Calibri"/>
-              </rPr>
-              <t/>
-            </r>
-          </p>
-          <p>
-            <pPr algn="l">
-              <lnSpc>
-                <spcPct val="125000"/>
-              </lnSpc>
-            </pPr>
-            <r>
-              <rPr sz="2618" b="0" i="0">
-                <solidFill>
-                  <srgbClr val="2A2A2A"/>
-                </solidFill>
-                <latin typeface="Calibri"/>
-              </rPr>
-              <t>  ② Estimate how likely that unusual behavior is to be</t>
-            </r>
-          </p>
-          <p>
-            <pPr algn="l">
-              <lnSpc>
-                <spcPct val="125000"/>
-              </lnSpc>
-            </pPr>
-            <r>
-              <rPr sz="2618" b="0" i="0">
-                <solidFill>
-                  <srgbClr val="2A2A2A"/>
-                </solidFill>
-                <latin typeface="Calibri"/>
-              </rPr>
-              <t>      intentional fraud (vs. a hack, bug, or large legitimate</t>
-            </r>
-          </p>
-          <p>
-            <pPr algn="l">
-              <lnSpc>
-                <spcPct val="125000"/>
-              </lnSpc>
-            </pPr>
-            <r>
-              <rPr sz="2618" b="0" i="0">
-                <solidFill>
-                  <srgbClr val="2A2A2A"/>
-                </solidFill>
-                <latin typeface="Calibri"/>
-              </rPr>
-              <t>      event).</t>
-            </r>
-          </p>
-        </p:txBody>
-      </p:sp>
-      <p:sp>
-        <p:nvSpPr>
-          <p:cNvPr id="15" name="TextBox 14"/>
-          <p:cNvSpPr txBox="1"/>
-          <p:nvPr/>
-        </p:nvSpPr>
-        <p:spPr>
-          <xfrm>
-            <off x="18886516" y="5486400"/>
-            <ext cx="17090967" cy="897774"/>
-          </xfrm>
-          <prstGeom prst="rect">
-            <avLst/>
-          </prstGeom>
-          <noFill/>
-        </p:spPr>
-        <p:txBody>
-          <bodyPr wrap="square" anchor="t">
-            <spAutoFit/>
-          </bodyPr>
-          <lstStyle/>
-          <p>
-            <pPr algn="l">
-              <lnSpc>
-                <spcPct val="115000"/>
-              </lnSpc>
-            </pPr>
-            <r>
-              <rPr sz="4581" b="1" i="0">
-                <solidFill>
-                  <srgbClr val="A51C30"/>
-                </solidFill>
-                <latin typeface="Calibri"/>
-              </rPr>
-              <t>METHODS</t>
-            </r>
-          </p>
-        </p:txBody>
-      </p:sp>
-      <p:sp>
-        <p:nvSpPr>
-          <p:cNvPr id="16" name="Rectangle 15"/>
-          <p:cNvSpPr/>
-          <p:nvPr/>
-        </p:nvSpPr>
-        <p:spPr>
-          <xfrm>
-            <off x="18886516" y="6483927"/>
-            <ext cx="5981838" cy="39901"/>
-          </xfrm>
-          <prstGeom prst="rect">
-            <avLst/>
-          </prstGeom>
-          <solidFill>
-            <srgbClr val="A51C30"/>
-          </solidFill>
-          <ln>
-            <noFill/>
-          </ln>
-          <effectLst/>
-        </p:spPr>
-        <p:style>
-          <lnRef idx="1">
-            <schemeClr val="accent1"/>
-          </lnRef>
-          <fillRef idx="3">
-            <schemeClr val="accent1"/>
-          </fillRef>
-          <effectRef idx="2">
-            <schemeClr val="accent1"/>
-          </effectRef>
-          <fontRef idx="minor">
-            <schemeClr val="lt1"/>
-          </fontRef>
-        </p:style>
-        <p:txBody>
-          <bodyPr rtlCol="0" anchor="ctr"/>
-          <lstStyle/>
-          <p>
-            <pPr algn="ctr"/>
-          </p>
-        </p:txBody>
-      </p:sp>
-      <p:sp>
-        <p:nvSpPr>
-          <p:cNvPr id="17" name="TextBox 16"/>
-          <p:cNvSpPr txBox="1"/>
-          <p:nvPr/>
-        </p:nvSpPr>
-        <p:spPr>
-          <xfrm>
-            <off x="18886516" y="6882938"/>
-            <ext cx="17090967" cy="13466618"/>
-          </xfrm>
-          <prstGeom prst="rect">
-            <avLst/>
-          </prstGeom>
-          <noFill/>
-        </p:spPr>
-        <p:txBody>
-          <bodyPr wrap="square" anchor="t">
-            <spAutoFit/>
-          </bodyPr>
-          <lstStyle/>
-          <p>
-            <pPr algn="l">
-              <lnSpc>
-                <spcPct val="125000"/>
-              </lnSpc>
-            </pPr>
-            <r>
-              <rPr sz="2618" b="0" i="0">
-                <solidFill>
-                  <srgbClr val="2A2A2A"/>
-                </solidFill>
-                <latin typeface="Calibri"/>
-              </rPr>
-              <t>Data. 4,334 mid-cap ERC-20 tokens on Ethereum</t>
-            </r>
-          </p>
-          <p>
-            <pPr algn="l">
-              <lnSpc>
-                <spcPct val="125000"/>
-              </lnSpc>
-            </pPr>
-            <r>
-              <rPr sz="2618" b="0" i="0">
-                <solidFill>
-                  <srgbClr val="2A2A2A"/>
-                </solidFill>
-                <latin typeface="Calibri"/>
-              </rPr>
-              <t>(Dune Analytics, 365-day window, $1M–$1B annual volume).</t>
-            </r>
-          </p>
-          <p>
-            <pPr algn="l">
-              <lnSpc>
-                <spcPct val="125000"/>
-              </lnSpc>
-            </pPr>
-            <r>
-              <rPr sz="2618" b="0" i="0">
-                <solidFill>
-                  <srgbClr val="2A2A2A"/>
-                </solidFill>
-                <latin typeface="Calibri"/>
-              </rPr>
-              <t/>
-            </r>
-          </p>
-          <p>
-            <pPr algn="l">
-              <lnSpc>
-                <spcPct val="125000"/>
-              </lnSpc>
-            </pPr>
-            <r>
-              <rPr sz="2618" b="0" i="0">
-                <solidFill>
-                  <srgbClr val="2A2A2A"/>
-                </solidFill>
-                <latin typeface="Calibri"/>
-              </rPr>
-              <t>Features (6). Volume spike ratio, peak daily volume, days</t>
-            </r>
-          </p>
-          <p>
-            <pPr algn="l">
-              <lnSpc>
-                <spcPct val="125000"/>
-              </lnSpc>
-            </pPr>
-            <r>
-              <rPr sz="2618" b="0" i="0">
-                <solidFill>
-                  <srgbClr val="2A2A2A"/>
-                </solidFill>
-                <latin typeface="Calibri"/>
-              </rPr>
-              <t>traded, max single-trade dominance, and two 24-hour post-</t>
-            </r>
-          </p>
-          <p>
-            <pPr algn="l">
-              <lnSpc>
-                <spcPct val="125000"/>
-              </lnSpc>
-            </pPr>
-            <r>
-              <rPr sz="2618" b="0" i="0">
-                <solidFill>
-                  <srgbClr val="2A2A2A"/>
-                </solidFill>
-                <latin typeface="Calibri"/>
-              </rPr>
-              <t>launch velocity features.</t>
-            </r>
-          </p>
-          <p>
-            <pPr algn="l">
-              <lnSpc>
-                <spcPct val="125000"/>
-              </lnSpc>
-            </pPr>
-            <r>
-              <rPr sz="2618" b="0" i="0">
-                <solidFill>
-                  <srgbClr val="2A2A2A"/>
-                </solidFill>
-                <latin typeface="Calibri"/>
-              </rPr>
-              <t/>
-            </r>
-          </p>
-          <p>
-            <pPr algn="l">
-              <lnSpc>
-                <spcPct val="125000"/>
-              </lnSpc>
-            </pPr>
-            <r>
-              <rPr sz="2618" b="0" i="0">
-                <solidFill>
-                  <srgbClr val="2A2A2A"/>
-                </solidFill>
-                <latin typeface="Calibri"/>
-              </rPr>
-              <t>Layer 1 — three independent detectors:</t>
-            </r>
-          </p>
-          <p>
-            <pPr algn="l">
-              <lnSpc>
-                <spcPct val="125000"/>
-              </lnSpc>
-            </pPr>
-            <r>
-              <rPr sz="2618" b="0" i="0">
-                <solidFill>
-                  <srgbClr val="2A2A2A"/>
-                </solidFill>
-                <latin typeface="Calibri"/>
-              </rPr>
-              <t>    •  Isolation Forest (tree-based outlier detection)</t>
-            </r>
-          </p>
-          <p>
-            <pPr algn="l">
-              <lnSpc>
-                <spcPct val="125000"/>
-              </lnSpc>
-            </pPr>
-            <r>
-              <rPr sz="2618" b="0" i="0">
-                <solidFill>
-                  <srgbClr val="2A2A2A"/>
-                </solidFill>
-                <latin typeface="Calibri"/>
-              </rPr>
-              <t>    •  DBSCAN (density clustering; we keep the noise points)</t>
-            </r>
-          </p>
-          <p>
-            <pPr algn="l">
-              <lnSpc>
-                <spcPct val="125000"/>
-              </lnSpc>
-            </pPr>
-            <r>
-              <rPr sz="2618" b="0" i="0">
-                <solidFill>
-                  <srgbClr val="2A2A2A"/>
-                </solidFill>
-                <latin typeface="Calibri"/>
-              </rPr>
-              <t>    •  PCA + Mahalanobis distance</t>
-            </r>
-          </p>
-          <p>
-            <pPr algn="l">
-              <lnSpc>
-                <spcPct val="125000"/>
-              </lnSpc>
-            </pPr>
-            <r>
-              <rPr sz="2618" b="0" i="0">
-                <solidFill>
-                  <srgbClr val="2A2A2A"/>
-                </solidFill>
-                <latin typeface="Calibri"/>
-              </rPr>
-              <t/>
-            </r>
-          </p>
-          <p>
-            <pPr algn="l">
-              <lnSpc>
-                <spcPct val="125000"/>
-              </lnSpc>
-            </pPr>
-            <r>
-              <rPr sz="2618" b="0" i="0">
-                <solidFill>
-                  <srgbClr val="2A2A2A"/>
-                </solidFill>
-                <latin typeface="Calibri"/>
-              </rPr>
-              <t>We rank-average their outputs into a single continuous</t>
-            </r>
-          </p>
-          <p>
-            <pPr algn="l">
-              <lnSpc>
-                <spcPct val="125000"/>
-              </lnSpc>
-            </pPr>
-            <r>
-              <rPr sz="2618" b="0" i="0">
-                <solidFill>
-                  <srgbClr val="2A2A2A"/>
-                </solidFill>
-                <latin typeface="Calibri"/>
-              </rPr>
-              <t>suspicion score in [0, 1], replacing the legacy three-detector</t>
-            </r>
-          </p>
-          <p>
-            <pPr algn="l">
-              <lnSpc>
-                <spcPct val="125000"/>
-              </lnSpc>
-            </pPr>
-            <r>
-              <rPr sz="2618" b="0" i="0">
-                <solidFill>
-                  <srgbClr val="2A2A2A"/>
-                </solidFill>
-                <latin typeface="Calibri"/>
-              </rPr>
-              <t>yes/no vote.</t>
-            </r>
-          </p>
-          <p>
-            <pPr algn="l">
-              <lnSpc>
-                <spcPct val="125000"/>
-              </lnSpc>
-            </pPr>
-            <r>
-              <rPr sz="2618" b="0" i="0">
-                <solidFill>
-                  <srgbClr val="2A2A2A"/>
-                </solidFill>
-                <latin typeface="Calibri"/>
-              </rPr>
-              <t/>
-            </r>
-          </p>
-          <p>
-            <pPr algn="l">
-              <lnSpc>
-                <spcPct val="125000"/>
-              </lnSpc>
-            </pPr>
-            <r>
-              <rPr sz="2618" b="0" i="0">
-                <solidFill>
-                  <srgbClr val="2A2A2A"/>
-                </solidFill>
-                <latin typeface="Calibri"/>
-              </rPr>
-              <t>Layer 2. Logistic regression (L2-regularized) fit on n=14</t>
-            </r>
-          </p>
-          <p>
-            <pPr algn="l">
-              <lnSpc>
-                <spcPct val="125000"/>
-              </lnSpc>
-            </pPr>
-            <r>
-              <rPr sz="2618" b="0" i="0">
-                <solidFill>
-                  <srgbClr val="2A2A2A"/>
-                </solidFill>
-                <latin typeface="Calibri"/>
-              </rPr>
-              <t>hand-validated tokens, mapping suspicious-behavior features</t>
-            </r>
-          </p>
-          <p>
-            <pPr algn="l">
-              <lnSpc>
-                <spcPct val="125000"/>
-              </lnSpc>
-            </pPr>
-            <r>
-              <rPr sz="2618" b="0" i="0">
-                <solidFill>
-                  <srgbClr val="2A2A2A"/>
-                </solidFill>
-                <latin typeface="Calibri"/>
-              </rPr>
-              <t>to P(fraud). Evaluated with leave-one-out cross-validation.</t>
-            </r>
-          </p>
-        </p:txBody>
-      </p:sp>
-      <p:sp>
-        <p:nvSpPr>
-          <p:cNvPr id="18" name="TextBox 17"/>
-          <p:cNvSpPr txBox="1"/>
-          <p:nvPr/>
-        </p:nvSpPr>
-        <p:spPr>
-          <xfrm>
-            <off x="36875258" y="5486400"/>
-            <ext cx="17090967" cy="897774"/>
-          </xfrm>
-          <prstGeom prst="rect">
-            <avLst/>
-          </prstGeom>
-          <noFill/>
-        </p:spPr>
-        <p:txBody>
-          <bodyPr wrap="square" anchor="t">
-            <spAutoFit/>
-          </bodyPr>
-          <lstStyle/>
-          <p>
-            <pPr algn="l">
-              <lnSpc>
-                <spcPct val="115000"/>
-              </lnSpc>
-            </pPr>
-            <r>
-              <rPr sz="4581" b="1" i="0">
-                <solidFill>
-                  <srgbClr val="A51C30"/>
-                </solidFill>
-                <latin typeface="Calibri"/>
-              </rPr>
-              <t>RESULTS</t>
-            </r>
-          </p>
-        </p:txBody>
-      </p:sp>
-      <p:sp>
-        <p:nvSpPr>
-          <p:cNvPr id="19" name="Rectangle 18"/>
-          <p:cNvSpPr/>
-          <p:nvPr/>
-        </p:nvSpPr>
-        <p:spPr>
-          <xfrm>
-            <off x="36875258" y="6483927"/>
-            <ext cx="5981838" cy="39901"/>
-          </xfrm>
-          <prstGeom prst="rect">
-            <avLst/>
-          </prstGeom>
-          <solidFill>
-            <srgbClr val="A51C30"/>
-          </solidFill>
-          <ln>
-            <noFill/>
-          </ln>
-          <effectLst/>
-        </p:spPr>
-        <p:style>
-          <lnRef idx="1">
-            <schemeClr val="accent1"/>
-          </lnRef>
-          <fillRef idx="3">
-            <schemeClr val="accent1"/>
-          </fillRef>
-          <effectRef idx="2">
-            <schemeClr val="accent1"/>
-          </effectRef>
-          <fontRef idx="minor">
-            <schemeClr val="lt1"/>
-          </fontRef>
-        </p:style>
-        <p:txBody>
-          <bodyPr rtlCol="0" anchor="ctr"/>
-          <lstStyle/>
-          <p>
-            <pPr algn="ctr"/>
-          </p>
-        </p:txBody>
-      </p:sp>
-      <p:sp>
-        <p:nvSpPr>
-          <p:cNvPr id="20" name="Rounded Rectangle 19"/>
-          <p:cNvSpPr/>
-          <p:nvPr/>
-        </p:nvSpPr>
-        <p:spPr>
-          <xfrm>
-            <off x="36875258" y="6882938"/>
-            <ext cx="17090967" cy="3192087"/>
-          </xfrm>
-          <prstGeom prst="roundRect">
-            <avLst>
-              <gd name="adj" fmla="val 6000"/>
-            </avLst>
-          </prstGeom>
-          <solidFill>
-            <srgbClr val="F5F5F5"/>
-          </solidFill>
-          <ln w="9525">
-            <solidFill>
-              <srgbClr val="D8D8D8"/>
-            </solidFill>
-          </ln>
-          <effectLst/>
-        </p:spPr>
-        <p:style>
-          <lnRef idx="1">
-            <schemeClr val="accent1"/>
-          </lnRef>
-          <fillRef idx="3">
-            <schemeClr val="accent1"/>
-          </fillRef>
-          <effectRef idx="2">
-            <schemeClr val="accent1"/>
-          </effectRef>
-          <fontRef idx="minor">
-            <schemeClr val="lt1"/>
-          </fontRef>
-        </p:style>
-        <p:txBody>
-          <bodyPr rtlCol="0" anchor="ctr"/>
-          <lstStyle/>
-          <p>
-            <pPr algn="ctr"/>
-          </p>
-        </p:txBody>
-      </p:sp>
-      <p:sp>
-        <p:nvSpPr>
-          <p:cNvPr id="21" name="TextBox 20"/>
-          <p:cNvSpPr txBox="1"/>
-          <p:nvPr/>
-        </p:nvSpPr>
-        <p:spPr>
-          <xfrm>
-            <off x="36875258" y="7032567"/>
-            <ext cx="17090967" cy="1596043"/>
-          </xfrm>
-          <prstGeom prst="rect">
-            <avLst/>
-          </prstGeom>
-          <noFill/>
-        </p:spPr>
-        <p:txBody>
-          <bodyPr wrap="square" anchor="t">
-            <spAutoFit/>
-          </bodyPr>
-          <lstStyle/>
-          <p>
-            <pPr algn="ctr">
-              <lnSpc>
-                <spcPct val="115000"/>
-              </lnSpc>
-            </pPr>
-            <r>
-              <rPr sz="10472" b="1" i="0">
-                <solidFill>
-                  <srgbClr val="A51C30"/>
-                </solidFill>
-                <latin typeface="Georgia"/>
-              </rPr>
-              <t>6 / 6</t>
-            </r>
-          </p>
-        </p:txBody>
-      </p:sp>
-      <p:sp>
-        <p:nvSpPr>
-          <p:cNvPr id="22" name="TextBox 21"/>
-          <p:cNvSpPr txBox="1"/>
-          <p:nvPr/>
-        </p:nvSpPr>
-        <p:spPr>
-          <xfrm>
-            <off x="36875258" y="8778240"/>
-            <ext cx="17090967" cy="1197032"/>
-          </xfrm>
-          <prstGeom prst="rect">
-            <avLst/>
-          </prstGeom>
-          <noFill/>
-        </p:spPr>
-        <p:txBody>
-          <bodyPr wrap="square" anchor="t">
-            <spAutoFit/>
-          </bodyPr>
-          <lstStyle/>
-          <p>
-            <pPr algn="ctr">
-              <lnSpc>
-                <spcPct val="120000"/>
-              </lnSpc>
-            </pPr>
-            <r>
-              <rPr sz="2400" b="0" i="1">
-                <solidFill>
-                  <srgbClr val="2A2A2A"/>
-                </solidFill>
-                <latin typeface="Calibri"/>
-              </rPr>
-              <t>known frauds recovered at the p90 suspicion cutoff.</t>
-            </r>
-          </p>
-          <p>
-            <pPr algn="ctr">
-              <lnSpc>
-                <spcPct val="120000"/>
-              </lnSpc>
-            </pPr>
-            <r>
-              <rPr sz="2400" b="0" i="1">
-                <solidFill>
-                  <srgbClr val="2A2A2A"/>
-                </solidFill>
-                <latin typeface="Calibri"/>
-              </rPr>
-              <t>The legacy three-vote consensus recovered 1 of 6.</t>
-            </r>
-          </p>
+          <a:bodyPr rtlCol="0" anchor="ctr"/>
+          <a:lstStyle/>
+          <a:p>
+            <a:pPr algn="ctr"/>
+          </a:p>
         </p:txBody>
       </p:sp>
       <p:pic>
         <p:nvPicPr>
-          <p:cNvPr id="23" name="Picture 22" descr="baseline_comparison.png"/>
+          <p:cNvPr id="3" name="Picture 2" descr="harvard-shield.png"/>
           <p:cNvPicPr>
-            <picLocks noChangeAspect="1"/>
+            <a:picLocks noChangeAspect="1"/>
           </p:cNvPicPr>
           <p:nvPr/>
         </p:nvPicPr>
         <p:blipFill>
-          <blip ns2:embed="rId2"/>
-          <stretch>
-            <fillRect/>
-          </stretch>
+          <a:blip r:embed="rId2"/>
+          <a:stretch>
+            <a:fillRect/>
+          </a:stretch>
         </p:blipFill>
         <p:spPr>
-          <xfrm>
-            <off x="36875258" y="10474036"/>
-            <ext cx="17090967" cy="6483927"/>
-          </xfrm>
-          <prstGeom prst="rect">
-            <avLst/>
-          </prstGeom>
+          <a:xfrm>
+            <a:off x="822960" y="548640"/>
+            <a:ext cx="2926080" cy="3291840"/>
+          </a:xfrm>
+          <a:prstGeom prst="rect">
+            <a:avLst/>
+          </a:prstGeom>
         </p:spPr>
       </p:pic>
-      <p:sp>
-        <p:nvSpPr>
-          <p:cNvPr id="24" name="TextBox 23"/>
-          <p:cNvSpPr txBox="1"/>
-          <p:nvPr/>
-        </p:nvSpPr>
-        <p:spPr>
-          <xfrm>
-            <off x="36875258" y="17007840"/>
-            <ext cx="17090967" cy="798021"/>
-          </xfrm>
-          <prstGeom prst="rect">
-            <avLst/>
-          </prstGeom>
-          <noFill/>
-        </p:spPr>
-        <p:txBody>
-          <bodyPr wrap="square" anchor="t">
-            <spAutoFit/>
-          </bodyPr>
-          <lstStyle/>
-          <p>
-            <pPr algn="ctr">
-              <lnSpc>
-                <spcPct val="115000"/>
-              </lnSpc>
-            </pPr>
-            <r>
-              <rPr sz="2400" b="0" i="1">
-                <solidFill>
-                  <srgbClr val="2A2A2A"/>
-                </solidFill>
-                <latin typeface="Calibri"/>
-              </rPr>
-              <t>Fig. 1.  Fraud recall on the validated subset (n=6 fraud, 8 non-fraud</t>
-            </r>
-          </p>
-          <p>
-            <pPr algn="ctr">
-              <lnSpc>
-                <spcPct val="115000"/>
-              </lnSpc>
-            </pPr>
-            <r>
-              <rPr sz="2400" b="0" i="1">
-                <solidFill>
-                  <srgbClr val="2A2A2A"/>
-                </solidFill>
-                <latin typeface="Calibri"/>
-              </rPr>
-              <t>anomaly). Continuous suspicion score catches all known fraud where</t>
-            </r>
-          </p>
-          <p>
-            <pPr algn="ctr">
-              <lnSpc>
-                <spcPct val="115000"/>
-              </lnSpc>
-            </pPr>
-            <r>
-              <rPr sz="2400" b="0" i="1">
-                <solidFill>
-                  <srgbClr val="2A2A2A"/>
-                </solidFill>
-                <latin typeface="Calibri"/>
-              </rPr>
-              <t>the legacy consensus vote catches one.</t>
-            </r>
-          </p>
-        </p:txBody>
-      </p:sp>
       <p:pic>
         <p:nvPicPr>
-          <p:cNvPr id="25" name="Picture 24" descr="shap_global_importance.png"/>
+          <p:cNvPr id="4" name="Picture 3" descr="H_SEAS_logo_RGB.png"/>
           <p:cNvPicPr>
-            <picLocks noChangeAspect="1"/>
+            <a:picLocks noChangeAspect="1"/>
           </p:cNvPicPr>
           <p:nvPr/>
         </p:nvPicPr>
         <p:blipFill>
-          <blip ns2:embed="rId3"/>
-          <stretch>
-            <fillRect/>
-          </stretch>
+          <a:blip r:embed="rId3"/>
+          <a:stretch>
+            <a:fillRect/>
+          </a:stretch>
         </p:blipFill>
         <p:spPr>
-          <xfrm>
-            <off x="36875258" y="18554007"/>
-            <ext cx="17090967" cy="5187141"/>
-          </xfrm>
-          <prstGeom prst="rect">
-            <avLst/>
-          </prstGeom>
+          <a:xfrm>
+            <a:off x="46542960" y="548640"/>
+            <a:ext cx="2926080" cy="3291840"/>
+          </a:xfrm>
+          <a:prstGeom prst="rect">
+            <a:avLst/>
+          </a:prstGeom>
         </p:spPr>
       </p:pic>
+      <p:sp>
+        <p:nvSpPr>
+          <p:cNvPr id="5" name="TextBox 4"/>
+          <p:cNvSpPr txBox="1"/>
+          <p:nvPr/>
+        </p:nvSpPr>
+        <p:spPr>
+          <a:xfrm>
+            <a:off x="4114800" y="548640"/>
+            <a:ext cx="42062400" cy="2377440"/>
+          </a:xfrm>
+          <a:prstGeom prst="rect">
+            <a:avLst/>
+          </a:prstGeom>
+          <a:noFill/>
+        </p:spPr>
+        <p:txBody>
+          <a:bodyPr wrap="square" anchor="t">
+            <a:spAutoFit/>
+          </a:bodyPr>
+          <a:lstStyle/>
+          <a:p>
+            <a:pPr algn="ctr">
+              <a:lnSpc>
+                <a:spcPct val="105000"/>
+              </a:lnSpc>
+            </a:pPr>
+            <a:r>
+              <a:rPr sz="5600" b="1" i="0">
+                <a:solidFill>
+                  <a:srgbClr val="A51C30"/>
+                </a:solidFill>
+                <a:latin typeface="Georgia"/>
+              </a:rPr>
+              <a:t>Detecting crypto fraud without labels:</a:t>
+            </a:r>
+          </a:p>
+          <a:p>
+            <a:pPr algn="ctr">
+              <a:lnSpc>
+                <a:spcPct val="105000"/>
+              </a:lnSpc>
+            </a:pPr>
+            <a:r>
+              <a:rPr sz="5600" b="1" i="0">
+                <a:solidFill>
+                  <a:srgbClr val="A51C30"/>
+                </a:solidFill>
+                <a:latin typeface="Georgia"/>
+              </a:rPr>
+              <a:t>14 of 15 known rug pulls recovered from 4,334 Ethereum tokens.</a:t>
+            </a:r>
+          </a:p>
+        </p:txBody>
+      </p:sp>
+      <p:sp>
+        <p:nvSpPr>
+          <p:cNvPr id="6" name="TextBox 5"/>
+          <p:cNvSpPr txBox="1"/>
+          <p:nvPr/>
+        </p:nvSpPr>
+        <p:spPr>
+          <a:xfrm>
+            <a:off x="4114800" y="2926080"/>
+            <a:ext cx="42062400" cy="640080"/>
+          </a:xfrm>
+          <a:prstGeom prst="rect">
+            <a:avLst/>
+          </a:prstGeom>
+          <a:noFill/>
+        </p:spPr>
+        <p:txBody>
+          <a:bodyPr wrap="square" anchor="t">
+            <a:spAutoFit/>
+          </a:bodyPr>
+          <a:lstStyle/>
+          <a:p>
+            <a:pPr algn="ctr">
+              <a:lnSpc>
+                <a:spcPct val="120000"/>
+              </a:lnSpc>
+            </a:pPr>
+            <a:r>
+              <a:rPr sz="2800" b="0" i="0">
+                <a:solidFill>
+                  <a:srgbClr val="2A2A2A"/>
+                </a:solidFill>
+                <a:latin typeface="Georgia"/>
+              </a:rPr>
+              <a:t>Gillian Schriever  ·  Jiahui (Cecilia) Cai  ·  Zhilin Chen  ·  Jinghan Huang</a:t>
+            </a:r>
+          </a:p>
+        </p:txBody>
+      </p:sp>
+      <p:sp>
+        <p:nvSpPr>
+          <p:cNvPr id="7" name="TextBox 6"/>
+          <p:cNvSpPr txBox="1"/>
+          <p:nvPr/>
+        </p:nvSpPr>
+        <p:spPr>
+          <a:xfrm>
+            <a:off x="4114800" y="3566160"/>
+            <a:ext cx="42062400" cy="548640"/>
+          </a:xfrm>
+          <a:prstGeom prst="rect">
+            <a:avLst/>
+          </a:prstGeom>
+          <a:noFill/>
+        </p:spPr>
+        <p:txBody>
+          <a:bodyPr wrap="square" anchor="t">
+            <a:spAutoFit/>
+          </a:bodyPr>
+          <a:lstStyle/>
+          <a:p>
+            <a:pPr algn="ctr">
+              <a:lnSpc>
+                <a:spcPct val="120000"/>
+              </a:lnSpc>
+            </a:pPr>
+            <a:r>
+              <a:rPr sz="2200" b="0" i="1">
+                <a:solidFill>
+                  <a:srgbClr val="2A2A2A"/>
+                </a:solidFill>
+                <a:latin typeface="Georgia"/>
+              </a:rPr>
+              <a:t>Harvard John A. Paulson School of Engineering and Applied Sciences  —  AC297r Capstone, Spring 2026</a:t>
+            </a:r>
+          </a:p>
+        </p:txBody>
+      </p:sp>
+      <p:sp>
+        <p:nvSpPr>
+          <p:cNvPr id="8" name="Rectangle 7"/>
+          <p:cNvSpPr/>
+          <p:nvPr/>
+        </p:nvSpPr>
+        <p:spPr>
+          <a:xfrm>
+            <a:off x="0" y="4389120"/>
+            <a:ext cx="50292000" cy="36576"/>
+          </a:xfrm>
+          <a:prstGeom prst="rect">
+            <a:avLst/>
+          </a:prstGeom>
+          <a:solidFill>
+            <a:srgbClr val="A51C30"/>
+          </a:solidFill>
+          <a:ln>
+            <a:noFill/>
+          </a:ln>
+          <a:effectLst/>
+        </p:spPr>
+        <p:style>
+          <a:lnRef idx="1">
+            <a:schemeClr val="accent1"/>
+          </a:lnRef>
+          <a:fillRef idx="3">
+            <a:schemeClr val="accent1"/>
+          </a:fillRef>
+          <a:effectRef idx="2">
+            <a:schemeClr val="accent1"/>
+          </a:effectRef>
+          <a:fontRef idx="minor">
+            <a:schemeClr val="lt1"/>
+          </a:fontRef>
+        </p:style>
+        <p:txBody>
+          <a:bodyPr rtlCol="0" anchor="ctr"/>
+          <a:lstStyle/>
+          <a:p>
+            <a:pPr algn="ctr"/>
+          </a:p>
+        </p:txBody>
+      </p:sp>
+      <p:sp>
+        <p:nvSpPr>
+          <p:cNvPr id="9" name="TextBox 8"/>
+          <p:cNvSpPr txBox="1"/>
+          <p:nvPr/>
+        </p:nvSpPr>
+        <p:spPr>
+          <a:xfrm>
+            <a:off x="822960" y="5029200"/>
+            <a:ext cx="15666720" cy="822960"/>
+          </a:xfrm>
+          <a:prstGeom prst="rect">
+            <a:avLst/>
+          </a:prstGeom>
+          <a:noFill/>
+        </p:spPr>
+        <p:txBody>
+          <a:bodyPr wrap="square" anchor="t">
+            <a:spAutoFit/>
+          </a:bodyPr>
+          <a:lstStyle/>
+          <a:p>
+            <a:pPr algn="l">
+              <a:lnSpc>
+                <a:spcPct val="120000"/>
+              </a:lnSpc>
+            </a:pPr>
+            <a:r>
+              <a:rPr sz="4200" b="1" i="0">
+                <a:solidFill>
+                  <a:srgbClr val="A51C30"/>
+                </a:solidFill>
+                <a:latin typeface="Calibri"/>
+              </a:rPr>
+              <a:t>THE QUESTION</a:t>
+            </a:r>
+          </a:p>
+        </p:txBody>
+      </p:sp>
+      <p:sp>
+        <p:nvSpPr>
+          <p:cNvPr id="10" name="Rectangle 9"/>
+          <p:cNvSpPr/>
+          <p:nvPr/>
+        </p:nvSpPr>
+        <p:spPr>
+          <a:xfrm>
+            <a:off x="822960" y="5943600"/>
+            <a:ext cx="5483352" cy="36576"/>
+          </a:xfrm>
+          <a:prstGeom prst="rect">
+            <a:avLst/>
+          </a:prstGeom>
+          <a:solidFill>
+            <a:srgbClr val="A51C30"/>
+          </a:solidFill>
+          <a:ln>
+            <a:noFill/>
+          </a:ln>
+          <a:effectLst/>
+        </p:spPr>
+        <p:style>
+          <a:lnRef idx="1">
+            <a:schemeClr val="accent1"/>
+          </a:lnRef>
+          <a:fillRef idx="3">
+            <a:schemeClr val="accent1"/>
+          </a:fillRef>
+          <a:effectRef idx="2">
+            <a:schemeClr val="accent1"/>
+          </a:effectRef>
+          <a:fontRef idx="minor">
+            <a:schemeClr val="lt1"/>
+          </a:fontRef>
+        </p:style>
+        <p:txBody>
+          <a:bodyPr rtlCol="0" anchor="ctr"/>
+          <a:lstStyle/>
+          <a:p>
+            <a:pPr algn="ctr"/>
+          </a:p>
+        </p:txBody>
+      </p:sp>
+      <p:sp>
+        <p:nvSpPr>
+          <p:cNvPr id="11" name="TextBox 10"/>
+          <p:cNvSpPr txBox="1"/>
+          <p:nvPr/>
+        </p:nvSpPr>
+        <p:spPr>
+          <a:xfrm>
+            <a:off x="822960" y="6309360"/>
+            <a:ext cx="15666720" cy="2743200"/>
+          </a:xfrm>
+          <a:prstGeom prst="rect">
+            <a:avLst/>
+          </a:prstGeom>
+          <a:noFill/>
+        </p:spPr>
+        <p:txBody>
+          <a:bodyPr wrap="square" anchor="t">
+            <a:spAutoFit/>
+          </a:bodyPr>
+          <a:lstStyle/>
+          <a:p>
+            <a:pPr algn="l">
+              <a:lnSpc>
+                <a:spcPct val="115000"/>
+              </a:lnSpc>
+            </a:pPr>
+            <a:r>
+              <a:rPr sz="3000" b="1" i="0">
+                <a:solidFill>
+                  <a:srgbClr val="2A2A2A"/>
+                </a:solidFill>
+                <a:latin typeface="Calibri"/>
+              </a:rPr>
+              <a:t>Can we detect crypto fraud without any labeled data?</a:t>
+            </a:r>
+          </a:p>
+        </p:txBody>
+      </p:sp>
+      <p:sp>
+        <p:nvSpPr>
+          <p:cNvPr id="12" name="TextBox 11"/>
+          <p:cNvSpPr txBox="1"/>
+          <p:nvPr/>
+        </p:nvSpPr>
+        <p:spPr>
+          <a:xfrm>
+            <a:off x="822960" y="8869680"/>
+            <a:ext cx="15666720" cy="9601200"/>
+          </a:xfrm>
+          <a:prstGeom prst="rect">
+            <a:avLst/>
+          </a:prstGeom>
+          <a:noFill/>
+        </p:spPr>
+        <p:txBody>
+          <a:bodyPr wrap="square" anchor="t">
+            <a:spAutoFit/>
+          </a:bodyPr>
+          <a:lstStyle/>
+          <a:p>
+            <a:pPr algn="l">
+              <a:lnSpc>
+                <a:spcPct val="125000"/>
+              </a:lnSpc>
+            </a:pPr>
+            <a:r>
+              <a:rPr sz="2400" b="0" i="0">
+                <a:solidFill>
+                  <a:srgbClr val="2A2A2A"/>
+                </a:solidFill>
+                <a:latin typeface="Calibri"/>
+              </a:rPr>
+              <a:t>Fraud labels in crypto are rare, slow to publish, and biased</a:t>
+            </a:r>
+          </a:p>
+          <a:p>
+            <a:pPr algn="l">
+              <a:lnSpc>
+                <a:spcPct val="125000"/>
+              </a:lnSpc>
+            </a:pPr>
+            <a:r>
+              <a:rPr sz="2400" b="0" i="0">
+                <a:solidFill>
+                  <a:srgbClr val="2A2A2A"/>
+                </a:solidFill>
+                <a:latin typeface="Calibri"/>
+              </a:rPr>
+              <a:t>toward high-profile cases. Supervised classifiers trained on</a:t>
+            </a:r>
+          </a:p>
+          <a:p>
+            <a:pPr algn="l">
+              <a:lnSpc>
+                <a:spcPct val="125000"/>
+              </a:lnSpc>
+            </a:pPr>
+            <a:r>
+              <a:rPr sz="2400" b="0" i="0">
+                <a:solidFill>
+                  <a:srgbClr val="2A2A2A"/>
+                </a:solidFill>
+                <a:latin typeface="Calibri"/>
+              </a:rPr>
+              <a:t>them don't generalize — the attacks evolve faster than the</a:t>
+            </a:r>
+          </a:p>
+          <a:p>
+            <a:pPr algn="l">
+              <a:lnSpc>
+                <a:spcPct val="125000"/>
+              </a:lnSpc>
+            </a:pPr>
+            <a:r>
+              <a:rPr sz="2400" b="0" i="0">
+                <a:solidFill>
+                  <a:srgbClr val="2A2A2A"/>
+                </a:solidFill>
+                <a:latin typeface="Calibri"/>
+              </a:rPr>
+              <a:t>labels.</a:t>
+            </a:r>
+          </a:p>
+          <a:p>
+            <a:pPr algn="l">
+              <a:lnSpc>
+                <a:spcPct val="125000"/>
+              </a:lnSpc>
+            </a:pPr>
+            <a:r>
+              <a:rPr sz="2400" b="0" i="0">
+                <a:solidFill>
+                  <a:srgbClr val="2A2A2A"/>
+                </a:solidFill>
+                <a:latin typeface="Calibri"/>
+              </a:rPr>
+              <a:t/>
+            </a:r>
+          </a:p>
+          <a:p>
+            <a:pPr algn="l">
+              <a:lnSpc>
+                <a:spcPct val="125000"/>
+              </a:lnSpc>
+            </a:pPr>
+            <a:r>
+              <a:rPr sz="2400" b="0" i="0">
+                <a:solidFill>
+                  <a:srgbClr val="2A2A2A"/>
+                </a:solidFill>
+                <a:latin typeface="Calibri"/>
+              </a:rPr>
+              <a:t>We build a two-layer unsupervised pipeline:</a:t>
+            </a:r>
+          </a:p>
+          <a:p>
+            <a:pPr algn="l">
+              <a:lnSpc>
+                <a:spcPct val="125000"/>
+              </a:lnSpc>
+            </a:pPr>
+            <a:r>
+              <a:rPr sz="2400" b="0" i="0">
+                <a:solidFill>
+                  <a:srgbClr val="2A2A2A"/>
+                </a:solidFill>
+                <a:latin typeface="Calibri"/>
+              </a:rPr>
+              <a:t/>
+            </a:r>
+          </a:p>
+          <a:p>
+            <a:pPr algn="l">
+              <a:lnSpc>
+                <a:spcPct val="125000"/>
+              </a:lnSpc>
+            </a:pPr>
+            <a:r>
+              <a:rPr sz="2400" b="0" i="0">
+                <a:solidFill>
+                  <a:srgbClr val="2A2A2A"/>
+                </a:solidFill>
+                <a:latin typeface="Calibri"/>
+              </a:rPr>
+              <a:t>①  Flag tokens whose on-chain trading behavior looks</a:t>
+            </a:r>
+          </a:p>
+          <a:p>
+            <a:pPr algn="l">
+              <a:lnSpc>
+                <a:spcPct val="125000"/>
+              </a:lnSpc>
+            </a:pPr>
+            <a:r>
+              <a:rPr sz="2400" b="0" i="0">
+                <a:solidFill>
+                  <a:srgbClr val="2A2A2A"/>
+                </a:solidFill>
+                <a:latin typeface="Calibri"/>
+              </a:rPr>
+              <a:t>     statistically unusual.</a:t>
+            </a:r>
+          </a:p>
+          <a:p>
+            <a:pPr algn="l">
+              <a:lnSpc>
+                <a:spcPct val="125000"/>
+              </a:lnSpc>
+            </a:pPr>
+            <a:r>
+              <a:rPr sz="2400" b="0" i="0">
+                <a:solidFill>
+                  <a:srgbClr val="2A2A2A"/>
+                </a:solidFill>
+                <a:latin typeface="Calibri"/>
+              </a:rPr>
+              <a:t/>
+            </a:r>
+          </a:p>
+          <a:p>
+            <a:pPr algn="l">
+              <a:lnSpc>
+                <a:spcPct val="125000"/>
+              </a:lnSpc>
+            </a:pPr>
+            <a:r>
+              <a:rPr sz="2400" b="0" i="0">
+                <a:solidFill>
+                  <a:srgbClr val="2A2A2A"/>
+                </a:solidFill>
+                <a:latin typeface="Calibri"/>
+              </a:rPr>
+              <a:t>②  Estimate how likely that unusual behavior is to be</a:t>
+            </a:r>
+          </a:p>
+          <a:p>
+            <a:pPr algn="l">
+              <a:lnSpc>
+                <a:spcPct val="125000"/>
+              </a:lnSpc>
+            </a:pPr>
+            <a:r>
+              <a:rPr sz="2400" b="0" i="0">
+                <a:solidFill>
+                  <a:srgbClr val="2A2A2A"/>
+                </a:solidFill>
+                <a:latin typeface="Calibri"/>
+              </a:rPr>
+              <a:t>     intentional fraud (vs. a hack, bug, or large legitimate</a:t>
+            </a:r>
+          </a:p>
+          <a:p>
+            <a:pPr algn="l">
+              <a:lnSpc>
+                <a:spcPct val="125000"/>
+              </a:lnSpc>
+            </a:pPr>
+            <a:r>
+              <a:rPr sz="2400" b="0" i="0">
+                <a:solidFill>
+                  <a:srgbClr val="2A2A2A"/>
+                </a:solidFill>
+                <a:latin typeface="Calibri"/>
+              </a:rPr>
+              <a:t>     event).</a:t>
+            </a:r>
+          </a:p>
+        </p:txBody>
+      </p:sp>
+      <p:sp>
+        <p:nvSpPr>
+          <p:cNvPr id="13" name="TextBox 12"/>
+          <p:cNvSpPr txBox="1"/>
+          <p:nvPr/>
+        </p:nvSpPr>
+        <p:spPr>
+          <a:xfrm>
+            <a:off x="17312640" y="5029200"/>
+            <a:ext cx="15666720" cy="822960"/>
+          </a:xfrm>
+          <a:prstGeom prst="rect">
+            <a:avLst/>
+          </a:prstGeom>
+          <a:noFill/>
+        </p:spPr>
+        <p:txBody>
+          <a:bodyPr wrap="square" anchor="t">
+            <a:spAutoFit/>
+          </a:bodyPr>
+          <a:lstStyle/>
+          <a:p>
+            <a:pPr algn="l">
+              <a:lnSpc>
+                <a:spcPct val="120000"/>
+              </a:lnSpc>
+            </a:pPr>
+            <a:r>
+              <a:rPr sz="4200" b="1" i="0">
+                <a:solidFill>
+                  <a:srgbClr val="A51C30"/>
+                </a:solidFill>
+                <a:latin typeface="Calibri"/>
+              </a:rPr>
+              <a:t>METHODS</a:t>
+            </a:r>
+          </a:p>
+        </p:txBody>
+      </p:sp>
+      <p:sp>
+        <p:nvSpPr>
+          <p:cNvPr id="14" name="Rectangle 13"/>
+          <p:cNvSpPr/>
+          <p:nvPr/>
+        </p:nvSpPr>
+        <p:spPr>
+          <a:xfrm>
+            <a:off x="17312640" y="5943600"/>
+            <a:ext cx="5483352" cy="36576"/>
+          </a:xfrm>
+          <a:prstGeom prst="rect">
+            <a:avLst/>
+          </a:prstGeom>
+          <a:solidFill>
+            <a:srgbClr val="A51C30"/>
+          </a:solidFill>
+          <a:ln>
+            <a:noFill/>
+          </a:ln>
+          <a:effectLst/>
+        </p:spPr>
+        <p:style>
+          <a:lnRef idx="1">
+            <a:schemeClr val="accent1"/>
+          </a:lnRef>
+          <a:fillRef idx="3">
+            <a:schemeClr val="accent1"/>
+          </a:fillRef>
+          <a:effectRef idx="2">
+            <a:schemeClr val="accent1"/>
+          </a:effectRef>
+          <a:fontRef idx="minor">
+            <a:schemeClr val="lt1"/>
+          </a:fontRef>
+        </p:style>
+        <p:txBody>
+          <a:bodyPr rtlCol="0" anchor="ctr"/>
+          <a:lstStyle/>
+          <a:p>
+            <a:pPr algn="ctr"/>
+          </a:p>
+        </p:txBody>
+      </p:sp>
+      <p:sp>
+        <p:nvSpPr>
+          <p:cNvPr id="15" name="TextBox 14"/>
+          <p:cNvSpPr txBox="1"/>
+          <p:nvPr/>
+        </p:nvSpPr>
+        <p:spPr>
+          <a:xfrm>
+            <a:off x="17312640" y="6309360"/>
+            <a:ext cx="15666720" cy="12344400"/>
+          </a:xfrm>
+          <a:prstGeom prst="rect">
+            <a:avLst/>
+          </a:prstGeom>
+          <a:noFill/>
+        </p:spPr>
+        <p:txBody>
+          <a:bodyPr wrap="square" anchor="t">
+            <a:spAutoFit/>
+          </a:bodyPr>
+          <a:lstStyle/>
+          <a:p>
+            <a:pPr algn="l">
+              <a:lnSpc>
+                <a:spcPct val="125000"/>
+              </a:lnSpc>
+            </a:pPr>
+            <a:r>
+              <a:rPr sz="2400" b="0" i="0">
+                <a:solidFill>
+                  <a:srgbClr val="2A2A2A"/>
+                </a:solidFill>
+                <a:latin typeface="Calibri"/>
+              </a:rPr>
+              <a:t>Data.  4,334 mid-cap ERC-20 tokens on Ethereum</a:t>
+            </a:r>
+          </a:p>
+          <a:p>
+            <a:pPr algn="l">
+              <a:lnSpc>
+                <a:spcPct val="125000"/>
+              </a:lnSpc>
+            </a:pPr>
+            <a:r>
+              <a:rPr sz="2400" b="0" i="0">
+                <a:solidFill>
+                  <a:srgbClr val="2A2A2A"/>
+                </a:solidFill>
+                <a:latin typeface="Calibri"/>
+              </a:rPr>
+              <a:t>(Dune Analytics, 365-day window, $1M–$1B annual volume).</a:t>
+            </a:r>
+          </a:p>
+          <a:p>
+            <a:pPr algn="l">
+              <a:lnSpc>
+                <a:spcPct val="125000"/>
+              </a:lnSpc>
+            </a:pPr>
+            <a:r>
+              <a:rPr sz="2400" b="0" i="0">
+                <a:solidFill>
+                  <a:srgbClr val="2A2A2A"/>
+                </a:solidFill>
+                <a:latin typeface="Calibri"/>
+              </a:rPr>
+              <a:t/>
+            </a:r>
+          </a:p>
+          <a:p>
+            <a:pPr algn="l">
+              <a:lnSpc>
+                <a:spcPct val="125000"/>
+              </a:lnSpc>
+            </a:pPr>
+            <a:r>
+              <a:rPr sz="2400" b="0" i="0">
+                <a:solidFill>
+                  <a:srgbClr val="2A2A2A"/>
+                </a:solidFill>
+                <a:latin typeface="Calibri"/>
+              </a:rPr>
+              <a:t>Features (6).  Volume spike ratio, peak daily volume, days</a:t>
+            </a:r>
+          </a:p>
+          <a:p>
+            <a:pPr algn="l">
+              <a:lnSpc>
+                <a:spcPct val="125000"/>
+              </a:lnSpc>
+            </a:pPr>
+            <a:r>
+              <a:rPr sz="2400" b="0" i="0">
+                <a:solidFill>
+                  <a:srgbClr val="2A2A2A"/>
+                </a:solidFill>
+                <a:latin typeface="Calibri"/>
+              </a:rPr>
+              <a:t>traded, max single-trade dominance, and two 24-hour post-</a:t>
+            </a:r>
+          </a:p>
+          <a:p>
+            <a:pPr algn="l">
+              <a:lnSpc>
+                <a:spcPct val="125000"/>
+              </a:lnSpc>
+            </a:pPr>
+            <a:r>
+              <a:rPr sz="2400" b="0" i="0">
+                <a:solidFill>
+                  <a:srgbClr val="2A2A2A"/>
+                </a:solidFill>
+                <a:latin typeface="Calibri"/>
+              </a:rPr>
+              <a:t>launch velocity features.</a:t>
+            </a:r>
+          </a:p>
+          <a:p>
+            <a:pPr algn="l">
+              <a:lnSpc>
+                <a:spcPct val="125000"/>
+              </a:lnSpc>
+            </a:pPr>
+            <a:r>
+              <a:rPr sz="2400" b="0" i="0">
+                <a:solidFill>
+                  <a:srgbClr val="2A2A2A"/>
+                </a:solidFill>
+                <a:latin typeface="Calibri"/>
+              </a:rPr>
+              <a:t/>
+            </a:r>
+          </a:p>
+          <a:p>
+            <a:pPr algn="l">
+              <a:lnSpc>
+                <a:spcPct val="125000"/>
+              </a:lnSpc>
+            </a:pPr>
+            <a:r>
+              <a:rPr sz="2400" b="0" i="0">
+                <a:solidFill>
+                  <a:srgbClr val="2A2A2A"/>
+                </a:solidFill>
+                <a:latin typeface="Calibri"/>
+              </a:rPr>
+              <a:t>Layer 1 — three independent detectors:</a:t>
+            </a:r>
+          </a:p>
+          <a:p>
+            <a:pPr algn="l">
+              <a:lnSpc>
+                <a:spcPct val="125000"/>
+              </a:lnSpc>
+            </a:pPr>
+            <a:r>
+              <a:rPr sz="2400" b="0" i="0">
+                <a:solidFill>
+                  <a:srgbClr val="2A2A2A"/>
+                </a:solidFill>
+                <a:latin typeface="Calibri"/>
+              </a:rPr>
+              <a:t>    •  Isolation Forest (tree-based outlier detection)</a:t>
+            </a:r>
+          </a:p>
+          <a:p>
+            <a:pPr algn="l">
+              <a:lnSpc>
+                <a:spcPct val="125000"/>
+              </a:lnSpc>
+            </a:pPr>
+            <a:r>
+              <a:rPr sz="2400" b="0" i="0">
+                <a:solidFill>
+                  <a:srgbClr val="2A2A2A"/>
+                </a:solidFill>
+                <a:latin typeface="Calibri"/>
+              </a:rPr>
+              <a:t>    •  DBSCAN (density clustering; keep the noise points)</a:t>
+            </a:r>
+          </a:p>
+          <a:p>
+            <a:pPr algn="l">
+              <a:lnSpc>
+                <a:spcPct val="125000"/>
+              </a:lnSpc>
+            </a:pPr>
+            <a:r>
+              <a:rPr sz="2400" b="0" i="0">
+                <a:solidFill>
+                  <a:srgbClr val="2A2A2A"/>
+                </a:solidFill>
+                <a:latin typeface="Calibri"/>
+              </a:rPr>
+              <a:t>    •  PCA + Mahalanobis distance</a:t>
+            </a:r>
+          </a:p>
+          <a:p>
+            <a:pPr algn="l">
+              <a:lnSpc>
+                <a:spcPct val="125000"/>
+              </a:lnSpc>
+            </a:pPr>
+            <a:r>
+              <a:rPr sz="2400" b="0" i="0">
+                <a:solidFill>
+                  <a:srgbClr val="2A2A2A"/>
+                </a:solidFill>
+                <a:latin typeface="Calibri"/>
+              </a:rPr>
+              <a:t/>
+            </a:r>
+          </a:p>
+          <a:p>
+            <a:pPr algn="l">
+              <a:lnSpc>
+                <a:spcPct val="125000"/>
+              </a:lnSpc>
+            </a:pPr>
+            <a:r>
+              <a:rPr sz="2400" b="0" i="0">
+                <a:solidFill>
+                  <a:srgbClr val="2A2A2A"/>
+                </a:solidFill>
+                <a:latin typeface="Calibri"/>
+              </a:rPr>
+              <a:t>Rank-averaged into a single continuous suspicion score</a:t>
+            </a:r>
+          </a:p>
+          <a:p>
+            <a:pPr algn="l">
+              <a:lnSpc>
+                <a:spcPct val="125000"/>
+              </a:lnSpc>
+            </a:pPr>
+            <a:r>
+              <a:rPr sz="2400" b="0" i="0">
+                <a:solidFill>
+                  <a:srgbClr val="2A2A2A"/>
+                </a:solidFill>
+                <a:latin typeface="Calibri"/>
+              </a:rPr>
+              <a:t>in [0, 1], replacing the legacy three-detector yes/no vote.</a:t>
+            </a:r>
+          </a:p>
+          <a:p>
+            <a:pPr algn="l">
+              <a:lnSpc>
+                <a:spcPct val="125000"/>
+              </a:lnSpc>
+            </a:pPr>
+            <a:r>
+              <a:rPr sz="2400" b="0" i="0">
+                <a:solidFill>
+                  <a:srgbClr val="2A2A2A"/>
+                </a:solidFill>
+                <a:latin typeface="Calibri"/>
+              </a:rPr>
+              <a:t/>
+            </a:r>
+          </a:p>
+          <a:p>
+            <a:pPr algn="l">
+              <a:lnSpc>
+                <a:spcPct val="125000"/>
+              </a:lnSpc>
+            </a:pPr>
+            <a:r>
+              <a:rPr sz="2400" b="0" i="0">
+                <a:solidFill>
+                  <a:srgbClr val="2A2A2A"/>
+                </a:solidFill>
+                <a:latin typeface="Calibri"/>
+              </a:rPr>
+              <a:t>Layer 2.  Logistic regression (L2-regularized) fit on</a:t>
+            </a:r>
+          </a:p>
+          <a:p>
+            <a:pPr algn="l">
+              <a:lnSpc>
+                <a:spcPct val="125000"/>
+              </a:lnSpc>
+            </a:pPr>
+            <a:r>
+              <a:rPr sz="2400" b="0" i="0">
+                <a:solidFill>
+                  <a:srgbClr val="2A2A2A"/>
+                </a:solidFill>
+                <a:latin typeface="Calibri"/>
+              </a:rPr>
+              <a:t>n = 144 hand- and web-validated tokens, mapping suspicious-</a:t>
+            </a:r>
+          </a:p>
+          <a:p>
+            <a:pPr algn="l">
+              <a:lnSpc>
+                <a:spcPct val="125000"/>
+              </a:lnSpc>
+            </a:pPr>
+            <a:r>
+              <a:rPr sz="2400" b="0" i="0">
+                <a:solidFill>
+                  <a:srgbClr val="2A2A2A"/>
+                </a:solidFill>
+                <a:latin typeface="Calibri"/>
+              </a:rPr>
+              <a:t>behavior features to P(fraud). Evaluated with leave-one-out</a:t>
+            </a:r>
+          </a:p>
+          <a:p>
+            <a:pPr algn="l">
+              <a:lnSpc>
+                <a:spcPct val="125000"/>
+              </a:lnSpc>
+            </a:pPr>
+            <a:r>
+              <a:rPr sz="2400" b="0" i="0">
+                <a:solidFill>
+                  <a:srgbClr val="2A2A2A"/>
+                </a:solidFill>
+                <a:latin typeface="Calibri"/>
+              </a:rPr>
+              <a:t>cross-validation.</a:t>
+            </a:r>
+          </a:p>
+        </p:txBody>
+      </p:sp>
+      <p:sp>
+        <p:nvSpPr>
+          <p:cNvPr id="16" name="TextBox 15"/>
+          <p:cNvSpPr txBox="1"/>
+          <p:nvPr/>
+        </p:nvSpPr>
+        <p:spPr>
+          <a:xfrm>
+            <a:off x="33802320" y="5029200"/>
+            <a:ext cx="15666720" cy="822960"/>
+          </a:xfrm>
+          <a:prstGeom prst="rect">
+            <a:avLst/>
+          </a:prstGeom>
+          <a:noFill/>
+        </p:spPr>
+        <p:txBody>
+          <a:bodyPr wrap="square" anchor="t">
+            <a:spAutoFit/>
+          </a:bodyPr>
+          <a:lstStyle/>
+          <a:p>
+            <a:pPr algn="l">
+              <a:lnSpc>
+                <a:spcPct val="120000"/>
+              </a:lnSpc>
+            </a:pPr>
+            <a:r>
+              <a:rPr sz="4200" b="1" i="0">
+                <a:solidFill>
+                  <a:srgbClr val="A51C30"/>
+                </a:solidFill>
+                <a:latin typeface="Calibri"/>
+              </a:rPr>
+              <a:t>RESULTS</a:t>
+            </a:r>
+          </a:p>
+        </p:txBody>
+      </p:sp>
+      <p:sp>
+        <p:nvSpPr>
+          <p:cNvPr id="17" name="Rectangle 16"/>
+          <p:cNvSpPr/>
+          <p:nvPr/>
+        </p:nvSpPr>
+        <p:spPr>
+          <a:xfrm>
+            <a:off x="33802320" y="5943600"/>
+            <a:ext cx="5483352" cy="36576"/>
+          </a:xfrm>
+          <a:prstGeom prst="rect">
+            <a:avLst/>
+          </a:prstGeom>
+          <a:solidFill>
+            <a:srgbClr val="A51C30"/>
+          </a:solidFill>
+          <a:ln>
+            <a:noFill/>
+          </a:ln>
+          <a:effectLst/>
+        </p:spPr>
+        <p:style>
+          <a:lnRef idx="1">
+            <a:schemeClr val="accent1"/>
+          </a:lnRef>
+          <a:fillRef idx="3">
+            <a:schemeClr val="accent1"/>
+          </a:fillRef>
+          <a:effectRef idx="2">
+            <a:schemeClr val="accent1"/>
+          </a:effectRef>
+          <a:fontRef idx="minor">
+            <a:schemeClr val="lt1"/>
+          </a:fontRef>
+        </p:style>
+        <p:txBody>
+          <a:bodyPr rtlCol="0" anchor="ctr"/>
+          <a:lstStyle/>
+          <a:p>
+            <a:pPr algn="ctr"/>
+          </a:p>
+        </p:txBody>
+      </p:sp>
+      <p:sp>
+        <p:nvSpPr>
+          <p:cNvPr id="18" name="Rounded Rectangle 17"/>
+          <p:cNvSpPr/>
+          <p:nvPr/>
+        </p:nvSpPr>
+        <p:spPr>
+          <a:xfrm>
+            <a:off x="33802320" y="6309360"/>
+            <a:ext cx="15666720" cy="2926080"/>
+          </a:xfrm>
+          <a:prstGeom prst="roundRect">
+            <a:avLst>
+              <a:gd name="adj" fmla="val 6000"/>
+            </a:avLst>
+          </a:prstGeom>
+          <a:solidFill>
+            <a:srgbClr val="F5F5F5"/>
+          </a:solidFill>
+          <a:ln w="9525">
+            <a:solidFill>
+              <a:srgbClr val="D8D8D8"/>
+            </a:solidFill>
+          </a:ln>
+          <a:effectLst/>
+        </p:spPr>
+        <p:style>
+          <a:lnRef idx="1">
+            <a:schemeClr val="accent1"/>
+          </a:lnRef>
+          <a:fillRef idx="3">
+            <a:schemeClr val="accent1"/>
+          </a:fillRef>
+          <a:effectRef idx="2">
+            <a:schemeClr val="accent1"/>
+          </a:effectRef>
+          <a:fontRef idx="minor">
+            <a:schemeClr val="lt1"/>
+          </a:fontRef>
+        </p:style>
+        <p:txBody>
+          <a:bodyPr rtlCol="0" anchor="ctr"/>
+          <a:lstStyle/>
+          <a:p>
+            <a:pPr algn="ctr"/>
+          </a:p>
+        </p:txBody>
+      </p:sp>
+      <p:sp>
+        <p:nvSpPr>
+          <p:cNvPr id="19" name="TextBox 18"/>
+          <p:cNvSpPr txBox="1"/>
+          <p:nvPr/>
+        </p:nvSpPr>
+        <p:spPr>
+          <a:xfrm>
+            <a:off x="33802320" y="6446520"/>
+            <a:ext cx="15666720" cy="1463040"/>
+          </a:xfrm>
+          <a:prstGeom prst="rect">
+            <a:avLst/>
+          </a:prstGeom>
+          <a:noFill/>
+        </p:spPr>
+        <p:txBody>
+          <a:bodyPr wrap="square" anchor="t">
+            <a:spAutoFit/>
+          </a:bodyPr>
+          <a:lstStyle/>
+          <a:p>
+            <a:pPr algn="ctr">
+              <a:lnSpc>
+                <a:spcPct val="120000"/>
+              </a:lnSpc>
+            </a:pPr>
+            <a:r>
+              <a:rPr sz="9600" b="1" i="0">
+                <a:solidFill>
+                  <a:srgbClr val="A51C30"/>
+                </a:solidFill>
+                <a:latin typeface="Georgia"/>
+              </a:rPr>
+              <a:t>14 / 15</a:t>
+            </a:r>
+          </a:p>
+        </p:txBody>
+      </p:sp>
+      <p:sp>
+        <p:nvSpPr>
+          <p:cNvPr id="20" name="TextBox 19"/>
+          <p:cNvSpPr txBox="1"/>
+          <p:nvPr/>
+        </p:nvSpPr>
+        <p:spPr>
+          <a:xfrm>
+            <a:off x="33802320" y="8046720"/>
+            <a:ext cx="15666720" cy="1097280"/>
+          </a:xfrm>
+          <a:prstGeom prst="rect">
+            <a:avLst/>
+          </a:prstGeom>
+          <a:noFill/>
+        </p:spPr>
+        <p:txBody>
+          <a:bodyPr wrap="square" anchor="t">
+            <a:spAutoFit/>
+          </a:bodyPr>
+          <a:lstStyle/>
+          <a:p>
+            <a:pPr algn="ctr">
+              <a:lnSpc>
+                <a:spcPct val="120000"/>
+              </a:lnSpc>
+            </a:pPr>
+            <a:r>
+              <a:rPr sz="2200" b="0" i="1">
+                <a:solidFill>
+                  <a:srgbClr val="2A2A2A"/>
+                </a:solidFill>
+                <a:latin typeface="Calibri"/>
+              </a:rPr>
+              <a:t>known frauds recovered at the p85 suspicion cutoff.</a:t>
+            </a:r>
+          </a:p>
+          <a:p>
+            <a:pPr algn="ctr">
+              <a:lnSpc>
+                <a:spcPct val="120000"/>
+              </a:lnSpc>
+            </a:pPr>
+            <a:r>
+              <a:rPr sz="2200" b="0" i="1">
+                <a:solidFill>
+                  <a:srgbClr val="2A2A2A"/>
+                </a:solidFill>
+                <a:latin typeface="Calibri"/>
+              </a:rPr>
+              <a:t>The legacy three-vote consensus recovered 4 of 15.</a:t>
+            </a:r>
+          </a:p>
+        </p:txBody>
+      </p:sp>
+      <p:pic>
+        <p:nvPicPr>
+          <p:cNvPr id="21" name="Picture 20" descr="baseline_comparison.png"/>
+          <p:cNvPicPr>
+            <a:picLocks noChangeAspect="1"/>
+          </p:cNvPicPr>
+          <p:nvPr/>
+        </p:nvPicPr>
+        <p:blipFill>
+          <a:blip r:embed="rId4"/>
+          <a:stretch>
+            <a:fillRect/>
+          </a:stretch>
+        </p:blipFill>
+        <p:spPr>
+          <a:xfrm>
+            <a:off x="33802320" y="9601200"/>
+            <a:ext cx="15666720" cy="5303520"/>
+          </a:xfrm>
+          <a:prstGeom prst="rect">
+            <a:avLst/>
+          </a:prstGeom>
+        </p:spPr>
+      </p:pic>
+      <p:sp>
+        <p:nvSpPr>
+          <p:cNvPr id="22" name="TextBox 21"/>
+          <p:cNvSpPr txBox="1"/>
+          <p:nvPr/>
+        </p:nvSpPr>
+        <p:spPr>
+          <a:xfrm>
+            <a:off x="33802320" y="14950440"/>
+            <a:ext cx="15666720" cy="914400"/>
+          </a:xfrm>
+          <a:prstGeom prst="rect">
+            <a:avLst/>
+          </a:prstGeom>
+          <a:noFill/>
+        </p:spPr>
+        <p:txBody>
+          <a:bodyPr wrap="square" anchor="t">
+            <a:spAutoFit/>
+          </a:bodyPr>
+          <a:lstStyle/>
+          <a:p>
+            <a:pPr algn="ctr">
+              <a:lnSpc>
+                <a:spcPct val="120000"/>
+              </a:lnSpc>
+            </a:pPr>
+            <a:r>
+              <a:rPr sz="2200" b="0" i="1">
+                <a:solidFill>
+                  <a:srgbClr val="2A2A2A"/>
+                </a:solidFill>
+                <a:latin typeface="Calibri"/>
+              </a:rPr>
+              <a:t>Fig. 1.  Fraud recall on the n = 144 validated subset</a:t>
+            </a:r>
+          </a:p>
+          <a:p>
+            <a:pPr algn="ctr">
+              <a:lnSpc>
+                <a:spcPct val="120000"/>
+              </a:lnSpc>
+            </a:pPr>
+            <a:r>
+              <a:rPr sz="2200" b="0" i="1">
+                <a:solidFill>
+                  <a:srgbClr val="2A2A2A"/>
+                </a:solidFill>
+                <a:latin typeface="Calibri"/>
+              </a:rPr>
+              <a:t>(15 FRAUD, 129 non-fraud). Continuous suspicion</a:t>
+            </a:r>
+          </a:p>
+          <a:p>
+            <a:pPr algn="ctr">
+              <a:lnSpc>
+                <a:spcPct val="120000"/>
+              </a:lnSpc>
+            </a:pPr>
+            <a:r>
+              <a:rPr sz="2200" b="0" i="1">
+                <a:solidFill>
+                  <a:srgbClr val="2A2A2A"/>
+                </a:solidFill>
+                <a:latin typeface="Calibri"/>
+              </a:rPr>
+              <a:t>score catches 14 of 15 at p85; discrete voting catches 4.</a:t>
+            </a:r>
+          </a:p>
+        </p:txBody>
+      </p:sp>
+      <p:pic>
+        <p:nvPicPr>
+          <p:cNvPr id="23" name="Picture 22" descr="shap_global_importance.png"/>
+          <p:cNvPicPr>
+            <a:picLocks noChangeAspect="1"/>
+          </p:cNvPicPr>
+          <p:nvPr/>
+        </p:nvPicPr>
+        <p:blipFill>
+          <a:blip r:embed="rId5"/>
+          <a:stretch>
+            <a:fillRect/>
+          </a:stretch>
+        </p:blipFill>
+        <p:spPr>
+          <a:xfrm>
+            <a:off x="33802320" y="16733520"/>
+            <a:ext cx="15666720" cy="4389120"/>
+          </a:xfrm>
+          <a:prstGeom prst="rect">
+            <a:avLst/>
+          </a:prstGeom>
+        </p:spPr>
+      </p:pic>
+      <p:sp>
+        <p:nvSpPr>
+          <p:cNvPr id="24" name="TextBox 23"/>
+          <p:cNvSpPr txBox="1"/>
+          <p:nvPr/>
+        </p:nvSpPr>
+        <p:spPr>
+          <a:xfrm>
+            <a:off x="33802320" y="21168360"/>
+            <a:ext cx="15666720" cy="914400"/>
+          </a:xfrm>
+          <a:prstGeom prst="rect">
+            <a:avLst/>
+          </a:prstGeom>
+          <a:noFill/>
+        </p:spPr>
+        <p:txBody>
+          <a:bodyPr wrap="square" anchor="t">
+            <a:spAutoFit/>
+          </a:bodyPr>
+          <a:lstStyle/>
+          <a:p>
+            <a:pPr algn="ctr">
+              <a:lnSpc>
+                <a:spcPct val="120000"/>
+              </a:lnSpc>
+            </a:pPr>
+            <a:r>
+              <a:rPr sz="2200" b="0" i="1">
+                <a:solidFill>
+                  <a:srgbClr val="2A2A2A"/>
+                </a:solidFill>
+                <a:latin typeface="Calibri"/>
+              </a:rPr>
+              <a:t>Fig. 2.  SHAP attribution on Isolation Forest.</a:t>
+            </a:r>
+          </a:p>
+          <a:p>
+            <a:pPr algn="ctr">
+              <a:lnSpc>
+                <a:spcPct val="120000"/>
+              </a:lnSpc>
+            </a:pPr>
+            <a:r>
+              <a:rPr sz="2200" b="0" i="1">
+                <a:solidFill>
+                  <a:srgbClr val="2A2A2A"/>
+                </a:solidFill>
+                <a:latin typeface="Calibri"/>
+              </a:rPr>
+              <a:t>24-hour early velocity outranks the legacy volume-spike feature.</a:t>
+            </a:r>
+          </a:p>
+        </p:txBody>
+      </p:sp>
+      <p:sp>
+        <p:nvSpPr>
+          <p:cNvPr id="25" name="Rounded Rectangle 24"/>
+          <p:cNvSpPr/>
+          <p:nvPr/>
+        </p:nvSpPr>
+        <p:spPr>
+          <a:xfrm>
+            <a:off x="822960" y="32918400"/>
+            <a:ext cx="48646080" cy="4389120"/>
+          </a:xfrm>
+          <a:prstGeom prst="roundRect">
+            <a:avLst>
+              <a:gd name="adj" fmla="val 3000"/>
+            </a:avLst>
+          </a:prstGeom>
+          <a:solidFill>
+            <a:srgbClr val="A51C30"/>
+          </a:solidFill>
+          <a:ln>
+            <a:noFill/>
+          </a:ln>
+          <a:effectLst/>
+        </p:spPr>
+        <p:style>
+          <a:lnRef idx="1">
+            <a:schemeClr val="accent1"/>
+          </a:lnRef>
+          <a:fillRef idx="3">
+            <a:schemeClr val="accent1"/>
+          </a:fillRef>
+          <a:effectRef idx="2">
+            <a:schemeClr val="accent1"/>
+          </a:effectRef>
+          <a:fontRef idx="minor">
+            <a:schemeClr val="lt1"/>
+          </a:fontRef>
+        </p:style>
+        <p:txBody>
+          <a:bodyPr rtlCol="0" anchor="ctr"/>
+          <a:lstStyle/>
+          <a:p>
+            <a:pPr algn="ctr"/>
+          </a:p>
+        </p:txBody>
+      </p:sp>
       <p:sp>
         <p:nvSpPr>
           <p:cNvPr id="26" name="TextBox 25"/>
@@ -4592,98 +4571,203 @@
           <p:nvPr/>
         </p:nvSpPr>
         <p:spPr>
-          <xfrm>
-            <off x="36875258" y="23791025"/>
-            <ext cx="17090967" cy="798021"/>
-          </xfrm>
-          <prstGeom prst="rect">
-            <avLst/>
-          </prstGeom>
-          <noFill/>
+          <a:xfrm>
+            <a:off x="1371600" y="33147000"/>
+            <a:ext cx="47548800" cy="1005840"/>
+          </a:xfrm>
+          <a:prstGeom prst="rect">
+            <a:avLst/>
+          </a:prstGeom>
+          <a:noFill/>
         </p:spPr>
         <p:txBody>
-          <bodyPr wrap="square" anchor="t">
-            <spAutoFit/>
-          </bodyPr>
-          <lstStyle/>
-          <p>
-            <pPr algn="ctr">
-              <lnSpc>
-                <spcPct val="115000"/>
-              </lnSpc>
-            </pPr>
-            <r>
-              <rPr sz="2400" b="0" i="1">
-                <solidFill>
-                  <srgbClr val="2A2A2A"/>
-                </solidFill>
-                <latin typeface="Calibri"/>
-              </rPr>
-              <t>Fig. 2.  SHAP attribution on Isolation Forest.  Early 24-hour</t>
-            </r>
-          </p>
-          <p>
-            <pPr algn="ctr">
-              <lnSpc>
-                <spcPct val="115000"/>
-              </lnSpc>
-            </pPr>
-            <r>
-              <rPr sz="2400" b="0" i="1">
-                <solidFill>
-                  <srgbClr val="2A2A2A"/>
-                </solidFill>
-                <latin typeface="Calibri"/>
-              </rPr>
-              <t>velocity outranks the legacy headline feature (volume spike ratio).</t>
-            </r>
-          </p>
-        </p:txBody>
-      </p:sp>
-      <p:sp>
-        <p:nvSpPr>
-          <p:cNvPr id="27" name="Rounded Rectangle 26"/>
-          <p:cNvSpPr/>
+          <a:bodyPr wrap="square" anchor="t">
+            <a:spAutoFit/>
+          </a:bodyPr>
+          <a:lstStyle/>
+          <a:p>
+            <a:pPr algn="l">
+              <a:lnSpc>
+                <a:spcPct val="120000"/>
+              </a:lnSpc>
+            </a:pPr>
+            <a:r>
+              <a:rPr sz="3200" b="1" i="0">
+                <a:solidFill>
+                  <a:srgbClr val="FFFFFF"/>
+                </a:solidFill>
+                <a:latin typeface="Calibri"/>
+              </a:rPr>
+              <a:t>SO WHAT</a:t>
+            </a:r>
+          </a:p>
+        </p:txBody>
+      </p:sp>
+      <p:sp>
+        <p:nvSpPr>
+          <p:cNvPr id="27" name="TextBox 26"/>
+          <p:cNvSpPr txBox="1"/>
           <p:nvPr/>
         </p:nvSpPr>
         <p:spPr>
-          <xfrm>
-            <off x="897774" y="35412218"/>
-            <ext cx="53068450" cy="5187141"/>
-          </xfrm>
-          <prstGeom prst="roundRect">
-            <avLst>
-              <gd name="adj" fmla="val 3000"/>
-            </avLst>
-          </prstGeom>
-          <solidFill>
-            <srgbClr val="A51C30"/>
-          </solidFill>
-          <ln>
-            <noFill/>
-          </ln>
-          <effectLst/>
+          <a:xfrm>
+            <a:off x="1371600" y="34152840"/>
+            <a:ext cx="47548800" cy="3108960"/>
+          </a:xfrm>
+          <a:prstGeom prst="rect">
+            <a:avLst/>
+          </a:prstGeom>
+          <a:noFill/>
         </p:spPr>
-        <p:style>
-          <lnRef idx="1">
-            <schemeClr val="accent1"/>
-          </lnRef>
-          <fillRef idx="3">
-            <schemeClr val="accent1"/>
-          </fillRef>
-          <effectRef idx="2">
-            <schemeClr val="accent1"/>
-          </effectRef>
-          <fontRef idx="minor">
-            <schemeClr val="lt1"/>
-          </fontRef>
-        </p:style>
-        <p:txBody>
-          <bodyPr rtlCol="0" anchor="ctr"/>
-          <lstStyle/>
-          <p>
-            <pPr algn="ctr"/>
-          </p>
+        <p:txBody>
+          <a:bodyPr wrap="square" anchor="t">
+            <a:spAutoFit/>
+          </a:bodyPr>
+          <a:lstStyle/>
+          <a:p>
+            <a:pPr algn="l">
+              <a:lnSpc>
+                <a:spcPct val="125000"/>
+              </a:lnSpc>
+            </a:pPr>
+            <a:r>
+              <a:rPr sz="2400" b="0" i="0">
+                <a:solidFill>
+                  <a:srgbClr val="FFFFFF"/>
+                </a:solidFill>
+                <a:latin typeface="Calibri"/>
+              </a:rPr>
+              <a:t>Continuous ranking beats discrete voting.  A rank-averaged suspicion score recovered 14 of 15 known</a:t>
+            </a:r>
+          </a:p>
+          <a:p>
+            <a:pPr algn="l">
+              <a:lnSpc>
+                <a:spcPct val="125000"/>
+              </a:lnSpc>
+            </a:pPr>
+            <a:r>
+              <a:rPr sz="2400" b="0" i="0">
+                <a:solidFill>
+                  <a:srgbClr val="FFFFFF"/>
+                </a:solidFill>
+                <a:latin typeface="Calibri"/>
+              </a:rPr>
+              <a:t>frauds on the validated subset; the legacy "3 of 3 detectors agree" rule recovered only 4 of 15.</a:t>
+            </a:r>
+          </a:p>
+          <a:p>
+            <a:pPr algn="l">
+              <a:lnSpc>
+                <a:spcPct val="125000"/>
+              </a:lnSpc>
+            </a:pPr>
+            <a:r>
+              <a:rPr sz="2400" b="0" i="0">
+                <a:solidFill>
+                  <a:srgbClr val="FFFFFF"/>
+                </a:solidFill>
+                <a:latin typeface="Calibri"/>
+              </a:rPr>
+              <a:t/>
+            </a:r>
+          </a:p>
+          <a:p>
+            <a:pPr algn="l">
+              <a:lnSpc>
+                <a:spcPct val="125000"/>
+              </a:lnSpc>
+            </a:pPr>
+            <a:r>
+              <a:rPr sz="2400" b="0" i="0">
+                <a:solidFill>
+                  <a:srgbClr val="FFFFFF"/>
+                </a:solidFill>
+                <a:latin typeface="Calibri"/>
+              </a:rPr>
+              <a:t>Two layers separate 'anomaly' from 'fraud.'  The Layer-2 calibrator achieves 88% specificity —</a:t>
+            </a:r>
+          </a:p>
+          <a:p>
+            <a:pPr algn="l">
+              <a:lnSpc>
+                <a:spcPct val="125000"/>
+              </a:lnSpc>
+            </a:pPr>
+            <a:r>
+              <a:rPr sz="2400" b="0" i="0">
+                <a:solidFill>
+                  <a:srgbClr val="FFFFFF"/>
+                </a:solidFill>
+                <a:latin typeface="Calibri"/>
+              </a:rPr>
+              <a:t>blue-chip tokens (WLFI, DEGEN, MIM, 3Crv) that trigger Layer 1 alarms all score P(fraud) &lt; 0.06,</a:t>
+            </a:r>
+          </a:p>
+          <a:p>
+            <a:pPr algn="l">
+              <a:lnSpc>
+                <a:spcPct val="125000"/>
+              </a:lnSpc>
+            </a:pPr>
+            <a:r>
+              <a:rPr sz="2400" b="0" i="0">
+                <a:solidFill>
+                  <a:srgbClr val="FFFFFF"/>
+                </a:solidFill>
+                <a:latin typeface="Calibri"/>
+              </a:rPr>
+              <a:t>while known rugs (WFT, PLASMA, ORBDEG cluster) score P(fraud) &gt; 0.8. Leave-one-out accuracy 0.87.</a:t>
+            </a:r>
+          </a:p>
+          <a:p>
+            <a:pPr algn="l">
+              <a:lnSpc>
+                <a:spcPct val="125000"/>
+              </a:lnSpc>
+            </a:pPr>
+            <a:r>
+              <a:rPr sz="2400" b="0" i="0">
+                <a:solidFill>
+                  <a:srgbClr val="FFFFFF"/>
+                </a:solidFill>
+                <a:latin typeface="Calibri"/>
+              </a:rPr>
+              <a:t/>
+            </a:r>
+          </a:p>
+          <a:p>
+            <a:pPr algn="l">
+              <a:lnSpc>
+                <a:spcPct val="125000"/>
+              </a:lnSpc>
+            </a:pPr>
+            <a:r>
+              <a:rPr sz="2400" b="0" i="0">
+                <a:solidFill>
+                  <a:srgbClr val="FFFFFF"/>
+                </a:solidFill>
+                <a:latin typeface="Calibri"/>
+              </a:rPr>
+              <a:t>Remaining limitations.  Small-volume honeypots (HYPER, KUBO) still slip through — catching them</a:t>
+            </a:r>
+          </a:p>
+          <a:p>
+            <a:pPr algn="l">
+              <a:lnSpc>
+                <a:spcPct val="125000"/>
+              </a:lnSpc>
+            </a:pPr>
+            <a:r>
+              <a:rPr sz="2400" b="0" i="0">
+                <a:solidFill>
+                  <a:srgbClr val="FFFFFF"/>
+                </a:solidFill>
+                <a:latin typeface="Calibri"/>
+              </a:rPr>
+              <a:t>requires graph-level signals (deployer history, liquidity-pool removal) beyond on-chain volume.</a:t>
+            </a:r>
+          </a:p>
         </p:txBody>
       </p:sp>
       <p:sp>
@@ -4693,36 +4777,68 @@
           <p:nvPr/>
         </p:nvSpPr>
         <p:spPr>
-          <xfrm>
-            <off x="1496290" y="35711476"/>
-            <ext cx="51871418" cy="1097280"/>
-          </xfrm>
-          <prstGeom prst="rect">
-            <avLst/>
-          </prstGeom>
-          <noFill/>
+          <a:xfrm>
+            <a:off x="822960" y="37627560"/>
+            <a:ext cx="24323040" cy="2331720"/>
+          </a:xfrm>
+          <a:prstGeom prst="rect">
+            <a:avLst/>
+          </a:prstGeom>
+          <a:noFill/>
         </p:spPr>
         <p:txBody>
-          <bodyPr wrap="square" anchor="t">
-            <spAutoFit/>
-          </bodyPr>
-          <lstStyle/>
-          <p>
-            <pPr algn="l">
-              <lnSpc>
-                <spcPct val="115000"/>
-              </lnSpc>
-            </pPr>
-            <r>
-              <rPr sz="3490" b="1" i="0">
-                <solidFill>
-                  <srgbClr val="FFFFFF"/>
-                </solidFill>
-                <latin typeface="Calibri"/>
-              </rPr>
-              <t>SO WHAT</t>
-            </r>
-          </p>
+          <a:bodyPr wrap="square" anchor="t">
+            <a:spAutoFit/>
+          </a:bodyPr>
+          <a:lstStyle/>
+          <a:p>
+            <a:pPr algn="l">
+              <a:lnSpc>
+                <a:spcPct val="130000"/>
+              </a:lnSpc>
+            </a:pPr>
+            <a:r>
+              <a:rPr sz="2200" b="0" i="0">
+                <a:solidFill>
+                  <a:srgbClr val="2A2A2A"/>
+                </a:solidFill>
+                <a:latin typeface="Calibri"/>
+              </a:rPr>
+              <a:t>Code:      github.com/gschriever/AC297r-crypto-fraud-detector</a:t>
+            </a:r>
+          </a:p>
+          <a:p>
+            <a:pPr algn="l">
+              <a:lnSpc>
+                <a:spcPct val="130000"/>
+              </a:lnSpc>
+            </a:pPr>
+            <a:r>
+              <a:rPr sz="2200" b="0" i="0">
+                <a:solidFill>
+                  <a:srgbClr val="2A2A2A"/>
+                </a:solidFill>
+                <a:latin typeface="Calibri"/>
+              </a:rPr>
+              <a:t>Contact:   [ name ]  ·  [ email ]</a:t>
+            </a:r>
+          </a:p>
+          <a:p>
+            <a:pPr algn="l">
+              <a:lnSpc>
+                <a:spcPct val="130000"/>
+              </a:lnSpc>
+            </a:pPr>
+            <a:r>
+              <a:rPr sz="2200" b="0" i="0">
+                <a:solidFill>
+                  <a:srgbClr val="2A2A2A"/>
+                </a:solidFill>
+                <a:latin typeface="Calibri"/>
+              </a:rPr>
+              <a:t>Advisor:   [ advisor ]</a:t>
+            </a:r>
+          </a:p>
         </p:txBody>
       </p:sp>
       <p:sp>
@@ -4732,296 +4848,74 @@
           <p:nvPr/>
         </p:nvSpPr>
         <p:spPr>
-          <xfrm>
-            <off x="1496290" y="36808756"/>
-            <ext cx="51871418" cy="3690850"/>
-          </xfrm>
-          <prstGeom prst="rect">
-            <avLst/>
-          </prstGeom>
-          <noFill/>
+          <a:xfrm>
+            <a:off x="25146000" y="37627560"/>
+            <a:ext cx="24323040" cy="2331720"/>
+          </a:xfrm>
+          <a:prstGeom prst="rect">
+            <a:avLst/>
+          </a:prstGeom>
+          <a:noFill/>
         </p:spPr>
         <p:txBody>
-          <bodyPr wrap="square" anchor="t">
-            <spAutoFit/>
-          </bodyPr>
-          <lstStyle/>
-          <p>
-            <pPr algn="l">
-              <lnSpc>
-                <spcPct val="125000"/>
-              </lnSpc>
-            </pPr>
-            <r>
-              <rPr sz="2836" b="0" i="0">
-                <solidFill>
-                  <srgbClr val="FFFFFF"/>
-                </solidFill>
-                <latin typeface="Calibri"/>
-              </rPr>
-              <t>Continuous ranking beats discrete voting.  A rank-averaged suspicion score recovered 6/6 known</t>
-            </r>
-          </p>
-          <p>
-            <pPr algn="l">
-              <lnSpc>
-                <spcPct val="125000"/>
-              </lnSpc>
-            </pPr>
-            <r>
-              <rPr sz="2836" b="0" i="0">
-                <solidFill>
-                  <srgbClr val="FFFFFF"/>
-                </solidFill>
-                <latin typeface="Calibri"/>
-              </rPr>
-              <t>frauds on the validated subset; the legacy "3 of 3 detectors agree" rule recovered 1/6.</t>
-            </r>
-          </p>
-          <p>
-            <pPr algn="l">
-              <lnSpc>
-                <spcPct val="125000"/>
-              </lnSpc>
-            </pPr>
-            <r>
-              <rPr sz="2836" b="0" i="0">
-                <solidFill>
-                  <srgbClr val="FFFFFF"/>
-                </solidFill>
-                <latin typeface="Calibri"/>
-              </rPr>
-              <t/>
-            </r>
-          </p>
-          <p>
-            <pPr algn="l">
-              <lnSpc>
-                <spcPct val="125000"/>
-              </lnSpc>
-            </pPr>
-            <r>
-              <rPr sz="2836" b="0" i="0">
-                <solidFill>
-                  <srgbClr val="FFFFFF"/>
-                </solidFill>
-                <latin typeface="Calibri"/>
-              </rPr>
-              <t>Two layers separate 'anomaly' from 'fraud.'  The Layer-2 calibrator cleanly distinguishes rug-pulls</t>
-            </r>
-          </p>
-          <p>
-            <pPr algn="l">
-              <lnSpc>
-                <spcPct val="125000"/>
-              </lnSpc>
-            </pPr>
-            <r>
-              <rPr sz="2836" b="0" i="0">
-                <solidFill>
-                  <srgbClr val="FFFFFF"/>
-                </solidFill>
-                <latin typeface="Calibri"/>
-              </rPr>
-              <t>(P ≈ 0.5–0.7) from large legitimate events like hacks and de-peg shocks (P ≈ 0.1–0.2).</t>
-            </r>
-          </p>
-          <p>
-            <pPr algn="l">
-              <lnSpc>
-                <spcPct val="125000"/>
-              </lnSpc>
-            </pPr>
-            <r>
-              <rPr sz="2836" b="0" i="0">
-                <solidFill>
-                  <srgbClr val="FFFFFF"/>
-                </solidFill>
-                <latin typeface="Calibri"/>
-              </rPr>
-              <t/>
-            </r>
-          </p>
-          <p>
-            <pPr algn="l">
-              <lnSpc>
-                <spcPct val="125000"/>
-              </lnSpc>
-            </pPr>
-            <r>
-              <rPr sz="2836" b="0" i="0">
-                <solidFill>
-                  <srgbClr val="FFFFFF"/>
-                </solidFill>
-                <latin typeface="Calibri"/>
-              </rPr>
-              <t>Key caveat.  The calibration layer is trained on only 14 hand-validated tokens; expanding that</t>
-            </r>
-          </p>
-          <p>
-            <pPr algn="l">
-              <lnSpc>
-                <spcPct val="125000"/>
-              </lnSpc>
-            </pPr>
-            <r>
-              <rPr sz="2836" b="0" i="0">
-                <solidFill>
-                  <srgbClr val="FFFFFF"/>
-                </solidFill>
-                <latin typeface="Calibri"/>
-              </rPr>
-              <t>labeled set is the single most valuable next step.</t>
-            </r>
-          </p>
-        </p:txBody>
-      </p:sp>
-      <p:sp>
-        <p:nvSpPr>
-          <p:cNvPr id="30" name="TextBox 29"/>
-          <p:cNvSpPr txBox="1"/>
-          <p:nvPr/>
-        </p:nvSpPr>
-        <p:spPr>
-          <xfrm>
-            <off x="897774" y="40998370"/>
-            <ext cx="26534225" cy="2493818"/>
-          </xfrm>
-          <prstGeom prst="rect">
-            <avLst/>
-          </prstGeom>
-          <noFill/>
-        </p:spPr>
-        <p:txBody>
-          <bodyPr wrap="square" anchor="t">
-            <spAutoFit/>
-          </bodyPr>
-          <lstStyle/>
-          <p>
-            <pPr algn="l">
-              <lnSpc>
-                <spcPct val="130000"/>
-              </lnSpc>
-            </pPr>
-            <r>
-              <rPr sz="2400" b="0" i="0">
-                <solidFill>
-                  <srgbClr val="2A2A2A"/>
-                </solidFill>
-                <latin typeface="Calibri"/>
-              </rPr>
-              <t>Code:      github.com/gschriever/AC297r-crypto-fraud-detector</t>
-            </r>
-          </p>
-          <p>
-            <pPr algn="l">
-              <lnSpc>
-                <spcPct val="130000"/>
-              </lnSpc>
-            </pPr>
-            <r>
-              <rPr sz="2400" b="0" i="0">
-                <solidFill>
-                  <srgbClr val="2A2A2A"/>
-                </solidFill>
-                <latin typeface="Calibri"/>
-              </rPr>
-              <t>Contact:   [ name ]  ·  [ email ]</t>
-            </r>
-          </p>
-          <p>
-            <pPr algn="l">
-              <lnSpc>
-                <spcPct val="130000"/>
-              </lnSpc>
-            </pPr>
-            <r>
-              <rPr sz="2400" b="0" i="0">
-                <solidFill>
-                  <srgbClr val="2A2A2A"/>
-                </solidFill>
-                <latin typeface="Calibri"/>
-              </rPr>
-              <t>Advisor:   [ advisor ]</t>
-            </r>
-          </p>
-        </p:txBody>
-      </p:sp>
-      <p:sp>
-        <p:nvSpPr>
-          <p:cNvPr id="31" name="TextBox 30"/>
-          <p:cNvSpPr txBox="1"/>
-          <p:nvPr/>
-        </p:nvSpPr>
-        <p:spPr>
-          <xfrm>
-            <off x="27431999" y="40998370"/>
-            <ext cx="26534225" cy="2493818"/>
-          </xfrm>
-          <prstGeom prst="rect">
-            <avLst/>
-          </prstGeom>
-          <noFill/>
-        </p:spPr>
-        <p:txBody>
-          <bodyPr wrap="square" anchor="t">
-            <spAutoFit/>
-          </bodyPr>
-          <lstStyle/>
-          <p>
-            <pPr algn="l">
-              <lnSpc>
-                <spcPct val="130000"/>
-              </lnSpc>
-            </pPr>
-            <r>
-              <rPr sz="2400" b="0" i="0">
-                <solidFill>
-                  <srgbClr val="2A2A2A"/>
-                </solidFill>
-                <latin typeface="Calibri"/>
-              </rPr>
-              <t>[1] Mazorra et al.  Do Not Rug on Me.  arXiv:2201.07220, 2022.</t>
-            </r>
-          </p>
-          <p>
-            <pPr algn="l">
-              <lnSpc>
-                <spcPct val="130000"/>
-              </lnSpc>
-            </pPr>
-            <r>
-              <rPr sz="2400" b="0" i="0">
-                <solidFill>
-                  <srgbClr val="2A2A2A"/>
-                </solidFill>
-                <latin typeface="Calibri"/>
-              </rPr>
-              <t>[2] Liu, Ting &amp; Zhou.  Isolation Forest.  ICDM 2008.</t>
-            </r>
-          </p>
-          <p>
-            <pPr algn="l">
-              <lnSpc>
-                <spcPct val="130000"/>
-              </lnSpc>
-            </pPr>
-            <r>
-              <rPr sz="2400" b="0" i="0">
-                <solidFill>
-                  <srgbClr val="2A2A2A"/>
-                </solidFill>
-                <latin typeface="Calibri"/>
-              </rPr>
-              <t>[3] Lundberg &amp; Lee.  SHAP.  NeurIPS 2017.</t>
-            </r>
-          </p>
+          <a:bodyPr wrap="square" anchor="t">
+            <a:spAutoFit/>
+          </a:bodyPr>
+          <a:lstStyle/>
+          <a:p>
+            <a:pPr algn="l">
+              <a:lnSpc>
+                <a:spcPct val="130000"/>
+              </a:lnSpc>
+            </a:pPr>
+            <a:r>
+              <a:rPr sz="2200" b="0" i="0">
+                <a:solidFill>
+                  <a:srgbClr val="2A2A2A"/>
+                </a:solidFill>
+                <a:latin typeface="Calibri"/>
+              </a:rPr>
+              <a:t>[1] Mazorra et al.  Do Not Rug on Me.  arXiv:2201.07220, 2022.</a:t>
+            </a:r>
+          </a:p>
+          <a:p>
+            <a:pPr algn="l">
+              <a:lnSpc>
+                <a:spcPct val="130000"/>
+              </a:lnSpc>
+            </a:pPr>
+            <a:r>
+              <a:rPr sz="2200" b="0" i="0">
+                <a:solidFill>
+                  <a:srgbClr val="2A2A2A"/>
+                </a:solidFill>
+                <a:latin typeface="Calibri"/>
+              </a:rPr>
+              <a:t>[2] Liu, Ting &amp; Zhou.  Isolation Forest.  ICDM 2008.</a:t>
+            </a:r>
+          </a:p>
+          <a:p>
+            <a:pPr algn="l">
+              <a:lnSpc>
+                <a:spcPct val="130000"/>
+              </a:lnSpc>
+            </a:pPr>
+            <a:r>
+              <a:rPr sz="2200" b="0" i="0">
+                <a:solidFill>
+                  <a:srgbClr val="2A2A2A"/>
+                </a:solidFill>
+                <a:latin typeface="Calibri"/>
+              </a:rPr>
+              <a:t>[3] Lundberg &amp; Lee.  SHAP.  NeurIPS 2017.</a:t>
+            </a:r>
+          </a:p>
         </p:txBody>
       </p:sp>
     </p:spTree>
   </p:cSld>
   <p:clrMapOvr>
-    <masterClrMapping/>
+    <a:masterClrMapping/>
   </p:clrMapOvr>
 </p:sld>
 </file>

--- a/poster templaates/AC297r_Poster_Template.pptx
+++ b/poster templaates/AC297r_Poster_Template.pptx
@@ -5,16 +5,16 @@
     <p:sldMasterId id="2147483648" r:id="rId1"/>
   </p:sldMasterIdLst>
   <p:sldIdLst>
-    <p:sldId id="256" r:id="rId7"/>
+    <p:sldId id="256" r:id="rId2"/>
   </p:sldIdLst>
-  <p:sldSz cx="50292000" cy="40233600" type="screen4x3"/>
+  <p:sldSz cx="45720000" cy="36576000"/>
   <p:notesSz cx="6858000" cy="9144000"/>
   <p:defaultTextStyle>
     <a:defPPr>
       <a:defRPr lang="en-US"/>
     </a:defPPr>
-    <a:lvl1pPr marL="0" algn="l" defTabSz="457200" rtl="0" eaLnBrk="1" latinLnBrk="0" hangingPunct="1">
-      <a:defRPr sz="1800" kern="1200">
+    <a:lvl1pPr marL="0" algn="l" defTabSz="415595" rtl="0" eaLnBrk="1" latinLnBrk="0" hangingPunct="1">
+      <a:defRPr sz="1636" kern="1200">
         <a:solidFill>
           <a:schemeClr val="tx1"/>
         </a:solidFill>
@@ -23,8 +23,8 @@
         <a:cs typeface="+mn-cs"/>
       </a:defRPr>
     </a:lvl1pPr>
-    <a:lvl2pPr marL="457200" algn="l" defTabSz="457200" rtl="0" eaLnBrk="1" latinLnBrk="0" hangingPunct="1">
-      <a:defRPr sz="1800" kern="1200">
+    <a:lvl2pPr marL="415595" algn="l" defTabSz="415595" rtl="0" eaLnBrk="1" latinLnBrk="0" hangingPunct="1">
+      <a:defRPr sz="1636" kern="1200">
         <a:solidFill>
           <a:schemeClr val="tx1"/>
         </a:solidFill>
@@ -33,8 +33,8 @@
         <a:cs typeface="+mn-cs"/>
       </a:defRPr>
     </a:lvl2pPr>
-    <a:lvl3pPr marL="914400" algn="l" defTabSz="457200" rtl="0" eaLnBrk="1" latinLnBrk="0" hangingPunct="1">
-      <a:defRPr sz="1800" kern="1200">
+    <a:lvl3pPr marL="831190" algn="l" defTabSz="415595" rtl="0" eaLnBrk="1" latinLnBrk="0" hangingPunct="1">
+      <a:defRPr sz="1636" kern="1200">
         <a:solidFill>
           <a:schemeClr val="tx1"/>
         </a:solidFill>
@@ -43,8 +43,8 @@
         <a:cs typeface="+mn-cs"/>
       </a:defRPr>
     </a:lvl3pPr>
-    <a:lvl4pPr marL="1371600" algn="l" defTabSz="457200" rtl="0" eaLnBrk="1" latinLnBrk="0" hangingPunct="1">
-      <a:defRPr sz="1800" kern="1200">
+    <a:lvl4pPr marL="1246784" algn="l" defTabSz="415595" rtl="0" eaLnBrk="1" latinLnBrk="0" hangingPunct="1">
+      <a:defRPr sz="1636" kern="1200">
         <a:solidFill>
           <a:schemeClr val="tx1"/>
         </a:solidFill>
@@ -53,8 +53,8 @@
         <a:cs typeface="+mn-cs"/>
       </a:defRPr>
     </a:lvl4pPr>
-    <a:lvl5pPr marL="1828800" algn="l" defTabSz="457200" rtl="0" eaLnBrk="1" latinLnBrk="0" hangingPunct="1">
-      <a:defRPr sz="1800" kern="1200">
+    <a:lvl5pPr marL="1662379" algn="l" defTabSz="415595" rtl="0" eaLnBrk="1" latinLnBrk="0" hangingPunct="1">
+      <a:defRPr sz="1636" kern="1200">
         <a:solidFill>
           <a:schemeClr val="tx1"/>
         </a:solidFill>
@@ -63,8 +63,8 @@
         <a:cs typeface="+mn-cs"/>
       </a:defRPr>
     </a:lvl5pPr>
-    <a:lvl6pPr marL="2286000" algn="l" defTabSz="457200" rtl="0" eaLnBrk="1" latinLnBrk="0" hangingPunct="1">
-      <a:defRPr sz="1800" kern="1200">
+    <a:lvl6pPr marL="2077974" algn="l" defTabSz="415595" rtl="0" eaLnBrk="1" latinLnBrk="0" hangingPunct="1">
+      <a:defRPr sz="1636" kern="1200">
         <a:solidFill>
           <a:schemeClr val="tx1"/>
         </a:solidFill>
@@ -73,8 +73,8 @@
         <a:cs typeface="+mn-cs"/>
       </a:defRPr>
     </a:lvl6pPr>
-    <a:lvl7pPr marL="2743200" algn="l" defTabSz="457200" rtl="0" eaLnBrk="1" latinLnBrk="0" hangingPunct="1">
-      <a:defRPr sz="1800" kern="1200">
+    <a:lvl7pPr marL="2493569" algn="l" defTabSz="415595" rtl="0" eaLnBrk="1" latinLnBrk="0" hangingPunct="1">
+      <a:defRPr sz="1636" kern="1200">
         <a:solidFill>
           <a:schemeClr val="tx1"/>
         </a:solidFill>
@@ -83,8 +83,8 @@
         <a:cs typeface="+mn-cs"/>
       </a:defRPr>
     </a:lvl7pPr>
-    <a:lvl8pPr marL="3200400" algn="l" defTabSz="457200" rtl="0" eaLnBrk="1" latinLnBrk="0" hangingPunct="1">
-      <a:defRPr sz="1800" kern="1200">
+    <a:lvl8pPr marL="2909164" algn="l" defTabSz="415595" rtl="0" eaLnBrk="1" latinLnBrk="0" hangingPunct="1">
+      <a:defRPr sz="1636" kern="1200">
         <a:solidFill>
           <a:schemeClr val="tx1"/>
         </a:solidFill>
@@ -93,8 +93,8 @@
         <a:cs typeface="+mn-cs"/>
       </a:defRPr>
     </a:lvl8pPr>
-    <a:lvl9pPr marL="3657600" algn="l" defTabSz="457200" rtl="0" eaLnBrk="1" latinLnBrk="0" hangingPunct="1">
-      <a:defRPr sz="1800" kern="1200">
+    <a:lvl9pPr marL="3324758" algn="l" defTabSz="415595" rtl="0" eaLnBrk="1" latinLnBrk="0" hangingPunct="1">
+      <a:defRPr sz="1636" kern="1200">
         <a:solidFill>
           <a:schemeClr val="tx1"/>
         </a:solidFill>
@@ -104,6 +104,22 @@
       </a:defRPr>
     </a:lvl9pPr>
   </p:defaultTextStyle>
+  <p:extLst>
+    <p:ext uri="{EFAFB233-063F-42B5-8137-9DF3F51BA10A}">
+      <p15:sldGuideLst xmlns:p15="http://schemas.microsoft.com/office/powerpoint/2012/main">
+        <p15:guide id="1" orient="horz" pos="1964" userDrawn="1">
+          <p15:clr>
+            <a:srgbClr val="A4A3A4"/>
+          </p15:clr>
+        </p15:guide>
+        <p15:guide id="2" pos="2618" userDrawn="1">
+          <p15:clr>
+            <a:srgbClr val="A4A3A4"/>
+          </p15:clr>
+        </p15:guide>
+      </p15:sldGuideLst>
+    </p:ext>
+  </p:extLst>
 </p:presentation>
 </file>
 
@@ -136,8 +152,8 @@
         </p:nvSpPr>
         <p:spPr>
           <a:xfrm>
-            <a:off x="685800" y="2130425"/>
-            <a:ext cx="7772400" cy="1470025"/>
+            <a:off x="623455" y="1936751"/>
+            <a:ext cx="7065818" cy="1336386"/>
           </a:xfrm>
         </p:spPr>
         <p:txBody>
@@ -145,10 +161,9 @@
           <a:lstStyle/>
           <a:p>
             <a:r>
-              <a:rPr lang="en-US" smtClean="0"/>
+              <a:rPr lang="en-US"/>
               <a:t>Click to edit Master title style</a:t>
             </a:r>
-            <a:endParaRPr lang="en-US"/>
           </a:p>
         </p:txBody>
       </p:sp>
@@ -164,8 +179,8 @@
         </p:nvSpPr>
         <p:spPr>
           <a:xfrm>
-            <a:off x="1371600" y="3886200"/>
-            <a:ext cx="6400800" cy="1752600"/>
+            <a:off x="1246909" y="3532909"/>
+            <a:ext cx="5818909" cy="1593273"/>
           </a:xfrm>
         </p:spPr>
         <p:txBody>
@@ -181,7 +196,7 @@
                 </a:solidFill>
               </a:defRPr>
             </a:lvl1pPr>
-            <a:lvl2pPr marL="457200" indent="0" algn="ctr">
+            <a:lvl2pPr marL="415641" indent="0" algn="ctr">
               <a:buNone/>
               <a:defRPr>
                 <a:solidFill>
@@ -191,7 +206,7 @@
                 </a:solidFill>
               </a:defRPr>
             </a:lvl2pPr>
-            <a:lvl3pPr marL="914400" indent="0" algn="ctr">
+            <a:lvl3pPr marL="831281" indent="0" algn="ctr">
               <a:buNone/>
               <a:defRPr>
                 <a:solidFill>
@@ -201,7 +216,7 @@
                 </a:solidFill>
               </a:defRPr>
             </a:lvl3pPr>
-            <a:lvl4pPr marL="1371600" indent="0" algn="ctr">
+            <a:lvl4pPr marL="1246922" indent="0" algn="ctr">
               <a:buNone/>
               <a:defRPr>
                 <a:solidFill>
@@ -211,7 +226,7 @@
                 </a:solidFill>
               </a:defRPr>
             </a:lvl4pPr>
-            <a:lvl5pPr marL="1828800" indent="0" algn="ctr">
+            <a:lvl5pPr marL="1662562" indent="0" algn="ctr">
               <a:buNone/>
               <a:defRPr>
                 <a:solidFill>
@@ -221,7 +236,7 @@
                 </a:solidFill>
               </a:defRPr>
             </a:lvl5pPr>
-            <a:lvl6pPr marL="2286000" indent="0" algn="ctr">
+            <a:lvl6pPr marL="2078203" indent="0" algn="ctr">
               <a:buNone/>
               <a:defRPr>
                 <a:solidFill>
@@ -231,7 +246,7 @@
                 </a:solidFill>
               </a:defRPr>
             </a:lvl6pPr>
-            <a:lvl7pPr marL="2743200" indent="0" algn="ctr">
+            <a:lvl7pPr marL="2493843" indent="0" algn="ctr">
               <a:buNone/>
               <a:defRPr>
                 <a:solidFill>
@@ -241,7 +256,7 @@
                 </a:solidFill>
               </a:defRPr>
             </a:lvl7pPr>
-            <a:lvl8pPr marL="3200400" indent="0" algn="ctr">
+            <a:lvl8pPr marL="2909484" indent="0" algn="ctr">
               <a:buNone/>
               <a:defRPr>
                 <a:solidFill>
@@ -251,7 +266,7 @@
                 </a:solidFill>
               </a:defRPr>
             </a:lvl8pPr>
-            <a:lvl9pPr marL="3657600" indent="0" algn="ctr">
+            <a:lvl9pPr marL="3325124" indent="0" algn="ctr">
               <a:buNone/>
               <a:defRPr>
                 <a:solidFill>
@@ -264,10 +279,9 @@
           </a:lstStyle>
           <a:p>
             <a:r>
-              <a:rPr lang="en-US" smtClean="0"/>
+              <a:rPr lang="en-US"/>
               <a:t>Click to edit Master subtitle style</a:t>
             </a:r>
-            <a:endParaRPr lang="en-US"/>
           </a:p>
         </p:txBody>
       </p:sp>
@@ -288,7 +302,7 @@
           <a:p>
             <a:fld id="{5BCAD085-E8A6-8845-BD4E-CB4CCA059FC4}" type="datetimeFigureOut">
               <a:rPr lang="en-US" smtClean="0"/>
-              <a:t>1/27/13</a:t>
+              <a:t>4/24/26</a:t>
             </a:fld>
             <a:endParaRPr lang="en-US"/>
           </a:p>
@@ -382,10 +396,9 @@
           <a:lstStyle/>
           <a:p>
             <a:r>
-              <a:rPr lang="en-US" smtClean="0"/>
+              <a:rPr lang="en-US"/>
               <a:t>Click to edit Master title style</a:t>
             </a:r>
-            <a:endParaRPr lang="en-US"/>
           </a:p>
         </p:txBody>
       </p:sp>
@@ -406,38 +419,37 @@
           <a:p>
             <a:pPr lvl="0"/>
             <a:r>
-              <a:rPr lang="en-US" smtClean="0"/>
+              <a:rPr lang="en-US"/>
               <a:t>Click to edit Master text styles</a:t>
             </a:r>
           </a:p>
           <a:p>
             <a:pPr lvl="1"/>
             <a:r>
-              <a:rPr lang="en-US" smtClean="0"/>
+              <a:rPr lang="en-US"/>
               <a:t>Second level</a:t>
             </a:r>
           </a:p>
           <a:p>
             <a:pPr lvl="2"/>
             <a:r>
-              <a:rPr lang="en-US" smtClean="0"/>
+              <a:rPr lang="en-US"/>
               <a:t>Third level</a:t>
             </a:r>
           </a:p>
           <a:p>
             <a:pPr lvl="3"/>
             <a:r>
-              <a:rPr lang="en-US" smtClean="0"/>
+              <a:rPr lang="en-US"/>
               <a:t>Fourth level</a:t>
             </a:r>
           </a:p>
           <a:p>
             <a:pPr lvl="4"/>
             <a:r>
-              <a:rPr lang="en-US" smtClean="0"/>
+              <a:rPr lang="en-US"/>
               <a:t>Fifth level</a:t>
             </a:r>
-            <a:endParaRPr lang="en-US"/>
           </a:p>
         </p:txBody>
       </p:sp>
@@ -458,7 +470,7 @@
           <a:p>
             <a:fld id="{5BCAD085-E8A6-8845-BD4E-CB4CCA059FC4}" type="datetimeFigureOut">
               <a:rPr lang="en-US" smtClean="0"/>
-              <a:t>1/27/13</a:t>
+              <a:t>4/24/26</a:t>
             </a:fld>
             <a:endParaRPr lang="en-US"/>
           </a:p>
@@ -548,8 +560,8 @@
         </p:nvSpPr>
         <p:spPr>
           <a:xfrm>
-            <a:off x="6629400" y="274638"/>
-            <a:ext cx="2057400" cy="5851525"/>
+            <a:off x="6026727" y="249671"/>
+            <a:ext cx="1870364" cy="5319568"/>
           </a:xfrm>
         </p:spPr>
         <p:txBody>
@@ -557,10 +569,9 @@
           <a:lstStyle/>
           <a:p>
             <a:r>
-              <a:rPr lang="en-US" smtClean="0"/>
+              <a:rPr lang="en-US"/>
               <a:t>Click to edit Master title style</a:t>
             </a:r>
-            <a:endParaRPr lang="en-US"/>
           </a:p>
         </p:txBody>
       </p:sp>
@@ -576,8 +587,8 @@
         </p:nvSpPr>
         <p:spPr>
           <a:xfrm>
-            <a:off x="457200" y="274638"/>
-            <a:ext cx="6019800" cy="5851525"/>
+            <a:off x="415637" y="249671"/>
+            <a:ext cx="5472545" cy="5319568"/>
           </a:xfrm>
         </p:spPr>
         <p:txBody>
@@ -586,38 +597,37 @@
           <a:p>
             <a:pPr lvl="0"/>
             <a:r>
-              <a:rPr lang="en-US" smtClean="0"/>
+              <a:rPr lang="en-US"/>
               <a:t>Click to edit Master text styles</a:t>
             </a:r>
           </a:p>
           <a:p>
             <a:pPr lvl="1"/>
             <a:r>
-              <a:rPr lang="en-US" smtClean="0"/>
+              <a:rPr lang="en-US"/>
               <a:t>Second level</a:t>
             </a:r>
           </a:p>
           <a:p>
             <a:pPr lvl="2"/>
             <a:r>
-              <a:rPr lang="en-US" smtClean="0"/>
+              <a:rPr lang="en-US"/>
               <a:t>Third level</a:t>
             </a:r>
           </a:p>
           <a:p>
             <a:pPr lvl="3"/>
             <a:r>
-              <a:rPr lang="en-US" smtClean="0"/>
+              <a:rPr lang="en-US"/>
               <a:t>Fourth level</a:t>
             </a:r>
           </a:p>
           <a:p>
             <a:pPr lvl="4"/>
             <a:r>
-              <a:rPr lang="en-US" smtClean="0"/>
+              <a:rPr lang="en-US"/>
               <a:t>Fifth level</a:t>
             </a:r>
-            <a:endParaRPr lang="en-US"/>
           </a:p>
         </p:txBody>
       </p:sp>
@@ -638,7 +648,7 @@
           <a:p>
             <a:fld id="{5BCAD085-E8A6-8845-BD4E-CB4CCA059FC4}" type="datetimeFigureOut">
               <a:rPr lang="en-US" smtClean="0"/>
-              <a:t>1/27/13</a:t>
+              <a:t>4/24/26</a:t>
             </a:fld>
             <a:endParaRPr lang="en-US"/>
           </a:p>
@@ -732,10 +742,9 @@
           <a:lstStyle/>
           <a:p>
             <a:r>
-              <a:rPr lang="en-US" smtClean="0"/>
+              <a:rPr lang="en-US"/>
               <a:t>Click to edit Master title style</a:t>
             </a:r>
-            <a:endParaRPr lang="en-US"/>
           </a:p>
         </p:txBody>
       </p:sp>
@@ -756,38 +765,37 @@
           <a:p>
             <a:pPr lvl="0"/>
             <a:r>
-              <a:rPr lang="en-US" smtClean="0"/>
+              <a:rPr lang="en-US"/>
               <a:t>Click to edit Master text styles</a:t>
             </a:r>
           </a:p>
           <a:p>
             <a:pPr lvl="1"/>
             <a:r>
-              <a:rPr lang="en-US" smtClean="0"/>
+              <a:rPr lang="en-US"/>
               <a:t>Second level</a:t>
             </a:r>
           </a:p>
           <a:p>
             <a:pPr lvl="2"/>
             <a:r>
-              <a:rPr lang="en-US" smtClean="0"/>
+              <a:rPr lang="en-US"/>
               <a:t>Third level</a:t>
             </a:r>
           </a:p>
           <a:p>
             <a:pPr lvl="3"/>
             <a:r>
-              <a:rPr lang="en-US" smtClean="0"/>
+              <a:rPr lang="en-US"/>
               <a:t>Fourth level</a:t>
             </a:r>
           </a:p>
           <a:p>
             <a:pPr lvl="4"/>
             <a:r>
-              <a:rPr lang="en-US" smtClean="0"/>
+              <a:rPr lang="en-US"/>
               <a:t>Fifth level</a:t>
             </a:r>
-            <a:endParaRPr lang="en-US"/>
           </a:p>
         </p:txBody>
       </p:sp>
@@ -808,7 +816,7 @@
           <a:p>
             <a:fld id="{5BCAD085-E8A6-8845-BD4E-CB4CCA059FC4}" type="datetimeFigureOut">
               <a:rPr lang="en-US" smtClean="0"/>
-              <a:t>1/27/13</a:t>
+              <a:t>4/24/26</a:t>
             </a:fld>
             <a:endParaRPr lang="en-US"/>
           </a:p>
@@ -898,23 +906,22 @@
         </p:nvSpPr>
         <p:spPr>
           <a:xfrm>
-            <a:off x="722313" y="4406900"/>
-            <a:ext cx="7772400" cy="1362075"/>
+            <a:off x="656648" y="4006273"/>
+            <a:ext cx="7065818" cy="1238250"/>
           </a:xfrm>
         </p:spPr>
         <p:txBody>
           <a:bodyPr anchor="t"/>
           <a:lstStyle>
             <a:lvl1pPr algn="l">
-              <a:defRPr sz="4000" b="1" cap="all"/>
+              <a:defRPr sz="3636" b="1" cap="all"/>
             </a:lvl1pPr>
           </a:lstStyle>
           <a:p>
             <a:r>
-              <a:rPr lang="en-US" smtClean="0"/>
+              <a:rPr lang="en-US"/>
               <a:t>Click to edit Master title style</a:t>
             </a:r>
-            <a:endParaRPr lang="en-US"/>
           </a:p>
         </p:txBody>
       </p:sp>
@@ -930,8 +937,8 @@
         </p:nvSpPr>
         <p:spPr>
           <a:xfrm>
-            <a:off x="722313" y="2906713"/>
-            <a:ext cx="7772400" cy="1500187"/>
+            <a:off x="656648" y="2642467"/>
+            <a:ext cx="7065818" cy="1363806"/>
           </a:xfrm>
         </p:spPr>
         <p:txBody>
@@ -939,7 +946,7 @@
           <a:lstStyle>
             <a:lvl1pPr marL="0" indent="0">
               <a:buNone/>
-              <a:defRPr sz="2000">
+              <a:defRPr sz="1818">
                 <a:solidFill>
                   <a:schemeClr val="tx1">
                     <a:tint val="75000"/>
@@ -947,9 +954,9 @@
                 </a:solidFill>
               </a:defRPr>
             </a:lvl1pPr>
-            <a:lvl2pPr marL="457200" indent="0">
-              <a:buNone/>
-              <a:defRPr sz="1800">
+            <a:lvl2pPr marL="415641" indent="0">
+              <a:buNone/>
+              <a:defRPr sz="1636">
                 <a:solidFill>
                   <a:schemeClr val="tx1">
                     <a:tint val="75000"/>
@@ -957,9 +964,9 @@
                 </a:solidFill>
               </a:defRPr>
             </a:lvl2pPr>
-            <a:lvl3pPr marL="914400" indent="0">
-              <a:buNone/>
-              <a:defRPr sz="1600">
+            <a:lvl3pPr marL="831281" indent="0">
+              <a:buNone/>
+              <a:defRPr sz="1455">
                 <a:solidFill>
                   <a:schemeClr val="tx1">
                     <a:tint val="75000"/>
@@ -967,9 +974,9 @@
                 </a:solidFill>
               </a:defRPr>
             </a:lvl3pPr>
-            <a:lvl4pPr marL="1371600" indent="0">
-              <a:buNone/>
-              <a:defRPr sz="1400">
+            <a:lvl4pPr marL="1246922" indent="0">
+              <a:buNone/>
+              <a:defRPr sz="1273">
                 <a:solidFill>
                   <a:schemeClr val="tx1">
                     <a:tint val="75000"/>
@@ -977,9 +984,9 @@
                 </a:solidFill>
               </a:defRPr>
             </a:lvl4pPr>
-            <a:lvl5pPr marL="1828800" indent="0">
-              <a:buNone/>
-              <a:defRPr sz="1400">
+            <a:lvl5pPr marL="1662562" indent="0">
+              <a:buNone/>
+              <a:defRPr sz="1273">
                 <a:solidFill>
                   <a:schemeClr val="tx1">
                     <a:tint val="75000"/>
@@ -987,9 +994,9 @@
                 </a:solidFill>
               </a:defRPr>
             </a:lvl5pPr>
-            <a:lvl6pPr marL="2286000" indent="0">
-              <a:buNone/>
-              <a:defRPr sz="1400">
+            <a:lvl6pPr marL="2078203" indent="0">
+              <a:buNone/>
+              <a:defRPr sz="1273">
                 <a:solidFill>
                   <a:schemeClr val="tx1">
                     <a:tint val="75000"/>
@@ -997,9 +1004,9 @@
                 </a:solidFill>
               </a:defRPr>
             </a:lvl6pPr>
-            <a:lvl7pPr marL="2743200" indent="0">
-              <a:buNone/>
-              <a:defRPr sz="1400">
+            <a:lvl7pPr marL="2493843" indent="0">
+              <a:buNone/>
+              <a:defRPr sz="1273">
                 <a:solidFill>
                   <a:schemeClr val="tx1">
                     <a:tint val="75000"/>
@@ -1007,9 +1014,9 @@
                 </a:solidFill>
               </a:defRPr>
             </a:lvl7pPr>
-            <a:lvl8pPr marL="3200400" indent="0">
-              <a:buNone/>
-              <a:defRPr sz="1400">
+            <a:lvl8pPr marL="2909484" indent="0">
+              <a:buNone/>
+              <a:defRPr sz="1273">
                 <a:solidFill>
                   <a:schemeClr val="tx1">
                     <a:tint val="75000"/>
@@ -1017,9 +1024,9 @@
                 </a:solidFill>
               </a:defRPr>
             </a:lvl8pPr>
-            <a:lvl9pPr marL="3657600" indent="0">
-              <a:buNone/>
-              <a:defRPr sz="1400">
+            <a:lvl9pPr marL="3325124" indent="0">
+              <a:buNone/>
+              <a:defRPr sz="1273">
                 <a:solidFill>
                   <a:schemeClr val="tx1">
                     <a:tint val="75000"/>
@@ -1031,7 +1038,7 @@
           <a:p>
             <a:pPr lvl="0"/>
             <a:r>
-              <a:rPr lang="en-US" smtClean="0"/>
+              <a:rPr lang="en-US"/>
               <a:t>Click to edit Master text styles</a:t>
             </a:r>
           </a:p>
@@ -1054,7 +1061,7 @@
           <a:p>
             <a:fld id="{5BCAD085-E8A6-8845-BD4E-CB4CCA059FC4}" type="datetimeFigureOut">
               <a:rPr lang="en-US" smtClean="0"/>
-              <a:t>1/27/13</a:t>
+              <a:t>4/24/26</a:t>
             </a:fld>
             <a:endParaRPr lang="en-US"/>
           </a:p>
@@ -1148,10 +1155,9 @@
           <a:lstStyle/>
           <a:p>
             <a:r>
-              <a:rPr lang="en-US" smtClean="0"/>
+              <a:rPr lang="en-US"/>
               <a:t>Click to edit Master title style</a:t>
             </a:r>
-            <a:endParaRPr lang="en-US"/>
           </a:p>
         </p:txBody>
       </p:sp>
@@ -1167,76 +1173,75 @@
         </p:nvSpPr>
         <p:spPr>
           <a:xfrm>
-            <a:off x="457200" y="1600200"/>
-            <a:ext cx="4038600" cy="4525963"/>
+            <a:off x="415636" y="1454728"/>
+            <a:ext cx="3671455" cy="4114512"/>
           </a:xfrm>
         </p:spPr>
         <p:txBody>
           <a:bodyPr/>
           <a:lstStyle>
             <a:lvl1pPr>
-              <a:defRPr sz="2800"/>
+              <a:defRPr sz="2545"/>
             </a:lvl1pPr>
             <a:lvl2pPr>
-              <a:defRPr sz="2400"/>
+              <a:defRPr sz="2182"/>
             </a:lvl2pPr>
             <a:lvl3pPr>
-              <a:defRPr sz="2000"/>
+              <a:defRPr sz="1818"/>
             </a:lvl3pPr>
             <a:lvl4pPr>
-              <a:defRPr sz="1800"/>
+              <a:defRPr sz="1636"/>
             </a:lvl4pPr>
             <a:lvl5pPr>
-              <a:defRPr sz="1800"/>
+              <a:defRPr sz="1636"/>
             </a:lvl5pPr>
             <a:lvl6pPr>
-              <a:defRPr sz="1800"/>
+              <a:defRPr sz="1636"/>
             </a:lvl6pPr>
             <a:lvl7pPr>
-              <a:defRPr sz="1800"/>
+              <a:defRPr sz="1636"/>
             </a:lvl7pPr>
             <a:lvl8pPr>
-              <a:defRPr sz="1800"/>
+              <a:defRPr sz="1636"/>
             </a:lvl8pPr>
             <a:lvl9pPr>
-              <a:defRPr sz="1800"/>
+              <a:defRPr sz="1636"/>
             </a:lvl9pPr>
           </a:lstStyle>
           <a:p>
             <a:pPr lvl="0"/>
             <a:r>
-              <a:rPr lang="en-US" smtClean="0"/>
+              <a:rPr lang="en-US"/>
               <a:t>Click to edit Master text styles</a:t>
             </a:r>
           </a:p>
           <a:p>
             <a:pPr lvl="1"/>
             <a:r>
-              <a:rPr lang="en-US" smtClean="0"/>
+              <a:rPr lang="en-US"/>
               <a:t>Second level</a:t>
             </a:r>
           </a:p>
           <a:p>
             <a:pPr lvl="2"/>
             <a:r>
-              <a:rPr lang="en-US" smtClean="0"/>
+              <a:rPr lang="en-US"/>
               <a:t>Third level</a:t>
             </a:r>
           </a:p>
           <a:p>
             <a:pPr lvl="3"/>
             <a:r>
-              <a:rPr lang="en-US" smtClean="0"/>
+              <a:rPr lang="en-US"/>
               <a:t>Fourth level</a:t>
             </a:r>
           </a:p>
           <a:p>
             <a:pPr lvl="4"/>
             <a:r>
-              <a:rPr lang="en-US" smtClean="0"/>
+              <a:rPr lang="en-US"/>
               <a:t>Fifth level</a:t>
             </a:r>
-            <a:endParaRPr lang="en-US"/>
           </a:p>
         </p:txBody>
       </p:sp>
@@ -1252,76 +1257,75 @@
         </p:nvSpPr>
         <p:spPr>
           <a:xfrm>
-            <a:off x="4648200" y="1600200"/>
-            <a:ext cx="4038600" cy="4525963"/>
+            <a:off x="4225636" y="1454728"/>
+            <a:ext cx="3671455" cy="4114512"/>
           </a:xfrm>
         </p:spPr>
         <p:txBody>
           <a:bodyPr/>
           <a:lstStyle>
             <a:lvl1pPr>
-              <a:defRPr sz="2800"/>
+              <a:defRPr sz="2545"/>
             </a:lvl1pPr>
             <a:lvl2pPr>
-              <a:defRPr sz="2400"/>
+              <a:defRPr sz="2182"/>
             </a:lvl2pPr>
             <a:lvl3pPr>
-              <a:defRPr sz="2000"/>
+              <a:defRPr sz="1818"/>
             </a:lvl3pPr>
             <a:lvl4pPr>
-              <a:defRPr sz="1800"/>
+              <a:defRPr sz="1636"/>
             </a:lvl4pPr>
             <a:lvl5pPr>
-              <a:defRPr sz="1800"/>
+              <a:defRPr sz="1636"/>
             </a:lvl5pPr>
             <a:lvl6pPr>
-              <a:defRPr sz="1800"/>
+              <a:defRPr sz="1636"/>
             </a:lvl6pPr>
             <a:lvl7pPr>
-              <a:defRPr sz="1800"/>
+              <a:defRPr sz="1636"/>
             </a:lvl7pPr>
             <a:lvl8pPr>
-              <a:defRPr sz="1800"/>
+              <a:defRPr sz="1636"/>
             </a:lvl8pPr>
             <a:lvl9pPr>
-              <a:defRPr sz="1800"/>
+              <a:defRPr sz="1636"/>
             </a:lvl9pPr>
           </a:lstStyle>
           <a:p>
             <a:pPr lvl="0"/>
             <a:r>
-              <a:rPr lang="en-US" smtClean="0"/>
+              <a:rPr lang="en-US"/>
               <a:t>Click to edit Master text styles</a:t>
             </a:r>
           </a:p>
           <a:p>
             <a:pPr lvl="1"/>
             <a:r>
-              <a:rPr lang="en-US" smtClean="0"/>
+              <a:rPr lang="en-US"/>
               <a:t>Second level</a:t>
             </a:r>
           </a:p>
           <a:p>
             <a:pPr lvl="2"/>
             <a:r>
-              <a:rPr lang="en-US" smtClean="0"/>
+              <a:rPr lang="en-US"/>
               <a:t>Third level</a:t>
             </a:r>
           </a:p>
           <a:p>
             <a:pPr lvl="3"/>
             <a:r>
-              <a:rPr lang="en-US" smtClean="0"/>
+              <a:rPr lang="en-US"/>
               <a:t>Fourth level</a:t>
             </a:r>
           </a:p>
           <a:p>
             <a:pPr lvl="4"/>
             <a:r>
-              <a:rPr lang="en-US" smtClean="0"/>
+              <a:rPr lang="en-US"/>
               <a:t>Fifth level</a:t>
             </a:r>
-            <a:endParaRPr lang="en-US"/>
           </a:p>
         </p:txBody>
       </p:sp>
@@ -1342,7 +1346,7 @@
           <a:p>
             <a:fld id="{5BCAD085-E8A6-8845-BD4E-CB4CCA059FC4}" type="datetimeFigureOut">
               <a:rPr lang="en-US" smtClean="0"/>
-              <a:t>1/27/13</a:t>
+              <a:t>4/24/26</a:t>
             </a:fld>
             <a:endParaRPr lang="en-US"/>
           </a:p>
@@ -1440,10 +1444,9 @@
           </a:lstStyle>
           <a:p>
             <a:r>
-              <a:rPr lang="en-US" smtClean="0"/>
+              <a:rPr lang="en-US"/>
               <a:t>Click to edit Master title style</a:t>
             </a:r>
-            <a:endParaRPr lang="en-US"/>
           </a:p>
         </p:txBody>
       </p:sp>
@@ -1459,8 +1462,8 @@
         </p:nvSpPr>
         <p:spPr>
           <a:xfrm>
-            <a:off x="457200" y="1535113"/>
-            <a:ext cx="4040188" cy="639762"/>
+            <a:off x="415636" y="1395557"/>
+            <a:ext cx="3672898" cy="581602"/>
           </a:xfrm>
         </p:spPr>
         <p:txBody>
@@ -1468,45 +1471,45 @@
           <a:lstStyle>
             <a:lvl1pPr marL="0" indent="0">
               <a:buNone/>
-              <a:defRPr sz="2400" b="1"/>
+              <a:defRPr sz="2182" b="1"/>
             </a:lvl1pPr>
-            <a:lvl2pPr marL="457200" indent="0">
-              <a:buNone/>
-              <a:defRPr sz="2000" b="1"/>
+            <a:lvl2pPr marL="415641" indent="0">
+              <a:buNone/>
+              <a:defRPr sz="1818" b="1"/>
             </a:lvl2pPr>
-            <a:lvl3pPr marL="914400" indent="0">
-              <a:buNone/>
-              <a:defRPr sz="1800" b="1"/>
+            <a:lvl3pPr marL="831281" indent="0">
+              <a:buNone/>
+              <a:defRPr sz="1636" b="1"/>
             </a:lvl3pPr>
-            <a:lvl4pPr marL="1371600" indent="0">
-              <a:buNone/>
-              <a:defRPr sz="1600" b="1"/>
+            <a:lvl4pPr marL="1246922" indent="0">
+              <a:buNone/>
+              <a:defRPr sz="1455" b="1"/>
             </a:lvl4pPr>
-            <a:lvl5pPr marL="1828800" indent="0">
-              <a:buNone/>
-              <a:defRPr sz="1600" b="1"/>
+            <a:lvl5pPr marL="1662562" indent="0">
+              <a:buNone/>
+              <a:defRPr sz="1455" b="1"/>
             </a:lvl5pPr>
-            <a:lvl6pPr marL="2286000" indent="0">
-              <a:buNone/>
-              <a:defRPr sz="1600" b="1"/>
+            <a:lvl6pPr marL="2078203" indent="0">
+              <a:buNone/>
+              <a:defRPr sz="1455" b="1"/>
             </a:lvl6pPr>
-            <a:lvl7pPr marL="2743200" indent="0">
-              <a:buNone/>
-              <a:defRPr sz="1600" b="1"/>
+            <a:lvl7pPr marL="2493843" indent="0">
+              <a:buNone/>
+              <a:defRPr sz="1455" b="1"/>
             </a:lvl7pPr>
-            <a:lvl8pPr marL="3200400" indent="0">
-              <a:buNone/>
-              <a:defRPr sz="1600" b="1"/>
+            <a:lvl8pPr marL="2909484" indent="0">
+              <a:buNone/>
+              <a:defRPr sz="1455" b="1"/>
             </a:lvl8pPr>
-            <a:lvl9pPr marL="3657600" indent="0">
-              <a:buNone/>
-              <a:defRPr sz="1600" b="1"/>
+            <a:lvl9pPr marL="3325124" indent="0">
+              <a:buNone/>
+              <a:defRPr sz="1455" b="1"/>
             </a:lvl9pPr>
           </a:lstStyle>
           <a:p>
             <a:pPr lvl="0"/>
             <a:r>
-              <a:rPr lang="en-US" smtClean="0"/>
+              <a:rPr lang="en-US"/>
               <a:t>Click to edit Master text styles</a:t>
             </a:r>
           </a:p>
@@ -1524,76 +1527,75 @@
         </p:nvSpPr>
         <p:spPr>
           <a:xfrm>
-            <a:off x="457200" y="2174875"/>
-            <a:ext cx="4040188" cy="3951288"/>
+            <a:off x="415636" y="1977159"/>
+            <a:ext cx="3672898" cy="3592080"/>
           </a:xfrm>
         </p:spPr>
         <p:txBody>
           <a:bodyPr/>
           <a:lstStyle>
             <a:lvl1pPr>
-              <a:defRPr sz="2400"/>
+              <a:defRPr sz="2182"/>
             </a:lvl1pPr>
             <a:lvl2pPr>
-              <a:defRPr sz="2000"/>
+              <a:defRPr sz="1818"/>
             </a:lvl2pPr>
             <a:lvl3pPr>
-              <a:defRPr sz="1800"/>
+              <a:defRPr sz="1636"/>
             </a:lvl3pPr>
             <a:lvl4pPr>
-              <a:defRPr sz="1600"/>
+              <a:defRPr sz="1455"/>
             </a:lvl4pPr>
             <a:lvl5pPr>
-              <a:defRPr sz="1600"/>
+              <a:defRPr sz="1455"/>
             </a:lvl5pPr>
             <a:lvl6pPr>
-              <a:defRPr sz="1600"/>
+              <a:defRPr sz="1455"/>
             </a:lvl6pPr>
             <a:lvl7pPr>
-              <a:defRPr sz="1600"/>
+              <a:defRPr sz="1455"/>
             </a:lvl7pPr>
             <a:lvl8pPr>
-              <a:defRPr sz="1600"/>
+              <a:defRPr sz="1455"/>
             </a:lvl8pPr>
             <a:lvl9pPr>
-              <a:defRPr sz="1600"/>
+              <a:defRPr sz="1455"/>
             </a:lvl9pPr>
           </a:lstStyle>
           <a:p>
             <a:pPr lvl="0"/>
             <a:r>
-              <a:rPr lang="en-US" smtClean="0"/>
+              <a:rPr lang="en-US"/>
               <a:t>Click to edit Master text styles</a:t>
             </a:r>
           </a:p>
           <a:p>
             <a:pPr lvl="1"/>
             <a:r>
-              <a:rPr lang="en-US" smtClean="0"/>
+              <a:rPr lang="en-US"/>
               <a:t>Second level</a:t>
             </a:r>
           </a:p>
           <a:p>
             <a:pPr lvl="2"/>
             <a:r>
-              <a:rPr lang="en-US" smtClean="0"/>
+              <a:rPr lang="en-US"/>
               <a:t>Third level</a:t>
             </a:r>
           </a:p>
           <a:p>
             <a:pPr lvl="3"/>
             <a:r>
-              <a:rPr lang="en-US" smtClean="0"/>
+              <a:rPr lang="en-US"/>
               <a:t>Fourth level</a:t>
             </a:r>
           </a:p>
           <a:p>
             <a:pPr lvl="4"/>
             <a:r>
-              <a:rPr lang="en-US" smtClean="0"/>
+              <a:rPr lang="en-US"/>
               <a:t>Fifth level</a:t>
             </a:r>
-            <a:endParaRPr lang="en-US"/>
           </a:p>
         </p:txBody>
       </p:sp>
@@ -1609,8 +1611,8 @@
         </p:nvSpPr>
         <p:spPr>
           <a:xfrm>
-            <a:off x="4645025" y="1535113"/>
-            <a:ext cx="4041775" cy="639762"/>
+            <a:off x="4222750" y="1395557"/>
+            <a:ext cx="3674341" cy="581602"/>
           </a:xfrm>
         </p:spPr>
         <p:txBody>
@@ -1618,45 +1620,45 @@
           <a:lstStyle>
             <a:lvl1pPr marL="0" indent="0">
               <a:buNone/>
-              <a:defRPr sz="2400" b="1"/>
+              <a:defRPr sz="2182" b="1"/>
             </a:lvl1pPr>
-            <a:lvl2pPr marL="457200" indent="0">
-              <a:buNone/>
-              <a:defRPr sz="2000" b="1"/>
+            <a:lvl2pPr marL="415641" indent="0">
+              <a:buNone/>
+              <a:defRPr sz="1818" b="1"/>
             </a:lvl2pPr>
-            <a:lvl3pPr marL="914400" indent="0">
-              <a:buNone/>
-              <a:defRPr sz="1800" b="1"/>
+            <a:lvl3pPr marL="831281" indent="0">
+              <a:buNone/>
+              <a:defRPr sz="1636" b="1"/>
             </a:lvl3pPr>
-            <a:lvl4pPr marL="1371600" indent="0">
-              <a:buNone/>
-              <a:defRPr sz="1600" b="1"/>
+            <a:lvl4pPr marL="1246922" indent="0">
+              <a:buNone/>
+              <a:defRPr sz="1455" b="1"/>
             </a:lvl4pPr>
-            <a:lvl5pPr marL="1828800" indent="0">
-              <a:buNone/>
-              <a:defRPr sz="1600" b="1"/>
+            <a:lvl5pPr marL="1662562" indent="0">
+              <a:buNone/>
+              <a:defRPr sz="1455" b="1"/>
             </a:lvl5pPr>
-            <a:lvl6pPr marL="2286000" indent="0">
-              <a:buNone/>
-              <a:defRPr sz="1600" b="1"/>
+            <a:lvl6pPr marL="2078203" indent="0">
+              <a:buNone/>
+              <a:defRPr sz="1455" b="1"/>
             </a:lvl6pPr>
-            <a:lvl7pPr marL="2743200" indent="0">
-              <a:buNone/>
-              <a:defRPr sz="1600" b="1"/>
+            <a:lvl7pPr marL="2493843" indent="0">
+              <a:buNone/>
+              <a:defRPr sz="1455" b="1"/>
             </a:lvl7pPr>
-            <a:lvl8pPr marL="3200400" indent="0">
-              <a:buNone/>
-              <a:defRPr sz="1600" b="1"/>
+            <a:lvl8pPr marL="2909484" indent="0">
+              <a:buNone/>
+              <a:defRPr sz="1455" b="1"/>
             </a:lvl8pPr>
-            <a:lvl9pPr marL="3657600" indent="0">
-              <a:buNone/>
-              <a:defRPr sz="1600" b="1"/>
+            <a:lvl9pPr marL="3325124" indent="0">
+              <a:buNone/>
+              <a:defRPr sz="1455" b="1"/>
             </a:lvl9pPr>
           </a:lstStyle>
           <a:p>
             <a:pPr lvl="0"/>
             <a:r>
-              <a:rPr lang="en-US" smtClean="0"/>
+              <a:rPr lang="en-US"/>
               <a:t>Click to edit Master text styles</a:t>
             </a:r>
           </a:p>
@@ -1674,76 +1676,75 @@
         </p:nvSpPr>
         <p:spPr>
           <a:xfrm>
-            <a:off x="4645025" y="2174875"/>
-            <a:ext cx="4041775" cy="3951288"/>
+            <a:off x="4222750" y="1977159"/>
+            <a:ext cx="3674341" cy="3592080"/>
           </a:xfrm>
         </p:spPr>
         <p:txBody>
           <a:bodyPr/>
           <a:lstStyle>
             <a:lvl1pPr>
-              <a:defRPr sz="2400"/>
+              <a:defRPr sz="2182"/>
             </a:lvl1pPr>
             <a:lvl2pPr>
-              <a:defRPr sz="2000"/>
+              <a:defRPr sz="1818"/>
             </a:lvl2pPr>
             <a:lvl3pPr>
-              <a:defRPr sz="1800"/>
+              <a:defRPr sz="1636"/>
             </a:lvl3pPr>
             <a:lvl4pPr>
-              <a:defRPr sz="1600"/>
+              <a:defRPr sz="1455"/>
             </a:lvl4pPr>
             <a:lvl5pPr>
-              <a:defRPr sz="1600"/>
+              <a:defRPr sz="1455"/>
             </a:lvl5pPr>
             <a:lvl6pPr>
-              <a:defRPr sz="1600"/>
+              <a:defRPr sz="1455"/>
             </a:lvl6pPr>
             <a:lvl7pPr>
-              <a:defRPr sz="1600"/>
+              <a:defRPr sz="1455"/>
             </a:lvl7pPr>
             <a:lvl8pPr>
-              <a:defRPr sz="1600"/>
+              <a:defRPr sz="1455"/>
             </a:lvl8pPr>
             <a:lvl9pPr>
-              <a:defRPr sz="1600"/>
+              <a:defRPr sz="1455"/>
             </a:lvl9pPr>
           </a:lstStyle>
           <a:p>
             <a:pPr lvl="0"/>
             <a:r>
-              <a:rPr lang="en-US" smtClean="0"/>
+              <a:rPr lang="en-US"/>
               <a:t>Click to edit Master text styles</a:t>
             </a:r>
           </a:p>
           <a:p>
             <a:pPr lvl="1"/>
             <a:r>
-              <a:rPr lang="en-US" smtClean="0"/>
+              <a:rPr lang="en-US"/>
               <a:t>Second level</a:t>
             </a:r>
           </a:p>
           <a:p>
             <a:pPr lvl="2"/>
             <a:r>
-              <a:rPr lang="en-US" smtClean="0"/>
+              <a:rPr lang="en-US"/>
               <a:t>Third level</a:t>
             </a:r>
           </a:p>
           <a:p>
             <a:pPr lvl="3"/>
             <a:r>
-              <a:rPr lang="en-US" smtClean="0"/>
+              <a:rPr lang="en-US"/>
               <a:t>Fourth level</a:t>
             </a:r>
           </a:p>
           <a:p>
             <a:pPr lvl="4"/>
             <a:r>
-              <a:rPr lang="en-US" smtClean="0"/>
+              <a:rPr lang="en-US"/>
               <a:t>Fifth level</a:t>
             </a:r>
-            <a:endParaRPr lang="en-US"/>
           </a:p>
         </p:txBody>
       </p:sp>
@@ -1764,7 +1765,7 @@
           <a:p>
             <a:fld id="{5BCAD085-E8A6-8845-BD4E-CB4CCA059FC4}" type="datetimeFigureOut">
               <a:rPr lang="en-US" smtClean="0"/>
-              <a:t>1/27/13</a:t>
+              <a:t>4/24/26</a:t>
             </a:fld>
             <a:endParaRPr lang="en-US"/>
           </a:p>
@@ -1858,10 +1859,9 @@
           <a:lstStyle/>
           <a:p>
             <a:r>
-              <a:rPr lang="en-US" smtClean="0"/>
+              <a:rPr lang="en-US"/>
               <a:t>Click to edit Master title style</a:t>
             </a:r>
-            <a:endParaRPr lang="en-US"/>
           </a:p>
         </p:txBody>
       </p:sp>
@@ -1882,7 +1882,7 @@
           <a:p>
             <a:fld id="{5BCAD085-E8A6-8845-BD4E-CB4CCA059FC4}" type="datetimeFigureOut">
               <a:rPr lang="en-US" smtClean="0"/>
-              <a:t>1/27/13</a:t>
+              <a:t>4/24/26</a:t>
             </a:fld>
             <a:endParaRPr lang="en-US"/>
           </a:p>
@@ -1977,7 +1977,7 @@
           <a:p>
             <a:fld id="{5BCAD085-E8A6-8845-BD4E-CB4CCA059FC4}" type="datetimeFigureOut">
               <a:rPr lang="en-US" smtClean="0"/>
-              <a:t>1/27/13</a:t>
+              <a:t>4/24/26</a:t>
             </a:fld>
             <a:endParaRPr lang="en-US"/>
           </a:p>
@@ -2067,23 +2067,22 @@
         </p:nvSpPr>
         <p:spPr>
           <a:xfrm>
-            <a:off x="457200" y="273050"/>
-            <a:ext cx="3008313" cy="1162050"/>
+            <a:off x="415637" y="248227"/>
+            <a:ext cx="2734830" cy="1056409"/>
           </a:xfrm>
         </p:spPr>
         <p:txBody>
           <a:bodyPr anchor="b"/>
           <a:lstStyle>
             <a:lvl1pPr algn="l">
-              <a:defRPr sz="2000" b="1"/>
+              <a:defRPr sz="1818" b="1"/>
             </a:lvl1pPr>
           </a:lstStyle>
           <a:p>
             <a:r>
-              <a:rPr lang="en-US" smtClean="0"/>
+              <a:rPr lang="en-US"/>
               <a:t>Click to edit Master title style</a:t>
             </a:r>
-            <a:endParaRPr lang="en-US"/>
           </a:p>
         </p:txBody>
       </p:sp>
@@ -2099,76 +2098,75 @@
         </p:nvSpPr>
         <p:spPr>
           <a:xfrm>
-            <a:off x="3575050" y="273050"/>
-            <a:ext cx="5111750" cy="5853113"/>
+            <a:off x="3250046" y="248228"/>
+            <a:ext cx="4647045" cy="5321012"/>
           </a:xfrm>
         </p:spPr>
         <p:txBody>
           <a:bodyPr/>
           <a:lstStyle>
             <a:lvl1pPr>
-              <a:defRPr sz="3200"/>
+              <a:defRPr sz="2909"/>
             </a:lvl1pPr>
             <a:lvl2pPr>
-              <a:defRPr sz="2800"/>
+              <a:defRPr sz="2545"/>
             </a:lvl2pPr>
             <a:lvl3pPr>
-              <a:defRPr sz="2400"/>
+              <a:defRPr sz="2182"/>
             </a:lvl3pPr>
             <a:lvl4pPr>
-              <a:defRPr sz="2000"/>
+              <a:defRPr sz="1818"/>
             </a:lvl4pPr>
             <a:lvl5pPr>
-              <a:defRPr sz="2000"/>
+              <a:defRPr sz="1818"/>
             </a:lvl5pPr>
             <a:lvl6pPr>
-              <a:defRPr sz="2000"/>
+              <a:defRPr sz="1818"/>
             </a:lvl6pPr>
             <a:lvl7pPr>
-              <a:defRPr sz="2000"/>
+              <a:defRPr sz="1818"/>
             </a:lvl7pPr>
             <a:lvl8pPr>
-              <a:defRPr sz="2000"/>
+              <a:defRPr sz="1818"/>
             </a:lvl8pPr>
             <a:lvl9pPr>
-              <a:defRPr sz="2000"/>
+              <a:defRPr sz="1818"/>
             </a:lvl9pPr>
           </a:lstStyle>
           <a:p>
             <a:pPr lvl="0"/>
             <a:r>
-              <a:rPr lang="en-US" smtClean="0"/>
+              <a:rPr lang="en-US"/>
               <a:t>Click to edit Master text styles</a:t>
             </a:r>
           </a:p>
           <a:p>
             <a:pPr lvl="1"/>
             <a:r>
-              <a:rPr lang="en-US" smtClean="0"/>
+              <a:rPr lang="en-US"/>
               <a:t>Second level</a:t>
             </a:r>
           </a:p>
           <a:p>
             <a:pPr lvl="2"/>
             <a:r>
-              <a:rPr lang="en-US" smtClean="0"/>
+              <a:rPr lang="en-US"/>
               <a:t>Third level</a:t>
             </a:r>
           </a:p>
           <a:p>
             <a:pPr lvl="3"/>
             <a:r>
-              <a:rPr lang="en-US" smtClean="0"/>
+              <a:rPr lang="en-US"/>
               <a:t>Fourth level</a:t>
             </a:r>
           </a:p>
           <a:p>
             <a:pPr lvl="4"/>
             <a:r>
-              <a:rPr lang="en-US" smtClean="0"/>
+              <a:rPr lang="en-US"/>
               <a:t>Fifth level</a:t>
             </a:r>
-            <a:endParaRPr lang="en-US"/>
           </a:p>
         </p:txBody>
       </p:sp>
@@ -2184,8 +2182,8 @@
         </p:nvSpPr>
         <p:spPr>
           <a:xfrm>
-            <a:off x="457200" y="1435100"/>
-            <a:ext cx="3008313" cy="4691063"/>
+            <a:off x="415637" y="1304637"/>
+            <a:ext cx="2734830" cy="4264603"/>
           </a:xfrm>
         </p:spPr>
         <p:txBody>
@@ -2193,45 +2191,45 @@
           <a:lstStyle>
             <a:lvl1pPr marL="0" indent="0">
               <a:buNone/>
-              <a:defRPr sz="1400"/>
+              <a:defRPr sz="1273"/>
             </a:lvl1pPr>
-            <a:lvl2pPr marL="457200" indent="0">
-              <a:buNone/>
-              <a:defRPr sz="1200"/>
+            <a:lvl2pPr marL="415641" indent="0">
+              <a:buNone/>
+              <a:defRPr sz="1091"/>
             </a:lvl2pPr>
-            <a:lvl3pPr marL="914400" indent="0">
-              <a:buNone/>
-              <a:defRPr sz="1000"/>
+            <a:lvl3pPr marL="831281" indent="0">
+              <a:buNone/>
+              <a:defRPr sz="909"/>
             </a:lvl3pPr>
-            <a:lvl4pPr marL="1371600" indent="0">
-              <a:buNone/>
-              <a:defRPr sz="900"/>
+            <a:lvl4pPr marL="1246922" indent="0">
+              <a:buNone/>
+              <a:defRPr sz="818"/>
             </a:lvl4pPr>
-            <a:lvl5pPr marL="1828800" indent="0">
-              <a:buNone/>
-              <a:defRPr sz="900"/>
+            <a:lvl5pPr marL="1662562" indent="0">
+              <a:buNone/>
+              <a:defRPr sz="818"/>
             </a:lvl5pPr>
-            <a:lvl6pPr marL="2286000" indent="0">
-              <a:buNone/>
-              <a:defRPr sz="900"/>
+            <a:lvl6pPr marL="2078203" indent="0">
+              <a:buNone/>
+              <a:defRPr sz="818"/>
             </a:lvl6pPr>
-            <a:lvl7pPr marL="2743200" indent="0">
-              <a:buNone/>
-              <a:defRPr sz="900"/>
+            <a:lvl7pPr marL="2493843" indent="0">
+              <a:buNone/>
+              <a:defRPr sz="818"/>
             </a:lvl7pPr>
-            <a:lvl8pPr marL="3200400" indent="0">
-              <a:buNone/>
-              <a:defRPr sz="900"/>
+            <a:lvl8pPr marL="2909484" indent="0">
+              <a:buNone/>
+              <a:defRPr sz="818"/>
             </a:lvl8pPr>
-            <a:lvl9pPr marL="3657600" indent="0">
-              <a:buNone/>
-              <a:defRPr sz="900"/>
+            <a:lvl9pPr marL="3325124" indent="0">
+              <a:buNone/>
+              <a:defRPr sz="818"/>
             </a:lvl9pPr>
           </a:lstStyle>
           <a:p>
             <a:pPr lvl="0"/>
             <a:r>
-              <a:rPr lang="en-US" smtClean="0"/>
+              <a:rPr lang="en-US"/>
               <a:t>Click to edit Master text styles</a:t>
             </a:r>
           </a:p>
@@ -2254,7 +2252,7 @@
           <a:p>
             <a:fld id="{5BCAD085-E8A6-8845-BD4E-CB4CCA059FC4}" type="datetimeFigureOut">
               <a:rPr lang="en-US" smtClean="0"/>
-              <a:t>1/27/13</a:t>
+              <a:t>4/24/26</a:t>
             </a:fld>
             <a:endParaRPr lang="en-US"/>
           </a:p>
@@ -2344,23 +2342,22 @@
         </p:nvSpPr>
         <p:spPr>
           <a:xfrm>
-            <a:off x="1792288" y="4800600"/>
-            <a:ext cx="5486400" cy="566738"/>
+            <a:off x="1629353" y="4364182"/>
+            <a:ext cx="4987636" cy="515216"/>
           </a:xfrm>
         </p:spPr>
         <p:txBody>
           <a:bodyPr anchor="b"/>
           <a:lstStyle>
             <a:lvl1pPr algn="l">
-              <a:defRPr sz="2000" b="1"/>
+              <a:defRPr sz="1818" b="1"/>
             </a:lvl1pPr>
           </a:lstStyle>
           <a:p>
             <a:r>
-              <a:rPr lang="en-US" smtClean="0"/>
+              <a:rPr lang="en-US"/>
               <a:t>Click to edit Master title style</a:t>
             </a:r>
-            <a:endParaRPr lang="en-US"/>
           </a:p>
         </p:txBody>
       </p:sp>
@@ -2376,8 +2373,8 @@
         </p:nvSpPr>
         <p:spPr>
           <a:xfrm>
-            <a:off x="1792288" y="612775"/>
-            <a:ext cx="5486400" cy="4114800"/>
+            <a:off x="1629353" y="557068"/>
+            <a:ext cx="4987636" cy="3740727"/>
           </a:xfrm>
         </p:spPr>
         <p:txBody>
@@ -2385,39 +2382,39 @@
           <a:lstStyle>
             <a:lvl1pPr marL="0" indent="0">
               <a:buNone/>
-              <a:defRPr sz="3200"/>
+              <a:defRPr sz="2909"/>
             </a:lvl1pPr>
-            <a:lvl2pPr marL="457200" indent="0">
-              <a:buNone/>
-              <a:defRPr sz="2800"/>
+            <a:lvl2pPr marL="415641" indent="0">
+              <a:buNone/>
+              <a:defRPr sz="2545"/>
             </a:lvl2pPr>
-            <a:lvl3pPr marL="914400" indent="0">
-              <a:buNone/>
-              <a:defRPr sz="2400"/>
+            <a:lvl3pPr marL="831281" indent="0">
+              <a:buNone/>
+              <a:defRPr sz="2182"/>
             </a:lvl3pPr>
-            <a:lvl4pPr marL="1371600" indent="0">
-              <a:buNone/>
-              <a:defRPr sz="2000"/>
+            <a:lvl4pPr marL="1246922" indent="0">
+              <a:buNone/>
+              <a:defRPr sz="1818"/>
             </a:lvl4pPr>
-            <a:lvl5pPr marL="1828800" indent="0">
-              <a:buNone/>
-              <a:defRPr sz="2000"/>
+            <a:lvl5pPr marL="1662562" indent="0">
+              <a:buNone/>
+              <a:defRPr sz="1818"/>
             </a:lvl5pPr>
-            <a:lvl6pPr marL="2286000" indent="0">
-              <a:buNone/>
-              <a:defRPr sz="2000"/>
+            <a:lvl6pPr marL="2078203" indent="0">
+              <a:buNone/>
+              <a:defRPr sz="1818"/>
             </a:lvl6pPr>
-            <a:lvl7pPr marL="2743200" indent="0">
-              <a:buNone/>
-              <a:defRPr sz="2000"/>
+            <a:lvl7pPr marL="2493843" indent="0">
+              <a:buNone/>
+              <a:defRPr sz="1818"/>
             </a:lvl7pPr>
-            <a:lvl8pPr marL="3200400" indent="0">
-              <a:buNone/>
-              <a:defRPr sz="2000"/>
+            <a:lvl8pPr marL="2909484" indent="0">
+              <a:buNone/>
+              <a:defRPr sz="1818"/>
             </a:lvl8pPr>
-            <a:lvl9pPr marL="3657600" indent="0">
-              <a:buNone/>
-              <a:defRPr sz="2000"/>
+            <a:lvl9pPr marL="3325124" indent="0">
+              <a:buNone/>
+              <a:defRPr sz="1818"/>
             </a:lvl9pPr>
           </a:lstStyle>
           <a:p>
@@ -2437,8 +2434,8 @@
         </p:nvSpPr>
         <p:spPr>
           <a:xfrm>
-            <a:off x="1792288" y="5367338"/>
-            <a:ext cx="5486400" cy="804862"/>
+            <a:off x="1629353" y="4879398"/>
+            <a:ext cx="4987636" cy="731693"/>
           </a:xfrm>
         </p:spPr>
         <p:txBody>
@@ -2446,45 +2443,45 @@
           <a:lstStyle>
             <a:lvl1pPr marL="0" indent="0">
               <a:buNone/>
-              <a:defRPr sz="1400"/>
+              <a:defRPr sz="1273"/>
             </a:lvl1pPr>
-            <a:lvl2pPr marL="457200" indent="0">
-              <a:buNone/>
-              <a:defRPr sz="1200"/>
+            <a:lvl2pPr marL="415641" indent="0">
+              <a:buNone/>
+              <a:defRPr sz="1091"/>
             </a:lvl2pPr>
-            <a:lvl3pPr marL="914400" indent="0">
-              <a:buNone/>
-              <a:defRPr sz="1000"/>
+            <a:lvl3pPr marL="831281" indent="0">
+              <a:buNone/>
+              <a:defRPr sz="909"/>
             </a:lvl3pPr>
-            <a:lvl4pPr marL="1371600" indent="0">
-              <a:buNone/>
-              <a:defRPr sz="900"/>
+            <a:lvl4pPr marL="1246922" indent="0">
+              <a:buNone/>
+              <a:defRPr sz="818"/>
             </a:lvl4pPr>
-            <a:lvl5pPr marL="1828800" indent="0">
-              <a:buNone/>
-              <a:defRPr sz="900"/>
+            <a:lvl5pPr marL="1662562" indent="0">
+              <a:buNone/>
+              <a:defRPr sz="818"/>
             </a:lvl5pPr>
-            <a:lvl6pPr marL="2286000" indent="0">
-              <a:buNone/>
-              <a:defRPr sz="900"/>
+            <a:lvl6pPr marL="2078203" indent="0">
+              <a:buNone/>
+              <a:defRPr sz="818"/>
             </a:lvl6pPr>
-            <a:lvl7pPr marL="2743200" indent="0">
-              <a:buNone/>
-              <a:defRPr sz="900"/>
+            <a:lvl7pPr marL="2493843" indent="0">
+              <a:buNone/>
+              <a:defRPr sz="818"/>
             </a:lvl7pPr>
-            <a:lvl8pPr marL="3200400" indent="0">
-              <a:buNone/>
-              <a:defRPr sz="900"/>
+            <a:lvl8pPr marL="2909484" indent="0">
+              <a:buNone/>
+              <a:defRPr sz="818"/>
             </a:lvl8pPr>
-            <a:lvl9pPr marL="3657600" indent="0">
-              <a:buNone/>
-              <a:defRPr sz="900"/>
+            <a:lvl9pPr marL="3325124" indent="0">
+              <a:buNone/>
+              <a:defRPr sz="818"/>
             </a:lvl9pPr>
           </a:lstStyle>
           <a:p>
             <a:pPr lvl="0"/>
             <a:r>
-              <a:rPr lang="en-US" smtClean="0"/>
+              <a:rPr lang="en-US"/>
               <a:t>Click to edit Master text styles</a:t>
             </a:r>
           </a:p>
@@ -2507,7 +2504,7 @@
           <a:p>
             <a:fld id="{5BCAD085-E8A6-8845-BD4E-CB4CCA059FC4}" type="datetimeFigureOut">
               <a:rPr lang="en-US" smtClean="0"/>
-              <a:t>1/27/13</a:t>
+              <a:t>4/24/26</a:t>
             </a:fld>
             <a:endParaRPr lang="en-US"/>
           </a:p>
@@ -2602,8 +2599,8 @@
         </p:nvSpPr>
         <p:spPr>
           <a:xfrm>
-            <a:off x="457200" y="274638"/>
-            <a:ext cx="8229600" cy="1143000"/>
+            <a:off x="415636" y="249671"/>
+            <a:ext cx="7481455" cy="1039091"/>
           </a:xfrm>
           <a:prstGeom prst="rect">
             <a:avLst/>
@@ -2616,10 +2613,9 @@
           <a:lstStyle/>
           <a:p>
             <a:r>
-              <a:rPr lang="en-US" smtClean="0"/>
+              <a:rPr lang="en-US"/>
               <a:t>Click to edit Master title style</a:t>
             </a:r>
-            <a:endParaRPr lang="en-US"/>
           </a:p>
         </p:txBody>
       </p:sp>
@@ -2635,8 +2631,8 @@
         </p:nvSpPr>
         <p:spPr>
           <a:xfrm>
-            <a:off x="457200" y="1600200"/>
-            <a:ext cx="8229600" cy="4525963"/>
+            <a:off x="415636" y="1454728"/>
+            <a:ext cx="7481455" cy="4114512"/>
           </a:xfrm>
           <a:prstGeom prst="rect">
             <a:avLst/>
@@ -2650,38 +2646,37 @@
           <a:p>
             <a:pPr lvl="0"/>
             <a:r>
-              <a:rPr lang="en-US" smtClean="0"/>
+              <a:rPr lang="en-US"/>
               <a:t>Click to edit Master text styles</a:t>
             </a:r>
           </a:p>
           <a:p>
             <a:pPr lvl="1"/>
             <a:r>
-              <a:rPr lang="en-US" smtClean="0"/>
+              <a:rPr lang="en-US"/>
               <a:t>Second level</a:t>
             </a:r>
           </a:p>
           <a:p>
             <a:pPr lvl="2"/>
             <a:r>
-              <a:rPr lang="en-US" smtClean="0"/>
+              <a:rPr lang="en-US"/>
               <a:t>Third level</a:t>
             </a:r>
           </a:p>
           <a:p>
             <a:pPr lvl="3"/>
             <a:r>
-              <a:rPr lang="en-US" smtClean="0"/>
+              <a:rPr lang="en-US"/>
               <a:t>Fourth level</a:t>
             </a:r>
           </a:p>
           <a:p>
             <a:pPr lvl="4"/>
             <a:r>
-              <a:rPr lang="en-US" smtClean="0"/>
+              <a:rPr lang="en-US"/>
               <a:t>Fifth level</a:t>
             </a:r>
-            <a:endParaRPr lang="en-US"/>
           </a:p>
         </p:txBody>
       </p:sp>
@@ -2697,8 +2692,8 @@
         </p:nvSpPr>
         <p:spPr>
           <a:xfrm>
-            <a:off x="457200" y="6356350"/>
-            <a:ext cx="2133600" cy="365125"/>
+            <a:off x="415637" y="5778500"/>
+            <a:ext cx="1939636" cy="331932"/>
           </a:xfrm>
           <a:prstGeom prst="rect">
             <a:avLst/>
@@ -2708,7 +2703,7 @@
           <a:bodyPr vert="horz" lIns="91440" tIns="45720" rIns="91440" bIns="45720" rtlCol="0" anchor="ctr"/>
           <a:lstStyle>
             <a:lvl1pPr algn="l">
-              <a:defRPr sz="1200">
+              <a:defRPr sz="1091">
                 <a:solidFill>
                   <a:schemeClr val="tx1">
                     <a:tint val="75000"/>
@@ -2720,7 +2715,7 @@
           <a:p>
             <a:fld id="{5BCAD085-E8A6-8845-BD4E-CB4CCA059FC4}" type="datetimeFigureOut">
               <a:rPr lang="en-US" smtClean="0"/>
-              <a:t>1/27/13</a:t>
+              <a:t>4/24/26</a:t>
             </a:fld>
             <a:endParaRPr lang="en-US"/>
           </a:p>
@@ -2738,8 +2733,8 @@
         </p:nvSpPr>
         <p:spPr>
           <a:xfrm>
-            <a:off x="3124200" y="6356350"/>
-            <a:ext cx="2895600" cy="365125"/>
+            <a:off x="2840182" y="5778500"/>
+            <a:ext cx="2632364" cy="331932"/>
           </a:xfrm>
           <a:prstGeom prst="rect">
             <a:avLst/>
@@ -2749,7 +2744,7 @@
           <a:bodyPr vert="horz" lIns="91440" tIns="45720" rIns="91440" bIns="45720" rtlCol="0" anchor="ctr"/>
           <a:lstStyle>
             <a:lvl1pPr algn="ctr">
-              <a:defRPr sz="1200">
+              <a:defRPr sz="1091">
                 <a:solidFill>
                   <a:schemeClr val="tx1">
                     <a:tint val="75000"/>
@@ -2775,8 +2770,8 @@
         </p:nvSpPr>
         <p:spPr>
           <a:xfrm>
-            <a:off x="6553200" y="6356350"/>
-            <a:ext cx="2133600" cy="365125"/>
+            <a:off x="5957455" y="5778500"/>
+            <a:ext cx="1939636" cy="331932"/>
           </a:xfrm>
           <a:prstGeom prst="rect">
             <a:avLst/>
@@ -2786,7 +2781,7 @@
           <a:bodyPr vert="horz" lIns="91440" tIns="45720" rIns="91440" bIns="45720" rtlCol="0" anchor="ctr"/>
           <a:lstStyle>
             <a:lvl1pPr algn="r">
-              <a:defRPr sz="1200">
+              <a:defRPr sz="1091">
                 <a:solidFill>
                   <a:schemeClr val="tx1">
                     <a:tint val="75000"/>
@@ -2827,12 +2822,12 @@
   </p:sldLayoutIdLst>
   <p:txStyles>
     <p:titleStyle>
-      <a:lvl1pPr algn="ctr" defTabSz="457200" rtl="0" eaLnBrk="1" latinLnBrk="0" hangingPunct="1">
+      <a:lvl1pPr algn="ctr" defTabSz="415641" rtl="0" eaLnBrk="1" latinLnBrk="0" hangingPunct="1">
         <a:spcBef>
           <a:spcPct val="0"/>
         </a:spcBef>
         <a:buNone/>
-        <a:defRPr sz="4400" kern="1200">
+        <a:defRPr sz="4000" kern="1200">
           <a:solidFill>
             <a:schemeClr val="tx1"/>
           </a:solidFill>
@@ -2843,13 +2838,13 @@
       </a:lvl1pPr>
     </p:titleStyle>
     <p:bodyStyle>
-      <a:lvl1pPr marL="342900" indent="-342900" algn="l" defTabSz="457200" rtl="0" eaLnBrk="1" latinLnBrk="0" hangingPunct="1">
+      <a:lvl1pPr marL="311730" indent="-311730" algn="l" defTabSz="415641" rtl="0" eaLnBrk="1" latinLnBrk="0" hangingPunct="1">
         <a:spcBef>
           <a:spcPct val="20000"/>
         </a:spcBef>
         <a:buFont typeface="Arial"/>
         <a:buChar char="•"/>
-        <a:defRPr sz="3200" kern="1200">
+        <a:defRPr sz="2909" kern="1200">
           <a:solidFill>
             <a:schemeClr val="tx1"/>
           </a:solidFill>
@@ -2858,13 +2853,13 @@
           <a:cs typeface="+mn-cs"/>
         </a:defRPr>
       </a:lvl1pPr>
-      <a:lvl2pPr marL="742950" indent="-285750" algn="l" defTabSz="457200" rtl="0" eaLnBrk="1" latinLnBrk="0" hangingPunct="1">
+      <a:lvl2pPr marL="675416" indent="-259775" algn="l" defTabSz="415641" rtl="0" eaLnBrk="1" latinLnBrk="0" hangingPunct="1">
         <a:spcBef>
           <a:spcPct val="20000"/>
         </a:spcBef>
         <a:buFont typeface="Arial"/>
         <a:buChar char="–"/>
-        <a:defRPr sz="2800" kern="1200">
+        <a:defRPr sz="2545" kern="1200">
           <a:solidFill>
             <a:schemeClr val="tx1"/>
           </a:solidFill>
@@ -2873,13 +2868,13 @@
           <a:cs typeface="+mn-cs"/>
         </a:defRPr>
       </a:lvl2pPr>
-      <a:lvl3pPr marL="1143000" indent="-228600" algn="l" defTabSz="457200" rtl="0" eaLnBrk="1" latinLnBrk="0" hangingPunct="1">
+      <a:lvl3pPr marL="1039101" indent="-207820" algn="l" defTabSz="415641" rtl="0" eaLnBrk="1" latinLnBrk="0" hangingPunct="1">
         <a:spcBef>
           <a:spcPct val="20000"/>
         </a:spcBef>
         <a:buFont typeface="Arial"/>
         <a:buChar char="•"/>
-        <a:defRPr sz="2400" kern="1200">
+        <a:defRPr sz="2182" kern="1200">
           <a:solidFill>
             <a:schemeClr val="tx1"/>
           </a:solidFill>
@@ -2888,13 +2883,13 @@
           <a:cs typeface="+mn-cs"/>
         </a:defRPr>
       </a:lvl3pPr>
-      <a:lvl4pPr marL="1600200" indent="-228600" algn="l" defTabSz="457200" rtl="0" eaLnBrk="1" latinLnBrk="0" hangingPunct="1">
+      <a:lvl4pPr marL="1454742" indent="-207820" algn="l" defTabSz="415641" rtl="0" eaLnBrk="1" latinLnBrk="0" hangingPunct="1">
         <a:spcBef>
           <a:spcPct val="20000"/>
         </a:spcBef>
         <a:buFont typeface="Arial"/>
         <a:buChar char="–"/>
-        <a:defRPr sz="2000" kern="1200">
+        <a:defRPr sz="1818" kern="1200">
           <a:solidFill>
             <a:schemeClr val="tx1"/>
           </a:solidFill>
@@ -2903,13 +2898,13 @@
           <a:cs typeface="+mn-cs"/>
         </a:defRPr>
       </a:lvl4pPr>
-      <a:lvl5pPr marL="2057400" indent="-228600" algn="l" defTabSz="457200" rtl="0" eaLnBrk="1" latinLnBrk="0" hangingPunct="1">
+      <a:lvl5pPr marL="1870382" indent="-207820" algn="l" defTabSz="415641" rtl="0" eaLnBrk="1" latinLnBrk="0" hangingPunct="1">
         <a:spcBef>
           <a:spcPct val="20000"/>
         </a:spcBef>
         <a:buFont typeface="Arial"/>
         <a:buChar char="»"/>
-        <a:defRPr sz="2000" kern="1200">
+        <a:defRPr sz="1818" kern="1200">
           <a:solidFill>
             <a:schemeClr val="tx1"/>
           </a:solidFill>
@@ -2918,13 +2913,13 @@
           <a:cs typeface="+mn-cs"/>
         </a:defRPr>
       </a:lvl5pPr>
-      <a:lvl6pPr marL="2514600" indent="-228600" algn="l" defTabSz="457200" rtl="0" eaLnBrk="1" latinLnBrk="0" hangingPunct="1">
+      <a:lvl6pPr marL="2286023" indent="-207820" algn="l" defTabSz="415641" rtl="0" eaLnBrk="1" latinLnBrk="0" hangingPunct="1">
         <a:spcBef>
           <a:spcPct val="20000"/>
         </a:spcBef>
         <a:buFont typeface="Arial"/>
         <a:buChar char="•"/>
-        <a:defRPr sz="2000" kern="1200">
+        <a:defRPr sz="1818" kern="1200">
           <a:solidFill>
             <a:schemeClr val="tx1"/>
           </a:solidFill>
@@ -2933,13 +2928,13 @@
           <a:cs typeface="+mn-cs"/>
         </a:defRPr>
       </a:lvl6pPr>
-      <a:lvl7pPr marL="2971800" indent="-228600" algn="l" defTabSz="457200" rtl="0" eaLnBrk="1" latinLnBrk="0" hangingPunct="1">
+      <a:lvl7pPr marL="2701663" indent="-207820" algn="l" defTabSz="415641" rtl="0" eaLnBrk="1" latinLnBrk="0" hangingPunct="1">
         <a:spcBef>
           <a:spcPct val="20000"/>
         </a:spcBef>
         <a:buFont typeface="Arial"/>
         <a:buChar char="•"/>
-        <a:defRPr sz="2000" kern="1200">
+        <a:defRPr sz="1818" kern="1200">
           <a:solidFill>
             <a:schemeClr val="tx1"/>
           </a:solidFill>
@@ -2948,13 +2943,13 @@
           <a:cs typeface="+mn-cs"/>
         </a:defRPr>
       </a:lvl7pPr>
-      <a:lvl8pPr marL="3429000" indent="-228600" algn="l" defTabSz="457200" rtl="0" eaLnBrk="1" latinLnBrk="0" hangingPunct="1">
+      <a:lvl8pPr marL="3117304" indent="-207820" algn="l" defTabSz="415641" rtl="0" eaLnBrk="1" latinLnBrk="0" hangingPunct="1">
         <a:spcBef>
           <a:spcPct val="20000"/>
         </a:spcBef>
         <a:buFont typeface="Arial"/>
         <a:buChar char="•"/>
-        <a:defRPr sz="2000" kern="1200">
+        <a:defRPr sz="1818" kern="1200">
           <a:solidFill>
             <a:schemeClr val="tx1"/>
           </a:solidFill>
@@ -2963,13 +2958,13 @@
           <a:cs typeface="+mn-cs"/>
         </a:defRPr>
       </a:lvl8pPr>
-      <a:lvl9pPr marL="3886200" indent="-228600" algn="l" defTabSz="457200" rtl="0" eaLnBrk="1" latinLnBrk="0" hangingPunct="1">
+      <a:lvl9pPr marL="3532944" indent="-207820" algn="l" defTabSz="415641" rtl="0" eaLnBrk="1" latinLnBrk="0" hangingPunct="1">
         <a:spcBef>
           <a:spcPct val="20000"/>
         </a:spcBef>
         <a:buFont typeface="Arial"/>
         <a:buChar char="•"/>
-        <a:defRPr sz="2000" kern="1200">
+        <a:defRPr sz="1818" kern="1200">
           <a:solidFill>
             <a:schemeClr val="tx1"/>
           </a:solidFill>
@@ -2983,8 +2978,8 @@
       <a:defPPr>
         <a:defRPr lang="en-US"/>
       </a:defPPr>
-      <a:lvl1pPr marL="0" algn="l" defTabSz="457200" rtl="0" eaLnBrk="1" latinLnBrk="0" hangingPunct="1">
-        <a:defRPr sz="1800" kern="1200">
+      <a:lvl1pPr marL="0" algn="l" defTabSz="415641" rtl="0" eaLnBrk="1" latinLnBrk="0" hangingPunct="1">
+        <a:defRPr sz="1636" kern="1200">
           <a:solidFill>
             <a:schemeClr val="tx1"/>
           </a:solidFill>
@@ -2993,8 +2988,8 @@
           <a:cs typeface="+mn-cs"/>
         </a:defRPr>
       </a:lvl1pPr>
-      <a:lvl2pPr marL="457200" algn="l" defTabSz="457200" rtl="0" eaLnBrk="1" latinLnBrk="0" hangingPunct="1">
-        <a:defRPr sz="1800" kern="1200">
+      <a:lvl2pPr marL="415641" algn="l" defTabSz="415641" rtl="0" eaLnBrk="1" latinLnBrk="0" hangingPunct="1">
+        <a:defRPr sz="1636" kern="1200">
           <a:solidFill>
             <a:schemeClr val="tx1"/>
           </a:solidFill>
@@ -3003,8 +2998,8 @@
           <a:cs typeface="+mn-cs"/>
         </a:defRPr>
       </a:lvl2pPr>
-      <a:lvl3pPr marL="914400" algn="l" defTabSz="457200" rtl="0" eaLnBrk="1" latinLnBrk="0" hangingPunct="1">
-        <a:defRPr sz="1800" kern="1200">
+      <a:lvl3pPr marL="831281" algn="l" defTabSz="415641" rtl="0" eaLnBrk="1" latinLnBrk="0" hangingPunct="1">
+        <a:defRPr sz="1636" kern="1200">
           <a:solidFill>
             <a:schemeClr val="tx1"/>
           </a:solidFill>
@@ -3013,8 +3008,8 @@
           <a:cs typeface="+mn-cs"/>
         </a:defRPr>
       </a:lvl3pPr>
-      <a:lvl4pPr marL="1371600" algn="l" defTabSz="457200" rtl="0" eaLnBrk="1" latinLnBrk="0" hangingPunct="1">
-        <a:defRPr sz="1800" kern="1200">
+      <a:lvl4pPr marL="1246922" algn="l" defTabSz="415641" rtl="0" eaLnBrk="1" latinLnBrk="0" hangingPunct="1">
+        <a:defRPr sz="1636" kern="1200">
           <a:solidFill>
             <a:schemeClr val="tx1"/>
           </a:solidFill>
@@ -3023,8 +3018,8 @@
           <a:cs typeface="+mn-cs"/>
         </a:defRPr>
       </a:lvl4pPr>
-      <a:lvl5pPr marL="1828800" algn="l" defTabSz="457200" rtl="0" eaLnBrk="1" latinLnBrk="0" hangingPunct="1">
-        <a:defRPr sz="1800" kern="1200">
+      <a:lvl5pPr marL="1662562" algn="l" defTabSz="415641" rtl="0" eaLnBrk="1" latinLnBrk="0" hangingPunct="1">
+        <a:defRPr sz="1636" kern="1200">
           <a:solidFill>
             <a:schemeClr val="tx1"/>
           </a:solidFill>
@@ -3033,8 +3028,8 @@
           <a:cs typeface="+mn-cs"/>
         </a:defRPr>
       </a:lvl5pPr>
-      <a:lvl6pPr marL="2286000" algn="l" defTabSz="457200" rtl="0" eaLnBrk="1" latinLnBrk="0" hangingPunct="1">
-        <a:defRPr sz="1800" kern="1200">
+      <a:lvl6pPr marL="2078203" algn="l" defTabSz="415641" rtl="0" eaLnBrk="1" latinLnBrk="0" hangingPunct="1">
+        <a:defRPr sz="1636" kern="1200">
           <a:solidFill>
             <a:schemeClr val="tx1"/>
           </a:solidFill>
@@ -3043,8 +3038,8 @@
           <a:cs typeface="+mn-cs"/>
         </a:defRPr>
       </a:lvl6pPr>
-      <a:lvl7pPr marL="2743200" algn="l" defTabSz="457200" rtl="0" eaLnBrk="1" latinLnBrk="0" hangingPunct="1">
-        <a:defRPr sz="1800" kern="1200">
+      <a:lvl7pPr marL="2493843" algn="l" defTabSz="415641" rtl="0" eaLnBrk="1" latinLnBrk="0" hangingPunct="1">
+        <a:defRPr sz="1636" kern="1200">
           <a:solidFill>
             <a:schemeClr val="tx1"/>
           </a:solidFill>
@@ -3053,8 +3048,8 @@
           <a:cs typeface="+mn-cs"/>
         </a:defRPr>
       </a:lvl7pPr>
-      <a:lvl8pPr marL="3200400" algn="l" defTabSz="457200" rtl="0" eaLnBrk="1" latinLnBrk="0" hangingPunct="1">
-        <a:defRPr sz="1800" kern="1200">
+      <a:lvl8pPr marL="2909484" algn="l" defTabSz="415641" rtl="0" eaLnBrk="1" latinLnBrk="0" hangingPunct="1">
+        <a:defRPr sz="1636" kern="1200">
           <a:solidFill>
             <a:schemeClr val="tx1"/>
           </a:solidFill>
@@ -3063,8 +3058,8 @@
           <a:cs typeface="+mn-cs"/>
         </a:defRPr>
       </a:lvl8pPr>
-      <a:lvl9pPr marL="3657600" algn="l" defTabSz="457200" rtl="0" eaLnBrk="1" latinLnBrk="0" hangingPunct="1">
-        <a:defRPr sz="1800" kern="1200">
+      <a:lvl9pPr marL="3325124" algn="l" defTabSz="415641" rtl="0" eaLnBrk="1" latinLnBrk="0" hangingPunct="1">
+        <a:defRPr sz="1636" kern="1200">
           <a:solidFill>
             <a:schemeClr val="tx1"/>
           </a:solidFill>
@@ -3079,7 +3074,7 @@
 </file>
 
 <file path=ppt/slides/slide1.xml><?xml version="1.0" encoding="utf-8"?>
-<p:sld xmlns:a="http://schemas.openxmlformats.org/drawingml/2006/main" xmlns:p="http://schemas.openxmlformats.org/presentationml/2006/main" xmlns:r="http://schemas.openxmlformats.org/officeDocument/2006/relationships">
+<p:sld xmlns:a="http://schemas.openxmlformats.org/drawingml/2006/main" xmlns:r="http://schemas.openxmlformats.org/officeDocument/2006/relationships" xmlns:p="http://schemas.openxmlformats.org/presentationml/2006/main">
   <p:cSld>
     <p:spTree>
       <p:nvGrpSpPr>
@@ -3087,7 +3082,14 @@
         <p:cNvGrpSpPr/>
         <p:nvPr/>
       </p:nvGrpSpPr>
-      <p:grpSpPr/>
+      <p:grpSpPr>
+        <a:xfrm>
+          <a:off x="0" y="0"/>
+          <a:ext cx="0" cy="0"/>
+          <a:chOff x="0" y="0"/>
+          <a:chExt cx="0" cy="0"/>
+        </a:xfrm>
+      </p:grpSpPr>
       <p:sp>
         <p:nvSpPr>
           <p:cNvPr id="2" name="Rectangle 1"/>
@@ -3097,7 +3099,7 @@
         <p:spPr>
           <a:xfrm>
             <a:off x="0" y="0"/>
-            <a:ext cx="50292000" cy="40233600"/>
+            <a:ext cx="45720000" cy="36576000"/>
           </a:xfrm>
           <a:prstGeom prst="rect">
             <a:avLst/>
@@ -3128,6 +3130,7 @@
           <a:lstStyle/>
           <a:p>
             <a:pPr algn="ctr"/>
+            <a:endParaRPr sz="1487"/>
           </a:p>
         </p:txBody>
       </p:sp>
@@ -3147,8 +3150,8 @@
         </p:blipFill>
         <p:spPr>
           <a:xfrm>
-            <a:off x="822960" y="548640"/>
-            <a:ext cx="2926080" cy="3291840"/>
+            <a:off x="748145" y="498764"/>
+            <a:ext cx="2660073" cy="2992582"/>
           </a:xfrm>
           <a:prstGeom prst="rect">
             <a:avLst/>
@@ -3171,8 +3174,8 @@
         </p:blipFill>
         <p:spPr>
           <a:xfrm>
-            <a:off x="46542960" y="548640"/>
-            <a:ext cx="2926080" cy="3291840"/>
+            <a:off x="34580946" y="498764"/>
+            <a:ext cx="10390909" cy="2992582"/>
           </a:xfrm>
           <a:prstGeom prst="rect">
             <a:avLst/>
@@ -3187,8 +3190,8 @@
         </p:nvSpPr>
         <p:spPr>
           <a:xfrm>
-            <a:off x="4114800" y="548640"/>
-            <a:ext cx="42062400" cy="2377440"/>
+            <a:off x="3740728" y="498763"/>
+            <a:ext cx="38238545" cy="1701824"/>
           </a:xfrm>
           <a:prstGeom prst="rect">
             <a:avLst/>
@@ -3196,7 +3199,7 @@
           <a:noFill/>
         </p:spPr>
         <p:txBody>
-          <a:bodyPr wrap="square" anchor="t">
+          <a:bodyPr wrap="square" lIns="124691" tIns="83127" rIns="124691" bIns="83127" anchor="t">
             <a:spAutoFit/>
           </a:bodyPr>
           <a:lstStyle/>
@@ -3207,7 +3210,7 @@
               </a:lnSpc>
             </a:pPr>
             <a:r>
-              <a:rPr sz="5600" b="1" i="0">
+              <a:rPr sz="4909" b="1">
                 <a:solidFill>
                   <a:srgbClr val="A51C30"/>
                 </a:solidFill>
@@ -3223,7 +3226,7 @@
               </a:lnSpc>
             </a:pPr>
             <a:r>
-              <a:rPr sz="5600" b="1" i="0">
+              <a:rPr sz="4909" b="1">
                 <a:solidFill>
                   <a:srgbClr val="A51C30"/>
                 </a:solidFill>
@@ -3242,8 +3245,8 @@
         </p:nvSpPr>
         <p:spPr>
           <a:xfrm>
-            <a:off x="4114800" y="2926080"/>
-            <a:ext cx="42062400" cy="640080"/>
+            <a:off x="3740728" y="2660073"/>
+            <a:ext cx="38238545" cy="565551"/>
           </a:xfrm>
           <a:prstGeom prst="rect">
             <a:avLst/>
@@ -3251,7 +3254,7 @@
           <a:noFill/>
         </p:spPr>
         <p:txBody>
-          <a:bodyPr wrap="square" anchor="t">
+          <a:bodyPr wrap="square" lIns="124691" tIns="83127" rIns="124691" bIns="83127" anchor="t">
             <a:spAutoFit/>
           </a:bodyPr>
           <a:lstStyle/>
@@ -3262,7 +3265,7 @@
               </a:lnSpc>
             </a:pPr>
             <a:r>
-              <a:rPr sz="2800" b="0" i="0">
+              <a:rPr sz="2364">
                 <a:solidFill>
                   <a:srgbClr val="2A2A2A"/>
                 </a:solidFill>
@@ -3281,8 +3284,8 @@
         </p:nvSpPr>
         <p:spPr>
           <a:xfrm>
-            <a:off x="4114800" y="3566160"/>
-            <a:ext cx="42062400" cy="548640"/>
+            <a:off x="3740728" y="3241964"/>
+            <a:ext cx="38238545" cy="473667"/>
           </a:xfrm>
           <a:prstGeom prst="rect">
             <a:avLst/>
@@ -3290,7 +3293,7 @@
           <a:noFill/>
         </p:spPr>
         <p:txBody>
-          <a:bodyPr wrap="square" anchor="t">
+          <a:bodyPr wrap="square" lIns="124691" tIns="83127" rIns="124691" bIns="83127" anchor="t">
             <a:spAutoFit/>
           </a:bodyPr>
           <a:lstStyle/>
@@ -3301,7 +3304,7 @@
               </a:lnSpc>
             </a:pPr>
             <a:r>
-              <a:rPr sz="2200" b="0" i="1">
+              <a:rPr sz="1818" i="1">
                 <a:solidFill>
                   <a:srgbClr val="2A2A2A"/>
                 </a:solidFill>
@@ -3320,8 +3323,8 @@
         </p:nvSpPr>
         <p:spPr>
           <a:xfrm>
-            <a:off x="0" y="4389120"/>
-            <a:ext cx="50292000" cy="36576"/>
+            <a:off x="0" y="3990109"/>
+            <a:ext cx="45720000" cy="83127"/>
           </a:xfrm>
           <a:prstGeom prst="rect">
             <a:avLst/>
@@ -3353,69 +3356,41 @@
           <a:lstStyle/>
           <a:p>
             <a:pPr algn="ctr"/>
-          </a:p>
-        </p:txBody>
-      </p:sp>
-      <p:sp>
-        <p:nvSpPr>
-          <p:cNvPr id="9" name="TextBox 8"/>
-          <p:cNvSpPr txBox="1"/>
-          <p:nvPr/>
-        </p:nvSpPr>
-        <p:spPr>
-          <a:xfrm>
-            <a:off x="822960" y="5029200"/>
-            <a:ext cx="15666720" cy="822960"/>
-          </a:xfrm>
-          <a:prstGeom prst="rect">
-            <a:avLst/>
-          </a:prstGeom>
-          <a:noFill/>
-        </p:spPr>
-        <p:txBody>
-          <a:bodyPr wrap="square" anchor="t">
-            <a:spAutoFit/>
-          </a:bodyPr>
-          <a:lstStyle/>
-          <a:p>
-            <a:pPr algn="l">
-              <a:lnSpc>
-                <a:spcPct val="120000"/>
-              </a:lnSpc>
-            </a:pPr>
-            <a:r>
-              <a:rPr sz="4200" b="1" i="0">
-                <a:solidFill>
-                  <a:srgbClr val="A51C30"/>
-                </a:solidFill>
-                <a:latin typeface="Calibri"/>
-              </a:rPr>
-              <a:t>THE QUESTION</a:t>
-            </a:r>
-          </a:p>
-        </p:txBody>
-      </p:sp>
-      <p:sp>
-        <p:nvSpPr>
-          <p:cNvPr id="10" name="Rectangle 9"/>
+            <a:endParaRPr sz="1487"/>
+          </a:p>
+        </p:txBody>
+      </p:sp>
+      <p:sp>
+        <p:nvSpPr>
+          <p:cNvPr id="9" name="Rounded Rectangle 8"/>
           <p:cNvSpPr/>
           <p:nvPr/>
         </p:nvSpPr>
         <p:spPr>
           <a:xfrm>
-            <a:off x="822960" y="5943600"/>
-            <a:ext cx="5483352" cy="36576"/>
-          </a:xfrm>
-          <a:prstGeom prst="rect">
-            <a:avLst/>
+            <a:off x="748146" y="4488873"/>
+            <a:ext cx="14353309" cy="8312727"/>
+          </a:xfrm>
+          <a:prstGeom prst="roundRect">
+            <a:avLst>
+              <a:gd name="adj" fmla="val 5000"/>
+            </a:avLst>
           </a:prstGeom>
           <a:solidFill>
-            <a:srgbClr val="A51C30"/>
+            <a:srgbClr val="E8F1F8"/>
           </a:solidFill>
-          <a:ln>
-            <a:noFill/>
+          <a:ln w="15875">
+            <a:solidFill>
+              <a:srgbClr val="B8CCDE"/>
+            </a:solidFill>
           </a:ln>
-          <a:effectLst/>
+          <a:effectLst>
+            <a:outerShdw blurRad="127000" dist="50800" dir="2700000" algn="tl" rotWithShape="0">
+              <a:srgbClr val="000000">
+                <a:alpha val="28000"/>
+              </a:srgbClr>
+            </a:outerShdw>
+          </a:effectLst>
         </p:spPr>
         <p:style>
           <a:lnRef idx="1">
@@ -3436,331 +3411,26 @@
           <a:lstStyle/>
           <a:p>
             <a:pPr algn="ctr"/>
-          </a:p>
-        </p:txBody>
-      </p:sp>
-      <p:sp>
-        <p:nvSpPr>
-          <p:cNvPr id="11" name="TextBox 10"/>
-          <p:cNvSpPr txBox="1"/>
-          <p:nvPr/>
-        </p:nvSpPr>
-        <p:spPr>
-          <a:xfrm>
-            <a:off x="822960" y="6309360"/>
-            <a:ext cx="15666720" cy="2743200"/>
-          </a:xfrm>
-          <a:prstGeom prst="rect">
-            <a:avLst/>
-          </a:prstGeom>
-          <a:noFill/>
-        </p:spPr>
-        <p:txBody>
-          <a:bodyPr wrap="square" anchor="t">
-            <a:spAutoFit/>
-          </a:bodyPr>
-          <a:lstStyle/>
-          <a:p>
-            <a:pPr algn="l">
-              <a:lnSpc>
-                <a:spcPct val="115000"/>
-              </a:lnSpc>
-            </a:pPr>
-            <a:r>
-              <a:rPr sz="3000" b="1" i="0">
-                <a:solidFill>
-                  <a:srgbClr val="2A2A2A"/>
-                </a:solidFill>
-                <a:latin typeface="Calibri"/>
-              </a:rPr>
-              <a:t>Can we detect crypto fraud without any labeled data?</a:t>
-            </a:r>
-          </a:p>
-        </p:txBody>
-      </p:sp>
-      <p:sp>
-        <p:nvSpPr>
-          <p:cNvPr id="12" name="TextBox 11"/>
-          <p:cNvSpPr txBox="1"/>
-          <p:nvPr/>
-        </p:nvSpPr>
-        <p:spPr>
-          <a:xfrm>
-            <a:off x="822960" y="8869680"/>
-            <a:ext cx="15666720" cy="9601200"/>
-          </a:xfrm>
-          <a:prstGeom prst="rect">
-            <a:avLst/>
-          </a:prstGeom>
-          <a:noFill/>
-        </p:spPr>
-        <p:txBody>
-          <a:bodyPr wrap="square" anchor="t">
-            <a:spAutoFit/>
-          </a:bodyPr>
-          <a:lstStyle/>
-          <a:p>
-            <a:pPr algn="l">
-              <a:lnSpc>
-                <a:spcPct val="125000"/>
-              </a:lnSpc>
-            </a:pPr>
-            <a:r>
-              <a:rPr sz="2400" b="0" i="0">
-                <a:solidFill>
-                  <a:srgbClr val="2A2A2A"/>
-                </a:solidFill>
-                <a:latin typeface="Calibri"/>
-              </a:rPr>
-              <a:t>Fraud labels in crypto are rare, slow to publish, and biased</a:t>
-            </a:r>
-          </a:p>
-          <a:p>
-            <a:pPr algn="l">
-              <a:lnSpc>
-                <a:spcPct val="125000"/>
-              </a:lnSpc>
-            </a:pPr>
-            <a:r>
-              <a:rPr sz="2400" b="0" i="0">
-                <a:solidFill>
-                  <a:srgbClr val="2A2A2A"/>
-                </a:solidFill>
-                <a:latin typeface="Calibri"/>
-              </a:rPr>
-              <a:t>toward high-profile cases. Supervised classifiers trained on</a:t>
-            </a:r>
-          </a:p>
-          <a:p>
-            <a:pPr algn="l">
-              <a:lnSpc>
-                <a:spcPct val="125000"/>
-              </a:lnSpc>
-            </a:pPr>
-            <a:r>
-              <a:rPr sz="2400" b="0" i="0">
-                <a:solidFill>
-                  <a:srgbClr val="2A2A2A"/>
-                </a:solidFill>
-                <a:latin typeface="Calibri"/>
-              </a:rPr>
-              <a:t>them don't generalize — the attacks evolve faster than the</a:t>
-            </a:r>
-          </a:p>
-          <a:p>
-            <a:pPr algn="l">
-              <a:lnSpc>
-                <a:spcPct val="125000"/>
-              </a:lnSpc>
-            </a:pPr>
-            <a:r>
-              <a:rPr sz="2400" b="0" i="0">
-                <a:solidFill>
-                  <a:srgbClr val="2A2A2A"/>
-                </a:solidFill>
-                <a:latin typeface="Calibri"/>
-              </a:rPr>
-              <a:t>labels.</a:t>
-            </a:r>
-          </a:p>
-          <a:p>
-            <a:pPr algn="l">
-              <a:lnSpc>
-                <a:spcPct val="125000"/>
-              </a:lnSpc>
-            </a:pPr>
-            <a:r>
-              <a:rPr sz="2400" b="0" i="0">
-                <a:solidFill>
-                  <a:srgbClr val="2A2A2A"/>
-                </a:solidFill>
-                <a:latin typeface="Calibri"/>
-              </a:rPr>
-              <a:t/>
-            </a:r>
-          </a:p>
-          <a:p>
-            <a:pPr algn="l">
-              <a:lnSpc>
-                <a:spcPct val="125000"/>
-              </a:lnSpc>
-            </a:pPr>
-            <a:r>
-              <a:rPr sz="2400" b="0" i="0">
-                <a:solidFill>
-                  <a:srgbClr val="2A2A2A"/>
-                </a:solidFill>
-                <a:latin typeface="Calibri"/>
-              </a:rPr>
-              <a:t>We build a two-layer unsupervised pipeline:</a:t>
-            </a:r>
-          </a:p>
-          <a:p>
-            <a:pPr algn="l">
-              <a:lnSpc>
-                <a:spcPct val="125000"/>
-              </a:lnSpc>
-            </a:pPr>
-            <a:r>
-              <a:rPr sz="2400" b="0" i="0">
-                <a:solidFill>
-                  <a:srgbClr val="2A2A2A"/>
-                </a:solidFill>
-                <a:latin typeface="Calibri"/>
-              </a:rPr>
-              <a:t/>
-            </a:r>
-          </a:p>
-          <a:p>
-            <a:pPr algn="l">
-              <a:lnSpc>
-                <a:spcPct val="125000"/>
-              </a:lnSpc>
-            </a:pPr>
-            <a:r>
-              <a:rPr sz="2400" b="0" i="0">
-                <a:solidFill>
-                  <a:srgbClr val="2A2A2A"/>
-                </a:solidFill>
-                <a:latin typeface="Calibri"/>
-              </a:rPr>
-              <a:t>①  Flag tokens whose on-chain trading behavior looks</a:t>
-            </a:r>
-          </a:p>
-          <a:p>
-            <a:pPr algn="l">
-              <a:lnSpc>
-                <a:spcPct val="125000"/>
-              </a:lnSpc>
-            </a:pPr>
-            <a:r>
-              <a:rPr sz="2400" b="0" i="0">
-                <a:solidFill>
-                  <a:srgbClr val="2A2A2A"/>
-                </a:solidFill>
-                <a:latin typeface="Calibri"/>
-              </a:rPr>
-              <a:t>     statistically unusual.</a:t>
-            </a:r>
-          </a:p>
-          <a:p>
-            <a:pPr algn="l">
-              <a:lnSpc>
-                <a:spcPct val="125000"/>
-              </a:lnSpc>
-            </a:pPr>
-            <a:r>
-              <a:rPr sz="2400" b="0" i="0">
-                <a:solidFill>
-                  <a:srgbClr val="2A2A2A"/>
-                </a:solidFill>
-                <a:latin typeface="Calibri"/>
-              </a:rPr>
-              <a:t/>
-            </a:r>
-          </a:p>
-          <a:p>
-            <a:pPr algn="l">
-              <a:lnSpc>
-                <a:spcPct val="125000"/>
-              </a:lnSpc>
-            </a:pPr>
-            <a:r>
-              <a:rPr sz="2400" b="0" i="0">
-                <a:solidFill>
-                  <a:srgbClr val="2A2A2A"/>
-                </a:solidFill>
-                <a:latin typeface="Calibri"/>
-              </a:rPr>
-              <a:t>②  Estimate how likely that unusual behavior is to be</a:t>
-            </a:r>
-          </a:p>
-          <a:p>
-            <a:pPr algn="l">
-              <a:lnSpc>
-                <a:spcPct val="125000"/>
-              </a:lnSpc>
-            </a:pPr>
-            <a:r>
-              <a:rPr sz="2400" b="0" i="0">
-                <a:solidFill>
-                  <a:srgbClr val="2A2A2A"/>
-                </a:solidFill>
-                <a:latin typeface="Calibri"/>
-              </a:rPr>
-              <a:t>     intentional fraud (vs. a hack, bug, or large legitimate</a:t>
-            </a:r>
-          </a:p>
-          <a:p>
-            <a:pPr algn="l">
-              <a:lnSpc>
-                <a:spcPct val="125000"/>
-              </a:lnSpc>
-            </a:pPr>
-            <a:r>
-              <a:rPr sz="2400" b="0" i="0">
-                <a:solidFill>
-                  <a:srgbClr val="2A2A2A"/>
-                </a:solidFill>
-                <a:latin typeface="Calibri"/>
-              </a:rPr>
-              <a:t>     event).</a:t>
-            </a:r>
-          </a:p>
-        </p:txBody>
-      </p:sp>
-      <p:sp>
-        <p:nvSpPr>
-          <p:cNvPr id="13" name="TextBox 12"/>
-          <p:cNvSpPr txBox="1"/>
-          <p:nvPr/>
-        </p:nvSpPr>
-        <p:spPr>
-          <a:xfrm>
-            <a:off x="17312640" y="5029200"/>
-            <a:ext cx="15666720" cy="822960"/>
-          </a:xfrm>
-          <a:prstGeom prst="rect">
-            <a:avLst/>
-          </a:prstGeom>
-          <a:noFill/>
-        </p:spPr>
-        <p:txBody>
-          <a:bodyPr wrap="square" anchor="t">
-            <a:spAutoFit/>
-          </a:bodyPr>
-          <a:lstStyle/>
-          <a:p>
-            <a:pPr algn="l">
-              <a:lnSpc>
-                <a:spcPct val="120000"/>
-              </a:lnSpc>
-            </a:pPr>
-            <a:r>
-              <a:rPr sz="4200" b="1" i="0">
-                <a:solidFill>
-                  <a:srgbClr val="A51C30"/>
-                </a:solidFill>
-                <a:latin typeface="Calibri"/>
-              </a:rPr>
-              <a:t>METHODS</a:t>
-            </a:r>
-          </a:p>
-        </p:txBody>
-      </p:sp>
-      <p:sp>
-        <p:nvSpPr>
-          <p:cNvPr id="14" name="Rectangle 13"/>
+            <a:endParaRPr sz="1487"/>
+          </a:p>
+        </p:txBody>
+      </p:sp>
+      <p:sp>
+        <p:nvSpPr>
+          <p:cNvPr id="10" name="Round Same Side Corner Rectangle 9"/>
           <p:cNvSpPr/>
           <p:nvPr/>
         </p:nvSpPr>
         <p:spPr>
           <a:xfrm>
-            <a:off x="17312640" y="5943600"/>
-            <a:ext cx="5483352" cy="36576"/>
-          </a:xfrm>
-          <a:prstGeom prst="rect">
-            <a:avLst/>
+            <a:off x="748146" y="4488873"/>
+            <a:ext cx="14353309" cy="1163782"/>
+          </a:xfrm>
+          <a:prstGeom prst="round2SameRect">
+            <a:avLst>
+              <a:gd name="adj1" fmla="val 22000"/>
+              <a:gd name="adj2" fmla="val 0"/>
+            </a:avLst>
           </a:prstGeom>
           <a:solidFill>
             <a:srgbClr val="A51C30"/>
@@ -3789,19 +3459,20 @@
           <a:lstStyle/>
           <a:p>
             <a:pPr algn="ctr"/>
-          </a:p>
-        </p:txBody>
-      </p:sp>
-      <p:sp>
-        <p:nvSpPr>
-          <p:cNvPr id="15" name="TextBox 14"/>
+            <a:endParaRPr sz="1487"/>
+          </a:p>
+        </p:txBody>
+      </p:sp>
+      <p:sp>
+        <p:nvSpPr>
+          <p:cNvPr id="11" name="TextBox 10"/>
           <p:cNvSpPr txBox="1"/>
           <p:nvPr/>
         </p:nvSpPr>
         <p:spPr>
           <a:xfrm>
-            <a:off x="17312640" y="6309360"/>
-            <a:ext cx="15666720" cy="12344400"/>
+            <a:off x="1080655" y="4696691"/>
+            <a:ext cx="13688291" cy="763362"/>
           </a:xfrm>
           <a:prstGeom prst="rect">
             <a:avLst/>
@@ -3809,326 +3480,38 @@
           <a:noFill/>
         </p:spPr>
         <p:txBody>
-          <a:bodyPr wrap="square" anchor="t">
+          <a:bodyPr wrap="square" lIns="124691" tIns="83127" rIns="124691" bIns="83127" anchor="t">
             <a:spAutoFit/>
           </a:bodyPr>
           <a:lstStyle/>
           <a:p>
             <a:pPr algn="l">
               <a:lnSpc>
-                <a:spcPct val="125000"/>
-              </a:lnSpc>
-            </a:pPr>
-            <a:r>
-              <a:rPr sz="2400" b="0" i="0">
-                <a:solidFill>
-                  <a:srgbClr val="2A2A2A"/>
+                <a:spcPct val="120000"/>
+              </a:lnSpc>
+            </a:pPr>
+            <a:r>
+              <a:rPr sz="3455" b="1">
+                <a:solidFill>
+                  <a:srgbClr val="FFFFFF"/>
                 </a:solidFill>
                 <a:latin typeface="Calibri"/>
               </a:rPr>
-              <a:t>Data.  4,334 mid-cap ERC-20 tokens on Ethereum</a:t>
-            </a:r>
-          </a:p>
-          <a:p>
-            <a:pPr algn="l">
-              <a:lnSpc>
-                <a:spcPct val="125000"/>
-              </a:lnSpc>
-            </a:pPr>
-            <a:r>
-              <a:rPr sz="2400" b="0" i="0">
-                <a:solidFill>
-                  <a:srgbClr val="2A2A2A"/>
-                </a:solidFill>
-                <a:latin typeface="Calibri"/>
-              </a:rPr>
-              <a:t>(Dune Analytics, 365-day window, $1M–$1B annual volume).</a:t>
-            </a:r>
-          </a:p>
-          <a:p>
-            <a:pPr algn="l">
-              <a:lnSpc>
-                <a:spcPct val="125000"/>
-              </a:lnSpc>
-            </a:pPr>
-            <a:r>
-              <a:rPr sz="2400" b="0" i="0">
-                <a:solidFill>
-                  <a:srgbClr val="2A2A2A"/>
-                </a:solidFill>
-                <a:latin typeface="Calibri"/>
-              </a:rPr>
-              <a:t/>
-            </a:r>
-          </a:p>
-          <a:p>
-            <a:pPr algn="l">
-              <a:lnSpc>
-                <a:spcPct val="125000"/>
-              </a:lnSpc>
-            </a:pPr>
-            <a:r>
-              <a:rPr sz="2400" b="0" i="0">
-                <a:solidFill>
-                  <a:srgbClr val="2A2A2A"/>
-                </a:solidFill>
-                <a:latin typeface="Calibri"/>
-              </a:rPr>
-              <a:t>Features (6).  Volume spike ratio, peak daily volume, days</a:t>
-            </a:r>
-          </a:p>
-          <a:p>
-            <a:pPr algn="l">
-              <a:lnSpc>
-                <a:spcPct val="125000"/>
-              </a:lnSpc>
-            </a:pPr>
-            <a:r>
-              <a:rPr sz="2400" b="0" i="0">
-                <a:solidFill>
-                  <a:srgbClr val="2A2A2A"/>
-                </a:solidFill>
-                <a:latin typeface="Calibri"/>
-              </a:rPr>
-              <a:t>traded, max single-trade dominance, and two 24-hour post-</a:t>
-            </a:r>
-          </a:p>
-          <a:p>
-            <a:pPr algn="l">
-              <a:lnSpc>
-                <a:spcPct val="125000"/>
-              </a:lnSpc>
-            </a:pPr>
-            <a:r>
-              <a:rPr sz="2400" b="0" i="0">
-                <a:solidFill>
-                  <a:srgbClr val="2A2A2A"/>
-                </a:solidFill>
-                <a:latin typeface="Calibri"/>
-              </a:rPr>
-              <a:t>launch velocity features.</a:t>
-            </a:r>
-          </a:p>
-          <a:p>
-            <a:pPr algn="l">
-              <a:lnSpc>
-                <a:spcPct val="125000"/>
-              </a:lnSpc>
-            </a:pPr>
-            <a:r>
-              <a:rPr sz="2400" b="0" i="0">
-                <a:solidFill>
-                  <a:srgbClr val="2A2A2A"/>
-                </a:solidFill>
-                <a:latin typeface="Calibri"/>
-              </a:rPr>
-              <a:t/>
-            </a:r>
-          </a:p>
-          <a:p>
-            <a:pPr algn="l">
-              <a:lnSpc>
-                <a:spcPct val="125000"/>
-              </a:lnSpc>
-            </a:pPr>
-            <a:r>
-              <a:rPr sz="2400" b="0" i="0">
-                <a:solidFill>
-                  <a:srgbClr val="2A2A2A"/>
-                </a:solidFill>
-                <a:latin typeface="Calibri"/>
-              </a:rPr>
-              <a:t>Layer 1 — three independent detectors:</a:t>
-            </a:r>
-          </a:p>
-          <a:p>
-            <a:pPr algn="l">
-              <a:lnSpc>
-                <a:spcPct val="125000"/>
-              </a:lnSpc>
-            </a:pPr>
-            <a:r>
-              <a:rPr sz="2400" b="0" i="0">
-                <a:solidFill>
-                  <a:srgbClr val="2A2A2A"/>
-                </a:solidFill>
-                <a:latin typeface="Calibri"/>
-              </a:rPr>
-              <a:t>    •  Isolation Forest (tree-based outlier detection)</a:t>
-            </a:r>
-          </a:p>
-          <a:p>
-            <a:pPr algn="l">
-              <a:lnSpc>
-                <a:spcPct val="125000"/>
-              </a:lnSpc>
-            </a:pPr>
-            <a:r>
-              <a:rPr sz="2400" b="0" i="0">
-                <a:solidFill>
-                  <a:srgbClr val="2A2A2A"/>
-                </a:solidFill>
-                <a:latin typeface="Calibri"/>
-              </a:rPr>
-              <a:t>    •  DBSCAN (density clustering; keep the noise points)</a:t>
-            </a:r>
-          </a:p>
-          <a:p>
-            <a:pPr algn="l">
-              <a:lnSpc>
-                <a:spcPct val="125000"/>
-              </a:lnSpc>
-            </a:pPr>
-            <a:r>
-              <a:rPr sz="2400" b="0" i="0">
-                <a:solidFill>
-                  <a:srgbClr val="2A2A2A"/>
-                </a:solidFill>
-                <a:latin typeface="Calibri"/>
-              </a:rPr>
-              <a:t>    •  PCA + Mahalanobis distance</a:t>
-            </a:r>
-          </a:p>
-          <a:p>
-            <a:pPr algn="l">
-              <a:lnSpc>
-                <a:spcPct val="125000"/>
-              </a:lnSpc>
-            </a:pPr>
-            <a:r>
-              <a:rPr sz="2400" b="0" i="0">
-                <a:solidFill>
-                  <a:srgbClr val="2A2A2A"/>
-                </a:solidFill>
-                <a:latin typeface="Calibri"/>
-              </a:rPr>
-              <a:t/>
-            </a:r>
-          </a:p>
-          <a:p>
-            <a:pPr algn="l">
-              <a:lnSpc>
-                <a:spcPct val="125000"/>
-              </a:lnSpc>
-            </a:pPr>
-            <a:r>
-              <a:rPr sz="2400" b="0" i="0">
-                <a:solidFill>
-                  <a:srgbClr val="2A2A2A"/>
-                </a:solidFill>
-                <a:latin typeface="Calibri"/>
-              </a:rPr>
-              <a:t>Rank-averaged into a single continuous suspicion score</a:t>
-            </a:r>
-          </a:p>
-          <a:p>
-            <a:pPr algn="l">
-              <a:lnSpc>
-                <a:spcPct val="125000"/>
-              </a:lnSpc>
-            </a:pPr>
-            <a:r>
-              <a:rPr sz="2400" b="0" i="0">
-                <a:solidFill>
-                  <a:srgbClr val="2A2A2A"/>
-                </a:solidFill>
-                <a:latin typeface="Calibri"/>
-              </a:rPr>
-              <a:t>in [0, 1], replacing the legacy three-detector yes/no vote.</a:t>
-            </a:r>
-          </a:p>
-          <a:p>
-            <a:pPr algn="l">
-              <a:lnSpc>
-                <a:spcPct val="125000"/>
-              </a:lnSpc>
-            </a:pPr>
-            <a:r>
-              <a:rPr sz="2400" b="0" i="0">
-                <a:solidFill>
-                  <a:srgbClr val="2A2A2A"/>
-                </a:solidFill>
-                <a:latin typeface="Calibri"/>
-              </a:rPr>
-              <a:t/>
-            </a:r>
-          </a:p>
-          <a:p>
-            <a:pPr algn="l">
-              <a:lnSpc>
-                <a:spcPct val="125000"/>
-              </a:lnSpc>
-            </a:pPr>
-            <a:r>
-              <a:rPr sz="2400" b="0" i="0">
-                <a:solidFill>
-                  <a:srgbClr val="2A2A2A"/>
-                </a:solidFill>
-                <a:latin typeface="Calibri"/>
-              </a:rPr>
-              <a:t>Layer 2.  Logistic regression (L2-regularized) fit on</a:t>
-            </a:r>
-          </a:p>
-          <a:p>
-            <a:pPr algn="l">
-              <a:lnSpc>
-                <a:spcPct val="125000"/>
-              </a:lnSpc>
-            </a:pPr>
-            <a:r>
-              <a:rPr sz="2400" b="0" i="0">
-                <a:solidFill>
-                  <a:srgbClr val="2A2A2A"/>
-                </a:solidFill>
-                <a:latin typeface="Calibri"/>
-              </a:rPr>
-              <a:t>n = 144 hand- and web-validated tokens, mapping suspicious-</a:t>
-            </a:r>
-          </a:p>
-          <a:p>
-            <a:pPr algn="l">
-              <a:lnSpc>
-                <a:spcPct val="125000"/>
-              </a:lnSpc>
-            </a:pPr>
-            <a:r>
-              <a:rPr sz="2400" b="0" i="0">
-                <a:solidFill>
-                  <a:srgbClr val="2A2A2A"/>
-                </a:solidFill>
-                <a:latin typeface="Calibri"/>
-              </a:rPr>
-              <a:t>behavior features to P(fraud). Evaluated with leave-one-out</a:t>
-            </a:r>
-          </a:p>
-          <a:p>
-            <a:pPr algn="l">
-              <a:lnSpc>
-                <a:spcPct val="125000"/>
-              </a:lnSpc>
-            </a:pPr>
-            <a:r>
-              <a:rPr sz="2400" b="0" i="0">
-                <a:solidFill>
-                  <a:srgbClr val="2A2A2A"/>
-                </a:solidFill>
-                <a:latin typeface="Calibri"/>
-              </a:rPr>
-              <a:t>cross-validation.</a:t>
-            </a:r>
-          </a:p>
-        </p:txBody>
-      </p:sp>
-      <p:sp>
-        <p:nvSpPr>
-          <p:cNvPr id="16" name="TextBox 15"/>
+              <a:t>① THE QUESTION</a:t>
+            </a:r>
+          </a:p>
+        </p:txBody>
+      </p:sp>
+      <p:sp>
+        <p:nvSpPr>
+          <p:cNvPr id="12" name="TextBox 11"/>
           <p:cNvSpPr txBox="1"/>
           <p:nvPr/>
         </p:nvSpPr>
         <p:spPr>
           <a:xfrm>
-            <a:off x="33802320" y="5029200"/>
-            <a:ext cx="15666720" cy="822960"/>
+            <a:off x="1163782" y="5943600"/>
+            <a:ext cx="13522036" cy="2315260"/>
           </a:xfrm>
           <a:prstGeom prst="rect">
             <a:avLst/>
@@ -4136,49 +3519,120 @@
           <a:noFill/>
         </p:spPr>
         <p:txBody>
-          <a:bodyPr wrap="square" anchor="t">
+          <a:bodyPr wrap="square" lIns="124691" tIns="83127" rIns="124691" bIns="83127" anchor="t">
             <a:spAutoFit/>
           </a:bodyPr>
           <a:lstStyle/>
           <a:p>
             <a:pPr algn="l">
               <a:lnSpc>
-                <a:spcPct val="120000"/>
-              </a:lnSpc>
-            </a:pPr>
-            <a:r>
-              <a:rPr sz="4200" b="1" i="0">
-                <a:solidFill>
-                  <a:srgbClr val="A51C30"/>
+                <a:spcPct val="130000"/>
+              </a:lnSpc>
+            </a:pPr>
+            <a:r>
+              <a:rPr sz="2182" i="1">
+                <a:solidFill>
+                  <a:srgbClr val="8A99A8"/>
                 </a:solidFill>
                 <a:latin typeface="Calibri"/>
               </a:rPr>
-              <a:t>RESULTS</a:t>
-            </a:r>
-          </a:p>
-        </p:txBody>
-      </p:sp>
-      <p:sp>
-        <p:nvSpPr>
-          <p:cNvPr id="17" name="Rectangle 16"/>
+              <a:t>[ Paste your 'question and motivation' text here. ]</a:t>
+            </a:r>
+          </a:p>
+          <a:p>
+            <a:pPr algn="l">
+              <a:lnSpc>
+                <a:spcPct val="130000"/>
+              </a:lnSpc>
+            </a:pPr>
+            <a:endParaRPr sz="2182" i="1">
+              <a:solidFill>
+                <a:srgbClr val="8A99A8"/>
+              </a:solidFill>
+              <a:latin typeface="Calibri"/>
+            </a:endParaRPr>
+          </a:p>
+          <a:p>
+            <a:pPr algn="l">
+              <a:lnSpc>
+                <a:spcPct val="130000"/>
+              </a:lnSpc>
+            </a:pPr>
+            <a:r>
+              <a:rPr sz="2182" i="1">
+                <a:solidFill>
+                  <a:srgbClr val="8A99A8"/>
+                </a:solidFill>
+                <a:latin typeface="Calibri"/>
+              </a:rPr>
+              <a:t>  •  Why fraud detection on-chain is hard</a:t>
+            </a:r>
+          </a:p>
+          <a:p>
+            <a:pPr algn="l">
+              <a:lnSpc>
+                <a:spcPct val="130000"/>
+              </a:lnSpc>
+            </a:pPr>
+            <a:r>
+              <a:rPr sz="2182" i="1">
+                <a:solidFill>
+                  <a:srgbClr val="8A99A8"/>
+                </a:solidFill>
+                <a:latin typeface="Calibri"/>
+              </a:rPr>
+              <a:t>  •  Why labels don't work in crypto</a:t>
+            </a:r>
+          </a:p>
+          <a:p>
+            <a:pPr algn="l">
+              <a:lnSpc>
+                <a:spcPct val="130000"/>
+              </a:lnSpc>
+            </a:pPr>
+            <a:r>
+              <a:rPr sz="2182" i="1">
+                <a:solidFill>
+                  <a:srgbClr val="8A99A8"/>
+                </a:solidFill>
+                <a:latin typeface="Calibri"/>
+              </a:rPr>
+              <a:t>  •  Our two-layer approach in 1–2 sentences</a:t>
+            </a:r>
+          </a:p>
+        </p:txBody>
+      </p:sp>
+      <p:sp>
+        <p:nvSpPr>
+          <p:cNvPr id="13" name="Rounded Rectangle 12"/>
           <p:cNvSpPr/>
           <p:nvPr/>
         </p:nvSpPr>
         <p:spPr>
           <a:xfrm>
-            <a:off x="33802320" y="5943600"/>
-            <a:ext cx="5483352" cy="36576"/>
-          </a:xfrm>
-          <a:prstGeom prst="rect">
-            <a:avLst/>
+            <a:off x="15683346" y="4488873"/>
+            <a:ext cx="14353309" cy="8312727"/>
+          </a:xfrm>
+          <a:prstGeom prst="roundRect">
+            <a:avLst>
+              <a:gd name="adj" fmla="val 5000"/>
+            </a:avLst>
           </a:prstGeom>
           <a:solidFill>
-            <a:srgbClr val="A51C30"/>
+            <a:srgbClr val="E8F1F8"/>
           </a:solidFill>
-          <a:ln>
-            <a:noFill/>
+          <a:ln w="15875">
+            <a:solidFill>
+              <a:srgbClr val="B8CCDE"/>
+            </a:solidFill>
           </a:ln>
-          <a:effectLst/>
+          <a:effectLst>
+            <a:outerShdw blurRad="127000" dist="50800" dir="2700000" algn="tl" rotWithShape="0">
+              <a:srgbClr val="000000">
+                <a:alpha val="28000"/>
+              </a:srgbClr>
+            </a:outerShdw>
+          </a:effectLst>
         </p:spPr>
         <p:style>
           <a:lnRef idx="1">
@@ -4199,32 +3653,32 @@
           <a:lstStyle/>
           <a:p>
             <a:pPr algn="ctr"/>
-          </a:p>
-        </p:txBody>
-      </p:sp>
-      <p:sp>
-        <p:nvSpPr>
-          <p:cNvPr id="18" name="Rounded Rectangle 17"/>
+            <a:endParaRPr sz="1487"/>
+          </a:p>
+        </p:txBody>
+      </p:sp>
+      <p:sp>
+        <p:nvSpPr>
+          <p:cNvPr id="14" name="Round Same Side Corner Rectangle 13"/>
           <p:cNvSpPr/>
           <p:nvPr/>
         </p:nvSpPr>
         <p:spPr>
           <a:xfrm>
-            <a:off x="33802320" y="6309360"/>
-            <a:ext cx="15666720" cy="2926080"/>
-          </a:xfrm>
-          <a:prstGeom prst="roundRect">
+            <a:off x="15683346" y="4488873"/>
+            <a:ext cx="14353309" cy="1163782"/>
+          </a:xfrm>
+          <a:prstGeom prst="round2SameRect">
             <a:avLst>
-              <a:gd name="adj" fmla="val 6000"/>
+              <a:gd name="adj1" fmla="val 22000"/>
+              <a:gd name="adj2" fmla="val 0"/>
             </a:avLst>
           </a:prstGeom>
           <a:solidFill>
-            <a:srgbClr val="F5F5F5"/>
+            <a:srgbClr val="A51C30"/>
           </a:solidFill>
-          <a:ln w="9525">
-            <a:solidFill>
-              <a:srgbClr val="D8D8D8"/>
-            </a:solidFill>
+          <a:ln>
+            <a:noFill/>
           </a:ln>
           <a:effectLst/>
         </p:spPr>
@@ -4247,19 +3701,20 @@
           <a:lstStyle/>
           <a:p>
             <a:pPr algn="ctr"/>
-          </a:p>
-        </p:txBody>
-      </p:sp>
-      <p:sp>
-        <p:nvSpPr>
-          <p:cNvPr id="19" name="TextBox 18"/>
+            <a:endParaRPr sz="1487"/>
+          </a:p>
+        </p:txBody>
+      </p:sp>
+      <p:sp>
+        <p:nvSpPr>
+          <p:cNvPr id="15" name="TextBox 14"/>
           <p:cNvSpPr txBox="1"/>
           <p:nvPr/>
         </p:nvSpPr>
         <p:spPr>
           <a:xfrm>
-            <a:off x="33802320" y="6446520"/>
-            <a:ext cx="15666720" cy="1463040"/>
+            <a:off x="16015855" y="4696691"/>
+            <a:ext cx="13688291" cy="763362"/>
           </a:xfrm>
           <a:prstGeom prst="rect">
             <a:avLst/>
@@ -4267,38 +3722,38 @@
           <a:noFill/>
         </p:spPr>
         <p:txBody>
-          <a:bodyPr wrap="square" anchor="t">
+          <a:bodyPr wrap="square" lIns="124691" tIns="83127" rIns="124691" bIns="83127" anchor="t">
             <a:spAutoFit/>
           </a:bodyPr>
           <a:lstStyle/>
           <a:p>
-            <a:pPr algn="ctr">
+            <a:pPr algn="l">
               <a:lnSpc>
                 <a:spcPct val="120000"/>
               </a:lnSpc>
             </a:pPr>
             <a:r>
-              <a:rPr sz="9600" b="1" i="0">
-                <a:solidFill>
-                  <a:srgbClr val="A51C30"/>
-                </a:solidFill>
-                <a:latin typeface="Georgia"/>
+              <a:rPr sz="3455" b="1">
+                <a:solidFill>
+                  <a:srgbClr val="FFFFFF"/>
+                </a:solidFill>
+                <a:latin typeface="Calibri"/>
               </a:rPr>
-              <a:t>14 / 15</a:t>
-            </a:r>
-          </a:p>
-        </p:txBody>
-      </p:sp>
-      <p:sp>
-        <p:nvSpPr>
-          <p:cNvPr id="20" name="TextBox 19"/>
+              <a:t>② OBJECTIVES</a:t>
+            </a:r>
+          </a:p>
+        </p:txBody>
+      </p:sp>
+      <p:sp>
+        <p:nvSpPr>
+          <p:cNvPr id="16" name="TextBox 15"/>
           <p:cNvSpPr txBox="1"/>
           <p:nvPr/>
         </p:nvSpPr>
         <p:spPr>
           <a:xfrm>
-            <a:off x="33802320" y="8046720"/>
-            <a:ext cx="15666720" cy="1097280"/>
+            <a:off x="16098982" y="5943600"/>
+            <a:ext cx="13522036" cy="3188320"/>
           </a:xfrm>
           <a:prstGeom prst="rect">
             <a:avLst/>
@@ -4306,241 +3761,152 @@
           <a:noFill/>
         </p:spPr>
         <p:txBody>
-          <a:bodyPr wrap="square" anchor="t">
+          <a:bodyPr wrap="square" lIns="124691" tIns="83127" rIns="124691" bIns="83127" anchor="t">
             <a:spAutoFit/>
           </a:bodyPr>
           <a:lstStyle/>
           <a:p>
-            <a:pPr algn="ctr">
-              <a:lnSpc>
-                <a:spcPct val="120000"/>
-              </a:lnSpc>
-            </a:pPr>
-            <a:r>
-              <a:rPr sz="2200" b="0" i="1">
-                <a:solidFill>
-                  <a:srgbClr val="2A2A2A"/>
+            <a:pPr algn="l">
+              <a:lnSpc>
+                <a:spcPct val="130000"/>
+              </a:lnSpc>
+            </a:pPr>
+            <a:r>
+              <a:rPr sz="2182" i="1">
+                <a:solidFill>
+                  <a:srgbClr val="8A99A8"/>
                 </a:solidFill>
                 <a:latin typeface="Calibri"/>
               </a:rPr>
-              <a:t>known frauds recovered at the p85 suspicion cutoff.</a:t>
-            </a:r>
-          </a:p>
-          <a:p>
-            <a:pPr algn="ctr">
-              <a:lnSpc>
-                <a:spcPct val="120000"/>
-              </a:lnSpc>
-            </a:pPr>
-            <a:r>
-              <a:rPr sz="2200" b="0" i="1">
-                <a:solidFill>
-                  <a:srgbClr val="2A2A2A"/>
+              <a:t>[ Paste your objectives here. ]</a:t>
+            </a:r>
+          </a:p>
+          <a:p>
+            <a:pPr algn="l">
+              <a:lnSpc>
+                <a:spcPct val="130000"/>
+              </a:lnSpc>
+            </a:pPr>
+            <a:endParaRPr sz="2182" i="1">
+              <a:solidFill>
+                <a:srgbClr val="8A99A8"/>
+              </a:solidFill>
+              <a:latin typeface="Calibri"/>
+            </a:endParaRPr>
+          </a:p>
+          <a:p>
+            <a:pPr algn="l">
+              <a:lnSpc>
+                <a:spcPct val="130000"/>
+              </a:lnSpc>
+            </a:pPr>
+            <a:r>
+              <a:rPr sz="2182" i="1">
+                <a:solidFill>
+                  <a:srgbClr val="8A99A8"/>
                 </a:solidFill>
                 <a:latin typeface="Calibri"/>
               </a:rPr>
-              <a:t>The legacy three-vote consensus recovered 4 of 15.</a:t>
-            </a:r>
-          </a:p>
-        </p:txBody>
-      </p:sp>
-      <p:pic>
-        <p:nvPicPr>
-          <p:cNvPr id="21" name="Picture 20" descr="baseline_comparison.png"/>
-          <p:cNvPicPr>
-            <a:picLocks noChangeAspect="1"/>
-          </p:cNvPicPr>
-          <p:nvPr/>
-        </p:nvPicPr>
-        <p:blipFill>
-          <a:blip r:embed="rId4"/>
-          <a:stretch>
-            <a:fillRect/>
-          </a:stretch>
-        </p:blipFill>
-        <p:spPr>
-          <a:xfrm>
-            <a:off x="33802320" y="9601200"/>
-            <a:ext cx="15666720" cy="5303520"/>
-          </a:xfrm>
-          <a:prstGeom prst="rect">
-            <a:avLst/>
-          </a:prstGeom>
-        </p:spPr>
-      </p:pic>
-      <p:sp>
-        <p:nvSpPr>
-          <p:cNvPr id="22" name="TextBox 21"/>
-          <p:cNvSpPr txBox="1"/>
-          <p:nvPr/>
-        </p:nvSpPr>
-        <p:spPr>
-          <a:xfrm>
-            <a:off x="33802320" y="14950440"/>
-            <a:ext cx="15666720" cy="914400"/>
-          </a:xfrm>
-          <a:prstGeom prst="rect">
-            <a:avLst/>
-          </a:prstGeom>
-          <a:noFill/>
-        </p:spPr>
-        <p:txBody>
-          <a:bodyPr wrap="square" anchor="t">
-            <a:spAutoFit/>
-          </a:bodyPr>
-          <a:lstStyle/>
-          <a:p>
-            <a:pPr algn="ctr">
-              <a:lnSpc>
-                <a:spcPct val="120000"/>
-              </a:lnSpc>
-            </a:pPr>
-            <a:r>
-              <a:rPr sz="2200" b="0" i="1">
-                <a:solidFill>
-                  <a:srgbClr val="2A2A2A"/>
+              <a:t>Suggested:</a:t>
+            </a:r>
+          </a:p>
+          <a:p>
+            <a:pPr algn="l">
+              <a:lnSpc>
+                <a:spcPct val="130000"/>
+              </a:lnSpc>
+            </a:pPr>
+            <a:r>
+              <a:rPr sz="2182" i="1">
+                <a:solidFill>
+                  <a:srgbClr val="8A99A8"/>
                 </a:solidFill>
                 <a:latin typeface="Calibri"/>
               </a:rPr>
-              <a:t>Fig. 1.  Fraud recall on the n = 144 validated subset</a:t>
-            </a:r>
-          </a:p>
-          <a:p>
-            <a:pPr algn="ctr">
-              <a:lnSpc>
-                <a:spcPct val="120000"/>
-              </a:lnSpc>
-            </a:pPr>
-            <a:r>
-              <a:rPr sz="2200" b="0" i="1">
-                <a:solidFill>
-                  <a:srgbClr val="2A2A2A"/>
+              <a:t>  •  Flag suspicious tokens without supervised labels</a:t>
+            </a:r>
+          </a:p>
+          <a:p>
+            <a:pPr algn="l">
+              <a:lnSpc>
+                <a:spcPct val="130000"/>
+              </a:lnSpc>
+            </a:pPr>
+            <a:r>
+              <a:rPr sz="2182" i="1">
+                <a:solidFill>
+                  <a:srgbClr val="8A99A8"/>
                 </a:solidFill>
                 <a:latin typeface="Calibri"/>
               </a:rPr>
-              <a:t>(15 FRAUD, 129 non-fraud). Continuous suspicion</a:t>
-            </a:r>
-          </a:p>
-          <a:p>
-            <a:pPr algn="ctr">
-              <a:lnSpc>
-                <a:spcPct val="120000"/>
-              </a:lnSpc>
-            </a:pPr>
-            <a:r>
-              <a:rPr sz="2200" b="0" i="1">
-                <a:solidFill>
-                  <a:srgbClr val="2A2A2A"/>
+              <a:t>  •  Distinguish fraud from other anomaly types</a:t>
+            </a:r>
+          </a:p>
+          <a:p>
+            <a:pPr algn="l">
+              <a:lnSpc>
+                <a:spcPct val="130000"/>
+              </a:lnSpc>
+            </a:pPr>
+            <a:r>
+              <a:rPr sz="2182" i="1">
+                <a:solidFill>
+                  <a:srgbClr val="8A99A8"/>
                 </a:solidFill>
                 <a:latin typeface="Calibri"/>
               </a:rPr>
-              <a:t>score catches 14 of 15 at p85; discrete voting catches 4.</a:t>
-            </a:r>
-          </a:p>
-        </p:txBody>
-      </p:sp>
-      <p:pic>
-        <p:nvPicPr>
-          <p:cNvPr id="23" name="Picture 22" descr="shap_global_importance.png"/>
-          <p:cNvPicPr>
-            <a:picLocks noChangeAspect="1"/>
-          </p:cNvPicPr>
-          <p:nvPr/>
-        </p:nvPicPr>
-        <p:blipFill>
-          <a:blip r:embed="rId5"/>
-          <a:stretch>
-            <a:fillRect/>
-          </a:stretch>
-        </p:blipFill>
-        <p:spPr>
-          <a:xfrm>
-            <a:off x="33802320" y="16733520"/>
-            <a:ext cx="15666720" cy="4389120"/>
-          </a:xfrm>
-          <a:prstGeom prst="rect">
-            <a:avLst/>
-          </a:prstGeom>
-        </p:spPr>
-      </p:pic>
-      <p:sp>
-        <p:nvSpPr>
-          <p:cNvPr id="24" name="TextBox 23"/>
-          <p:cNvSpPr txBox="1"/>
-          <p:nvPr/>
-        </p:nvSpPr>
-        <p:spPr>
-          <a:xfrm>
-            <a:off x="33802320" y="21168360"/>
-            <a:ext cx="15666720" cy="914400"/>
-          </a:xfrm>
-          <a:prstGeom prst="rect">
-            <a:avLst/>
-          </a:prstGeom>
-          <a:noFill/>
-        </p:spPr>
-        <p:txBody>
-          <a:bodyPr wrap="square" anchor="t">
-            <a:spAutoFit/>
-          </a:bodyPr>
-          <a:lstStyle/>
-          <a:p>
-            <a:pPr algn="ctr">
-              <a:lnSpc>
-                <a:spcPct val="120000"/>
-              </a:lnSpc>
-            </a:pPr>
-            <a:r>
-              <a:rPr sz="2200" b="0" i="1">
-                <a:solidFill>
-                  <a:srgbClr val="2A2A2A"/>
+              <a:t>  •  Validate against documented rug-pulls and hacks</a:t>
+            </a:r>
+          </a:p>
+          <a:p>
+            <a:pPr algn="l">
+              <a:lnSpc>
+                <a:spcPct val="130000"/>
+              </a:lnSpc>
+            </a:pPr>
+            <a:r>
+              <a:rPr sz="2182" i="1">
+                <a:solidFill>
+                  <a:srgbClr val="8A99A8"/>
                 </a:solidFill>
                 <a:latin typeface="Calibri"/>
               </a:rPr>
-              <a:t>Fig. 2.  SHAP attribution on Isolation Forest.</a:t>
-            </a:r>
-          </a:p>
-          <a:p>
-            <a:pPr algn="ctr">
-              <a:lnSpc>
-                <a:spcPct val="120000"/>
-              </a:lnSpc>
-            </a:pPr>
-            <a:r>
-              <a:rPr sz="2200" b="0" i="1">
-                <a:solidFill>
-                  <a:srgbClr val="2A2A2A"/>
-                </a:solidFill>
-                <a:latin typeface="Calibri"/>
-              </a:rPr>
-              <a:t>24-hour early velocity outranks the legacy volume-spike feature.</a:t>
-            </a:r>
-          </a:p>
-        </p:txBody>
-      </p:sp>
-      <p:sp>
-        <p:nvSpPr>
-          <p:cNvPr id="25" name="Rounded Rectangle 24"/>
+              <a:t>  •  Deliver an interpretable, reproducible pipeline</a:t>
+            </a:r>
+          </a:p>
+        </p:txBody>
+      </p:sp>
+      <p:sp>
+        <p:nvSpPr>
+          <p:cNvPr id="17" name="Rounded Rectangle 16"/>
           <p:cNvSpPr/>
           <p:nvPr/>
         </p:nvSpPr>
         <p:spPr>
           <a:xfrm>
-            <a:off x="822960" y="32918400"/>
-            <a:ext cx="48646080" cy="4389120"/>
+            <a:off x="30618546" y="4488873"/>
+            <a:ext cx="14353309" cy="8312727"/>
           </a:xfrm>
           <a:prstGeom prst="roundRect">
             <a:avLst>
-              <a:gd name="adj" fmla="val 3000"/>
+              <a:gd name="adj" fmla="val 5000"/>
             </a:avLst>
           </a:prstGeom>
           <a:solidFill>
-            <a:srgbClr val="A51C30"/>
+            <a:srgbClr val="E8F1F8"/>
           </a:solidFill>
-          <a:ln>
-            <a:noFill/>
+          <a:ln w="15875">
+            <a:solidFill>
+              <a:srgbClr val="B8CCDE"/>
+            </a:solidFill>
           </a:ln>
-          <a:effectLst/>
+          <a:effectLst>
+            <a:outerShdw blurRad="127000" dist="50800" dir="2700000" algn="tl" rotWithShape="0">
+              <a:srgbClr val="000000">
+                <a:alpha val="28000"/>
+              </a:srgbClr>
+            </a:outerShdw>
+          </a:effectLst>
         </p:spPr>
         <p:style>
           <a:lnRef idx="1">
@@ -4561,19 +3927,68 @@
           <a:lstStyle/>
           <a:p>
             <a:pPr algn="ctr"/>
-          </a:p>
-        </p:txBody>
-      </p:sp>
-      <p:sp>
-        <p:nvSpPr>
-          <p:cNvPr id="26" name="TextBox 25"/>
+            <a:endParaRPr sz="1487"/>
+          </a:p>
+        </p:txBody>
+      </p:sp>
+      <p:sp>
+        <p:nvSpPr>
+          <p:cNvPr id="18" name="Round Same Side Corner Rectangle 17"/>
+          <p:cNvSpPr/>
+          <p:nvPr/>
+        </p:nvSpPr>
+        <p:spPr>
+          <a:xfrm>
+            <a:off x="30618546" y="4488873"/>
+            <a:ext cx="14353309" cy="1163782"/>
+          </a:xfrm>
+          <a:prstGeom prst="round2SameRect">
+            <a:avLst>
+              <a:gd name="adj1" fmla="val 22000"/>
+              <a:gd name="adj2" fmla="val 0"/>
+            </a:avLst>
+          </a:prstGeom>
+          <a:solidFill>
+            <a:srgbClr val="A51C30"/>
+          </a:solidFill>
+          <a:ln>
+            <a:noFill/>
+          </a:ln>
+          <a:effectLst/>
+        </p:spPr>
+        <p:style>
+          <a:lnRef idx="1">
+            <a:schemeClr val="accent1"/>
+          </a:lnRef>
+          <a:fillRef idx="3">
+            <a:schemeClr val="accent1"/>
+          </a:fillRef>
+          <a:effectRef idx="2">
+            <a:schemeClr val="accent1"/>
+          </a:effectRef>
+          <a:fontRef idx="minor">
+            <a:schemeClr val="lt1"/>
+          </a:fontRef>
+        </p:style>
+        <p:txBody>
+          <a:bodyPr rtlCol="0" anchor="ctr"/>
+          <a:lstStyle/>
+          <a:p>
+            <a:pPr algn="ctr"/>
+            <a:endParaRPr sz="1487"/>
+          </a:p>
+        </p:txBody>
+      </p:sp>
+      <p:sp>
+        <p:nvSpPr>
+          <p:cNvPr id="19" name="TextBox 18"/>
           <p:cNvSpPr txBox="1"/>
           <p:nvPr/>
         </p:nvSpPr>
         <p:spPr>
           <a:xfrm>
-            <a:off x="1371600" y="33147000"/>
-            <a:ext cx="47548800" cy="1005840"/>
+            <a:off x="30951055" y="4696691"/>
+            <a:ext cx="13688291" cy="763362"/>
           </a:xfrm>
           <a:prstGeom prst="rect">
             <a:avLst/>
@@ -4581,7 +3996,7 @@
           <a:noFill/>
         </p:spPr>
         <p:txBody>
-          <a:bodyPr wrap="square" anchor="t">
+          <a:bodyPr wrap="square" lIns="124691" tIns="83127" rIns="124691" bIns="83127" anchor="t">
             <a:spAutoFit/>
           </a:bodyPr>
           <a:lstStyle/>
@@ -4592,27 +4007,27 @@
               </a:lnSpc>
             </a:pPr>
             <a:r>
-              <a:rPr sz="3200" b="1" i="0">
+              <a:rPr sz="3455" b="1">
                 <a:solidFill>
                   <a:srgbClr val="FFFFFF"/>
                 </a:solidFill>
                 <a:latin typeface="Calibri"/>
               </a:rPr>
-              <a:t>SO WHAT</a:t>
-            </a:r>
-          </a:p>
-        </p:txBody>
-      </p:sp>
-      <p:sp>
-        <p:nvSpPr>
-          <p:cNvPr id="27" name="TextBox 26"/>
+              <a:t>③ METHODS</a:t>
+            </a:r>
+          </a:p>
+        </p:txBody>
+      </p:sp>
+      <p:sp>
+        <p:nvSpPr>
+          <p:cNvPr id="20" name="TextBox 19"/>
           <p:cNvSpPr txBox="1"/>
           <p:nvPr/>
         </p:nvSpPr>
         <p:spPr>
           <a:xfrm>
-            <a:off x="1371600" y="34152840"/>
-            <a:ext cx="47548800" cy="3108960"/>
+            <a:off x="31034182" y="5943600"/>
+            <a:ext cx="13522036" cy="3624850"/>
           </a:xfrm>
           <a:prstGeom prst="rect">
             <a:avLst/>
@@ -4620,166 +4035,250 @@
           <a:noFill/>
         </p:spPr>
         <p:txBody>
-          <a:bodyPr wrap="square" anchor="t">
+          <a:bodyPr wrap="square" lIns="124691" tIns="83127" rIns="124691" bIns="83127" anchor="t">
             <a:spAutoFit/>
           </a:bodyPr>
           <a:lstStyle/>
           <a:p>
             <a:pPr algn="l">
               <a:lnSpc>
-                <a:spcPct val="125000"/>
-              </a:lnSpc>
-            </a:pPr>
-            <a:r>
-              <a:rPr sz="2400" b="0" i="0">
-                <a:solidFill>
-                  <a:srgbClr val="FFFFFF"/>
+                <a:spcPct val="130000"/>
+              </a:lnSpc>
+            </a:pPr>
+            <a:r>
+              <a:rPr sz="2182" i="1">
+                <a:solidFill>
+                  <a:srgbClr val="8A99A8"/>
                 </a:solidFill>
                 <a:latin typeface="Calibri"/>
               </a:rPr>
-              <a:t>Continuous ranking beats discrete voting.  A rank-averaged suspicion score recovered 14 of 15 known</a:t>
+              <a:t>[ Paste your methods here. ]</a:t>
             </a:r>
           </a:p>
           <a:p>
             <a:pPr algn="l">
               <a:lnSpc>
-                <a:spcPct val="125000"/>
-              </a:lnSpc>
-            </a:pPr>
-            <a:r>
-              <a:rPr sz="2400" b="0" i="0">
-                <a:solidFill>
-                  <a:srgbClr val="FFFFFF"/>
+                <a:spcPct val="130000"/>
+              </a:lnSpc>
+            </a:pPr>
+            <a:endParaRPr sz="2182" i="1">
+              <a:solidFill>
+                <a:srgbClr val="8A99A8"/>
+              </a:solidFill>
+              <a:latin typeface="Calibri"/>
+            </a:endParaRPr>
+          </a:p>
+          <a:p>
+            <a:pPr algn="l">
+              <a:lnSpc>
+                <a:spcPct val="130000"/>
+              </a:lnSpc>
+            </a:pPr>
+            <a:r>
+              <a:rPr sz="2182" i="1">
+                <a:solidFill>
+                  <a:srgbClr val="8A99A8"/>
                 </a:solidFill>
                 <a:latin typeface="Calibri"/>
               </a:rPr>
-              <a:t>frauds on the validated subset; the legacy "3 of 3 detectors agree" rule recovered only 4 of 15.</a:t>
+              <a:t>Suggested:</a:t>
             </a:r>
           </a:p>
           <a:p>
             <a:pPr algn="l">
               <a:lnSpc>
-                <a:spcPct val="125000"/>
-              </a:lnSpc>
-            </a:pPr>
-            <a:r>
-              <a:rPr sz="2400" b="0" i="0">
-                <a:solidFill>
-                  <a:srgbClr val="FFFFFF"/>
+                <a:spcPct val="130000"/>
+              </a:lnSpc>
+            </a:pPr>
+            <a:r>
+              <a:rPr sz="2182" i="1">
+                <a:solidFill>
+                  <a:srgbClr val="8A99A8"/>
                 </a:solidFill>
                 <a:latin typeface="Calibri"/>
               </a:rPr>
-              <a:t/>
+              <a:t>  •  4,334 mid-cap ERC-20 tokens (Dune Analytics)</a:t>
             </a:r>
           </a:p>
           <a:p>
             <a:pPr algn="l">
               <a:lnSpc>
-                <a:spcPct val="125000"/>
-              </a:lnSpc>
-            </a:pPr>
-            <a:r>
-              <a:rPr sz="2400" b="0" i="0">
-                <a:solidFill>
-                  <a:srgbClr val="FFFFFF"/>
+                <a:spcPct val="130000"/>
+              </a:lnSpc>
+            </a:pPr>
+            <a:r>
+              <a:rPr sz="2182" i="1">
+                <a:solidFill>
+                  <a:srgbClr val="8A99A8"/>
                 </a:solidFill>
                 <a:latin typeface="Calibri"/>
               </a:rPr>
-              <a:t>Two layers separate 'anomaly' from 'fraud.'  The Layer-2 calibrator achieves 88% specificity —</a:t>
+              <a:t>  •  Six features; rank-averaged across three detectors</a:t>
             </a:r>
           </a:p>
           <a:p>
             <a:pPr algn="l">
               <a:lnSpc>
-                <a:spcPct val="125000"/>
-              </a:lnSpc>
-            </a:pPr>
-            <a:r>
-              <a:rPr sz="2400" b="0" i="0">
-                <a:solidFill>
-                  <a:srgbClr val="FFFFFF"/>
+                <a:spcPct val="130000"/>
+              </a:lnSpc>
+            </a:pPr>
+            <a:r>
+              <a:rPr sz="2182" i="1">
+                <a:solidFill>
+                  <a:srgbClr val="8A99A8"/>
                 </a:solidFill>
                 <a:latin typeface="Calibri"/>
               </a:rPr>
-              <a:t>blue-chip tokens (WLFI, DEGEN, MIM, 3Crv) that trigger Layer 1 alarms all score P(fraud) &lt; 0.06,</a:t>
+              <a:t>      (Isolation Forest + DBSCAN + PCA/Mahalanobis)</a:t>
             </a:r>
           </a:p>
           <a:p>
             <a:pPr algn="l">
               <a:lnSpc>
-                <a:spcPct val="125000"/>
-              </a:lnSpc>
-            </a:pPr>
-            <a:r>
-              <a:rPr sz="2400" b="0" i="0">
-                <a:solidFill>
-                  <a:srgbClr val="FFFFFF"/>
+                <a:spcPct val="130000"/>
+              </a:lnSpc>
+            </a:pPr>
+            <a:r>
+              <a:rPr sz="2182" i="1">
+                <a:solidFill>
+                  <a:srgbClr val="8A99A8"/>
                 </a:solidFill>
                 <a:latin typeface="Calibri"/>
               </a:rPr>
-              <a:t>while known rugs (WFT, PLASMA, ORBDEG cluster) score P(fraud) &gt; 0.8. Leave-one-out accuracy 0.87.</a:t>
+              <a:t>  •  Layer-2 logistic regression on n = 144 labels,</a:t>
             </a:r>
           </a:p>
           <a:p>
             <a:pPr algn="l">
               <a:lnSpc>
-                <a:spcPct val="125000"/>
-              </a:lnSpc>
-            </a:pPr>
-            <a:r>
-              <a:rPr sz="2400" b="0" i="0">
-                <a:solidFill>
-                  <a:srgbClr val="FFFFFF"/>
+                <a:spcPct val="130000"/>
+              </a:lnSpc>
+            </a:pPr>
+            <a:r>
+              <a:rPr sz="2182" i="1">
+                <a:solidFill>
+                  <a:srgbClr val="8A99A8"/>
                 </a:solidFill>
                 <a:latin typeface="Calibri"/>
               </a:rPr>
-              <a:t/>
-            </a:r>
-          </a:p>
-          <a:p>
-            <a:pPr algn="l">
-              <a:lnSpc>
-                <a:spcPct val="125000"/>
-              </a:lnSpc>
-            </a:pPr>
-            <a:r>
-              <a:rPr sz="2400" b="0" i="0">
-                <a:solidFill>
-                  <a:srgbClr val="FFFFFF"/>
-                </a:solidFill>
-                <a:latin typeface="Calibri"/>
-              </a:rPr>
-              <a:t>Remaining limitations.  Small-volume honeypots (HYPER, KUBO) still slip through — catching them</a:t>
-            </a:r>
-          </a:p>
-          <a:p>
-            <a:pPr algn="l">
-              <a:lnSpc>
-                <a:spcPct val="125000"/>
-              </a:lnSpc>
-            </a:pPr>
-            <a:r>
-              <a:rPr sz="2400" b="0" i="0">
-                <a:solidFill>
-                  <a:srgbClr val="FFFFFF"/>
-                </a:solidFill>
-                <a:latin typeface="Calibri"/>
-              </a:rPr>
-              <a:t>requires graph-level signals (deployer history, liquidity-pool removal) beyond on-chain volume.</a:t>
-            </a:r>
-          </a:p>
-        </p:txBody>
-      </p:sp>
-      <p:sp>
-        <p:nvSpPr>
-          <p:cNvPr id="28" name="TextBox 27"/>
+              <a:t>      evaluated by leave-one-out CV</a:t>
+            </a:r>
+          </a:p>
+        </p:txBody>
+      </p:sp>
+      <p:sp>
+        <p:nvSpPr>
+          <p:cNvPr id="21" name="Rounded Rectangle 20"/>
+          <p:cNvSpPr/>
+          <p:nvPr/>
+        </p:nvSpPr>
+        <p:spPr>
+          <a:xfrm>
+            <a:off x="748146" y="13217236"/>
+            <a:ext cx="14353309" cy="11637818"/>
+          </a:xfrm>
+          <a:prstGeom prst="roundRect">
+            <a:avLst>
+              <a:gd name="adj" fmla="val 5000"/>
+            </a:avLst>
+          </a:prstGeom>
+          <a:solidFill>
+            <a:srgbClr val="E8F1F8"/>
+          </a:solidFill>
+          <a:ln w="15875">
+            <a:solidFill>
+              <a:srgbClr val="B8CCDE"/>
+            </a:solidFill>
+          </a:ln>
+          <a:effectLst>
+            <a:outerShdw blurRad="127000" dist="50800" dir="2700000" algn="tl" rotWithShape="0">
+              <a:srgbClr val="000000">
+                <a:alpha val="28000"/>
+              </a:srgbClr>
+            </a:outerShdw>
+          </a:effectLst>
+        </p:spPr>
+        <p:style>
+          <a:lnRef idx="1">
+            <a:schemeClr val="accent1"/>
+          </a:lnRef>
+          <a:fillRef idx="3">
+            <a:schemeClr val="accent1"/>
+          </a:fillRef>
+          <a:effectRef idx="2">
+            <a:schemeClr val="accent1"/>
+          </a:effectRef>
+          <a:fontRef idx="minor">
+            <a:schemeClr val="lt1"/>
+          </a:fontRef>
+        </p:style>
+        <p:txBody>
+          <a:bodyPr rtlCol="0" anchor="ctr"/>
+          <a:lstStyle/>
+          <a:p>
+            <a:pPr algn="ctr"/>
+            <a:endParaRPr sz="1487"/>
+          </a:p>
+        </p:txBody>
+      </p:sp>
+      <p:sp>
+        <p:nvSpPr>
+          <p:cNvPr id="22" name="Round Same Side Corner Rectangle 21"/>
+          <p:cNvSpPr/>
+          <p:nvPr/>
+        </p:nvSpPr>
+        <p:spPr>
+          <a:xfrm>
+            <a:off x="748146" y="13217236"/>
+            <a:ext cx="14353309" cy="1163782"/>
+          </a:xfrm>
+          <a:prstGeom prst="round2SameRect">
+            <a:avLst>
+              <a:gd name="adj1" fmla="val 22000"/>
+              <a:gd name="adj2" fmla="val 0"/>
+            </a:avLst>
+          </a:prstGeom>
+          <a:solidFill>
+            <a:srgbClr val="A51C30"/>
+          </a:solidFill>
+          <a:ln>
+            <a:noFill/>
+          </a:ln>
+          <a:effectLst/>
+        </p:spPr>
+        <p:style>
+          <a:lnRef idx="1">
+            <a:schemeClr val="accent1"/>
+          </a:lnRef>
+          <a:fillRef idx="3">
+            <a:schemeClr val="accent1"/>
+          </a:fillRef>
+          <a:effectRef idx="2">
+            <a:schemeClr val="accent1"/>
+          </a:effectRef>
+          <a:fontRef idx="minor">
+            <a:schemeClr val="lt1"/>
+          </a:fontRef>
+        </p:style>
+        <p:txBody>
+          <a:bodyPr rtlCol="0" anchor="ctr"/>
+          <a:lstStyle/>
+          <a:p>
+            <a:pPr algn="ctr"/>
+            <a:endParaRPr sz="1487"/>
+          </a:p>
+        </p:txBody>
+      </p:sp>
+      <p:sp>
+        <p:nvSpPr>
+          <p:cNvPr id="23" name="TextBox 22"/>
           <p:cNvSpPr txBox="1"/>
           <p:nvPr/>
         </p:nvSpPr>
         <p:spPr>
           <a:xfrm>
-            <a:off x="822960" y="37627560"/>
-            <a:ext cx="24323040" cy="2331720"/>
+            <a:off x="1080655" y="13425055"/>
+            <a:ext cx="13688291" cy="763362"/>
           </a:xfrm>
           <a:prstGeom prst="rect">
             <a:avLst/>
@@ -4787,70 +4286,93 @@
           <a:noFill/>
         </p:spPr>
         <p:txBody>
-          <a:bodyPr wrap="square" anchor="t">
+          <a:bodyPr wrap="square" lIns="124691" tIns="83127" rIns="124691" bIns="83127" anchor="t">
             <a:spAutoFit/>
           </a:bodyPr>
           <a:lstStyle/>
           <a:p>
             <a:pPr algn="l">
               <a:lnSpc>
-                <a:spcPct val="130000"/>
-              </a:lnSpc>
-            </a:pPr>
-            <a:r>
-              <a:rPr sz="2200" b="0" i="0">
-                <a:solidFill>
-                  <a:srgbClr val="2A2A2A"/>
+                <a:spcPct val="120000"/>
+              </a:lnSpc>
+            </a:pPr>
+            <a:r>
+              <a:rPr sz="3455" b="1">
+                <a:solidFill>
+                  <a:srgbClr val="FFFFFF"/>
                 </a:solidFill>
                 <a:latin typeface="Calibri"/>
               </a:rPr>
-              <a:t>Code:      github.com/gschriever/AC297r-crypto-fraud-detector</a:t>
-            </a:r>
-          </a:p>
-          <a:p>
-            <a:pPr algn="l">
-              <a:lnSpc>
-                <a:spcPct val="130000"/>
-              </a:lnSpc>
-            </a:pPr>
-            <a:r>
-              <a:rPr sz="2200" b="0" i="0">
-                <a:solidFill>
-                  <a:srgbClr val="2A2A2A"/>
-                </a:solidFill>
-                <a:latin typeface="Calibri"/>
-              </a:rPr>
-              <a:t>Contact:   [ name ]  ·  [ email ]</a:t>
-            </a:r>
-          </a:p>
-          <a:p>
-            <a:pPr algn="l">
-              <a:lnSpc>
-                <a:spcPct val="130000"/>
-              </a:lnSpc>
-            </a:pPr>
-            <a:r>
-              <a:rPr sz="2200" b="0" i="0">
-                <a:solidFill>
-                  <a:srgbClr val="2A2A2A"/>
-                </a:solidFill>
-                <a:latin typeface="Calibri"/>
-              </a:rPr>
-              <a:t>Advisor:   [ advisor ]</a:t>
-            </a:r>
-          </a:p>
-        </p:txBody>
-      </p:sp>
-      <p:sp>
-        <p:nvSpPr>
-          <p:cNvPr id="29" name="TextBox 28"/>
+              <a:t>④ RESULTS</a:t>
+            </a:r>
+          </a:p>
+        </p:txBody>
+      </p:sp>
+      <p:sp>
+        <p:nvSpPr>
+          <p:cNvPr id="24" name="Rounded Rectangle 23"/>
+          <p:cNvSpPr/>
+          <p:nvPr/>
+        </p:nvSpPr>
+        <p:spPr>
+          <a:xfrm>
+            <a:off x="1163782" y="14671964"/>
+            <a:ext cx="13522036" cy="2992582"/>
+          </a:xfrm>
+          <a:prstGeom prst="roundRect">
+            <a:avLst>
+              <a:gd name="adj" fmla="val 8000"/>
+            </a:avLst>
+          </a:prstGeom>
+          <a:solidFill>
+            <a:srgbClr val="FFFFFF"/>
+          </a:solidFill>
+          <a:ln w="12700">
+            <a:solidFill>
+              <a:srgbClr val="B8CCDE"/>
+            </a:solidFill>
+          </a:ln>
+          <a:effectLst>
+            <a:outerShdw blurRad="76200" dist="25400" dir="2700000" algn="tl" rotWithShape="0">
+              <a:srgbClr val="000000">
+                <a:alpha val="22000"/>
+              </a:srgbClr>
+            </a:outerShdw>
+          </a:effectLst>
+        </p:spPr>
+        <p:style>
+          <a:lnRef idx="1">
+            <a:schemeClr val="accent1"/>
+          </a:lnRef>
+          <a:fillRef idx="3">
+            <a:schemeClr val="accent1"/>
+          </a:fillRef>
+          <a:effectRef idx="2">
+            <a:schemeClr val="accent1"/>
+          </a:effectRef>
+          <a:fontRef idx="minor">
+            <a:schemeClr val="lt1"/>
+          </a:fontRef>
+        </p:style>
+        <p:txBody>
+          <a:bodyPr rtlCol="0" anchor="ctr"/>
+          <a:lstStyle/>
+          <a:p>
+            <a:pPr algn="ctr"/>
+            <a:endParaRPr sz="1487"/>
+          </a:p>
+        </p:txBody>
+      </p:sp>
+      <p:sp>
+        <p:nvSpPr>
+          <p:cNvPr id="25" name="TextBox 24"/>
           <p:cNvSpPr txBox="1"/>
           <p:nvPr/>
         </p:nvSpPr>
         <p:spPr>
           <a:xfrm>
-            <a:off x="25146000" y="37627560"/>
-            <a:ext cx="24323040" cy="2331720"/>
+            <a:off x="1163782" y="14755091"/>
+            <a:ext cx="13522036" cy="1574673"/>
           </a:xfrm>
           <a:prstGeom prst="rect">
             <a:avLst/>
@@ -4858,42 +4380,104 @@
           <a:noFill/>
         </p:spPr>
         <p:txBody>
-          <a:bodyPr wrap="square" anchor="t">
+          <a:bodyPr wrap="square" lIns="124691" tIns="83127" rIns="124691" bIns="83127" anchor="t">
             <a:spAutoFit/>
           </a:bodyPr>
           <a:lstStyle/>
           <a:p>
-            <a:pPr algn="l">
-              <a:lnSpc>
-                <a:spcPct val="130000"/>
-              </a:lnSpc>
-            </a:pPr>
-            <a:r>
-              <a:rPr sz="2200" b="0" i="0">
+            <a:pPr algn="ctr">
+              <a:lnSpc>
+                <a:spcPct val="120000"/>
+              </a:lnSpc>
+            </a:pPr>
+            <a:r>
+              <a:rPr sz="8364" b="1">
+                <a:solidFill>
+                  <a:srgbClr val="A51C30"/>
+                </a:solidFill>
+                <a:latin typeface="Georgia"/>
+              </a:rPr>
+              <a:t>14 / 15</a:t>
+            </a:r>
+          </a:p>
+        </p:txBody>
+      </p:sp>
+      <p:sp>
+        <p:nvSpPr>
+          <p:cNvPr id="26" name="TextBox 25"/>
+          <p:cNvSpPr txBox="1"/>
+          <p:nvPr/>
+        </p:nvSpPr>
+        <p:spPr>
+          <a:xfrm>
+            <a:off x="1163782" y="16459200"/>
+            <a:ext cx="13522036" cy="816966"/>
+          </a:xfrm>
+          <a:prstGeom prst="rect">
+            <a:avLst/>
+          </a:prstGeom>
+          <a:noFill/>
+        </p:spPr>
+        <p:txBody>
+          <a:bodyPr wrap="square" lIns="124691" tIns="83127" rIns="124691" bIns="83127" anchor="t">
+            <a:spAutoFit/>
+          </a:bodyPr>
+          <a:lstStyle/>
+          <a:p>
+            <a:pPr algn="ctr">
+              <a:lnSpc>
+                <a:spcPct val="120000"/>
+              </a:lnSpc>
+            </a:pPr>
+            <a:r>
+              <a:rPr sz="1818" i="1">
                 <a:solidFill>
                   <a:srgbClr val="2A2A2A"/>
                 </a:solidFill>
                 <a:latin typeface="Calibri"/>
               </a:rPr>
-              <a:t>[1] Mazorra et al.  Do Not Rug on Me.  arXiv:2201.07220, 2022.</a:t>
-            </a:r>
-          </a:p>
-          <a:p>
-            <a:pPr algn="l">
-              <a:lnSpc>
-                <a:spcPct val="130000"/>
-              </a:lnSpc>
-            </a:pPr>
-            <a:r>
-              <a:rPr sz="2200" b="0" i="0">
+              <a:t>known frauds recovered at the p85 suspicion cutoff.</a:t>
+            </a:r>
+          </a:p>
+          <a:p>
+            <a:pPr algn="ctr">
+              <a:lnSpc>
+                <a:spcPct val="120000"/>
+              </a:lnSpc>
+            </a:pPr>
+            <a:r>
+              <a:rPr sz="1818" i="1">
                 <a:solidFill>
                   <a:srgbClr val="2A2A2A"/>
                 </a:solidFill>
                 <a:latin typeface="Calibri"/>
               </a:rPr>
-              <a:t>[2] Liu, Ting &amp; Zhou.  Isolation Forest.  ICDM 2008.</a:t>
-            </a:r>
-          </a:p>
+              <a:t>Legacy three-vote consensus recovered 4 of 15.</a:t>
+            </a:r>
+          </a:p>
+        </p:txBody>
+      </p:sp>
+      <p:sp>
+        <p:nvSpPr>
+          <p:cNvPr id="27" name="TextBox 26"/>
+          <p:cNvSpPr txBox="1"/>
+          <p:nvPr/>
+        </p:nvSpPr>
+        <p:spPr>
+          <a:xfrm>
+            <a:off x="1163782" y="17913927"/>
+            <a:ext cx="13522036" cy="2751790"/>
+          </a:xfrm>
+          <a:prstGeom prst="rect">
+            <a:avLst/>
+          </a:prstGeom>
+          <a:noFill/>
+        </p:spPr>
+        <p:txBody>
+          <a:bodyPr wrap="square" lIns="124691" tIns="83127" rIns="124691" bIns="83127" anchor="t">
+            <a:spAutoFit/>
+          </a:bodyPr>
+          <a:lstStyle/>
           <a:p>
             <a:pPr algn="l">
               <a:lnSpc>
@@ -4901,13 +4485,1112 @@
               </a:lnSpc>
             </a:pPr>
             <a:r>
-              <a:rPr sz="2200" b="0" i="0">
-                <a:solidFill>
-                  <a:srgbClr val="2A2A2A"/>
+              <a:rPr sz="2182" i="1">
+                <a:solidFill>
+                  <a:srgbClr val="8A99A8"/>
                 </a:solidFill>
                 <a:latin typeface="Calibri"/>
               </a:rPr>
-              <a:t>[3] Lundberg &amp; Lee.  SHAP.  NeurIPS 2017.</a:t>
+              <a:t>[ Paste any additional results text here. ]</a:t>
+            </a:r>
+          </a:p>
+          <a:p>
+            <a:pPr algn="l">
+              <a:lnSpc>
+                <a:spcPct val="130000"/>
+              </a:lnSpc>
+            </a:pPr>
+            <a:endParaRPr sz="2182" i="1">
+              <a:solidFill>
+                <a:srgbClr val="8A99A8"/>
+              </a:solidFill>
+              <a:latin typeface="Calibri"/>
+            </a:endParaRPr>
+          </a:p>
+          <a:p>
+            <a:pPr algn="l">
+              <a:lnSpc>
+                <a:spcPct val="130000"/>
+              </a:lnSpc>
+            </a:pPr>
+            <a:r>
+              <a:rPr sz="2182" i="1">
+                <a:solidFill>
+                  <a:srgbClr val="8A99A8"/>
+                </a:solidFill>
+                <a:latin typeface="Calibri"/>
+              </a:rPr>
+              <a:t>  •  Layer-2 LOO accuracy: 0.87</a:t>
+            </a:r>
+          </a:p>
+          <a:p>
+            <a:pPr algn="l">
+              <a:lnSpc>
+                <a:spcPct val="130000"/>
+              </a:lnSpc>
+            </a:pPr>
+            <a:r>
+              <a:rPr sz="2182" i="1">
+                <a:solidFill>
+                  <a:srgbClr val="8A99A8"/>
+                </a:solidFill>
+                <a:latin typeface="Calibri"/>
+              </a:rPr>
+              <a:t>  •  Specificity on non-fraud: 88%</a:t>
+            </a:r>
+          </a:p>
+          <a:p>
+            <a:pPr algn="l">
+              <a:lnSpc>
+                <a:spcPct val="130000"/>
+              </a:lnSpc>
+            </a:pPr>
+            <a:r>
+              <a:rPr sz="2182" i="1">
+                <a:solidFill>
+                  <a:srgbClr val="8A99A8"/>
+                </a:solidFill>
+                <a:latin typeface="Calibri"/>
+              </a:rPr>
+              <a:t>  •  Detected a coordinated rug cluster</a:t>
+            </a:r>
+          </a:p>
+          <a:p>
+            <a:pPr algn="l">
+              <a:lnSpc>
+                <a:spcPct val="130000"/>
+              </a:lnSpc>
+            </a:pPr>
+            <a:r>
+              <a:rPr sz="2182" i="1">
+                <a:solidFill>
+                  <a:srgbClr val="8A99A8"/>
+                </a:solidFill>
+                <a:latin typeface="Calibri"/>
+              </a:rPr>
+              <a:t>      (ORBDEG / SPHERUM / ORBS)</a:t>
+            </a:r>
+          </a:p>
+        </p:txBody>
+      </p:sp>
+      <p:sp>
+        <p:nvSpPr>
+          <p:cNvPr id="28" name="Rounded Rectangle 27"/>
+          <p:cNvSpPr/>
+          <p:nvPr/>
+        </p:nvSpPr>
+        <p:spPr>
+          <a:xfrm>
+            <a:off x="15683346" y="13217236"/>
+            <a:ext cx="14353309" cy="11637818"/>
+          </a:xfrm>
+          <a:prstGeom prst="roundRect">
+            <a:avLst>
+              <a:gd name="adj" fmla="val 5000"/>
+            </a:avLst>
+          </a:prstGeom>
+          <a:solidFill>
+            <a:srgbClr val="E8F1F8"/>
+          </a:solidFill>
+          <a:ln w="15875">
+            <a:solidFill>
+              <a:srgbClr val="B8CCDE"/>
+            </a:solidFill>
+          </a:ln>
+          <a:effectLst>
+            <a:outerShdw blurRad="127000" dist="50800" dir="2700000" algn="tl" rotWithShape="0">
+              <a:srgbClr val="000000">
+                <a:alpha val="28000"/>
+              </a:srgbClr>
+            </a:outerShdw>
+          </a:effectLst>
+        </p:spPr>
+        <p:style>
+          <a:lnRef idx="1">
+            <a:schemeClr val="accent1"/>
+          </a:lnRef>
+          <a:fillRef idx="3">
+            <a:schemeClr val="accent1"/>
+          </a:fillRef>
+          <a:effectRef idx="2">
+            <a:schemeClr val="accent1"/>
+          </a:effectRef>
+          <a:fontRef idx="minor">
+            <a:schemeClr val="lt1"/>
+          </a:fontRef>
+        </p:style>
+        <p:txBody>
+          <a:bodyPr rtlCol="0" anchor="ctr"/>
+          <a:lstStyle/>
+          <a:p>
+            <a:pPr algn="ctr"/>
+            <a:endParaRPr sz="1487"/>
+          </a:p>
+        </p:txBody>
+      </p:sp>
+      <p:sp>
+        <p:nvSpPr>
+          <p:cNvPr id="29" name="Round Same Side Corner Rectangle 28"/>
+          <p:cNvSpPr/>
+          <p:nvPr/>
+        </p:nvSpPr>
+        <p:spPr>
+          <a:xfrm>
+            <a:off x="15683346" y="13217236"/>
+            <a:ext cx="14353309" cy="1163782"/>
+          </a:xfrm>
+          <a:prstGeom prst="round2SameRect">
+            <a:avLst>
+              <a:gd name="adj1" fmla="val 22000"/>
+              <a:gd name="adj2" fmla="val 0"/>
+            </a:avLst>
+          </a:prstGeom>
+          <a:solidFill>
+            <a:srgbClr val="A51C30"/>
+          </a:solidFill>
+          <a:ln>
+            <a:noFill/>
+          </a:ln>
+          <a:effectLst/>
+        </p:spPr>
+        <p:style>
+          <a:lnRef idx="1">
+            <a:schemeClr val="accent1"/>
+          </a:lnRef>
+          <a:fillRef idx="3">
+            <a:schemeClr val="accent1"/>
+          </a:fillRef>
+          <a:effectRef idx="2">
+            <a:schemeClr val="accent1"/>
+          </a:effectRef>
+          <a:fontRef idx="minor">
+            <a:schemeClr val="lt1"/>
+          </a:fontRef>
+        </p:style>
+        <p:txBody>
+          <a:bodyPr rtlCol="0" anchor="ctr"/>
+          <a:lstStyle/>
+          <a:p>
+            <a:pPr algn="ctr"/>
+            <a:endParaRPr sz="1487"/>
+          </a:p>
+        </p:txBody>
+      </p:sp>
+      <p:sp>
+        <p:nvSpPr>
+          <p:cNvPr id="30" name="TextBox 29"/>
+          <p:cNvSpPr txBox="1"/>
+          <p:nvPr/>
+        </p:nvSpPr>
+        <p:spPr>
+          <a:xfrm>
+            <a:off x="16015855" y="13425055"/>
+            <a:ext cx="13688291" cy="763362"/>
+          </a:xfrm>
+          <a:prstGeom prst="rect">
+            <a:avLst/>
+          </a:prstGeom>
+          <a:noFill/>
+        </p:spPr>
+        <p:txBody>
+          <a:bodyPr wrap="square" lIns="124691" tIns="83127" rIns="124691" bIns="83127" anchor="t">
+            <a:spAutoFit/>
+          </a:bodyPr>
+          <a:lstStyle/>
+          <a:p>
+            <a:pPr algn="l">
+              <a:lnSpc>
+                <a:spcPct val="120000"/>
+              </a:lnSpc>
+            </a:pPr>
+            <a:r>
+              <a:rPr sz="3455" b="1">
+                <a:solidFill>
+                  <a:srgbClr val="FFFFFF"/>
+                </a:solidFill>
+                <a:latin typeface="Calibri"/>
+              </a:rPr>
+              <a:t>⑤ FIGURES</a:t>
+            </a:r>
+          </a:p>
+        </p:txBody>
+      </p:sp>
+      <p:pic>
+        <p:nvPicPr>
+          <p:cNvPr id="31" name="Picture 30" descr="baseline_comparison.png"/>
+          <p:cNvPicPr>
+            <a:picLocks noChangeAspect="1"/>
+          </p:cNvPicPr>
+          <p:nvPr/>
+        </p:nvPicPr>
+        <p:blipFill>
+          <a:blip r:embed="rId4"/>
+          <a:stretch>
+            <a:fillRect/>
+          </a:stretch>
+        </p:blipFill>
+        <p:spPr>
+          <a:xfrm>
+            <a:off x="16182109" y="14755091"/>
+            <a:ext cx="13355782" cy="4156364"/>
+          </a:xfrm>
+          <a:prstGeom prst="rect">
+            <a:avLst/>
+          </a:prstGeom>
+        </p:spPr>
+      </p:pic>
+      <p:sp>
+        <p:nvSpPr>
+          <p:cNvPr id="32" name="TextBox 31"/>
+          <p:cNvSpPr txBox="1"/>
+          <p:nvPr/>
+        </p:nvSpPr>
+        <p:spPr>
+          <a:xfrm>
+            <a:off x="16182109" y="18936393"/>
+            <a:ext cx="13355782" cy="481233"/>
+          </a:xfrm>
+          <a:prstGeom prst="rect">
+            <a:avLst/>
+          </a:prstGeom>
+          <a:noFill/>
+        </p:spPr>
+        <p:txBody>
+          <a:bodyPr wrap="square" lIns="124691" tIns="83127" rIns="124691" bIns="83127" anchor="t">
+            <a:spAutoFit/>
+          </a:bodyPr>
+          <a:lstStyle/>
+          <a:p>
+            <a:pPr algn="ctr">
+              <a:lnSpc>
+                <a:spcPct val="120000"/>
+              </a:lnSpc>
+            </a:pPr>
+            <a:r>
+              <a:rPr sz="1818" i="1">
+                <a:solidFill>
+                  <a:srgbClr val="2A2A2A"/>
+                </a:solidFill>
+                <a:latin typeface="Calibri"/>
+              </a:rPr>
+              <a:t>Fig. 1.  Fraud recall across strategies (n = 144).</a:t>
+            </a:r>
+          </a:p>
+        </p:txBody>
+      </p:sp>
+      <p:pic>
+        <p:nvPicPr>
+          <p:cNvPr id="33" name="Picture 32" descr="shap_global_importance.png"/>
+          <p:cNvPicPr>
+            <a:picLocks noChangeAspect="1"/>
+          </p:cNvPicPr>
+          <p:nvPr/>
+        </p:nvPicPr>
+        <p:blipFill>
+          <a:blip r:embed="rId5"/>
+          <a:stretch>
+            <a:fillRect/>
+          </a:stretch>
+        </p:blipFill>
+        <p:spPr>
+          <a:xfrm>
+            <a:off x="16182109" y="19742727"/>
+            <a:ext cx="13355782" cy="4655127"/>
+          </a:xfrm>
+          <a:prstGeom prst="rect">
+            <a:avLst/>
+          </a:prstGeom>
+        </p:spPr>
+      </p:pic>
+      <p:sp>
+        <p:nvSpPr>
+          <p:cNvPr id="34" name="TextBox 33"/>
+          <p:cNvSpPr txBox="1"/>
+          <p:nvPr/>
+        </p:nvSpPr>
+        <p:spPr>
+          <a:xfrm>
+            <a:off x="16182109" y="24422793"/>
+            <a:ext cx="13355782" cy="481233"/>
+          </a:xfrm>
+          <a:prstGeom prst="rect">
+            <a:avLst/>
+          </a:prstGeom>
+          <a:noFill/>
+        </p:spPr>
+        <p:txBody>
+          <a:bodyPr wrap="square" lIns="124691" tIns="83127" rIns="124691" bIns="83127" anchor="t">
+            <a:spAutoFit/>
+          </a:bodyPr>
+          <a:lstStyle/>
+          <a:p>
+            <a:pPr algn="ctr">
+              <a:lnSpc>
+                <a:spcPct val="120000"/>
+              </a:lnSpc>
+            </a:pPr>
+            <a:r>
+              <a:rPr sz="1818" i="1">
+                <a:solidFill>
+                  <a:srgbClr val="2A2A2A"/>
+                </a:solidFill>
+                <a:latin typeface="Calibri"/>
+              </a:rPr>
+              <a:t>Fig. 2.  SHAP importance — Isolation Forest.</a:t>
+            </a:r>
+          </a:p>
+        </p:txBody>
+      </p:sp>
+      <p:sp>
+        <p:nvSpPr>
+          <p:cNvPr id="35" name="Rounded Rectangle 34"/>
+          <p:cNvSpPr/>
+          <p:nvPr/>
+        </p:nvSpPr>
+        <p:spPr>
+          <a:xfrm>
+            <a:off x="30618546" y="13217236"/>
+            <a:ext cx="14353309" cy="11637818"/>
+          </a:xfrm>
+          <a:prstGeom prst="roundRect">
+            <a:avLst>
+              <a:gd name="adj" fmla="val 5000"/>
+            </a:avLst>
+          </a:prstGeom>
+          <a:solidFill>
+            <a:srgbClr val="E8F1F8"/>
+          </a:solidFill>
+          <a:ln w="15875">
+            <a:solidFill>
+              <a:srgbClr val="B8CCDE"/>
+            </a:solidFill>
+          </a:ln>
+          <a:effectLst>
+            <a:outerShdw blurRad="127000" dist="50800" dir="2700000" algn="tl" rotWithShape="0">
+              <a:srgbClr val="000000">
+                <a:alpha val="28000"/>
+              </a:srgbClr>
+            </a:outerShdw>
+          </a:effectLst>
+        </p:spPr>
+        <p:style>
+          <a:lnRef idx="1">
+            <a:schemeClr val="accent1"/>
+          </a:lnRef>
+          <a:fillRef idx="3">
+            <a:schemeClr val="accent1"/>
+          </a:fillRef>
+          <a:effectRef idx="2">
+            <a:schemeClr val="accent1"/>
+          </a:effectRef>
+          <a:fontRef idx="minor">
+            <a:schemeClr val="lt1"/>
+          </a:fontRef>
+        </p:style>
+        <p:txBody>
+          <a:bodyPr rtlCol="0" anchor="ctr"/>
+          <a:lstStyle/>
+          <a:p>
+            <a:pPr algn="ctr"/>
+            <a:endParaRPr sz="1487"/>
+          </a:p>
+        </p:txBody>
+      </p:sp>
+      <p:sp>
+        <p:nvSpPr>
+          <p:cNvPr id="36" name="Round Same Side Corner Rectangle 35"/>
+          <p:cNvSpPr/>
+          <p:nvPr/>
+        </p:nvSpPr>
+        <p:spPr>
+          <a:xfrm>
+            <a:off x="30618546" y="13217236"/>
+            <a:ext cx="14353309" cy="1163782"/>
+          </a:xfrm>
+          <a:prstGeom prst="round2SameRect">
+            <a:avLst>
+              <a:gd name="adj1" fmla="val 22000"/>
+              <a:gd name="adj2" fmla="val 0"/>
+            </a:avLst>
+          </a:prstGeom>
+          <a:solidFill>
+            <a:srgbClr val="A51C30"/>
+          </a:solidFill>
+          <a:ln>
+            <a:noFill/>
+          </a:ln>
+          <a:effectLst/>
+        </p:spPr>
+        <p:style>
+          <a:lnRef idx="1">
+            <a:schemeClr val="accent1"/>
+          </a:lnRef>
+          <a:fillRef idx="3">
+            <a:schemeClr val="accent1"/>
+          </a:fillRef>
+          <a:effectRef idx="2">
+            <a:schemeClr val="accent1"/>
+          </a:effectRef>
+          <a:fontRef idx="minor">
+            <a:schemeClr val="lt1"/>
+          </a:fontRef>
+        </p:style>
+        <p:txBody>
+          <a:bodyPr rtlCol="0" anchor="ctr"/>
+          <a:lstStyle/>
+          <a:p>
+            <a:pPr algn="ctr"/>
+            <a:endParaRPr sz="1487"/>
+          </a:p>
+        </p:txBody>
+      </p:sp>
+      <p:sp>
+        <p:nvSpPr>
+          <p:cNvPr id="37" name="TextBox 36"/>
+          <p:cNvSpPr txBox="1"/>
+          <p:nvPr/>
+        </p:nvSpPr>
+        <p:spPr>
+          <a:xfrm>
+            <a:off x="30951055" y="13425055"/>
+            <a:ext cx="13688291" cy="763362"/>
+          </a:xfrm>
+          <a:prstGeom prst="rect">
+            <a:avLst/>
+          </a:prstGeom>
+          <a:noFill/>
+        </p:spPr>
+        <p:txBody>
+          <a:bodyPr wrap="square" lIns="124691" tIns="83127" rIns="124691" bIns="83127" anchor="t">
+            <a:spAutoFit/>
+          </a:bodyPr>
+          <a:lstStyle/>
+          <a:p>
+            <a:pPr algn="l">
+              <a:lnSpc>
+                <a:spcPct val="120000"/>
+              </a:lnSpc>
+            </a:pPr>
+            <a:r>
+              <a:rPr sz="3455" b="1">
+                <a:solidFill>
+                  <a:srgbClr val="FFFFFF"/>
+                </a:solidFill>
+                <a:latin typeface="Calibri"/>
+              </a:rPr>
+              <a:t>⑥ REFERENCES</a:t>
+            </a:r>
+          </a:p>
+        </p:txBody>
+      </p:sp>
+      <p:sp>
+        <p:nvSpPr>
+          <p:cNvPr id="38" name="TextBox 37"/>
+          <p:cNvSpPr txBox="1"/>
+          <p:nvPr/>
+        </p:nvSpPr>
+        <p:spPr>
+          <a:xfrm>
+            <a:off x="31034182" y="14671963"/>
+            <a:ext cx="13522036" cy="5737416"/>
+          </a:xfrm>
+          <a:prstGeom prst="rect">
+            <a:avLst/>
+          </a:prstGeom>
+          <a:noFill/>
+        </p:spPr>
+        <p:txBody>
+          <a:bodyPr wrap="square" lIns="124691" tIns="83127" rIns="124691" bIns="83127" anchor="t">
+            <a:spAutoFit/>
+          </a:bodyPr>
+          <a:lstStyle/>
+          <a:p>
+            <a:pPr algn="l">
+              <a:lnSpc>
+                <a:spcPct val="125000"/>
+              </a:lnSpc>
+            </a:pPr>
+            <a:r>
+              <a:rPr sz="1818">
+                <a:solidFill>
+                  <a:srgbClr val="2A2A2A"/>
+                </a:solidFill>
+                <a:latin typeface="Calibri"/>
+              </a:rPr>
+              <a:t>[1]  Mazorra, B. et al.</a:t>
+            </a:r>
+          </a:p>
+          <a:p>
+            <a:pPr algn="l">
+              <a:lnSpc>
+                <a:spcPct val="125000"/>
+              </a:lnSpc>
+            </a:pPr>
+            <a:r>
+              <a:rPr sz="1818">
+                <a:solidFill>
+                  <a:srgbClr val="2A2A2A"/>
+                </a:solidFill>
+                <a:latin typeface="Calibri"/>
+              </a:rPr>
+              <a:t>       Do Not Rug on Me: Zero-Dimensional Scam</a:t>
+            </a:r>
+          </a:p>
+          <a:p>
+            <a:pPr algn="l">
+              <a:lnSpc>
+                <a:spcPct val="125000"/>
+              </a:lnSpc>
+            </a:pPr>
+            <a:r>
+              <a:rPr sz="1818">
+                <a:solidFill>
+                  <a:srgbClr val="2A2A2A"/>
+                </a:solidFill>
+                <a:latin typeface="Calibri"/>
+              </a:rPr>
+              <a:t>       Detection.  arXiv:2201.07220, 2022.</a:t>
+            </a:r>
+          </a:p>
+          <a:p>
+            <a:pPr algn="l">
+              <a:lnSpc>
+                <a:spcPct val="125000"/>
+              </a:lnSpc>
+            </a:pPr>
+            <a:endParaRPr sz="1818">
+              <a:solidFill>
+                <a:srgbClr val="2A2A2A"/>
+              </a:solidFill>
+              <a:latin typeface="Calibri"/>
+            </a:endParaRPr>
+          </a:p>
+          <a:p>
+            <a:pPr algn="l">
+              <a:lnSpc>
+                <a:spcPct val="125000"/>
+              </a:lnSpc>
+            </a:pPr>
+            <a:r>
+              <a:rPr sz="1818">
+                <a:solidFill>
+                  <a:srgbClr val="2A2A2A"/>
+                </a:solidFill>
+                <a:latin typeface="Calibri"/>
+              </a:rPr>
+              <a:t>[2]  Liu, F. T., Ting, K. M., &amp; Zhou, Z.-H.</a:t>
+            </a:r>
+          </a:p>
+          <a:p>
+            <a:pPr algn="l">
+              <a:lnSpc>
+                <a:spcPct val="125000"/>
+              </a:lnSpc>
+            </a:pPr>
+            <a:r>
+              <a:rPr sz="1818">
+                <a:solidFill>
+                  <a:srgbClr val="2A2A2A"/>
+                </a:solidFill>
+                <a:latin typeface="Calibri"/>
+              </a:rPr>
+              <a:t>       Isolation Forest.  ICDM, 2008.</a:t>
+            </a:r>
+          </a:p>
+          <a:p>
+            <a:pPr algn="l">
+              <a:lnSpc>
+                <a:spcPct val="125000"/>
+              </a:lnSpc>
+            </a:pPr>
+            <a:endParaRPr sz="1818">
+              <a:solidFill>
+                <a:srgbClr val="2A2A2A"/>
+              </a:solidFill>
+              <a:latin typeface="Calibri"/>
+            </a:endParaRPr>
+          </a:p>
+          <a:p>
+            <a:pPr algn="l">
+              <a:lnSpc>
+                <a:spcPct val="125000"/>
+              </a:lnSpc>
+            </a:pPr>
+            <a:r>
+              <a:rPr sz="1818">
+                <a:solidFill>
+                  <a:srgbClr val="2A2A2A"/>
+                </a:solidFill>
+                <a:latin typeface="Calibri"/>
+              </a:rPr>
+              <a:t>[3]  Ester, M., Kriegel, H.-P., Sander, J., &amp; Xu, X.</a:t>
+            </a:r>
+          </a:p>
+          <a:p>
+            <a:pPr algn="l">
+              <a:lnSpc>
+                <a:spcPct val="125000"/>
+              </a:lnSpc>
+            </a:pPr>
+            <a:r>
+              <a:rPr sz="1818">
+                <a:solidFill>
+                  <a:srgbClr val="2A2A2A"/>
+                </a:solidFill>
+                <a:latin typeface="Calibri"/>
+              </a:rPr>
+              <a:t>       A density-based algorithm for discovering</a:t>
+            </a:r>
+          </a:p>
+          <a:p>
+            <a:pPr algn="l">
+              <a:lnSpc>
+                <a:spcPct val="125000"/>
+              </a:lnSpc>
+            </a:pPr>
+            <a:r>
+              <a:rPr sz="1818">
+                <a:solidFill>
+                  <a:srgbClr val="2A2A2A"/>
+                </a:solidFill>
+                <a:latin typeface="Calibri"/>
+              </a:rPr>
+              <a:t>       clusters.  KDD, 1996.</a:t>
+            </a:r>
+          </a:p>
+          <a:p>
+            <a:pPr algn="l">
+              <a:lnSpc>
+                <a:spcPct val="125000"/>
+              </a:lnSpc>
+            </a:pPr>
+            <a:endParaRPr sz="1818">
+              <a:solidFill>
+                <a:srgbClr val="2A2A2A"/>
+              </a:solidFill>
+              <a:latin typeface="Calibri"/>
+            </a:endParaRPr>
+          </a:p>
+          <a:p>
+            <a:pPr algn="l">
+              <a:lnSpc>
+                <a:spcPct val="125000"/>
+              </a:lnSpc>
+            </a:pPr>
+            <a:r>
+              <a:rPr sz="1818">
+                <a:solidFill>
+                  <a:srgbClr val="2A2A2A"/>
+                </a:solidFill>
+                <a:latin typeface="Calibri"/>
+              </a:rPr>
+              <a:t>[4]  Lundberg, S. M. &amp; Lee, S.-I.</a:t>
+            </a:r>
+          </a:p>
+          <a:p>
+            <a:pPr algn="l">
+              <a:lnSpc>
+                <a:spcPct val="125000"/>
+              </a:lnSpc>
+            </a:pPr>
+            <a:r>
+              <a:rPr sz="1818">
+                <a:solidFill>
+                  <a:srgbClr val="2A2A2A"/>
+                </a:solidFill>
+                <a:latin typeface="Calibri"/>
+              </a:rPr>
+              <a:t>       A unified approach to interpreting model</a:t>
+            </a:r>
+          </a:p>
+          <a:p>
+            <a:pPr algn="l">
+              <a:lnSpc>
+                <a:spcPct val="125000"/>
+              </a:lnSpc>
+            </a:pPr>
+            <a:r>
+              <a:rPr sz="1818">
+                <a:solidFill>
+                  <a:srgbClr val="2A2A2A"/>
+                </a:solidFill>
+                <a:latin typeface="Calibri"/>
+              </a:rPr>
+              <a:t>       predictions.  NeurIPS, 2017.</a:t>
+            </a:r>
+          </a:p>
+          <a:p>
+            <a:pPr algn="l">
+              <a:lnSpc>
+                <a:spcPct val="125000"/>
+              </a:lnSpc>
+            </a:pPr>
+            <a:endParaRPr sz="1818">
+              <a:solidFill>
+                <a:srgbClr val="2A2A2A"/>
+              </a:solidFill>
+              <a:latin typeface="Calibri"/>
+            </a:endParaRPr>
+          </a:p>
+          <a:p>
+            <a:pPr algn="l">
+              <a:lnSpc>
+                <a:spcPct val="125000"/>
+              </a:lnSpc>
+            </a:pPr>
+            <a:r>
+              <a:rPr sz="1818">
+                <a:solidFill>
+                  <a:srgbClr val="2A2A2A"/>
+                </a:solidFill>
+                <a:latin typeface="Calibri"/>
+              </a:rPr>
+              <a:t>[ Add additional references here. ]</a:t>
+            </a:r>
+          </a:p>
+        </p:txBody>
+      </p:sp>
+      <p:sp>
+        <p:nvSpPr>
+          <p:cNvPr id="39" name="Rounded Rectangle 38"/>
+          <p:cNvSpPr/>
+          <p:nvPr/>
+        </p:nvSpPr>
+        <p:spPr>
+          <a:xfrm>
+            <a:off x="748146" y="25270691"/>
+            <a:ext cx="44223709" cy="7315200"/>
+          </a:xfrm>
+          <a:prstGeom prst="roundRect">
+            <a:avLst>
+              <a:gd name="adj" fmla="val 5000"/>
+            </a:avLst>
+          </a:prstGeom>
+          <a:solidFill>
+            <a:srgbClr val="E8F1F8"/>
+          </a:solidFill>
+          <a:ln w="15875">
+            <a:solidFill>
+              <a:srgbClr val="B8CCDE"/>
+            </a:solidFill>
+          </a:ln>
+          <a:effectLst>
+            <a:outerShdw blurRad="127000" dist="50800" dir="2700000" algn="tl" rotWithShape="0">
+              <a:srgbClr val="000000">
+                <a:alpha val="28000"/>
+              </a:srgbClr>
+            </a:outerShdw>
+          </a:effectLst>
+        </p:spPr>
+        <p:style>
+          <a:lnRef idx="1">
+            <a:schemeClr val="accent1"/>
+          </a:lnRef>
+          <a:fillRef idx="3">
+            <a:schemeClr val="accent1"/>
+          </a:fillRef>
+          <a:effectRef idx="2">
+            <a:schemeClr val="accent1"/>
+          </a:effectRef>
+          <a:fontRef idx="minor">
+            <a:schemeClr val="lt1"/>
+          </a:fontRef>
+        </p:style>
+        <p:txBody>
+          <a:bodyPr rtlCol="0" anchor="ctr"/>
+          <a:lstStyle/>
+          <a:p>
+            <a:pPr algn="ctr"/>
+            <a:endParaRPr sz="1487"/>
+          </a:p>
+        </p:txBody>
+      </p:sp>
+      <p:sp>
+        <p:nvSpPr>
+          <p:cNvPr id="40" name="Round Same Side Corner Rectangle 39"/>
+          <p:cNvSpPr/>
+          <p:nvPr/>
+        </p:nvSpPr>
+        <p:spPr>
+          <a:xfrm>
+            <a:off x="748146" y="25270691"/>
+            <a:ext cx="44223709" cy="1163782"/>
+          </a:xfrm>
+          <a:prstGeom prst="round2SameRect">
+            <a:avLst>
+              <a:gd name="adj1" fmla="val 22000"/>
+              <a:gd name="adj2" fmla="val 0"/>
+            </a:avLst>
+          </a:prstGeom>
+          <a:solidFill>
+            <a:srgbClr val="A51C30"/>
+          </a:solidFill>
+          <a:ln>
+            <a:noFill/>
+          </a:ln>
+          <a:effectLst/>
+        </p:spPr>
+        <p:style>
+          <a:lnRef idx="1">
+            <a:schemeClr val="accent1"/>
+          </a:lnRef>
+          <a:fillRef idx="3">
+            <a:schemeClr val="accent1"/>
+          </a:fillRef>
+          <a:effectRef idx="2">
+            <a:schemeClr val="accent1"/>
+          </a:effectRef>
+          <a:fontRef idx="minor">
+            <a:schemeClr val="lt1"/>
+          </a:fontRef>
+        </p:style>
+        <p:txBody>
+          <a:bodyPr rtlCol="0" anchor="ctr"/>
+          <a:lstStyle/>
+          <a:p>
+            <a:pPr algn="ctr"/>
+            <a:endParaRPr sz="1487"/>
+          </a:p>
+        </p:txBody>
+      </p:sp>
+      <p:sp>
+        <p:nvSpPr>
+          <p:cNvPr id="41" name="TextBox 40"/>
+          <p:cNvSpPr txBox="1"/>
+          <p:nvPr/>
+        </p:nvSpPr>
+        <p:spPr>
+          <a:xfrm>
+            <a:off x="1080655" y="25478509"/>
+            <a:ext cx="43558691" cy="763362"/>
+          </a:xfrm>
+          <a:prstGeom prst="rect">
+            <a:avLst/>
+          </a:prstGeom>
+          <a:noFill/>
+        </p:spPr>
+        <p:txBody>
+          <a:bodyPr wrap="square" lIns="124691" tIns="83127" rIns="124691" bIns="83127" anchor="t">
+            <a:spAutoFit/>
+          </a:bodyPr>
+          <a:lstStyle/>
+          <a:p>
+            <a:pPr algn="l">
+              <a:lnSpc>
+                <a:spcPct val="120000"/>
+              </a:lnSpc>
+            </a:pPr>
+            <a:r>
+              <a:rPr sz="3455" b="1">
+                <a:solidFill>
+                  <a:srgbClr val="FFFFFF"/>
+                </a:solidFill>
+                <a:latin typeface="Calibri"/>
+              </a:rPr>
+              <a:t>⑦ CONCLUSIONS</a:t>
+            </a:r>
+          </a:p>
+        </p:txBody>
+      </p:sp>
+      <p:sp>
+        <p:nvSpPr>
+          <p:cNvPr id="42" name="TextBox 41"/>
+          <p:cNvSpPr txBox="1"/>
+          <p:nvPr/>
+        </p:nvSpPr>
+        <p:spPr>
+          <a:xfrm>
+            <a:off x="1163782" y="26725418"/>
+            <a:ext cx="43392436" cy="4061379"/>
+          </a:xfrm>
+          <a:prstGeom prst="rect">
+            <a:avLst/>
+          </a:prstGeom>
+          <a:noFill/>
+        </p:spPr>
+        <p:txBody>
+          <a:bodyPr wrap="square" lIns="124691" tIns="83127" rIns="124691" bIns="83127" anchor="t">
+            <a:spAutoFit/>
+          </a:bodyPr>
+          <a:lstStyle/>
+          <a:p>
+            <a:pPr algn="l">
+              <a:lnSpc>
+                <a:spcPct val="130000"/>
+              </a:lnSpc>
+            </a:pPr>
+            <a:r>
+              <a:rPr sz="2182" i="1">
+                <a:solidFill>
+                  <a:srgbClr val="8A99A8"/>
+                </a:solidFill>
+                <a:latin typeface="Calibri"/>
+              </a:rPr>
+              <a:t>[ Paste your conclusions / 'so what' here. ]</a:t>
+            </a:r>
+          </a:p>
+          <a:p>
+            <a:pPr algn="l">
+              <a:lnSpc>
+                <a:spcPct val="130000"/>
+              </a:lnSpc>
+            </a:pPr>
+            <a:endParaRPr sz="2182" i="1">
+              <a:solidFill>
+                <a:srgbClr val="8A99A8"/>
+              </a:solidFill>
+              <a:latin typeface="Calibri"/>
+            </a:endParaRPr>
+          </a:p>
+          <a:p>
+            <a:pPr algn="l">
+              <a:lnSpc>
+                <a:spcPct val="130000"/>
+              </a:lnSpc>
+            </a:pPr>
+            <a:r>
+              <a:rPr sz="2182" i="1">
+                <a:solidFill>
+                  <a:srgbClr val="8A99A8"/>
+                </a:solidFill>
+                <a:latin typeface="Calibri"/>
+              </a:rPr>
+              <a:t>Suggested talking points:</a:t>
+            </a:r>
+          </a:p>
+          <a:p>
+            <a:pPr algn="l">
+              <a:lnSpc>
+                <a:spcPct val="130000"/>
+              </a:lnSpc>
+            </a:pPr>
+            <a:r>
+              <a:rPr sz="2182" i="1">
+                <a:solidFill>
+                  <a:srgbClr val="8A99A8"/>
+                </a:solidFill>
+                <a:latin typeface="Calibri"/>
+              </a:rPr>
+              <a:t>  •  Continuous ranking beats discrete voting (14 / 15 vs. 4 / 15 fraud recall) — the headline result of the project.</a:t>
+            </a:r>
+          </a:p>
+          <a:p>
+            <a:pPr algn="l">
+              <a:lnSpc>
+                <a:spcPct val="130000"/>
+              </a:lnSpc>
+            </a:pPr>
+            <a:r>
+              <a:rPr sz="2182" i="1">
+                <a:solidFill>
+                  <a:srgbClr val="8A99A8"/>
+                </a:solidFill>
+                <a:latin typeface="Calibri"/>
+              </a:rPr>
+              <a:t>  •  Two layers separate 'anomaly' from 'fraud.' Layer-2 specificity of 88% means blue-chip false alarms</a:t>
+            </a:r>
+          </a:p>
+          <a:p>
+            <a:pPr algn="l">
+              <a:lnSpc>
+                <a:spcPct val="130000"/>
+              </a:lnSpc>
+            </a:pPr>
+            <a:r>
+              <a:rPr sz="2182" i="1">
+                <a:solidFill>
+                  <a:srgbClr val="8A99A8"/>
+                </a:solidFill>
+                <a:latin typeface="Calibri"/>
+              </a:rPr>
+              <a:t>      (WLFI, DEGEN, 3Crv, MIM) are correctly dismissed while known rugs (WFT, PLASMA, ORBDEG cluster) score &gt; 0.8.</a:t>
+            </a:r>
+          </a:p>
+          <a:p>
+            <a:pPr algn="l">
+              <a:lnSpc>
+                <a:spcPct val="130000"/>
+              </a:lnSpc>
+            </a:pPr>
+            <a:r>
+              <a:rPr sz="2182" i="1">
+                <a:solidFill>
+                  <a:srgbClr val="8A99A8"/>
+                </a:solidFill>
+                <a:latin typeface="Calibri"/>
+              </a:rPr>
+              <a:t>  •  Honest limitations — small-volume honeypots (HYPER, KUBO) still slip through; catching them needs</a:t>
+            </a:r>
+          </a:p>
+          <a:p>
+            <a:pPr algn="l">
+              <a:lnSpc>
+                <a:spcPct val="130000"/>
+              </a:lnSpc>
+            </a:pPr>
+            <a:r>
+              <a:rPr sz="2182" i="1">
+                <a:solidFill>
+                  <a:srgbClr val="8A99A8"/>
+                </a:solidFill>
+                <a:latin typeface="Calibri"/>
+              </a:rPr>
+              <a:t>      graph-level signals (deployer history, liquidity-pool removal) beyond on-chain volume features.</a:t>
+            </a:r>
+          </a:p>
+          <a:p>
+            <a:pPr algn="l">
+              <a:lnSpc>
+                <a:spcPct val="130000"/>
+              </a:lnSpc>
+            </a:pPr>
+            <a:r>
+              <a:rPr sz="2182" i="1">
+                <a:solidFill>
+                  <a:srgbClr val="8A99A8"/>
+                </a:solidFill>
+                <a:latin typeface="Calibri"/>
+              </a:rPr>
+              <a:t>  •  Next step — grow the labeled registry further and add a Layer-3 graph feature set.</a:t>
+            </a:r>
+          </a:p>
+        </p:txBody>
+      </p:sp>
+      <p:sp>
+        <p:nvSpPr>
+          <p:cNvPr id="43" name="TextBox 42"/>
+          <p:cNvSpPr txBox="1"/>
+          <p:nvPr/>
+        </p:nvSpPr>
+        <p:spPr>
+          <a:xfrm>
+            <a:off x="748146" y="32835273"/>
+            <a:ext cx="44223709" cy="481233"/>
+          </a:xfrm>
+          <a:prstGeom prst="rect">
+            <a:avLst/>
+          </a:prstGeom>
+          <a:noFill/>
+        </p:spPr>
+        <p:txBody>
+          <a:bodyPr wrap="square" lIns="124691" tIns="83127" rIns="124691" bIns="83127" anchor="t">
+            <a:spAutoFit/>
+          </a:bodyPr>
+          <a:lstStyle/>
+          <a:p>
+            <a:pPr algn="ctr">
+              <a:lnSpc>
+                <a:spcPct val="120000"/>
+              </a:lnSpc>
+            </a:pPr>
+            <a:r>
+              <a:rPr sz="1818">
+                <a:solidFill>
+                  <a:srgbClr val="2A2A2A"/>
+                </a:solidFill>
+                <a:latin typeface="Calibri"/>
+              </a:rPr>
+              <a:t>Code:  github.com/gschriever/AC297r-crypto-fraud-detector     Contact:  [ name ]  ·  [ email ]     Advisor:  [ advisor ]</a:t>
             </a:r>
           </a:p>
         </p:txBody>
